--- a/Chapter 14 Text classification.pptx
+++ b/Chapter 14 Text classification.pptx
@@ -5,10 +5,10 @@
     <p:sldMasterId id="2147483660" r:id="rId1"/>
   </p:sldMasterIdLst>
   <p:notesMasterIdLst>
-    <p:notesMasterId r:id="rId27"/>
+    <p:notesMasterId r:id="rId24"/>
   </p:notesMasterIdLst>
   <p:handoutMasterIdLst>
-    <p:handoutMasterId r:id="rId28"/>
+    <p:handoutMasterId r:id="rId25"/>
   </p:handoutMasterIdLst>
   <p:sldIdLst>
     <p:sldId id="256" r:id="rId2"/>
@@ -28,14 +28,11 @@
     <p:sldId id="1186" r:id="rId16"/>
     <p:sldId id="1144" r:id="rId17"/>
     <p:sldId id="1145" r:id="rId18"/>
-    <p:sldId id="1150" r:id="rId19"/>
-    <p:sldId id="1151" r:id="rId20"/>
-    <p:sldId id="1147" r:id="rId21"/>
-    <p:sldId id="1152" r:id="rId22"/>
-    <p:sldId id="1179" r:id="rId23"/>
-    <p:sldId id="1178" r:id="rId24"/>
-    <p:sldId id="1148" r:id="rId25"/>
-    <p:sldId id="1146" r:id="rId26"/>
+    <p:sldId id="1152" r:id="rId19"/>
+    <p:sldId id="1147" r:id="rId20"/>
+    <p:sldId id="1151" r:id="rId21"/>
+    <p:sldId id="1178" r:id="rId22"/>
+    <p:sldId id="1146" r:id="rId23"/>
   </p:sldIdLst>
   <p:sldSz cx="12192000" cy="6858000"/>
   <p:notesSz cx="6858000" cy="9144000"/>
@@ -160,13 +157,10 @@
             <p14:sldId id="1186"/>
             <p14:sldId id="1144"/>
             <p14:sldId id="1145"/>
-            <p14:sldId id="1150"/>
+            <p14:sldId id="1152"/>
+            <p14:sldId id="1147"/>
             <p14:sldId id="1151"/>
-            <p14:sldId id="1147"/>
-            <p14:sldId id="1152"/>
-            <p14:sldId id="1179"/>
             <p14:sldId id="1178"/>
-            <p14:sldId id="1148"/>
             <p14:sldId id="1146"/>
           </p14:sldIdLst>
         </p14:section>
@@ -292,7 +286,7 @@
                 <a:latin typeface="맑은 고딕" panose="020B0503020000020004" pitchFamily="50" charset="-127"/>
                 <a:ea typeface="맑은 고딕" panose="020B0503020000020004" pitchFamily="50" charset="-127"/>
               </a:rPr>
-              <a:t>2026-08-15</a:t>
+              <a:t>2026-09-26</a:t>
             </a:fld>
             <a:endParaRPr lang="ko-KR" altLang="en-US">
               <a:latin typeface="맑은 고딕" panose="020B0503020000020004" pitchFamily="50" charset="-127"/>
@@ -478,7 +472,7 @@
           <a:p>
             <a:fld id="{43E1C3DD-4A19-441D-907C-380838DB51C4}" type="datetime1">
               <a:rPr lang="ko-KR" altLang="en-US" noProof="0" smtClean="0"/>
-              <a:t>2026-08-15</a:t>
+              <a:t>2026-09-26</a:t>
             </a:fld>
             <a:endParaRPr lang="ko-KR" altLang="en-US" noProof="0"/>
           </a:p>
@@ -1326,7 +1320,7 @@
           <a:p>
             <a:fld id="{990475B5-67CA-4281-BDCA-DA943C3C8EB3}" type="datetime1">
               <a:rPr lang="ko-KR" altLang="en-US" noProof="0" smtClean="0"/>
-              <a:t>2026-08-15</a:t>
+              <a:t>2026-09-26</a:t>
             </a:fld>
             <a:endParaRPr lang="ko-KR" altLang="en-US" noProof="0"/>
           </a:p>
@@ -1980,7 +1974,7 @@
           <a:p>
             <a:fld id="{48A87A34-81AB-432B-8DAE-1953F412C126}" type="datetimeFigureOut">
               <a:rPr lang="en-US" smtClean="0"/>
-              <a:t>8/15/2026</a:t>
+              <a:t>9/26/2026</a:t>
             </a:fld>
             <a:endParaRPr lang="en-US" dirty="0"/>
           </a:p>
@@ -2276,7 +2270,7 @@
           <a:p>
             <a:fld id="{C655C81E-72E7-4D05-94B5-F45B321A525D}" type="datetime1">
               <a:rPr lang="ko-KR" altLang="en-US" noProof="0" smtClean="0"/>
-              <a:t>2026-08-15</a:t>
+              <a:t>2026-09-26</a:t>
             </a:fld>
             <a:endParaRPr lang="ko-KR" altLang="en-US" noProof="0" dirty="0">
               <a:latin typeface="맑은 고딕" panose="020B0503020000020004" pitchFamily="50" charset="-127"/>
@@ -3158,13 +3152,18 @@
         </p:blipFill>
         <p:spPr bwMode="auto">
           <a:xfrm>
-            <a:off x="507823" y="3827089"/>
+            <a:off x="507823" y="3588964"/>
             <a:ext cx="3425278" cy="1969146"/>
           </a:xfrm>
           <a:prstGeom prst="rect">
             <a:avLst/>
           </a:prstGeom>
           <a:noFill/>
+          <a:ln>
+            <a:solidFill>
+              <a:schemeClr val="bg1"/>
+            </a:solidFill>
+          </a:ln>
           <a:extLst>
             <a:ext uri="{909E8E84-426E-40DD-AFC4-6F175D3DCCD1}">
               <a14:hiddenFill xmlns:a14="http://schemas.microsoft.com/office/drawing/2010/main">
@@ -3214,13 +3213,18 @@
         </p:blipFill>
         <p:spPr bwMode="auto">
           <a:xfrm>
-            <a:off x="4548950" y="3827089"/>
-            <a:ext cx="2387906" cy="2041474"/>
+            <a:off x="4548949" y="3588963"/>
+            <a:ext cx="2432875" cy="2079919"/>
           </a:xfrm>
           <a:prstGeom prst="rect">
             <a:avLst/>
           </a:prstGeom>
           <a:noFill/>
+          <a:ln>
+            <a:solidFill>
+              <a:schemeClr val="bg1"/>
+            </a:solidFill>
+          </a:ln>
           <a:extLst>
             <a:ext uri="{909E8E84-426E-40DD-AFC4-6F175D3DCCD1}">
               <a14:hiddenFill xmlns:a14="http://schemas.microsoft.com/office/drawing/2010/main">
@@ -3254,12 +3258,17 @@
         </p:blipFill>
         <p:spPr>
           <a:xfrm>
-            <a:off x="8066462" y="3827089"/>
-            <a:ext cx="2762945" cy="2431657"/>
+            <a:off x="8066462" y="3588964"/>
+            <a:ext cx="3296863" cy="2901556"/>
           </a:xfrm>
           <a:prstGeom prst="rect">
             <a:avLst/>
           </a:prstGeom>
+          <a:ln>
+            <a:solidFill>
+              <a:schemeClr val="bg1"/>
+            </a:solidFill>
+          </a:ln>
         </p:spPr>
       </p:pic>
       <p:sp>
@@ -3277,7 +3286,7 @@
         <p:spPr>
           <a:xfrm>
             <a:off x="385787" y="3251065"/>
-            <a:ext cx="2846791" cy="369332"/>
+            <a:ext cx="2289111" cy="338554"/>
           </a:xfrm>
           <a:prstGeom prst="rect">
             <a:avLst/>
@@ -3291,10 +3300,16 @@
           <a:lstStyle/>
           <a:p>
             <a:r>
-              <a:rPr lang="en-US" altLang="ko-KR" dirty="0"/>
+              <a:rPr lang="en-US" altLang="ko-KR" sz="1600" dirty="0">
+                <a:latin typeface="D2Coding" panose="020B0609020101020101" pitchFamily="49" charset="-127"/>
+                <a:ea typeface="D2Coding" panose="020B0609020101020101" pitchFamily="49" charset="-127"/>
+              </a:rPr>
               <a:t>Bag of Words :  Sets</a:t>
             </a:r>
-            <a:endParaRPr lang="ko-KR" altLang="en-US" dirty="0"/>
+            <a:endParaRPr lang="ko-KR" altLang="en-US" sz="1600" dirty="0">
+              <a:latin typeface="D2Coding" panose="020B0609020101020101" pitchFamily="49" charset="-127"/>
+              <a:ea typeface="D2Coding" panose="020B0609020101020101" pitchFamily="49" charset="-127"/>
+            </a:endParaRPr>
           </a:p>
         </p:txBody>
       </p:sp>
@@ -3313,7 +3328,7 @@
         <p:spPr>
           <a:xfrm>
             <a:off x="4548950" y="3251065"/>
-            <a:ext cx="3177816" cy="369332"/>
+            <a:ext cx="2555289" cy="338554"/>
           </a:xfrm>
           <a:prstGeom prst="rect">
             <a:avLst/>
@@ -3327,10 +3342,16 @@
           <a:lstStyle/>
           <a:p>
             <a:r>
-              <a:rPr lang="en-US" altLang="ko-KR" dirty="0"/>
+              <a:rPr lang="en-US" altLang="ko-KR" sz="1600" dirty="0">
+                <a:latin typeface="D2Coding" panose="020B0609020101020101" pitchFamily="49" charset="-127"/>
+                <a:ea typeface="D2Coding" panose="020B0609020101020101" pitchFamily="49" charset="-127"/>
+              </a:rPr>
               <a:t>RNN : Sequences</a:t>
             </a:r>
-            <a:endParaRPr lang="ko-KR" altLang="en-US" dirty="0"/>
+            <a:endParaRPr lang="ko-KR" altLang="en-US" sz="1600" dirty="0">
+              <a:latin typeface="D2Coding" panose="020B0609020101020101" pitchFamily="49" charset="-127"/>
+              <a:ea typeface="D2Coding" panose="020B0609020101020101" pitchFamily="49" charset="-127"/>
+            </a:endParaRPr>
           </a:p>
         </p:txBody>
       </p:sp>
@@ -3349,7 +3370,7 @@
         <p:spPr>
           <a:xfrm>
             <a:off x="7961860" y="3251065"/>
-            <a:ext cx="4230140" cy="369332"/>
+            <a:ext cx="3401465" cy="338554"/>
           </a:xfrm>
           <a:prstGeom prst="rect">
             <a:avLst/>
@@ -3363,10 +3384,16 @@
           <a:lstStyle/>
           <a:p>
             <a:r>
-              <a:rPr lang="en-US" altLang="ko-KR" dirty="0"/>
+              <a:rPr lang="en-US" altLang="ko-KR" sz="1600" dirty="0">
+                <a:latin typeface="D2Coding" panose="020B0609020101020101" pitchFamily="49" charset="-127"/>
+                <a:ea typeface="D2Coding" panose="020B0609020101020101" pitchFamily="49" charset="-127"/>
+              </a:rPr>
               <a:t>Transformer : Sets + Sequences</a:t>
             </a:r>
-            <a:endParaRPr lang="ko-KR" altLang="en-US" dirty="0"/>
+            <a:endParaRPr lang="ko-KR" altLang="en-US" sz="1600" dirty="0">
+              <a:latin typeface="D2Coding" panose="020B0609020101020101" pitchFamily="49" charset="-127"/>
+              <a:ea typeface="D2Coding" panose="020B0609020101020101" pitchFamily="49" charset="-127"/>
+            </a:endParaRPr>
           </a:p>
         </p:txBody>
       </p:sp>
@@ -3384,7 +3411,7 @@
         </p:nvSpPr>
         <p:spPr>
           <a:xfrm>
-            <a:off x="543560" y="1248422"/>
+            <a:off x="543560" y="1229372"/>
             <a:ext cx="11104880" cy="1162498"/>
           </a:xfrm>
           <a:prstGeom prst="rect">
@@ -3534,14 +3561,14 @@
                 <a:latin typeface="D2Coding" panose="020B0609020101020101" pitchFamily="49" charset="-127"/>
                 <a:ea typeface="D2Coding" panose="020B0609020101020101" pitchFamily="49" charset="-127"/>
               </a:rPr>
-              <a:t>동시에 순서를 고려하기 때문에</a:t>
+              <a:t>동시에 순서를 고려</a:t>
             </a:r>
             <a:r>
               <a:rPr lang="en-US" altLang="ko-KR" sz="1600" dirty="0">
                 <a:latin typeface="D2Coding" panose="020B0609020101020101" pitchFamily="49" charset="-127"/>
                 <a:ea typeface="D2Coding" panose="020B0609020101020101" pitchFamily="49" charset="-127"/>
               </a:rPr>
-              <a:t>, RNN</a:t>
+              <a:t>(RNN</a:t>
             </a:r>
             <a:r>
               <a:rPr lang="ko-KR" altLang="en-US" sz="1600" dirty="0">
@@ -3555,7 +3582,7 @@
                 <a:latin typeface="D2Coding" panose="020B0609020101020101" pitchFamily="49" charset="-127"/>
                 <a:ea typeface="D2Coding" panose="020B0609020101020101" pitchFamily="49" charset="-127"/>
               </a:rPr>
-              <a:t>(sequence models)</a:t>
+              <a:t>(sequence models))</a:t>
             </a:r>
             <a:endParaRPr lang="ko-KR" altLang="en-US" sz="1600" dirty="0">
               <a:latin typeface="D2Coding" panose="020B0609020101020101" pitchFamily="49" charset="-127"/>
@@ -4029,7 +4056,11 @@
           <a:prstGeom prst="rect">
             <a:avLst/>
           </a:prstGeom>
-          <a:noFill/>
+          <a:solidFill>
+            <a:schemeClr val="bg1">
+              <a:lumMod val="75000"/>
+            </a:schemeClr>
+          </a:solidFill>
           <a:ln>
             <a:solidFill>
               <a:schemeClr val="tx1"/>
@@ -4124,7 +4155,7 @@
             <a:avLst/>
           </a:prstGeom>
           <a:solidFill>
-            <a:schemeClr val="bg1"/>
+            <a:schemeClr val="tx1"/>
           </a:solidFill>
         </p:spPr>
         <p:txBody>
@@ -4140,6 +4171,9 @@
             </a:pPr>
             <a:r>
               <a:rPr lang="en-US" altLang="ko-KR" dirty="0">
+                <a:solidFill>
+                  <a:schemeClr val="bg1"/>
+                </a:solidFill>
                 <a:latin typeface="D2Coding" panose="020B0609020101020101" pitchFamily="49" charset="-127"/>
                 <a:ea typeface="D2Coding" panose="020B0609020101020101" pitchFamily="49" charset="-127"/>
               </a:rPr>
@@ -4147,6 +4181,9 @@
             </a:r>
             <a:r>
               <a:rPr lang="ko-KR" altLang="en-US" dirty="0">
+                <a:solidFill>
+                  <a:schemeClr val="bg1"/>
+                </a:solidFill>
                 <a:latin typeface="D2Coding" panose="020B0609020101020101" pitchFamily="49" charset="-127"/>
                 <a:ea typeface="D2Coding" panose="020B0609020101020101" pitchFamily="49" charset="-127"/>
               </a:rPr>
@@ -4154,12 +4191,18 @@
             </a:r>
             <a:r>
               <a:rPr lang="en-US" altLang="ko-KR" dirty="0">
+                <a:solidFill>
+                  <a:schemeClr val="bg1"/>
+                </a:solidFill>
                 <a:latin typeface="D2Coding" panose="020B0609020101020101" pitchFamily="49" charset="-127"/>
                 <a:ea typeface="D2Coding" panose="020B0609020101020101" pitchFamily="49" charset="-127"/>
               </a:rPr>
               <a:t>(N-gram Language Model)</a:t>
             </a:r>
             <a:endParaRPr lang="ko-KR" altLang="en-US" dirty="0">
+              <a:solidFill>
+                <a:schemeClr val="bg1"/>
+              </a:solidFill>
               <a:latin typeface="D2Coding" panose="020B0609020101020101" pitchFamily="49" charset="-127"/>
               <a:ea typeface="D2Coding" panose="020B0609020101020101" pitchFamily="49" charset="-127"/>
             </a:endParaRPr>
@@ -4331,7 +4374,7 @@
             <a:avLst/>
           </a:prstGeom>
           <a:solidFill>
-            <a:schemeClr val="bg1"/>
+            <a:schemeClr val="tx1"/>
           </a:solidFill>
         </p:spPr>
         <p:txBody>
@@ -4347,6 +4390,9 @@
             </a:pPr>
             <a:r>
               <a:rPr lang="en-US" altLang="ko-KR" sz="1400" dirty="0">
+                <a:solidFill>
+                  <a:schemeClr val="bg1"/>
+                </a:solidFill>
                 <a:latin typeface="D2Coding" panose="020B0609020101020101" pitchFamily="49" charset="-127"/>
                 <a:ea typeface="D2Coding" panose="020B0609020101020101" pitchFamily="49" charset="-127"/>
               </a:rPr>
@@ -4354,6 +4400,9 @@
             </a:r>
             <a:r>
               <a:rPr lang="ko-KR" altLang="en-US" sz="1400" dirty="0">
+                <a:solidFill>
+                  <a:schemeClr val="bg1"/>
+                </a:solidFill>
                 <a:latin typeface="D2Coding" panose="020B0609020101020101" pitchFamily="49" charset="-127"/>
                 <a:ea typeface="D2Coding" panose="020B0609020101020101" pitchFamily="49" charset="-127"/>
               </a:rPr>
@@ -4361,6 +4410,9 @@
             </a:r>
             <a:r>
               <a:rPr lang="en-US" altLang="ko-KR" sz="1400" dirty="0" err="1">
+                <a:solidFill>
+                  <a:schemeClr val="bg1"/>
+                </a:solidFill>
                 <a:latin typeface="D2Coding" panose="020B0609020101020101" pitchFamily="49" charset="-127"/>
                 <a:ea typeface="D2Coding" panose="020B0609020101020101" pitchFamily="49" charset="-127"/>
               </a:rPr>
@@ -4368,6 +4420,9 @@
             </a:r>
             <a:r>
               <a:rPr lang="en-US" altLang="ko-KR" sz="1400" dirty="0">
+                <a:solidFill>
+                  <a:schemeClr val="bg1"/>
+                </a:solidFill>
                 <a:latin typeface="D2Coding" panose="020B0609020101020101" pitchFamily="49" charset="-127"/>
                 <a:ea typeface="D2Coding" panose="020B0609020101020101" pitchFamily="49" charset="-127"/>
               </a:rPr>
@@ -4375,6 +4430,9 @@
             </a:r>
             <a:r>
               <a:rPr lang="ko-KR" altLang="en-US" sz="1400" dirty="0">
+                <a:solidFill>
+                  <a:schemeClr val="bg1"/>
+                </a:solidFill>
                 <a:latin typeface="D2Coding" panose="020B0609020101020101" pitchFamily="49" charset="-127"/>
                 <a:ea typeface="D2Coding" panose="020B0609020101020101" pitchFamily="49" charset="-127"/>
               </a:rPr>
@@ -4728,40 +4786,50 @@
                 <a:latin typeface="D2Coding" panose="020B0609020101020101" pitchFamily="49" charset="-127"/>
                 <a:ea typeface="D2Coding" panose="020B0609020101020101" pitchFamily="49" charset="-127"/>
               </a:rPr>
-              <a:t>접근 방식은 </a:t>
-            </a:r>
-            <a:r>
-              <a:rPr lang="ko-KR" altLang="en-US" dirty="0"/>
-              <a:t>모델에 가공되지 않은 원본 단어 시퀀스</a:t>
-            </a:r>
-            <a:r>
-              <a:rPr lang="en-US" altLang="ko-KR" dirty="0"/>
+              <a:t>접근 방식은 모델에 가공되지 않은 원본 단어 시퀀스</a:t>
+            </a:r>
+            <a:r>
+              <a:rPr lang="en-US" altLang="ko-KR" dirty="0">
+                <a:latin typeface="D2Coding" panose="020B0609020101020101" pitchFamily="49" charset="-127"/>
+                <a:ea typeface="D2Coding" panose="020B0609020101020101" pitchFamily="49" charset="-127"/>
+              </a:rPr>
               <a:t>(Raw word sequence)</a:t>
             </a:r>
             <a:r>
-              <a:rPr lang="ko-KR" altLang="en-US" dirty="0"/>
+              <a:rPr lang="ko-KR" altLang="en-US" dirty="0">
+                <a:latin typeface="D2Coding" panose="020B0609020101020101" pitchFamily="49" charset="-127"/>
+                <a:ea typeface="D2Coding" panose="020B0609020101020101" pitchFamily="49" charset="-127"/>
+              </a:rPr>
               <a:t>를 그대로 밀어 넣고</a:t>
             </a:r>
             <a:r>
-              <a:rPr lang="en-US" altLang="ko-KR" dirty="0"/>
+              <a:rPr lang="en-US" altLang="ko-KR" dirty="0">
+                <a:latin typeface="D2Coding" panose="020B0609020101020101" pitchFamily="49" charset="-127"/>
+                <a:ea typeface="D2Coding" panose="020B0609020101020101" pitchFamily="49" charset="-127"/>
+              </a:rPr>
               <a:t>, </a:t>
             </a:r>
             <a:r>
-              <a:rPr lang="ko-KR" altLang="en-US" dirty="0"/>
+              <a:rPr lang="ko-KR" altLang="en-US" dirty="0">
+                <a:latin typeface="D2Coding" panose="020B0609020101020101" pitchFamily="49" charset="-127"/>
+                <a:ea typeface="D2Coding" panose="020B0609020101020101" pitchFamily="49" charset="-127"/>
+              </a:rPr>
               <a:t>모델 스스로 단어 간의 위치적 의존성</a:t>
             </a:r>
             <a:r>
-              <a:rPr lang="en-US" altLang="ko-KR" dirty="0"/>
+              <a:rPr lang="en-US" altLang="ko-KR" dirty="0">
+                <a:latin typeface="D2Coding" panose="020B0609020101020101" pitchFamily="49" charset="-127"/>
+                <a:ea typeface="D2Coding" panose="020B0609020101020101" pitchFamily="49" charset="-127"/>
+              </a:rPr>
               <a:t>(Positional dependencies)</a:t>
             </a:r>
             <a:r>
-              <a:rPr lang="ko-KR" altLang="en-US" dirty="0"/>
+              <a:rPr lang="ko-KR" altLang="en-US" dirty="0">
+                <a:latin typeface="D2Coding" panose="020B0609020101020101" pitchFamily="49" charset="-127"/>
+                <a:ea typeface="D2Coding" panose="020B0609020101020101" pitchFamily="49" charset="-127"/>
+              </a:rPr>
               <a:t>을 직접 학습하게 만드는 것</a:t>
             </a:r>
-            <a:endParaRPr lang="ko-KR" altLang="en-US" dirty="0">
-              <a:latin typeface="D2Coding" panose="020B0609020101020101" pitchFamily="49" charset="-127"/>
-              <a:ea typeface="D2Coding" panose="020B0609020101020101" pitchFamily="49" charset="-127"/>
-            </a:endParaRPr>
           </a:p>
         </p:txBody>
       </p:sp>
@@ -4786,6 +4854,11 @@
             <a:avLst/>
           </a:prstGeom>
           <a:noFill/>
+          <a:ln>
+            <a:solidFill>
+              <a:schemeClr val="tx1"/>
+            </a:solidFill>
+          </a:ln>
         </p:spPr>
         <p:txBody>
           <a:bodyPr wrap="square">
@@ -5965,12 +6038,18 @@
         </p:blipFill>
         <p:spPr>
           <a:xfrm>
-            <a:off x="364324" y="1890460"/>
-            <a:ext cx="4666082" cy="1419719"/>
+            <a:off x="466930" y="1887171"/>
+            <a:ext cx="3940976" cy="1199096"/>
           </a:xfrm>
           <a:prstGeom prst="rect">
             <a:avLst/>
           </a:prstGeom>
+          <a:ln>
+            <a:noFill/>
+          </a:ln>
+          <a:effectLst>
+            <a:softEdge rad="112500"/>
+          </a:effectLst>
         </p:spPr>
       </p:pic>
       <p:sp>
@@ -6054,8 +6133,8 @@
         </p:nvSpPr>
         <p:spPr>
           <a:xfrm>
-            <a:off x="611333" y="3428999"/>
-            <a:ext cx="2343614" cy="738664"/>
+            <a:off x="572638" y="3167390"/>
+            <a:ext cx="3332017" cy="523220"/>
           </a:xfrm>
           <a:prstGeom prst="rect">
             <a:avLst/>
@@ -6229,7 +6308,7 @@
         </p:blipFill>
         <p:spPr>
           <a:xfrm rot="922006">
-            <a:off x="4665318" y="2570210"/>
+            <a:off x="4115174" y="2873691"/>
             <a:ext cx="914400" cy="914400"/>
           </a:xfrm>
           <a:prstGeom prst="rect">
@@ -7717,12 +7796,20 @@
         </p:blipFill>
         <p:spPr>
           <a:xfrm>
-            <a:off x="5328625" y="1497451"/>
+            <a:off x="5223850" y="1497451"/>
             <a:ext cx="6385855" cy="4903935"/>
           </a:xfrm>
           <a:prstGeom prst="rect">
             <a:avLst/>
           </a:prstGeom>
+          <a:solidFill>
+            <a:srgbClr val="76E3FF"/>
+          </a:solidFill>
+          <a:ln>
+            <a:solidFill>
+              <a:schemeClr val="tx1"/>
+            </a:solidFill>
+          </a:ln>
         </p:spPr>
       </p:pic>
       <p:sp>
@@ -7797,215 +7884,6 @@
           </a:p>
         </p:txBody>
       </p:sp>
-      <p:pic>
-        <p:nvPicPr>
-          <p:cNvPr id="6" name="Picture 2">
-            <a:extLst>
-              <a:ext uri="{FF2B5EF4-FFF2-40B4-BE49-F238E27FC236}">
-                <a16:creationId xmlns:a16="http://schemas.microsoft.com/office/drawing/2014/main" id="{3A6AAD7B-1959-8439-69E1-C9545449A4D6}"/>
-              </a:ext>
-            </a:extLst>
-          </p:cNvPr>
-          <p:cNvPicPr>
-            <a:picLocks noChangeAspect="1" noChangeArrowheads="1"/>
-          </p:cNvPicPr>
-          <p:nvPr/>
-        </p:nvPicPr>
-        <p:blipFill>
-          <a:blip r:embed="rId4">
-            <a:extLst>
-              <a:ext uri="{28A0092B-C50C-407E-A947-70E740481C1C}">
-                <a14:useLocalDpi xmlns:a14="http://schemas.microsoft.com/office/drawing/2010/main" val="0"/>
-              </a:ext>
-            </a:extLst>
-          </a:blip>
-          <a:srcRect/>
-          <a:stretch>
-            <a:fillRect/>
-          </a:stretch>
-        </p:blipFill>
-        <p:spPr bwMode="auto">
-          <a:xfrm>
-            <a:off x="642693" y="1956497"/>
-            <a:ext cx="4344508" cy="1629983"/>
-          </a:xfrm>
-          <a:prstGeom prst="rect">
-            <a:avLst/>
-          </a:prstGeom>
-          <a:noFill/>
-          <a:extLst>
-            <a:ext uri="{909E8E84-426E-40DD-AFC4-6F175D3DCCD1}">
-              <a14:hiddenFill xmlns:a14="http://schemas.microsoft.com/office/drawing/2010/main">
-                <a:solidFill>
-                  <a:srgbClr val="FFFFFF"/>
-                </a:solidFill>
-              </a14:hiddenFill>
-            </a:ext>
-          </a:extLst>
-        </p:spPr>
-      </p:pic>
-      <p:sp>
-        <p:nvSpPr>
-          <p:cNvPr id="8" name="TextBox 7">
-            <a:extLst>
-              <a:ext uri="{FF2B5EF4-FFF2-40B4-BE49-F238E27FC236}">
-                <a16:creationId xmlns:a16="http://schemas.microsoft.com/office/drawing/2014/main" id="{5745C829-0FBF-E869-481E-D4B66ECAA323}"/>
-              </a:ext>
-            </a:extLst>
-          </p:cNvPr>
-          <p:cNvSpPr txBox="1"/>
-          <p:nvPr/>
-        </p:nvSpPr>
-        <p:spPr>
-          <a:xfrm>
-            <a:off x="2146779" y="3376563"/>
-            <a:ext cx="1246661" cy="338554"/>
-          </a:xfrm>
-          <a:prstGeom prst="rect">
-            <a:avLst/>
-          </a:prstGeom>
-          <a:solidFill>
-            <a:schemeClr val="bg1"/>
-          </a:solidFill>
-        </p:spPr>
-        <p:txBody>
-          <a:bodyPr wrap="square">
-            <a:spAutoFit/>
-          </a:bodyPr>
-          <a:lstStyle/>
-          <a:p>
-            <a:r>
-              <a:rPr lang="ko-KR" altLang="en-US" sz="1600" dirty="0">
-                <a:latin typeface="D2Coding" panose="020B0609020101020101" pitchFamily="49" charset="-127"/>
-                <a:ea typeface="D2Coding" panose="020B0609020101020101" pitchFamily="49" charset="-127"/>
-              </a:rPr>
-              <a:t>단어 개수</a:t>
-            </a:r>
-            <a:endParaRPr lang="ko-KR" altLang="en-US" sz="1600" dirty="0"/>
-          </a:p>
-        </p:txBody>
-      </p:sp>
-      <p:sp>
-        <p:nvSpPr>
-          <p:cNvPr id="9" name="TextBox 8">
-            <a:extLst>
-              <a:ext uri="{FF2B5EF4-FFF2-40B4-BE49-F238E27FC236}">
-                <a16:creationId xmlns:a16="http://schemas.microsoft.com/office/drawing/2014/main" id="{2C6469B0-0EC6-D620-66F1-06DC661E76BC}"/>
-              </a:ext>
-            </a:extLst>
-          </p:cNvPr>
-          <p:cNvSpPr txBox="1"/>
-          <p:nvPr/>
-        </p:nvSpPr>
-        <p:spPr>
-          <a:xfrm>
-            <a:off x="297659" y="2432934"/>
-            <a:ext cx="1175541" cy="338554"/>
-          </a:xfrm>
-          <a:prstGeom prst="rect">
-            <a:avLst/>
-          </a:prstGeom>
-          <a:solidFill>
-            <a:schemeClr val="bg1"/>
-          </a:solidFill>
-        </p:spPr>
-        <p:txBody>
-          <a:bodyPr wrap="square">
-            <a:spAutoFit/>
-          </a:bodyPr>
-          <a:lstStyle/>
-          <a:p>
-            <a:r>
-              <a:rPr lang="ko-KR" altLang="en-US" sz="1600" dirty="0"/>
-              <a:t>기사 건수</a:t>
-            </a:r>
-          </a:p>
-        </p:txBody>
-      </p:sp>
-      <p:sp>
-        <p:nvSpPr>
-          <p:cNvPr id="10" name="TextBox 9">
-            <a:extLst>
-              <a:ext uri="{FF2B5EF4-FFF2-40B4-BE49-F238E27FC236}">
-                <a16:creationId xmlns:a16="http://schemas.microsoft.com/office/drawing/2014/main" id="{0BB66524-8D55-8096-3EF1-520DE30E4621}"/>
-              </a:ext>
-            </a:extLst>
-          </p:cNvPr>
-          <p:cNvSpPr txBox="1"/>
-          <p:nvPr/>
-        </p:nvSpPr>
-        <p:spPr>
-          <a:xfrm>
-            <a:off x="1132678" y="3746218"/>
-            <a:ext cx="4025235" cy="307777"/>
-          </a:xfrm>
-          <a:prstGeom prst="rect">
-            <a:avLst/>
-          </a:prstGeom>
-          <a:noFill/>
-        </p:spPr>
-        <p:txBody>
-          <a:bodyPr wrap="square">
-            <a:spAutoFit/>
-          </a:bodyPr>
-          <a:lstStyle/>
-          <a:p>
-            <a:r>
-              <a:rPr lang="en-US" altLang="ko-KR" sz="1400" b="0" i="0" dirty="0">
-                <a:effectLst/>
-                <a:latin typeface="D2Coding" panose="020B0609020101020101" pitchFamily="49" charset="-127"/>
-                <a:ea typeface="D2Coding" panose="020B0609020101020101" pitchFamily="49" charset="-127"/>
-              </a:rPr>
-              <a:t> A rank-3 text data tensor</a:t>
-            </a:r>
-            <a:endParaRPr lang="ko-KR" altLang="en-US" sz="1400" dirty="0">
-              <a:latin typeface="D2Coding" panose="020B0609020101020101" pitchFamily="49" charset="-127"/>
-              <a:ea typeface="D2Coding" panose="020B0609020101020101" pitchFamily="49" charset="-127"/>
-            </a:endParaRPr>
-          </a:p>
-        </p:txBody>
-      </p:sp>
-      <p:sp>
-        <p:nvSpPr>
-          <p:cNvPr id="11" name="TextBox 10">
-            <a:extLst>
-              <a:ext uri="{FF2B5EF4-FFF2-40B4-BE49-F238E27FC236}">
-                <a16:creationId xmlns:a16="http://schemas.microsoft.com/office/drawing/2014/main" id="{E3B5B094-B072-114D-860C-8082DC17FCDE}"/>
-              </a:ext>
-            </a:extLst>
-          </p:cNvPr>
-          <p:cNvSpPr txBox="1"/>
-          <p:nvPr/>
-        </p:nvSpPr>
-        <p:spPr>
-          <a:xfrm>
-            <a:off x="4219420" y="2848243"/>
-            <a:ext cx="767781" cy="338554"/>
-          </a:xfrm>
-          <a:prstGeom prst="rect">
-            <a:avLst/>
-          </a:prstGeom>
-          <a:solidFill>
-            <a:schemeClr val="bg1"/>
-          </a:solidFill>
-        </p:spPr>
-        <p:txBody>
-          <a:bodyPr wrap="square">
-            <a:spAutoFit/>
-          </a:bodyPr>
-          <a:lstStyle/>
-          <a:p>
-            <a:r>
-              <a:rPr lang="en-US" altLang="ko-KR" sz="1600" dirty="0">
-                <a:latin typeface="D2Coding" panose="020B0609020101020101" pitchFamily="49" charset="-127"/>
-                <a:ea typeface="D2Coding" panose="020B0609020101020101" pitchFamily="49" charset="-127"/>
-              </a:rPr>
-              <a:t>batch</a:t>
-            </a:r>
-            <a:endParaRPr lang="ko-KR" altLang="en-US" sz="1600" dirty="0"/>
-          </a:p>
-        </p:txBody>
-      </p:sp>
       <p:sp>
         <p:nvSpPr>
           <p:cNvPr id="2" name="슬라이드 번호 개체 틀 3">
@@ -8143,6 +8021,660 @@
               <a:latin typeface="Times New Roman" panose="02020603050405020304" pitchFamily="18" charset="0"/>
               <a:ea typeface="Verdana" panose="020B0604030504040204" pitchFamily="34" charset="0"/>
               <a:cs typeface="Times New Roman" panose="02020603050405020304" pitchFamily="18" charset="0"/>
+            </a:endParaRPr>
+          </a:p>
+        </p:txBody>
+      </p:sp>
+      <p:sp>
+        <p:nvSpPr>
+          <p:cNvPr id="7" name="Rectangle 1">
+            <a:extLst>
+              <a:ext uri="{FF2B5EF4-FFF2-40B4-BE49-F238E27FC236}">
+                <a16:creationId xmlns:a16="http://schemas.microsoft.com/office/drawing/2014/main" id="{DB4AC402-0A5A-34C0-0677-8510203EA4CA}"/>
+              </a:ext>
+            </a:extLst>
+          </p:cNvPr>
+          <p:cNvSpPr>
+            <a:spLocks noChangeArrowheads="1"/>
+          </p:cNvSpPr>
+          <p:nvPr/>
+        </p:nvSpPr>
+        <p:spPr bwMode="auto">
+          <a:xfrm>
+            <a:off x="3381711" y="3439334"/>
+            <a:ext cx="1523896" cy="415498"/>
+          </a:xfrm>
+          <a:prstGeom prst="rect">
+            <a:avLst/>
+          </a:prstGeom>
+          <a:noFill/>
+          <a:ln>
+            <a:noFill/>
+          </a:ln>
+          <a:effectLst/>
+          <a:extLst>
+            <a:ext uri="{909E8E84-426E-40DD-AFC4-6F175D3DCCD1}">
+              <a14:hiddenFill xmlns:a14="http://schemas.microsoft.com/office/drawing/2010/main">
+                <a:solidFill>
+                  <a:schemeClr val="accent1"/>
+                </a:solidFill>
+              </a14:hiddenFill>
+            </a:ext>
+            <a:ext uri="{91240B29-F687-4F45-9708-019B960494DF}">
+              <a14:hiddenLine xmlns:a14="http://schemas.microsoft.com/office/drawing/2010/main" w="9525">
+                <a:solidFill>
+                  <a:schemeClr val="tx1"/>
+                </a:solidFill>
+                <a:miter lim="800000"/>
+                <a:headEnd/>
+                <a:tailEnd/>
+              </a14:hiddenLine>
+            </a:ext>
+            <a:ext uri="{AF507438-7753-43E0-B8FC-AC1667EBCBE1}">
+              <a14:hiddenEffects xmlns:a14="http://schemas.microsoft.com/office/drawing/2010/main">
+                <a:effectLst>
+                  <a:outerShdw dist="35921" dir="2700000" algn="ctr" rotWithShape="0">
+                    <a:schemeClr val="bg2"/>
+                  </a:outerShdw>
+                </a:effectLst>
+              </a14:hiddenEffects>
+            </a:ext>
+          </a:extLst>
+        </p:spPr>
+        <p:txBody>
+          <a:bodyPr vert="horz" wrap="square" lIns="0" tIns="0" rIns="0" bIns="45720" numCol="1" anchor="ctr" anchorCtr="0" compatLnSpc="1">
+            <a:prstTxWarp prst="textNoShape">
+              <a:avLst/>
+            </a:prstTxWarp>
+            <a:spAutoFit/>
+          </a:bodyPr>
+          <a:lstStyle/>
+          <a:p>
+            <a:pPr lvl="0" algn="ctr" eaLnBrk="0" fontAlgn="base" hangingPunct="0">
+              <a:spcBef>
+                <a:spcPct val="0"/>
+              </a:spcBef>
+              <a:spcAft>
+                <a:spcPct val="0"/>
+              </a:spcAft>
+            </a:pPr>
+            <a:r>
+              <a:rPr lang="ko-KR" altLang="ko-KR" sz="1200" b="1" dirty="0">
+                <a:latin typeface="D2Coding" panose="020B0609020101020101" pitchFamily="49" charset="-127"/>
+                <a:ea typeface="D2Coding" panose="020B0609020101020101" pitchFamily="49" charset="-127"/>
+              </a:rPr>
+              <a:t>1,000,000</a:t>
+            </a:r>
+            <a:r>
+              <a:rPr lang="ko-KR" altLang="ko-KR" sz="1200" dirty="0">
+                <a:latin typeface="D2Coding" panose="020B0609020101020101" pitchFamily="49" charset="-127"/>
+                <a:ea typeface="D2Coding" panose="020B0609020101020101" pitchFamily="49" charset="-127"/>
+              </a:rPr>
+              <a:t> </a:t>
+            </a:r>
+            <a:endParaRPr lang="en-US" altLang="ko-KR" sz="1200" dirty="0">
+              <a:latin typeface="D2Coding" panose="020B0609020101020101" pitchFamily="49" charset="-127"/>
+              <a:ea typeface="D2Coding" panose="020B0609020101020101" pitchFamily="49" charset="-127"/>
+            </a:endParaRPr>
+          </a:p>
+          <a:p>
+            <a:pPr lvl="0" algn="ctr" eaLnBrk="0" fontAlgn="base" hangingPunct="0">
+              <a:spcBef>
+                <a:spcPct val="0"/>
+              </a:spcBef>
+              <a:spcAft>
+                <a:spcPct val="0"/>
+              </a:spcAft>
+            </a:pPr>
+            <a:r>
+              <a:rPr lang="ko-KR" altLang="ko-KR" sz="1200" dirty="0">
+                <a:latin typeface="D2Coding" panose="020B0609020101020101" pitchFamily="49" charset="-127"/>
+                <a:ea typeface="D2Coding" panose="020B0609020101020101" pitchFamily="49" charset="-127"/>
+              </a:rPr>
+              <a:t>(100만개 트윗)</a:t>
+            </a:r>
+            <a:r>
+              <a:rPr kumimoji="0" lang="ko-KR" altLang="ko-KR" sz="1200" i="0" u="none" strike="noStrike" cap="none" normalizeH="0" baseline="0" dirty="0">
+                <a:ln>
+                  <a:noFill/>
+                </a:ln>
+                <a:solidFill>
+                  <a:schemeClr val="tx1"/>
+                </a:solidFill>
+                <a:effectLst/>
+                <a:latin typeface="D2Coding" panose="020B0609020101020101" pitchFamily="49" charset="-127"/>
+                <a:ea typeface="D2Coding" panose="020B0609020101020101" pitchFamily="49" charset="-127"/>
+              </a:rPr>
+              <a:t> </a:t>
+            </a:r>
+          </a:p>
+        </p:txBody>
+      </p:sp>
+      <p:sp>
+        <p:nvSpPr>
+          <p:cNvPr id="12" name="Rectangle 1">
+            <a:extLst>
+              <a:ext uri="{FF2B5EF4-FFF2-40B4-BE49-F238E27FC236}">
+                <a16:creationId xmlns:a16="http://schemas.microsoft.com/office/drawing/2014/main" id="{273F8404-3E04-4E63-DB97-BD7835F9D84A}"/>
+              </a:ext>
+            </a:extLst>
+          </p:cNvPr>
+          <p:cNvSpPr>
+            <a:spLocks noChangeArrowheads="1"/>
+          </p:cNvSpPr>
+          <p:nvPr/>
+        </p:nvSpPr>
+        <p:spPr bwMode="auto">
+          <a:xfrm>
+            <a:off x="1486883" y="3938050"/>
+            <a:ext cx="2476292" cy="230832"/>
+          </a:xfrm>
+          <a:prstGeom prst="rect">
+            <a:avLst/>
+          </a:prstGeom>
+          <a:noFill/>
+          <a:ln>
+            <a:noFill/>
+          </a:ln>
+          <a:effectLst/>
+          <a:extLst>
+            <a:ext uri="{909E8E84-426E-40DD-AFC4-6F175D3DCCD1}">
+              <a14:hiddenFill xmlns:a14="http://schemas.microsoft.com/office/drawing/2010/main">
+                <a:solidFill>
+                  <a:schemeClr val="accent1"/>
+                </a:solidFill>
+              </a14:hiddenFill>
+            </a:ext>
+            <a:ext uri="{91240B29-F687-4F45-9708-019B960494DF}">
+              <a14:hiddenLine xmlns:a14="http://schemas.microsoft.com/office/drawing/2010/main" w="9525">
+                <a:solidFill>
+                  <a:schemeClr val="tx1"/>
+                </a:solidFill>
+                <a:miter lim="800000"/>
+                <a:headEnd/>
+                <a:tailEnd/>
+              </a14:hiddenLine>
+            </a:ext>
+            <a:ext uri="{AF507438-7753-43E0-B8FC-AC1667EBCBE1}">
+              <a14:hiddenEffects xmlns:a14="http://schemas.microsoft.com/office/drawing/2010/main">
+                <a:effectLst>
+                  <a:outerShdw dist="35921" dir="2700000" algn="ctr" rotWithShape="0">
+                    <a:schemeClr val="bg2"/>
+                  </a:outerShdw>
+                </a:effectLst>
+              </a14:hiddenEffects>
+            </a:ext>
+          </a:extLst>
+        </p:spPr>
+        <p:txBody>
+          <a:bodyPr vert="horz" wrap="square" lIns="0" tIns="0" rIns="0" bIns="45720" numCol="1" anchor="ctr" anchorCtr="0" compatLnSpc="1">
+            <a:prstTxWarp prst="textNoShape">
+              <a:avLst/>
+            </a:prstTxWarp>
+            <a:spAutoFit/>
+          </a:bodyPr>
+          <a:lstStyle/>
+          <a:p>
+            <a:pPr lvl="0" eaLnBrk="0" fontAlgn="base" hangingPunct="0">
+              <a:spcBef>
+                <a:spcPct val="0"/>
+              </a:spcBef>
+              <a:spcAft>
+                <a:spcPct val="0"/>
+              </a:spcAft>
+            </a:pPr>
+            <a:r>
+              <a:rPr lang="ko-KR" altLang="ko-KR" sz="1200" b="1" dirty="0">
+                <a:latin typeface="D2Coding" panose="020B0609020101020101" pitchFamily="49" charset="-127"/>
+                <a:ea typeface="D2Coding" panose="020B0609020101020101" pitchFamily="49" charset="-127"/>
+              </a:rPr>
+              <a:t>280</a:t>
+            </a:r>
+            <a:r>
+              <a:rPr lang="ko-KR" altLang="ko-KR" sz="1200" dirty="0">
+                <a:latin typeface="D2Coding" panose="020B0609020101020101" pitchFamily="49" charset="-127"/>
+                <a:ea typeface="D2Coding" panose="020B0609020101020101" pitchFamily="49" charset="-127"/>
+              </a:rPr>
+              <a:t> (최대 280글자)</a:t>
+            </a:r>
+            <a:endParaRPr kumimoji="0" lang="ko-KR" altLang="ko-KR" sz="1200" i="0" u="none" strike="noStrike" cap="none" normalizeH="0" baseline="0" dirty="0">
+              <a:ln>
+                <a:noFill/>
+              </a:ln>
+              <a:solidFill>
+                <a:schemeClr val="tx1"/>
+              </a:solidFill>
+              <a:effectLst/>
+              <a:latin typeface="D2Coding" panose="020B0609020101020101" pitchFamily="49" charset="-127"/>
+              <a:ea typeface="D2Coding" panose="020B0609020101020101" pitchFamily="49" charset="-127"/>
+            </a:endParaRPr>
+          </a:p>
+        </p:txBody>
+      </p:sp>
+      <p:sp>
+        <p:nvSpPr>
+          <p:cNvPr id="13" name="직사각형 12">
+            <a:extLst>
+              <a:ext uri="{FF2B5EF4-FFF2-40B4-BE49-F238E27FC236}">
+                <a16:creationId xmlns:a16="http://schemas.microsoft.com/office/drawing/2014/main" id="{26316727-EDA2-9935-782F-6215C67071AB}"/>
+              </a:ext>
+            </a:extLst>
+          </p:cNvPr>
+          <p:cNvSpPr/>
+          <p:nvPr/>
+        </p:nvSpPr>
+        <p:spPr>
+          <a:xfrm>
+            <a:off x="2648933" y="1886204"/>
+            <a:ext cx="1542067" cy="1200184"/>
+          </a:xfrm>
+          <a:prstGeom prst="rect">
+            <a:avLst/>
+          </a:prstGeom>
+          <a:solidFill>
+            <a:schemeClr val="tx2">
+              <a:lumMod val="20000"/>
+              <a:lumOff val="80000"/>
+            </a:schemeClr>
+          </a:solidFill>
+          <a:ln>
+            <a:solidFill>
+              <a:schemeClr val="tx2"/>
+            </a:solidFill>
+          </a:ln>
+        </p:spPr>
+        <p:style>
+          <a:lnRef idx="2">
+            <a:schemeClr val="accent1">
+              <a:shade val="15000"/>
+            </a:schemeClr>
+          </a:lnRef>
+          <a:fillRef idx="1">
+            <a:schemeClr val="accent1"/>
+          </a:fillRef>
+          <a:effectRef idx="0">
+            <a:schemeClr val="accent1"/>
+          </a:effectRef>
+          <a:fontRef idx="minor">
+            <a:schemeClr val="lt1"/>
+          </a:fontRef>
+        </p:style>
+        <p:txBody>
+          <a:bodyPr rtlCol="0" anchor="ctr"/>
+          <a:lstStyle/>
+          <a:p>
+            <a:pPr algn="ctr"/>
+            <a:endParaRPr lang="ko-KR" altLang="en-US"/>
+          </a:p>
+        </p:txBody>
+      </p:sp>
+      <p:sp>
+        <p:nvSpPr>
+          <p:cNvPr id="14" name="직사각형 13">
+            <a:extLst>
+              <a:ext uri="{FF2B5EF4-FFF2-40B4-BE49-F238E27FC236}">
+                <a16:creationId xmlns:a16="http://schemas.microsoft.com/office/drawing/2014/main" id="{771627A6-F046-6783-2DFF-27DABC343DFF}"/>
+              </a:ext>
+            </a:extLst>
+          </p:cNvPr>
+          <p:cNvSpPr/>
+          <p:nvPr/>
+        </p:nvSpPr>
+        <p:spPr>
+          <a:xfrm>
+            <a:off x="2363183" y="2057510"/>
+            <a:ext cx="1542067" cy="1200184"/>
+          </a:xfrm>
+          <a:prstGeom prst="rect">
+            <a:avLst/>
+          </a:prstGeom>
+          <a:solidFill>
+            <a:schemeClr val="tx2">
+              <a:lumMod val="20000"/>
+              <a:lumOff val="80000"/>
+            </a:schemeClr>
+          </a:solidFill>
+          <a:ln>
+            <a:solidFill>
+              <a:schemeClr val="tx2"/>
+            </a:solidFill>
+          </a:ln>
+        </p:spPr>
+        <p:style>
+          <a:lnRef idx="2">
+            <a:schemeClr val="accent1">
+              <a:shade val="15000"/>
+            </a:schemeClr>
+          </a:lnRef>
+          <a:fillRef idx="1">
+            <a:schemeClr val="accent1"/>
+          </a:fillRef>
+          <a:effectRef idx="0">
+            <a:schemeClr val="accent1"/>
+          </a:effectRef>
+          <a:fontRef idx="minor">
+            <a:schemeClr val="lt1"/>
+          </a:fontRef>
+        </p:style>
+        <p:txBody>
+          <a:bodyPr rtlCol="0" anchor="ctr"/>
+          <a:lstStyle/>
+          <a:p>
+            <a:pPr algn="ctr"/>
+            <a:endParaRPr lang="ko-KR" altLang="en-US"/>
+          </a:p>
+        </p:txBody>
+      </p:sp>
+      <p:sp>
+        <p:nvSpPr>
+          <p:cNvPr id="15" name="직사각형 14">
+            <a:extLst>
+              <a:ext uri="{FF2B5EF4-FFF2-40B4-BE49-F238E27FC236}">
+                <a16:creationId xmlns:a16="http://schemas.microsoft.com/office/drawing/2014/main" id="{630B357A-BBA0-36A2-FB11-79B322AEC88F}"/>
+              </a:ext>
+            </a:extLst>
+          </p:cNvPr>
+          <p:cNvSpPr/>
+          <p:nvPr/>
+        </p:nvSpPr>
+        <p:spPr>
+          <a:xfrm>
+            <a:off x="2077433" y="2228816"/>
+            <a:ext cx="1542067" cy="1200184"/>
+          </a:xfrm>
+          <a:prstGeom prst="rect">
+            <a:avLst/>
+          </a:prstGeom>
+          <a:solidFill>
+            <a:schemeClr val="tx2">
+              <a:lumMod val="20000"/>
+              <a:lumOff val="80000"/>
+            </a:schemeClr>
+          </a:solidFill>
+          <a:ln>
+            <a:solidFill>
+              <a:schemeClr val="tx2"/>
+            </a:solidFill>
+          </a:ln>
+        </p:spPr>
+        <p:style>
+          <a:lnRef idx="2">
+            <a:schemeClr val="accent1">
+              <a:shade val="15000"/>
+            </a:schemeClr>
+          </a:lnRef>
+          <a:fillRef idx="1">
+            <a:schemeClr val="accent1"/>
+          </a:fillRef>
+          <a:effectRef idx="0">
+            <a:schemeClr val="accent1"/>
+          </a:effectRef>
+          <a:fontRef idx="minor">
+            <a:schemeClr val="lt1"/>
+          </a:fontRef>
+        </p:style>
+        <p:txBody>
+          <a:bodyPr rtlCol="0" anchor="ctr"/>
+          <a:lstStyle/>
+          <a:p>
+            <a:pPr algn="ctr"/>
+            <a:endParaRPr lang="ko-KR" altLang="en-US"/>
+          </a:p>
+        </p:txBody>
+      </p:sp>
+      <p:sp>
+        <p:nvSpPr>
+          <p:cNvPr id="16" name="직사각형 15">
+            <a:extLst>
+              <a:ext uri="{FF2B5EF4-FFF2-40B4-BE49-F238E27FC236}">
+                <a16:creationId xmlns:a16="http://schemas.microsoft.com/office/drawing/2014/main" id="{2F4F00C6-DAD5-23F0-968A-829907D7785E}"/>
+              </a:ext>
+            </a:extLst>
+          </p:cNvPr>
+          <p:cNvSpPr/>
+          <p:nvPr/>
+        </p:nvSpPr>
+        <p:spPr>
+          <a:xfrm>
+            <a:off x="1782158" y="2400122"/>
+            <a:ext cx="1542067" cy="1200184"/>
+          </a:xfrm>
+          <a:prstGeom prst="rect">
+            <a:avLst/>
+          </a:prstGeom>
+          <a:solidFill>
+            <a:schemeClr val="tx2">
+              <a:lumMod val="20000"/>
+              <a:lumOff val="80000"/>
+            </a:schemeClr>
+          </a:solidFill>
+          <a:ln>
+            <a:solidFill>
+              <a:schemeClr val="tx2"/>
+            </a:solidFill>
+          </a:ln>
+        </p:spPr>
+        <p:style>
+          <a:lnRef idx="2">
+            <a:schemeClr val="accent1">
+              <a:shade val="15000"/>
+            </a:schemeClr>
+          </a:lnRef>
+          <a:fillRef idx="1">
+            <a:schemeClr val="accent1"/>
+          </a:fillRef>
+          <a:effectRef idx="0">
+            <a:schemeClr val="accent1"/>
+          </a:effectRef>
+          <a:fontRef idx="minor">
+            <a:schemeClr val="lt1"/>
+          </a:fontRef>
+        </p:style>
+        <p:txBody>
+          <a:bodyPr rtlCol="0" anchor="ctr"/>
+          <a:lstStyle/>
+          <a:p>
+            <a:pPr algn="ctr"/>
+            <a:endParaRPr lang="ko-KR" altLang="en-US"/>
+          </a:p>
+        </p:txBody>
+      </p:sp>
+      <p:sp>
+        <p:nvSpPr>
+          <p:cNvPr id="17" name="직사각형 16">
+            <a:extLst>
+              <a:ext uri="{FF2B5EF4-FFF2-40B4-BE49-F238E27FC236}">
+                <a16:creationId xmlns:a16="http://schemas.microsoft.com/office/drawing/2014/main" id="{7BB2C4ED-853D-EB0F-A343-C6290AF79E2B}"/>
+              </a:ext>
+            </a:extLst>
+          </p:cNvPr>
+          <p:cNvSpPr/>
+          <p:nvPr/>
+        </p:nvSpPr>
+        <p:spPr>
+          <a:xfrm>
+            <a:off x="1486883" y="2571430"/>
+            <a:ext cx="1542067" cy="1200184"/>
+          </a:xfrm>
+          <a:prstGeom prst="rect">
+            <a:avLst/>
+          </a:prstGeom>
+          <a:solidFill>
+            <a:schemeClr val="tx2">
+              <a:lumMod val="20000"/>
+              <a:lumOff val="80000"/>
+            </a:schemeClr>
+          </a:solidFill>
+          <a:ln>
+            <a:solidFill>
+              <a:schemeClr val="tx2"/>
+            </a:solidFill>
+          </a:ln>
+        </p:spPr>
+        <p:style>
+          <a:lnRef idx="2">
+            <a:schemeClr val="accent1">
+              <a:shade val="15000"/>
+            </a:schemeClr>
+          </a:lnRef>
+          <a:fillRef idx="1">
+            <a:schemeClr val="accent1"/>
+          </a:fillRef>
+          <a:effectRef idx="0">
+            <a:schemeClr val="accent1"/>
+          </a:effectRef>
+          <a:fontRef idx="minor">
+            <a:schemeClr val="lt1"/>
+          </a:fontRef>
+        </p:style>
+        <p:txBody>
+          <a:bodyPr rtlCol="0" anchor="ctr"/>
+          <a:lstStyle/>
+          <a:p>
+            <a:pPr algn="ctr"/>
+            <a:endParaRPr lang="ko-KR" altLang="en-US"/>
+          </a:p>
+        </p:txBody>
+      </p:sp>
+      <p:sp>
+        <p:nvSpPr>
+          <p:cNvPr id="4" name="Rectangle 1">
+            <a:extLst>
+              <a:ext uri="{FF2B5EF4-FFF2-40B4-BE49-F238E27FC236}">
+                <a16:creationId xmlns:a16="http://schemas.microsoft.com/office/drawing/2014/main" id="{60A93080-A6D1-3D3C-D44B-845124B0C8F2}"/>
+              </a:ext>
+            </a:extLst>
+          </p:cNvPr>
+          <p:cNvSpPr>
+            <a:spLocks noChangeArrowheads="1"/>
+          </p:cNvSpPr>
+          <p:nvPr/>
+        </p:nvSpPr>
+        <p:spPr bwMode="auto">
+          <a:xfrm>
+            <a:off x="372174" y="2899735"/>
+            <a:ext cx="1837626" cy="415498"/>
+          </a:xfrm>
+          <a:prstGeom prst="rect">
+            <a:avLst/>
+          </a:prstGeom>
+          <a:noFill/>
+          <a:ln>
+            <a:noFill/>
+          </a:ln>
+          <a:effectLst/>
+          <a:extLst>
+            <a:ext uri="{909E8E84-426E-40DD-AFC4-6F175D3DCCD1}">
+              <a14:hiddenFill xmlns:a14="http://schemas.microsoft.com/office/drawing/2010/main">
+                <a:solidFill>
+                  <a:schemeClr val="accent1"/>
+                </a:solidFill>
+              </a14:hiddenFill>
+            </a:ext>
+            <a:ext uri="{91240B29-F687-4F45-9708-019B960494DF}">
+              <a14:hiddenLine xmlns:a14="http://schemas.microsoft.com/office/drawing/2010/main" w="9525">
+                <a:solidFill>
+                  <a:schemeClr val="tx1"/>
+                </a:solidFill>
+                <a:miter lim="800000"/>
+                <a:headEnd/>
+                <a:tailEnd/>
+              </a14:hiddenLine>
+            </a:ext>
+            <a:ext uri="{AF507438-7753-43E0-B8FC-AC1667EBCBE1}">
+              <a14:hiddenEffects xmlns:a14="http://schemas.microsoft.com/office/drawing/2010/main">
+                <a:effectLst>
+                  <a:outerShdw dist="35921" dir="2700000" algn="ctr" rotWithShape="0">
+                    <a:schemeClr val="bg2"/>
+                  </a:outerShdw>
+                </a:effectLst>
+              </a14:hiddenEffects>
+            </a:ext>
+          </a:extLst>
+        </p:spPr>
+        <p:txBody>
+          <a:bodyPr vert="horz" wrap="square" lIns="0" tIns="0" rIns="0" bIns="45720" numCol="1" anchor="ctr" anchorCtr="0" compatLnSpc="1">
+            <a:prstTxWarp prst="textNoShape">
+              <a:avLst/>
+            </a:prstTxWarp>
+            <a:spAutoFit/>
+          </a:bodyPr>
+          <a:lstStyle/>
+          <a:p>
+            <a:pPr eaLnBrk="0" fontAlgn="base" hangingPunct="0">
+              <a:spcBef>
+                <a:spcPct val="0"/>
+              </a:spcBef>
+              <a:spcAft>
+                <a:spcPct val="0"/>
+              </a:spcAft>
+            </a:pPr>
+            <a:r>
+              <a:rPr lang="ko-KR" altLang="ko-KR" sz="1200" b="1" dirty="0">
+                <a:latin typeface="D2Coding" panose="020B0609020101020101" pitchFamily="49" charset="-127"/>
+                <a:ea typeface="D2Coding" panose="020B0609020101020101" pitchFamily="49" charset="-127"/>
+              </a:rPr>
+              <a:t>128</a:t>
+            </a:r>
+            <a:r>
+              <a:rPr lang="ko-KR" altLang="ko-KR" sz="1200" dirty="0">
+                <a:latin typeface="D2Coding" panose="020B0609020101020101" pitchFamily="49" charset="-127"/>
+                <a:ea typeface="D2Coding" panose="020B0609020101020101" pitchFamily="49" charset="-127"/>
+              </a:rPr>
+              <a:t> (문자 인코딩 차원)</a:t>
+            </a:r>
+            <a:endParaRPr lang="en-US" altLang="ko-KR" sz="1200" dirty="0">
+              <a:latin typeface="D2Coding" panose="020B0609020101020101" pitchFamily="49" charset="-127"/>
+              <a:ea typeface="D2Coding" panose="020B0609020101020101" pitchFamily="49" charset="-127"/>
+            </a:endParaRPr>
+          </a:p>
+          <a:p>
+            <a:pPr eaLnBrk="0" fontAlgn="base" hangingPunct="0">
+              <a:spcBef>
+                <a:spcPct val="0"/>
+              </a:spcBef>
+              <a:spcAft>
+                <a:spcPct val="0"/>
+              </a:spcAft>
+            </a:pPr>
+            <a:r>
+              <a:rPr lang="en-US" altLang="ko-KR" sz="1200" dirty="0">
+                <a:latin typeface="D2Coding" panose="020B0609020101020101" pitchFamily="49" charset="-127"/>
+                <a:ea typeface="D2Coding" panose="020B0609020101020101" pitchFamily="49" charset="-127"/>
+              </a:rPr>
+              <a:t>One</a:t>
+            </a:r>
+            <a:r>
+              <a:rPr lang="ko-KR" altLang="en-US" sz="1200" dirty="0">
+                <a:latin typeface="D2Coding" panose="020B0609020101020101" pitchFamily="49" charset="-127"/>
+                <a:ea typeface="D2Coding" panose="020B0609020101020101" pitchFamily="49" charset="-127"/>
+              </a:rPr>
+              <a:t> </a:t>
+            </a:r>
+            <a:r>
+              <a:rPr lang="en-US" altLang="ko-KR" sz="1200" dirty="0">
+                <a:latin typeface="D2Coding" panose="020B0609020101020101" pitchFamily="49" charset="-127"/>
+                <a:ea typeface="D2Coding" panose="020B0609020101020101" pitchFamily="49" charset="-127"/>
+              </a:rPr>
+              <a:t>hot</a:t>
+            </a:r>
+            <a:r>
+              <a:rPr lang="ko-KR" altLang="en-US" sz="1200" dirty="0">
+                <a:latin typeface="D2Coding" panose="020B0609020101020101" pitchFamily="49" charset="-127"/>
+                <a:ea typeface="D2Coding" panose="020B0609020101020101" pitchFamily="49" charset="-127"/>
+              </a:rPr>
+              <a:t> </a:t>
+            </a:r>
+            <a:r>
+              <a:rPr lang="en-US" altLang="ko-KR" sz="1200" dirty="0">
+                <a:latin typeface="D2Coding" panose="020B0609020101020101" pitchFamily="49" charset="-127"/>
+                <a:ea typeface="D2Coding" panose="020B0609020101020101" pitchFamily="49" charset="-127"/>
+              </a:rPr>
+              <a:t>encoding</a:t>
+            </a:r>
+            <a:endParaRPr lang="ko-KR" altLang="ko-KR" sz="1200" dirty="0">
+              <a:latin typeface="D2Coding" panose="020B0609020101020101" pitchFamily="49" charset="-127"/>
+              <a:ea typeface="D2Coding" panose="020B0609020101020101" pitchFamily="49" charset="-127"/>
             </a:endParaRPr>
           </a:p>
         </p:txBody>
@@ -8450,1522 +8982,6 @@
 </file>
 
 <file path=ppt/slides/slide18.xml><?xml version="1.0" encoding="utf-8"?>
-<p:sld xmlns:a="http://schemas.openxmlformats.org/drawingml/2006/main" xmlns:r="http://schemas.openxmlformats.org/officeDocument/2006/relationships" xmlns:p="http://schemas.openxmlformats.org/presentationml/2006/main">
-  <p:cSld>
-    <p:spTree>
-      <p:nvGrpSpPr>
-        <p:cNvPr id="1" name="">
-          <a:extLst>
-            <a:ext uri="{FF2B5EF4-FFF2-40B4-BE49-F238E27FC236}">
-              <a16:creationId xmlns:a16="http://schemas.microsoft.com/office/drawing/2014/main" id="{687FB3D6-1EA1-2E15-D1CB-599FD462BA7B}"/>
-            </a:ext>
-          </a:extLst>
-        </p:cNvPr>
-        <p:cNvGrpSpPr/>
-        <p:nvPr/>
-      </p:nvGrpSpPr>
-      <p:grpSpPr>
-        <a:xfrm>
-          <a:off x="0" y="0"/>
-          <a:ext cx="0" cy="0"/>
-          <a:chOff x="0" y="0"/>
-          <a:chExt cx="0" cy="0"/>
-        </a:xfrm>
-      </p:grpSpPr>
-      <p:sp>
-        <p:nvSpPr>
-          <p:cNvPr id="3" name="제목 1">
-            <a:extLst>
-              <a:ext uri="{FF2B5EF4-FFF2-40B4-BE49-F238E27FC236}">
-                <a16:creationId xmlns:a16="http://schemas.microsoft.com/office/drawing/2014/main" id="{B9C6AFB5-68B1-1825-3651-01B01705B581}"/>
-              </a:ext>
-            </a:extLst>
-          </p:cNvPr>
-          <p:cNvSpPr txBox="1">
-            <a:spLocks/>
-          </p:cNvSpPr>
-          <p:nvPr/>
-        </p:nvSpPr>
-        <p:spPr>
-          <a:xfrm>
-            <a:off x="475645" y="481983"/>
-            <a:ext cx="11076274" cy="766439"/>
-          </a:xfrm>
-          <a:prstGeom prst="rect">
-            <a:avLst/>
-          </a:prstGeom>
-        </p:spPr>
-        <p:txBody>
-          <a:bodyPr vert="horz" lIns="91440" tIns="45720" rIns="91440" bIns="45720" rtlCol="0" anchor="ctr">
-            <a:normAutofit/>
-          </a:bodyPr>
-          <a:lstStyle>
-            <a:lvl1pPr algn="ctr" defTabSz="914400" rtl="0" eaLnBrk="1" latinLnBrk="1" hangingPunct="1">
-              <a:lnSpc>
-                <a:spcPct val="90000"/>
-              </a:lnSpc>
-              <a:spcBef>
-                <a:spcPct val="0"/>
-              </a:spcBef>
-              <a:buNone/>
-              <a:defRPr sz="3200" kern="1200" cap="all" baseline="0">
-                <a:solidFill>
-                  <a:schemeClr val="tx1"/>
-                </a:solidFill>
-                <a:effectLst/>
-                <a:latin typeface="Batang" panose="02030600000101010101" pitchFamily="18" charset="-127"/>
-                <a:ea typeface="Batang" panose="02030600000101010101" pitchFamily="18" charset="-127"/>
-                <a:cs typeface="+mj-cs"/>
-              </a:defRPr>
-            </a:lvl1pPr>
-          </a:lstStyle>
-          <a:p>
-            <a:pPr algn="l"/>
-            <a:r>
-              <a:rPr lang="en-US" altLang="ko-KR" sz="2800" cap="none" dirty="0">
-                <a:solidFill>
-                  <a:schemeClr val="bg2">
-                    <a:lumMod val="25000"/>
-                  </a:schemeClr>
-                </a:solidFill>
-                <a:latin typeface="D2Coding" panose="020B0609020101020101" pitchFamily="49" charset="-127"/>
-                <a:ea typeface="D2Coding" panose="020B0609020101020101" pitchFamily="49" charset="-127"/>
-                <a:cs typeface="Segoe UI Light" panose="020B0502040204020203" pitchFamily="34" charset="0"/>
-              </a:rPr>
-              <a:t>Understanding word embeddings</a:t>
-            </a:r>
-          </a:p>
-        </p:txBody>
-      </p:sp>
-      <p:pic>
-        <p:nvPicPr>
-          <p:cNvPr id="2050" name="Picture 2">
-            <a:extLst>
-              <a:ext uri="{FF2B5EF4-FFF2-40B4-BE49-F238E27FC236}">
-                <a16:creationId xmlns:a16="http://schemas.microsoft.com/office/drawing/2014/main" id="{501AEBAD-5E48-BCDE-589F-AFA68DE64863}"/>
-              </a:ext>
-            </a:extLst>
-          </p:cNvPr>
-          <p:cNvPicPr>
-            <a:picLocks noChangeAspect="1" noChangeArrowheads="1"/>
-          </p:cNvPicPr>
-          <p:nvPr/>
-        </p:nvPicPr>
-        <p:blipFill>
-          <a:blip r:embed="rId2">
-            <a:extLst>
-              <a:ext uri="{28A0092B-C50C-407E-A947-70E740481C1C}">
-                <a14:useLocalDpi xmlns:a14="http://schemas.microsoft.com/office/drawing/2010/main" val="0"/>
-              </a:ext>
-            </a:extLst>
-          </a:blip>
-          <a:srcRect/>
-          <a:stretch>
-            <a:fillRect/>
-          </a:stretch>
-        </p:blipFill>
-        <p:spPr bwMode="auto">
-          <a:xfrm>
-            <a:off x="2581274" y="1729453"/>
-            <a:ext cx="4086999" cy="4205307"/>
-          </a:xfrm>
-          <a:prstGeom prst="rect">
-            <a:avLst/>
-          </a:prstGeom>
-          <a:noFill/>
-          <a:extLst>
-            <a:ext uri="{909E8E84-426E-40DD-AFC4-6F175D3DCCD1}">
-              <a14:hiddenFill xmlns:a14="http://schemas.microsoft.com/office/drawing/2010/main">
-                <a:solidFill>
-                  <a:srgbClr val="FFFFFF"/>
-                </a:solidFill>
-              </a14:hiddenFill>
-            </a:ext>
-          </a:extLst>
-        </p:spPr>
-      </p:pic>
-      <p:sp>
-        <p:nvSpPr>
-          <p:cNvPr id="5" name="TextBox 4">
-            <a:extLst>
-              <a:ext uri="{FF2B5EF4-FFF2-40B4-BE49-F238E27FC236}">
-                <a16:creationId xmlns:a16="http://schemas.microsoft.com/office/drawing/2014/main" id="{FB6508DE-FBA0-E26C-6F4F-0F86CCD3BDC2}"/>
-              </a:ext>
-            </a:extLst>
-          </p:cNvPr>
-          <p:cNvSpPr txBox="1"/>
-          <p:nvPr/>
-        </p:nvSpPr>
-        <p:spPr>
-          <a:xfrm>
-            <a:off x="2581274" y="5995770"/>
-            <a:ext cx="4657726" cy="338554"/>
-          </a:xfrm>
-          <a:prstGeom prst="rect">
-            <a:avLst/>
-          </a:prstGeom>
-          <a:noFill/>
-        </p:spPr>
-        <p:txBody>
-          <a:bodyPr wrap="square">
-            <a:spAutoFit/>
-          </a:bodyPr>
-          <a:lstStyle/>
-          <a:p>
-            <a:r>
-              <a:rPr lang="en-US" altLang="ko-KR" sz="1600" dirty="0">
-                <a:latin typeface="D2Coding" panose="020B0609020101020101" pitchFamily="49" charset="-127"/>
-                <a:ea typeface="D2Coding" panose="020B0609020101020101" pitchFamily="49" charset="-127"/>
-              </a:rPr>
-              <a:t>A toy example of a word-embedding space</a:t>
-            </a:r>
-            <a:endParaRPr lang="ko-KR" altLang="en-US" sz="1600" dirty="0">
-              <a:latin typeface="D2Coding" panose="020B0609020101020101" pitchFamily="49" charset="-127"/>
-              <a:ea typeface="D2Coding" panose="020B0609020101020101" pitchFamily="49" charset="-127"/>
-            </a:endParaRPr>
-          </a:p>
-        </p:txBody>
-      </p:sp>
-      <p:sp>
-        <p:nvSpPr>
-          <p:cNvPr id="6" name="슬라이드 번호 개체 틀 3">
-            <a:extLst>
-              <a:ext uri="{FF2B5EF4-FFF2-40B4-BE49-F238E27FC236}">
-                <a16:creationId xmlns:a16="http://schemas.microsoft.com/office/drawing/2014/main" id="{DE258610-9A81-601C-9A2B-32D2CEAF4AC4}"/>
-              </a:ext>
-            </a:extLst>
-          </p:cNvPr>
-          <p:cNvSpPr txBox="1">
-            <a:spLocks/>
-          </p:cNvSpPr>
-          <p:nvPr/>
-        </p:nvSpPr>
-        <p:spPr>
-          <a:xfrm>
-            <a:off x="11162487" y="299420"/>
-            <a:ext cx="753545" cy="365125"/>
-          </a:xfrm>
-          <a:prstGeom prst="rect">
-            <a:avLst/>
-          </a:prstGeom>
-        </p:spPr>
-        <p:txBody>
-          <a:bodyPr vert="horz" lIns="91440" tIns="45720" rIns="91440" bIns="45720" rtlCol="0" anchor="ctr"/>
-          <a:lstStyle>
-            <a:defPPr rtl="0">
-              <a:defRPr lang="ko-KR"/>
-            </a:defPPr>
-            <a:lvl1pPr marL="0" algn="r" defTabSz="914400" rtl="0" eaLnBrk="1" latinLnBrk="0" hangingPunct="1">
-              <a:defRPr sz="1200" kern="1200" baseline="0">
-                <a:solidFill>
-                  <a:schemeClr val="tx1">
-                    <a:lumMod val="65000"/>
-                    <a:lumOff val="35000"/>
-                  </a:schemeClr>
-                </a:solidFill>
-                <a:latin typeface="맑은 고딕" panose="020B0503020000020004" pitchFamily="50" charset="-127"/>
-                <a:ea typeface="맑은 고딕" panose="020B0503020000020004" pitchFamily="50" charset="-127"/>
-                <a:cs typeface="+mn-cs"/>
-              </a:defRPr>
-            </a:lvl1pPr>
-            <a:lvl2pPr marL="457200" algn="l" defTabSz="914400" rtl="0" eaLnBrk="1" latinLnBrk="0" hangingPunct="1">
-              <a:defRPr sz="1800" kern="1200">
-                <a:solidFill>
-                  <a:schemeClr val="tx1"/>
-                </a:solidFill>
-                <a:latin typeface="+mn-lt"/>
-                <a:ea typeface="+mn-ea"/>
-                <a:cs typeface="+mn-cs"/>
-              </a:defRPr>
-            </a:lvl2pPr>
-            <a:lvl3pPr marL="914400" algn="l" defTabSz="914400" rtl="0" eaLnBrk="1" latinLnBrk="0" hangingPunct="1">
-              <a:defRPr sz="1800" kern="1200">
-                <a:solidFill>
-                  <a:schemeClr val="tx1"/>
-                </a:solidFill>
-                <a:latin typeface="+mn-lt"/>
-                <a:ea typeface="+mn-ea"/>
-                <a:cs typeface="+mn-cs"/>
-              </a:defRPr>
-            </a:lvl3pPr>
-            <a:lvl4pPr marL="1371600" algn="l" defTabSz="914400" rtl="0" eaLnBrk="1" latinLnBrk="0" hangingPunct="1">
-              <a:defRPr sz="1800" kern="1200">
-                <a:solidFill>
-                  <a:schemeClr val="tx1"/>
-                </a:solidFill>
-                <a:latin typeface="+mn-lt"/>
-                <a:ea typeface="+mn-ea"/>
-                <a:cs typeface="+mn-cs"/>
-              </a:defRPr>
-            </a:lvl4pPr>
-            <a:lvl5pPr marL="1828800" algn="l" defTabSz="914400" rtl="0" eaLnBrk="1" latinLnBrk="0" hangingPunct="1">
-              <a:defRPr sz="1800" kern="1200">
-                <a:solidFill>
-                  <a:schemeClr val="tx1"/>
-                </a:solidFill>
-                <a:latin typeface="+mn-lt"/>
-                <a:ea typeface="+mn-ea"/>
-                <a:cs typeface="+mn-cs"/>
-              </a:defRPr>
-            </a:lvl5pPr>
-            <a:lvl6pPr marL="2286000" algn="l" defTabSz="914400" rtl="0" eaLnBrk="1" latinLnBrk="0" hangingPunct="1">
-              <a:defRPr sz="1800" kern="1200">
-                <a:solidFill>
-                  <a:schemeClr val="tx1"/>
-                </a:solidFill>
-                <a:latin typeface="+mn-lt"/>
-                <a:ea typeface="+mn-ea"/>
-                <a:cs typeface="+mn-cs"/>
-              </a:defRPr>
-            </a:lvl6pPr>
-            <a:lvl7pPr marL="2743200" algn="l" defTabSz="914400" rtl="0" eaLnBrk="1" latinLnBrk="0" hangingPunct="1">
-              <a:defRPr sz="1800" kern="1200">
-                <a:solidFill>
-                  <a:schemeClr val="tx1"/>
-                </a:solidFill>
-                <a:latin typeface="+mn-lt"/>
-                <a:ea typeface="+mn-ea"/>
-                <a:cs typeface="+mn-cs"/>
-              </a:defRPr>
-            </a:lvl7pPr>
-            <a:lvl8pPr marL="3200400" algn="l" defTabSz="914400" rtl="0" eaLnBrk="1" latinLnBrk="0" hangingPunct="1">
-              <a:defRPr sz="1800" kern="1200">
-                <a:solidFill>
-                  <a:schemeClr val="tx1"/>
-                </a:solidFill>
-                <a:latin typeface="+mn-lt"/>
-                <a:ea typeface="+mn-ea"/>
-                <a:cs typeface="+mn-cs"/>
-              </a:defRPr>
-            </a:lvl8pPr>
-            <a:lvl9pPr marL="3657600" algn="l" defTabSz="914400" rtl="0" eaLnBrk="1" latinLnBrk="0" hangingPunct="1">
-              <a:defRPr sz="1800" kern="1200">
-                <a:solidFill>
-                  <a:schemeClr val="tx1"/>
-                </a:solidFill>
-                <a:latin typeface="+mn-lt"/>
-                <a:ea typeface="+mn-ea"/>
-                <a:cs typeface="+mn-cs"/>
-              </a:defRPr>
-            </a:lvl9pPr>
-          </a:lstStyle>
-          <a:p>
-            <a:fld id="{D57F1E4F-1CFF-5643-939E-217C01CDF565}" type="slidenum">
-              <a:rPr lang="en-US" sz="1400" b="1" smtClean="0">
-                <a:latin typeface="Times New Roman" panose="02020603050405020304" pitchFamily="18" charset="0"/>
-                <a:ea typeface="Verdana" panose="020B0604030504040204" pitchFamily="34" charset="0"/>
-                <a:cs typeface="Times New Roman" panose="02020603050405020304" pitchFamily="18" charset="0"/>
-              </a:rPr>
-              <a:pPr/>
-              <a:t>18</a:t>
-            </a:fld>
-            <a:endParaRPr lang="en-US" sz="1400" b="1" dirty="0">
-              <a:latin typeface="Times New Roman" panose="02020603050405020304" pitchFamily="18" charset="0"/>
-              <a:ea typeface="Verdana" panose="020B0604030504040204" pitchFamily="34" charset="0"/>
-              <a:cs typeface="Times New Roman" panose="02020603050405020304" pitchFamily="18" charset="0"/>
-            </a:endParaRPr>
-          </a:p>
-        </p:txBody>
-      </p:sp>
-    </p:spTree>
-    <p:extLst>
-      <p:ext uri="{BB962C8B-B14F-4D97-AF65-F5344CB8AC3E}">
-        <p14:creationId xmlns:p14="http://schemas.microsoft.com/office/powerpoint/2010/main" val="2101644927"/>
-      </p:ext>
-    </p:extLst>
-  </p:cSld>
-  <p:clrMapOvr>
-    <a:masterClrMapping/>
-  </p:clrMapOvr>
-</p:sld>
-</file>
-
-<file path=ppt/slides/slide19.xml><?xml version="1.0" encoding="utf-8"?>
-<p:sld xmlns:a="http://schemas.openxmlformats.org/drawingml/2006/main" xmlns:r="http://schemas.openxmlformats.org/officeDocument/2006/relationships" xmlns:p="http://schemas.openxmlformats.org/presentationml/2006/main">
-  <p:cSld>
-    <p:spTree>
-      <p:nvGrpSpPr>
-        <p:cNvPr id="1" name="">
-          <a:extLst>
-            <a:ext uri="{FF2B5EF4-FFF2-40B4-BE49-F238E27FC236}">
-              <a16:creationId xmlns:a16="http://schemas.microsoft.com/office/drawing/2014/main" id="{F686BB75-EA64-8A67-64D7-5F96C1CC71DC}"/>
-            </a:ext>
-          </a:extLst>
-        </p:cNvPr>
-        <p:cNvGrpSpPr/>
-        <p:nvPr/>
-      </p:nvGrpSpPr>
-      <p:grpSpPr>
-        <a:xfrm>
-          <a:off x="0" y="0"/>
-          <a:ext cx="0" cy="0"/>
-          <a:chOff x="0" y="0"/>
-          <a:chExt cx="0" cy="0"/>
-        </a:xfrm>
-      </p:grpSpPr>
-      <p:sp>
-        <p:nvSpPr>
-          <p:cNvPr id="3" name="제목 1">
-            <a:extLst>
-              <a:ext uri="{FF2B5EF4-FFF2-40B4-BE49-F238E27FC236}">
-                <a16:creationId xmlns:a16="http://schemas.microsoft.com/office/drawing/2014/main" id="{A5988A04-D654-7F33-F67D-305715A38AAE}"/>
-              </a:ext>
-            </a:extLst>
-          </p:cNvPr>
-          <p:cNvSpPr txBox="1">
-            <a:spLocks/>
-          </p:cNvSpPr>
-          <p:nvPr/>
-        </p:nvSpPr>
-        <p:spPr>
-          <a:xfrm>
-            <a:off x="475645" y="481983"/>
-            <a:ext cx="11076274" cy="766439"/>
-          </a:xfrm>
-          <a:prstGeom prst="rect">
-            <a:avLst/>
-          </a:prstGeom>
-        </p:spPr>
-        <p:txBody>
-          <a:bodyPr vert="horz" lIns="91440" tIns="45720" rIns="91440" bIns="45720" rtlCol="0" anchor="ctr">
-            <a:normAutofit/>
-          </a:bodyPr>
-          <a:lstStyle>
-            <a:lvl1pPr algn="ctr" defTabSz="914400" rtl="0" eaLnBrk="1" latinLnBrk="1" hangingPunct="1">
-              <a:lnSpc>
-                <a:spcPct val="90000"/>
-              </a:lnSpc>
-              <a:spcBef>
-                <a:spcPct val="0"/>
-              </a:spcBef>
-              <a:buNone/>
-              <a:defRPr sz="3200" kern="1200" cap="all" baseline="0">
-                <a:solidFill>
-                  <a:schemeClr val="tx1"/>
-                </a:solidFill>
-                <a:effectLst/>
-                <a:latin typeface="Batang" panose="02030600000101010101" pitchFamily="18" charset="-127"/>
-                <a:ea typeface="Batang" panose="02030600000101010101" pitchFamily="18" charset="-127"/>
-                <a:cs typeface="+mj-cs"/>
-              </a:defRPr>
-            </a:lvl1pPr>
-          </a:lstStyle>
-          <a:p>
-            <a:pPr algn="l"/>
-            <a:r>
-              <a:rPr lang="en-US" altLang="ko-KR" sz="2800" cap="none" dirty="0">
-                <a:solidFill>
-                  <a:schemeClr val="bg2">
-                    <a:lumMod val="25000"/>
-                  </a:schemeClr>
-                </a:solidFill>
-                <a:latin typeface="D2Coding" panose="020B0609020101020101" pitchFamily="49" charset="-127"/>
-                <a:ea typeface="D2Coding" panose="020B0609020101020101" pitchFamily="49" charset="-127"/>
-                <a:cs typeface="Segoe UI Light" panose="020B0502040204020203" pitchFamily="34" charset="0"/>
-              </a:rPr>
-              <a:t>Using a word embedding</a:t>
-            </a:r>
-          </a:p>
-        </p:txBody>
-      </p:sp>
-      <p:pic>
-        <p:nvPicPr>
-          <p:cNvPr id="3074" name="Picture 2">
-            <a:extLst>
-              <a:ext uri="{FF2B5EF4-FFF2-40B4-BE49-F238E27FC236}">
-                <a16:creationId xmlns:a16="http://schemas.microsoft.com/office/drawing/2014/main" id="{7F5011C3-1E6F-8149-2411-669657317B09}"/>
-              </a:ext>
-            </a:extLst>
-          </p:cNvPr>
-          <p:cNvPicPr>
-            <a:picLocks noChangeAspect="1" noChangeArrowheads="1"/>
-          </p:cNvPicPr>
-          <p:nvPr/>
-        </p:nvPicPr>
-        <p:blipFill>
-          <a:blip r:embed="rId2">
-            <a:extLst>
-              <a:ext uri="{28A0092B-C50C-407E-A947-70E740481C1C}">
-                <a14:useLocalDpi xmlns:a14="http://schemas.microsoft.com/office/drawing/2010/main" val="0"/>
-              </a:ext>
-            </a:extLst>
-          </a:blip>
-          <a:srcRect/>
-          <a:stretch>
-            <a:fillRect/>
-          </a:stretch>
-        </p:blipFill>
-        <p:spPr bwMode="auto">
-          <a:xfrm>
-            <a:off x="1223963" y="1990725"/>
-            <a:ext cx="9577387" cy="3158748"/>
-          </a:xfrm>
-          <a:prstGeom prst="rect">
-            <a:avLst/>
-          </a:prstGeom>
-          <a:noFill/>
-          <a:extLst>
-            <a:ext uri="{909E8E84-426E-40DD-AFC4-6F175D3DCCD1}">
-              <a14:hiddenFill xmlns:a14="http://schemas.microsoft.com/office/drawing/2010/main">
-                <a:solidFill>
-                  <a:srgbClr val="FFFFFF"/>
-                </a:solidFill>
-              </a14:hiddenFill>
-            </a:ext>
-          </a:extLst>
-        </p:spPr>
-      </p:pic>
-      <p:sp>
-        <p:nvSpPr>
-          <p:cNvPr id="4" name="TextBox 3">
-            <a:extLst>
-              <a:ext uri="{FF2B5EF4-FFF2-40B4-BE49-F238E27FC236}">
-                <a16:creationId xmlns:a16="http://schemas.microsoft.com/office/drawing/2014/main" id="{3CEB2046-CD8A-18BD-836A-71B0B6E07825}"/>
-              </a:ext>
-            </a:extLst>
-          </p:cNvPr>
-          <p:cNvSpPr txBox="1"/>
-          <p:nvPr/>
-        </p:nvSpPr>
-        <p:spPr>
-          <a:xfrm>
-            <a:off x="1152525" y="5245445"/>
-            <a:ext cx="9467850" cy="338554"/>
-          </a:xfrm>
-          <a:prstGeom prst="rect">
-            <a:avLst/>
-          </a:prstGeom>
-          <a:noFill/>
-        </p:spPr>
-        <p:txBody>
-          <a:bodyPr wrap="square">
-            <a:spAutoFit/>
-          </a:bodyPr>
-          <a:lstStyle/>
-          <a:p>
-            <a:r>
-              <a:rPr lang="en-US" altLang="ko-KR" sz="1600" b="0" i="0" dirty="0">
-                <a:effectLst/>
-                <a:latin typeface="D2Coding" panose="020B0609020101020101" pitchFamily="49" charset="-127"/>
-                <a:ea typeface="D2Coding" panose="020B0609020101020101" pitchFamily="49" charset="-127"/>
-              </a:rPr>
-              <a:t>An </a:t>
-            </a:r>
-            <a:r>
-              <a:rPr lang="en-US" altLang="ko-KR" sz="1600" b="0" i="0" dirty="0">
-                <a:solidFill>
-                  <a:srgbClr val="990055"/>
-                </a:solidFill>
-                <a:effectLst/>
-                <a:latin typeface="D2Coding" panose="020B0609020101020101" pitchFamily="49" charset="-127"/>
-                <a:ea typeface="D2Coding" panose="020B0609020101020101" pitchFamily="49" charset="-127"/>
-              </a:rPr>
-              <a:t>Embedding</a:t>
-            </a:r>
-            <a:r>
-              <a:rPr lang="en-US" altLang="ko-KR" sz="1600" b="0" i="0" dirty="0">
-                <a:effectLst/>
-                <a:latin typeface="D2Coding" panose="020B0609020101020101" pitchFamily="49" charset="-127"/>
-                <a:ea typeface="D2Coding" panose="020B0609020101020101" pitchFamily="49" charset="-127"/>
-              </a:rPr>
-              <a:t> layer acts as a dictionary mapping </a:t>
-            </a:r>
-            <a:r>
-              <a:rPr lang="en-US" altLang="ko-KR" sz="1600" b="0" i="0" dirty="0" err="1">
-                <a:effectLst/>
-                <a:latin typeface="D2Coding" panose="020B0609020101020101" pitchFamily="49" charset="-127"/>
-                <a:ea typeface="D2Coding" panose="020B0609020101020101" pitchFamily="49" charset="-127"/>
-              </a:rPr>
-              <a:t>ints</a:t>
-            </a:r>
-            <a:r>
-              <a:rPr lang="en-US" altLang="ko-KR" sz="1600" b="0" i="0" dirty="0">
-                <a:effectLst/>
-                <a:latin typeface="D2Coding" panose="020B0609020101020101" pitchFamily="49" charset="-127"/>
-                <a:ea typeface="D2Coding" panose="020B0609020101020101" pitchFamily="49" charset="-127"/>
-              </a:rPr>
-              <a:t> to floating point vectors.</a:t>
-            </a:r>
-            <a:endParaRPr lang="ko-KR" altLang="en-US" sz="1600" dirty="0">
-              <a:latin typeface="D2Coding" panose="020B0609020101020101" pitchFamily="49" charset="-127"/>
-              <a:ea typeface="D2Coding" panose="020B0609020101020101" pitchFamily="49" charset="-127"/>
-            </a:endParaRPr>
-          </a:p>
-        </p:txBody>
-      </p:sp>
-      <p:sp>
-        <p:nvSpPr>
-          <p:cNvPr id="6" name="슬라이드 번호 개체 틀 3">
-            <a:extLst>
-              <a:ext uri="{FF2B5EF4-FFF2-40B4-BE49-F238E27FC236}">
-                <a16:creationId xmlns:a16="http://schemas.microsoft.com/office/drawing/2014/main" id="{F333B767-49D8-C742-A6E3-BC33943A14EE}"/>
-              </a:ext>
-            </a:extLst>
-          </p:cNvPr>
-          <p:cNvSpPr txBox="1">
-            <a:spLocks/>
-          </p:cNvSpPr>
-          <p:nvPr/>
-        </p:nvSpPr>
-        <p:spPr>
-          <a:xfrm>
-            <a:off x="11162487" y="299420"/>
-            <a:ext cx="753545" cy="365125"/>
-          </a:xfrm>
-          <a:prstGeom prst="rect">
-            <a:avLst/>
-          </a:prstGeom>
-        </p:spPr>
-        <p:txBody>
-          <a:bodyPr vert="horz" lIns="91440" tIns="45720" rIns="91440" bIns="45720" rtlCol="0" anchor="ctr"/>
-          <a:lstStyle>
-            <a:defPPr rtl="0">
-              <a:defRPr lang="ko-KR"/>
-            </a:defPPr>
-            <a:lvl1pPr marL="0" algn="r" defTabSz="914400" rtl="0" eaLnBrk="1" latinLnBrk="0" hangingPunct="1">
-              <a:defRPr sz="1200" kern="1200" baseline="0">
-                <a:solidFill>
-                  <a:schemeClr val="tx1">
-                    <a:lumMod val="65000"/>
-                    <a:lumOff val="35000"/>
-                  </a:schemeClr>
-                </a:solidFill>
-                <a:latin typeface="맑은 고딕" panose="020B0503020000020004" pitchFamily="50" charset="-127"/>
-                <a:ea typeface="맑은 고딕" panose="020B0503020000020004" pitchFamily="50" charset="-127"/>
-                <a:cs typeface="+mn-cs"/>
-              </a:defRPr>
-            </a:lvl1pPr>
-            <a:lvl2pPr marL="457200" algn="l" defTabSz="914400" rtl="0" eaLnBrk="1" latinLnBrk="0" hangingPunct="1">
-              <a:defRPr sz="1800" kern="1200">
-                <a:solidFill>
-                  <a:schemeClr val="tx1"/>
-                </a:solidFill>
-                <a:latin typeface="+mn-lt"/>
-                <a:ea typeface="+mn-ea"/>
-                <a:cs typeface="+mn-cs"/>
-              </a:defRPr>
-            </a:lvl2pPr>
-            <a:lvl3pPr marL="914400" algn="l" defTabSz="914400" rtl="0" eaLnBrk="1" latinLnBrk="0" hangingPunct="1">
-              <a:defRPr sz="1800" kern="1200">
-                <a:solidFill>
-                  <a:schemeClr val="tx1"/>
-                </a:solidFill>
-                <a:latin typeface="+mn-lt"/>
-                <a:ea typeface="+mn-ea"/>
-                <a:cs typeface="+mn-cs"/>
-              </a:defRPr>
-            </a:lvl3pPr>
-            <a:lvl4pPr marL="1371600" algn="l" defTabSz="914400" rtl="0" eaLnBrk="1" latinLnBrk="0" hangingPunct="1">
-              <a:defRPr sz="1800" kern="1200">
-                <a:solidFill>
-                  <a:schemeClr val="tx1"/>
-                </a:solidFill>
-                <a:latin typeface="+mn-lt"/>
-                <a:ea typeface="+mn-ea"/>
-                <a:cs typeface="+mn-cs"/>
-              </a:defRPr>
-            </a:lvl4pPr>
-            <a:lvl5pPr marL="1828800" algn="l" defTabSz="914400" rtl="0" eaLnBrk="1" latinLnBrk="0" hangingPunct="1">
-              <a:defRPr sz="1800" kern="1200">
-                <a:solidFill>
-                  <a:schemeClr val="tx1"/>
-                </a:solidFill>
-                <a:latin typeface="+mn-lt"/>
-                <a:ea typeface="+mn-ea"/>
-                <a:cs typeface="+mn-cs"/>
-              </a:defRPr>
-            </a:lvl5pPr>
-            <a:lvl6pPr marL="2286000" algn="l" defTabSz="914400" rtl="0" eaLnBrk="1" latinLnBrk="0" hangingPunct="1">
-              <a:defRPr sz="1800" kern="1200">
-                <a:solidFill>
-                  <a:schemeClr val="tx1"/>
-                </a:solidFill>
-                <a:latin typeface="+mn-lt"/>
-                <a:ea typeface="+mn-ea"/>
-                <a:cs typeface="+mn-cs"/>
-              </a:defRPr>
-            </a:lvl6pPr>
-            <a:lvl7pPr marL="2743200" algn="l" defTabSz="914400" rtl="0" eaLnBrk="1" latinLnBrk="0" hangingPunct="1">
-              <a:defRPr sz="1800" kern="1200">
-                <a:solidFill>
-                  <a:schemeClr val="tx1"/>
-                </a:solidFill>
-                <a:latin typeface="+mn-lt"/>
-                <a:ea typeface="+mn-ea"/>
-                <a:cs typeface="+mn-cs"/>
-              </a:defRPr>
-            </a:lvl7pPr>
-            <a:lvl8pPr marL="3200400" algn="l" defTabSz="914400" rtl="0" eaLnBrk="1" latinLnBrk="0" hangingPunct="1">
-              <a:defRPr sz="1800" kern="1200">
-                <a:solidFill>
-                  <a:schemeClr val="tx1"/>
-                </a:solidFill>
-                <a:latin typeface="+mn-lt"/>
-                <a:ea typeface="+mn-ea"/>
-                <a:cs typeface="+mn-cs"/>
-              </a:defRPr>
-            </a:lvl8pPr>
-            <a:lvl9pPr marL="3657600" algn="l" defTabSz="914400" rtl="0" eaLnBrk="1" latinLnBrk="0" hangingPunct="1">
-              <a:defRPr sz="1800" kern="1200">
-                <a:solidFill>
-                  <a:schemeClr val="tx1"/>
-                </a:solidFill>
-                <a:latin typeface="+mn-lt"/>
-                <a:ea typeface="+mn-ea"/>
-                <a:cs typeface="+mn-cs"/>
-              </a:defRPr>
-            </a:lvl9pPr>
-          </a:lstStyle>
-          <a:p>
-            <a:fld id="{D57F1E4F-1CFF-5643-939E-217C01CDF565}" type="slidenum">
-              <a:rPr lang="en-US" sz="1400" b="1" smtClean="0">
-                <a:latin typeface="Times New Roman" panose="02020603050405020304" pitchFamily="18" charset="0"/>
-                <a:ea typeface="Verdana" panose="020B0604030504040204" pitchFamily="34" charset="0"/>
-                <a:cs typeface="Times New Roman" panose="02020603050405020304" pitchFamily="18" charset="0"/>
-              </a:rPr>
-              <a:pPr/>
-              <a:t>19</a:t>
-            </a:fld>
-            <a:endParaRPr lang="en-US" sz="1400" b="1" dirty="0">
-              <a:latin typeface="Times New Roman" panose="02020603050405020304" pitchFamily="18" charset="0"/>
-              <a:ea typeface="Verdana" panose="020B0604030504040204" pitchFamily="34" charset="0"/>
-              <a:cs typeface="Times New Roman" panose="02020603050405020304" pitchFamily="18" charset="0"/>
-            </a:endParaRPr>
-          </a:p>
-        </p:txBody>
-      </p:sp>
-    </p:spTree>
-    <p:extLst>
-      <p:ext uri="{BB962C8B-B14F-4D97-AF65-F5344CB8AC3E}">
-        <p14:creationId xmlns:p14="http://schemas.microsoft.com/office/powerpoint/2010/main" val="1160981635"/>
-      </p:ext>
-    </p:extLst>
-  </p:cSld>
-  <p:clrMapOvr>
-    <a:masterClrMapping/>
-  </p:clrMapOvr>
-</p:sld>
-</file>
-
-<file path=ppt/slides/slide2.xml><?xml version="1.0" encoding="utf-8"?>
-<p:sld xmlns:a="http://schemas.openxmlformats.org/drawingml/2006/main" xmlns:r="http://schemas.openxmlformats.org/officeDocument/2006/relationships" xmlns:p="http://schemas.openxmlformats.org/presentationml/2006/main">
-  <p:cSld>
-    <p:spTree>
-      <p:nvGrpSpPr>
-        <p:cNvPr id="1" name="">
-          <a:extLst>
-            <a:ext uri="{FF2B5EF4-FFF2-40B4-BE49-F238E27FC236}">
-              <a16:creationId xmlns:a16="http://schemas.microsoft.com/office/drawing/2014/main" id="{1FF720D6-5AE6-3C71-71A9-7178299E6F89}"/>
-            </a:ext>
-          </a:extLst>
-        </p:cNvPr>
-        <p:cNvGrpSpPr/>
-        <p:nvPr/>
-      </p:nvGrpSpPr>
-      <p:grpSpPr>
-        <a:xfrm>
-          <a:off x="0" y="0"/>
-          <a:ext cx="0" cy="0"/>
-          <a:chOff x="0" y="0"/>
-          <a:chExt cx="0" cy="0"/>
-        </a:xfrm>
-      </p:grpSpPr>
-      <p:sp>
-        <p:nvSpPr>
-          <p:cNvPr id="4" name="슬라이드 번호 개체 틀 3">
-            <a:extLst>
-              <a:ext uri="{FF2B5EF4-FFF2-40B4-BE49-F238E27FC236}">
-                <a16:creationId xmlns:a16="http://schemas.microsoft.com/office/drawing/2014/main" id="{9BA99687-4C48-8DA7-5F76-6B7712A597D4}"/>
-              </a:ext>
-            </a:extLst>
-          </p:cNvPr>
-          <p:cNvSpPr>
-            <a:spLocks noGrp="1"/>
-          </p:cNvSpPr>
-          <p:nvPr>
-            <p:ph type="sldNum" sz="quarter" idx="12"/>
-          </p:nvPr>
-        </p:nvSpPr>
-        <p:spPr>
-          <a:xfrm>
-            <a:off x="10514011" y="6036261"/>
-            <a:ext cx="753545" cy="365125"/>
-          </a:xfrm>
-        </p:spPr>
-        <p:txBody>
-          <a:bodyPr/>
-          <a:lstStyle/>
-          <a:p>
-            <a:fld id="{D57F1E4F-1CFF-5643-939E-217C01CDF565}" type="slidenum">
-              <a:rPr lang="en-US" smtClean="0"/>
-              <a:pPr/>
-              <a:t>2</a:t>
-            </a:fld>
-            <a:endParaRPr lang="en-US" dirty="0"/>
-          </a:p>
-        </p:txBody>
-      </p:sp>
-      <p:sp>
-        <p:nvSpPr>
-          <p:cNvPr id="3" name="제목 1">
-            <a:extLst>
-              <a:ext uri="{FF2B5EF4-FFF2-40B4-BE49-F238E27FC236}">
-                <a16:creationId xmlns:a16="http://schemas.microsoft.com/office/drawing/2014/main" id="{FD810985-A788-B5F8-19D5-7D75D19399E4}"/>
-              </a:ext>
-            </a:extLst>
-          </p:cNvPr>
-          <p:cNvSpPr txBox="1">
-            <a:spLocks/>
-          </p:cNvSpPr>
-          <p:nvPr/>
-        </p:nvSpPr>
-        <p:spPr>
-          <a:xfrm>
-            <a:off x="475645" y="481983"/>
-            <a:ext cx="10353762" cy="766439"/>
-          </a:xfrm>
-          <a:prstGeom prst="rect">
-            <a:avLst/>
-          </a:prstGeom>
-        </p:spPr>
-        <p:txBody>
-          <a:bodyPr vert="horz" lIns="91440" tIns="45720" rIns="91440" bIns="45720" rtlCol="0" anchor="ctr">
-            <a:normAutofit/>
-          </a:bodyPr>
-          <a:lstStyle>
-            <a:lvl1pPr algn="ctr" defTabSz="914400" rtl="0" eaLnBrk="1" latinLnBrk="1" hangingPunct="1">
-              <a:lnSpc>
-                <a:spcPct val="90000"/>
-              </a:lnSpc>
-              <a:spcBef>
-                <a:spcPct val="0"/>
-              </a:spcBef>
-              <a:buNone/>
-              <a:defRPr sz="3200" kern="1200" cap="all" baseline="0">
-                <a:solidFill>
-                  <a:schemeClr val="tx1"/>
-                </a:solidFill>
-                <a:effectLst/>
-                <a:latin typeface="Batang" panose="02030600000101010101" pitchFamily="18" charset="-127"/>
-                <a:ea typeface="Batang" panose="02030600000101010101" pitchFamily="18" charset="-127"/>
-                <a:cs typeface="+mj-cs"/>
-              </a:defRPr>
-            </a:lvl1pPr>
-          </a:lstStyle>
-          <a:p>
-            <a:pPr algn="l"/>
-            <a:r>
-              <a:rPr lang="en-US" altLang="ko-KR" sz="2800" cap="none" dirty="0">
-                <a:solidFill>
-                  <a:schemeClr val="bg2">
-                    <a:lumMod val="25000"/>
-                  </a:schemeClr>
-                </a:solidFill>
-                <a:latin typeface="D2Coding" panose="020B0609020101020101" pitchFamily="49" charset="-127"/>
-                <a:ea typeface="D2Coding" panose="020B0609020101020101" pitchFamily="49" charset="-127"/>
-                <a:cs typeface="Segoe UI Light" panose="020B0502040204020203" pitchFamily="34" charset="0"/>
-              </a:rPr>
-              <a:t>Goals</a:t>
-            </a:r>
-            <a:endParaRPr lang="ko-KR" altLang="en-US" sz="2800" cap="none" dirty="0">
-              <a:solidFill>
-                <a:schemeClr val="bg2">
-                  <a:lumMod val="25000"/>
-                </a:schemeClr>
-              </a:solidFill>
-              <a:latin typeface="D2Coding" panose="020B0609020101020101" pitchFamily="49" charset="-127"/>
-              <a:ea typeface="D2Coding" panose="020B0609020101020101" pitchFamily="49" charset="-127"/>
-              <a:cs typeface="Segoe UI Light" panose="020B0502040204020203" pitchFamily="34" charset="0"/>
-            </a:endParaRPr>
-          </a:p>
-        </p:txBody>
-      </p:sp>
-      <p:sp>
-        <p:nvSpPr>
-          <p:cNvPr id="5" name="TextBox 4">
-            <a:extLst>
-              <a:ext uri="{FF2B5EF4-FFF2-40B4-BE49-F238E27FC236}">
-                <a16:creationId xmlns:a16="http://schemas.microsoft.com/office/drawing/2014/main" id="{3EAAB68B-A2BA-07A3-DB75-5B56921FF4A0}"/>
-              </a:ext>
-            </a:extLst>
-          </p:cNvPr>
-          <p:cNvSpPr txBox="1"/>
-          <p:nvPr/>
-        </p:nvSpPr>
-        <p:spPr>
-          <a:xfrm>
-            <a:off x="526588" y="1905647"/>
-            <a:ext cx="11138824" cy="1853264"/>
-          </a:xfrm>
-          <a:prstGeom prst="rect">
-            <a:avLst/>
-          </a:prstGeom>
-          <a:noFill/>
-        </p:spPr>
-        <p:txBody>
-          <a:bodyPr wrap="square">
-            <a:spAutoFit/>
-          </a:bodyPr>
-          <a:lstStyle/>
-          <a:p>
-            <a:pPr marL="800100" lvl="1" indent="-342900">
-              <a:lnSpc>
-                <a:spcPct val="200000"/>
-              </a:lnSpc>
-              <a:buFont typeface="Wingdings" panose="05000000000000000000" pitchFamily="2" charset="2"/>
-              <a:buChar char="v"/>
-            </a:pPr>
-            <a:r>
-              <a:rPr lang="en-US" altLang="ko-KR" sz="2000" dirty="0">
-                <a:latin typeface="D2Coding" panose="020B0609020101020101" pitchFamily="49" charset="-127"/>
-                <a:ea typeface="D2Coding" panose="020B0609020101020101" pitchFamily="49" charset="-127"/>
-              </a:rPr>
-              <a:t>An introduction to the field of natural language processing (NLP)</a:t>
-            </a:r>
-          </a:p>
-          <a:p>
-            <a:pPr marL="800100" lvl="1" indent="-342900">
-              <a:lnSpc>
-                <a:spcPct val="200000"/>
-              </a:lnSpc>
-              <a:buFont typeface="Wingdings" panose="05000000000000000000" pitchFamily="2" charset="2"/>
-              <a:buChar char="v"/>
-            </a:pPr>
-            <a:r>
-              <a:rPr lang="en-US" altLang="ko-KR" sz="2000" dirty="0">
-                <a:latin typeface="D2Coding" panose="020B0609020101020101" pitchFamily="49" charset="-127"/>
-                <a:ea typeface="D2Coding" panose="020B0609020101020101" pitchFamily="49" charset="-127"/>
-              </a:rPr>
-              <a:t>Preprocessing text input into numeric input</a:t>
-            </a:r>
-          </a:p>
-          <a:p>
-            <a:pPr marL="800100" lvl="1" indent="-342900">
-              <a:lnSpc>
-                <a:spcPct val="200000"/>
-              </a:lnSpc>
-              <a:buFont typeface="Wingdings" panose="05000000000000000000" pitchFamily="2" charset="2"/>
-              <a:buChar char="v"/>
-            </a:pPr>
-            <a:r>
-              <a:rPr lang="en-US" altLang="ko-KR" sz="2000" dirty="0">
-                <a:latin typeface="D2Coding" panose="020B0609020101020101" pitchFamily="49" charset="-127"/>
-                <a:ea typeface="D2Coding" panose="020B0609020101020101" pitchFamily="49" charset="-127"/>
-              </a:rPr>
-              <a:t>Building simple text classification models</a:t>
-            </a:r>
-          </a:p>
-        </p:txBody>
-      </p:sp>
-    </p:spTree>
-    <p:extLst>
-      <p:ext uri="{BB962C8B-B14F-4D97-AF65-F5344CB8AC3E}">
-        <p14:creationId xmlns:p14="http://schemas.microsoft.com/office/powerpoint/2010/main" val="578434090"/>
-      </p:ext>
-    </p:extLst>
-  </p:cSld>
-  <p:clrMapOvr>
-    <a:masterClrMapping/>
-  </p:clrMapOvr>
-</p:sld>
-</file>
-
-<file path=ppt/slides/slide20.xml><?xml version="1.0" encoding="utf-8"?>
-<p:sld xmlns:a="http://schemas.openxmlformats.org/drawingml/2006/main" xmlns:r="http://schemas.openxmlformats.org/officeDocument/2006/relationships" xmlns:p="http://schemas.openxmlformats.org/presentationml/2006/main">
-  <p:cSld>
-    <p:spTree>
-      <p:nvGrpSpPr>
-        <p:cNvPr id="1" name="">
-          <a:extLst>
-            <a:ext uri="{FF2B5EF4-FFF2-40B4-BE49-F238E27FC236}">
-              <a16:creationId xmlns:a16="http://schemas.microsoft.com/office/drawing/2014/main" id="{73E890B5-04FF-286C-8FB9-B7246B7A8470}"/>
-            </a:ext>
-          </a:extLst>
-        </p:cNvPr>
-        <p:cNvGrpSpPr/>
-        <p:nvPr/>
-      </p:nvGrpSpPr>
-      <p:grpSpPr>
-        <a:xfrm>
-          <a:off x="0" y="0"/>
-          <a:ext cx="0" cy="0"/>
-          <a:chOff x="0" y="0"/>
-          <a:chExt cx="0" cy="0"/>
-        </a:xfrm>
-      </p:grpSpPr>
-      <p:sp>
-        <p:nvSpPr>
-          <p:cNvPr id="3" name="제목 1">
-            <a:extLst>
-              <a:ext uri="{FF2B5EF4-FFF2-40B4-BE49-F238E27FC236}">
-                <a16:creationId xmlns:a16="http://schemas.microsoft.com/office/drawing/2014/main" id="{62039274-757B-323D-5A99-F47967AFFAF8}"/>
-              </a:ext>
-            </a:extLst>
-          </p:cNvPr>
-          <p:cNvSpPr txBox="1">
-            <a:spLocks/>
-          </p:cNvSpPr>
-          <p:nvPr/>
-        </p:nvSpPr>
-        <p:spPr>
-          <a:xfrm>
-            <a:off x="475645" y="481983"/>
-            <a:ext cx="11076274" cy="766439"/>
-          </a:xfrm>
-          <a:prstGeom prst="rect">
-            <a:avLst/>
-          </a:prstGeom>
-        </p:spPr>
-        <p:txBody>
-          <a:bodyPr vert="horz" lIns="91440" tIns="45720" rIns="91440" bIns="45720" rtlCol="0" anchor="ctr">
-            <a:normAutofit/>
-          </a:bodyPr>
-          <a:lstStyle>
-            <a:lvl1pPr algn="ctr" defTabSz="914400" rtl="0" eaLnBrk="1" latinLnBrk="1" hangingPunct="1">
-              <a:lnSpc>
-                <a:spcPct val="90000"/>
-              </a:lnSpc>
-              <a:spcBef>
-                <a:spcPct val="0"/>
-              </a:spcBef>
-              <a:buNone/>
-              <a:defRPr sz="3200" kern="1200" cap="all" baseline="0">
-                <a:solidFill>
-                  <a:schemeClr val="tx1"/>
-                </a:solidFill>
-                <a:effectLst/>
-                <a:latin typeface="Batang" panose="02030600000101010101" pitchFamily="18" charset="-127"/>
-                <a:ea typeface="Batang" panose="02030600000101010101" pitchFamily="18" charset="-127"/>
-                <a:cs typeface="+mj-cs"/>
-              </a:defRPr>
-            </a:lvl1pPr>
-          </a:lstStyle>
-          <a:p>
-            <a:pPr algn="l"/>
-            <a:r>
-              <a:rPr lang="en-US" altLang="ko-KR" sz="2800" cap="none" dirty="0">
-                <a:solidFill>
-                  <a:schemeClr val="bg2">
-                    <a:lumMod val="25000"/>
-                  </a:schemeClr>
-                </a:solidFill>
-                <a:latin typeface="D2Coding" panose="020B0609020101020101" pitchFamily="49" charset="-127"/>
-                <a:ea typeface="D2Coding" panose="020B0609020101020101" pitchFamily="49" charset="-127"/>
-                <a:cs typeface="Segoe UI Light" panose="020B0502040204020203" pitchFamily="34" charset="0"/>
-              </a:rPr>
-              <a:t>Understanding word embeddings</a:t>
-            </a:r>
-          </a:p>
-        </p:txBody>
-      </p:sp>
-      <p:pic>
-        <p:nvPicPr>
-          <p:cNvPr id="13314" name="Picture 2">
-            <a:extLst>
-              <a:ext uri="{FF2B5EF4-FFF2-40B4-BE49-F238E27FC236}">
-                <a16:creationId xmlns:a16="http://schemas.microsoft.com/office/drawing/2014/main" id="{1EC78B33-0570-791A-C3C2-F37E7B6145BC}"/>
-              </a:ext>
-            </a:extLst>
-          </p:cNvPr>
-          <p:cNvPicPr>
-            <a:picLocks noChangeAspect="1" noChangeArrowheads="1"/>
-          </p:cNvPicPr>
-          <p:nvPr/>
-        </p:nvPicPr>
-        <p:blipFill>
-          <a:blip r:embed="rId2">
-            <a:extLst>
-              <a:ext uri="{28A0092B-C50C-407E-A947-70E740481C1C}">
-                <a14:useLocalDpi xmlns:a14="http://schemas.microsoft.com/office/drawing/2010/main" val="0"/>
-              </a:ext>
-            </a:extLst>
-          </a:blip>
-          <a:srcRect/>
-          <a:stretch>
-            <a:fillRect/>
-          </a:stretch>
-        </p:blipFill>
-        <p:spPr bwMode="auto">
-          <a:xfrm>
-            <a:off x="1209040" y="3549720"/>
-            <a:ext cx="10196284" cy="1916360"/>
-          </a:xfrm>
-          <a:prstGeom prst="rect">
-            <a:avLst/>
-          </a:prstGeom>
-          <a:noFill/>
-          <a:extLst>
-            <a:ext uri="{909E8E84-426E-40DD-AFC4-6F175D3DCCD1}">
-              <a14:hiddenFill xmlns:a14="http://schemas.microsoft.com/office/drawing/2010/main">
-                <a:solidFill>
-                  <a:srgbClr val="FFFFFF"/>
-                </a:solidFill>
-              </a14:hiddenFill>
-            </a:ext>
-          </a:extLst>
-        </p:spPr>
-      </p:pic>
-      <p:sp>
-        <p:nvSpPr>
-          <p:cNvPr id="11" name="TextBox 10">
-            <a:extLst>
-              <a:ext uri="{FF2B5EF4-FFF2-40B4-BE49-F238E27FC236}">
-                <a16:creationId xmlns:a16="http://schemas.microsoft.com/office/drawing/2014/main" id="{B256FF4A-0A59-8AD1-49D2-5C71C23AD6A0}"/>
-              </a:ext>
-            </a:extLst>
-          </p:cNvPr>
-          <p:cNvSpPr txBox="1"/>
-          <p:nvPr/>
-        </p:nvSpPr>
-        <p:spPr>
-          <a:xfrm>
-            <a:off x="536605" y="1248422"/>
-            <a:ext cx="10891520" cy="2059859"/>
-          </a:xfrm>
-          <a:prstGeom prst="rect">
-            <a:avLst/>
-          </a:prstGeom>
-          <a:noFill/>
-        </p:spPr>
-        <p:txBody>
-          <a:bodyPr wrap="square">
-            <a:spAutoFit/>
-          </a:bodyPr>
-          <a:lstStyle/>
-          <a:p>
-            <a:pPr marL="285750" indent="-285750">
-              <a:buFont typeface="Wingdings" panose="05000000000000000000" pitchFamily="2" charset="2"/>
-              <a:buChar char="§"/>
-            </a:pPr>
-            <a:endParaRPr lang="en-US" altLang="ko-KR" sz="1400" dirty="0">
-              <a:latin typeface="D2Coding" panose="020B0609020101020101" pitchFamily="49" charset="-127"/>
-              <a:ea typeface="D2Coding" panose="020B0609020101020101" pitchFamily="49" charset="-127"/>
-            </a:endParaRPr>
-          </a:p>
-          <a:p>
-            <a:r>
-              <a:rPr lang="ko-KR" altLang="en-US" dirty="0">
-                <a:latin typeface="D2Coding" panose="020B0609020101020101" pitchFamily="49" charset="-127"/>
-                <a:ea typeface="D2Coding" panose="020B0609020101020101" pitchFamily="49" charset="-127"/>
-              </a:rPr>
-              <a:t>단어가 가진 </a:t>
-            </a:r>
-            <a:r>
-              <a:rPr lang="en-US" altLang="ko-KR" dirty="0">
-                <a:latin typeface="D2Coding" panose="020B0609020101020101" pitchFamily="49" charset="-127"/>
-                <a:ea typeface="D2Coding" panose="020B0609020101020101" pitchFamily="49" charset="-127"/>
-              </a:rPr>
-              <a:t>'</a:t>
-            </a:r>
-            <a:r>
-              <a:rPr lang="ko-KR" altLang="en-US" dirty="0">
-                <a:latin typeface="D2Coding" panose="020B0609020101020101" pitchFamily="49" charset="-127"/>
-                <a:ea typeface="D2Coding" panose="020B0609020101020101" pitchFamily="49" charset="-127"/>
-              </a:rPr>
-              <a:t>잠재적 특징</a:t>
-            </a:r>
-            <a:r>
-              <a:rPr lang="en-US" altLang="ko-KR" dirty="0">
-                <a:latin typeface="D2Coding" panose="020B0609020101020101" pitchFamily="49" charset="-127"/>
-                <a:ea typeface="D2Coding" panose="020B0609020101020101" pitchFamily="49" charset="-127"/>
-              </a:rPr>
-              <a:t>(Latent Features)'</a:t>
-            </a:r>
-            <a:r>
-              <a:rPr lang="ko-KR" altLang="en-US" dirty="0">
-                <a:latin typeface="D2Coding" panose="020B0609020101020101" pitchFamily="49" charset="-127"/>
-                <a:ea typeface="D2Coding" panose="020B0609020101020101" pitchFamily="49" charset="-127"/>
-              </a:rPr>
-              <a:t>의 개수</a:t>
-            </a:r>
-            <a:endParaRPr lang="en-US" altLang="ko-KR" dirty="0">
-              <a:latin typeface="D2Coding" panose="020B0609020101020101" pitchFamily="49" charset="-127"/>
-              <a:ea typeface="D2Coding" panose="020B0609020101020101" pitchFamily="49" charset="-127"/>
-            </a:endParaRPr>
-          </a:p>
-          <a:p>
-            <a:pPr marL="285750" indent="-285750">
-              <a:buFont typeface="Wingdings" panose="05000000000000000000" pitchFamily="2" charset="2"/>
-              <a:buChar char="§"/>
-            </a:pPr>
-            <a:endParaRPr lang="en-US" altLang="ko-KR" sz="1400" dirty="0">
-              <a:latin typeface="D2Coding" panose="020B0609020101020101" pitchFamily="49" charset="-127"/>
-              <a:ea typeface="D2Coding" panose="020B0609020101020101" pitchFamily="49" charset="-127"/>
-            </a:endParaRPr>
-          </a:p>
-          <a:p>
-            <a:pPr marL="742950" lvl="1" indent="-285750">
-              <a:lnSpc>
-                <a:spcPct val="150000"/>
-              </a:lnSpc>
-              <a:buFont typeface="Wingdings" panose="05000000000000000000" pitchFamily="2" charset="2"/>
-              <a:buChar char="§"/>
-            </a:pPr>
-            <a:r>
-              <a:rPr lang="ko-KR" altLang="en-US" sz="1400" dirty="0">
-                <a:latin typeface="D2Coding" panose="020B0609020101020101" pitchFamily="49" charset="-127"/>
-                <a:ea typeface="D2Coding" panose="020B0609020101020101" pitchFamily="49" charset="-127"/>
-              </a:rPr>
-              <a:t>1번 차원: 단어가 '</a:t>
-            </a:r>
-            <a:r>
-              <a:rPr lang="ko-KR" altLang="en-US" sz="1400" dirty="0" err="1">
-                <a:latin typeface="D2Coding" panose="020B0609020101020101" pitchFamily="49" charset="-127"/>
-                <a:ea typeface="D2Coding" panose="020B0609020101020101" pitchFamily="49" charset="-127"/>
-              </a:rPr>
-              <a:t>인간'에</a:t>
-            </a:r>
-            <a:r>
-              <a:rPr lang="ko-KR" altLang="en-US" sz="1400" dirty="0">
-                <a:latin typeface="D2Coding" panose="020B0609020101020101" pitchFamily="49" charset="-127"/>
-                <a:ea typeface="D2Coding" panose="020B0609020101020101" pitchFamily="49" charset="-127"/>
-              </a:rPr>
-              <a:t> 가까운가? (예: </a:t>
-            </a:r>
-            <a:r>
-              <a:rPr lang="ko-KR" altLang="en-US" sz="1400" dirty="0" err="1">
-                <a:latin typeface="D2Coding" panose="020B0609020101020101" pitchFamily="49" charset="-127"/>
-                <a:ea typeface="D2Coding" panose="020B0609020101020101" pitchFamily="49" charset="-127"/>
-              </a:rPr>
-              <a:t>King은</a:t>
-            </a:r>
-            <a:r>
-              <a:rPr lang="ko-KR" altLang="en-US" sz="1400" dirty="0">
-                <a:latin typeface="D2Coding" panose="020B0609020101020101" pitchFamily="49" charset="-127"/>
-                <a:ea typeface="D2Coding" panose="020B0609020101020101" pitchFamily="49" charset="-127"/>
-              </a:rPr>
-              <a:t> 높은 값, Apple은 낮은 값)</a:t>
-            </a:r>
-          </a:p>
-          <a:p>
-            <a:pPr marL="742950" lvl="1" indent="-285750">
-              <a:lnSpc>
-                <a:spcPct val="150000"/>
-              </a:lnSpc>
-              <a:buFont typeface="Wingdings" panose="05000000000000000000" pitchFamily="2" charset="2"/>
-              <a:buChar char="§"/>
-            </a:pPr>
-            <a:r>
-              <a:rPr lang="ko-KR" altLang="en-US" sz="1400" dirty="0">
-                <a:latin typeface="D2Coding" panose="020B0609020101020101" pitchFamily="49" charset="-127"/>
-                <a:ea typeface="D2Coding" panose="020B0609020101020101" pitchFamily="49" charset="-127"/>
-              </a:rPr>
-              <a:t>2번 차원: 단어가 '</a:t>
-            </a:r>
-            <a:r>
-              <a:rPr lang="ko-KR" altLang="en-US" sz="1400" dirty="0" err="1">
-                <a:latin typeface="D2Coding" panose="020B0609020101020101" pitchFamily="49" charset="-127"/>
-                <a:ea typeface="D2Coding" panose="020B0609020101020101" pitchFamily="49" charset="-127"/>
-              </a:rPr>
-              <a:t>여성성'을</a:t>
-            </a:r>
-            <a:r>
-              <a:rPr lang="ko-KR" altLang="en-US" sz="1400" dirty="0">
-                <a:latin typeface="D2Coding" panose="020B0609020101020101" pitchFamily="49" charset="-127"/>
-                <a:ea typeface="D2Coding" panose="020B0609020101020101" pitchFamily="49" charset="-127"/>
-              </a:rPr>
-              <a:t> 띠는가? (예: </a:t>
-            </a:r>
-            <a:r>
-              <a:rPr lang="ko-KR" altLang="en-US" sz="1400" dirty="0" err="1">
-                <a:latin typeface="D2Coding" panose="020B0609020101020101" pitchFamily="49" charset="-127"/>
-                <a:ea typeface="D2Coding" panose="020B0609020101020101" pitchFamily="49" charset="-127"/>
-              </a:rPr>
-              <a:t>Queen은</a:t>
-            </a:r>
-            <a:r>
-              <a:rPr lang="ko-KR" altLang="en-US" sz="1400" dirty="0">
-                <a:latin typeface="D2Coding" panose="020B0609020101020101" pitchFamily="49" charset="-127"/>
-                <a:ea typeface="D2Coding" panose="020B0609020101020101" pitchFamily="49" charset="-127"/>
-              </a:rPr>
-              <a:t> 높은 값, </a:t>
-            </a:r>
-            <a:r>
-              <a:rPr lang="ko-KR" altLang="en-US" sz="1400" dirty="0" err="1">
-                <a:latin typeface="D2Coding" panose="020B0609020101020101" pitchFamily="49" charset="-127"/>
-                <a:ea typeface="D2Coding" panose="020B0609020101020101" pitchFamily="49" charset="-127"/>
-              </a:rPr>
-              <a:t>King은</a:t>
-            </a:r>
-            <a:r>
-              <a:rPr lang="ko-KR" altLang="en-US" sz="1400" dirty="0">
-                <a:latin typeface="D2Coding" panose="020B0609020101020101" pitchFamily="49" charset="-127"/>
-                <a:ea typeface="D2Coding" panose="020B0609020101020101" pitchFamily="49" charset="-127"/>
-              </a:rPr>
-              <a:t> 낮은 값)</a:t>
-            </a:r>
-          </a:p>
-          <a:p>
-            <a:pPr marL="742950" lvl="1" indent="-285750">
-              <a:lnSpc>
-                <a:spcPct val="150000"/>
-              </a:lnSpc>
-              <a:buFont typeface="Wingdings" panose="05000000000000000000" pitchFamily="2" charset="2"/>
-              <a:buChar char="§"/>
-            </a:pPr>
-            <a:r>
-              <a:rPr lang="ko-KR" altLang="en-US" sz="1400" dirty="0">
-                <a:latin typeface="D2Coding" panose="020B0609020101020101" pitchFamily="49" charset="-127"/>
-                <a:ea typeface="D2Coding" panose="020B0609020101020101" pitchFamily="49" charset="-127"/>
-              </a:rPr>
-              <a:t>3번 차원: 단어가 '시간(과거/현재)'과 관련이 있는가?</a:t>
-            </a:r>
-          </a:p>
-          <a:p>
-            <a:pPr marL="742950" lvl="1" indent="-285750">
-              <a:lnSpc>
-                <a:spcPct val="150000"/>
-              </a:lnSpc>
-              <a:buFont typeface="Wingdings" panose="05000000000000000000" pitchFamily="2" charset="2"/>
-              <a:buChar char="§"/>
-            </a:pPr>
-            <a:r>
-              <a:rPr lang="ko-KR" altLang="en-US" sz="1400" dirty="0">
-                <a:latin typeface="D2Coding" panose="020B0609020101020101" pitchFamily="49" charset="-127"/>
-                <a:ea typeface="D2Coding" panose="020B0609020101020101" pitchFamily="49" charset="-127"/>
-              </a:rPr>
-              <a:t>4번 차원: 단어가 '부정적인 </a:t>
-            </a:r>
-            <a:r>
-              <a:rPr lang="ko-KR" altLang="en-US" sz="1400" dirty="0" err="1">
-                <a:latin typeface="D2Coding" panose="020B0609020101020101" pitchFamily="49" charset="-127"/>
-                <a:ea typeface="D2Coding" panose="020B0609020101020101" pitchFamily="49" charset="-127"/>
-              </a:rPr>
-              <a:t>뉘앙스'를</a:t>
-            </a:r>
-            <a:r>
-              <a:rPr lang="ko-KR" altLang="en-US" sz="1400" dirty="0">
-                <a:latin typeface="D2Coding" panose="020B0609020101020101" pitchFamily="49" charset="-127"/>
-                <a:ea typeface="D2Coding" panose="020B0609020101020101" pitchFamily="49" charset="-127"/>
-              </a:rPr>
-              <a:t> 풍기는가? (예: </a:t>
-            </a:r>
-            <a:r>
-              <a:rPr lang="ko-KR" altLang="en-US" sz="1400" dirty="0" err="1">
-                <a:latin typeface="D2Coding" panose="020B0609020101020101" pitchFamily="49" charset="-127"/>
-                <a:ea typeface="D2Coding" panose="020B0609020101020101" pitchFamily="49" charset="-127"/>
-              </a:rPr>
-              <a:t>bad</a:t>
-            </a:r>
-            <a:r>
-              <a:rPr lang="ko-KR" altLang="en-US" sz="1400" dirty="0">
-                <a:latin typeface="D2Coding" panose="020B0609020101020101" pitchFamily="49" charset="-127"/>
-                <a:ea typeface="D2Coding" panose="020B0609020101020101" pitchFamily="49" charset="-127"/>
-              </a:rPr>
-              <a:t>, </a:t>
-            </a:r>
-            <a:r>
-              <a:rPr lang="ko-KR" altLang="en-US" sz="1400" dirty="0" err="1">
-                <a:latin typeface="D2Coding" panose="020B0609020101020101" pitchFamily="49" charset="-127"/>
-                <a:ea typeface="D2Coding" panose="020B0609020101020101" pitchFamily="49" charset="-127"/>
-              </a:rPr>
-              <a:t>awful은</a:t>
-            </a:r>
-            <a:r>
-              <a:rPr lang="ko-KR" altLang="en-US" sz="1400" dirty="0">
-                <a:latin typeface="D2Coding" panose="020B0609020101020101" pitchFamily="49" charset="-127"/>
-                <a:ea typeface="D2Coding" panose="020B0609020101020101" pitchFamily="49" charset="-127"/>
-              </a:rPr>
-              <a:t> 높은 값)</a:t>
-            </a:r>
-          </a:p>
-        </p:txBody>
-      </p:sp>
-      <p:cxnSp>
-        <p:nvCxnSpPr>
-          <p:cNvPr id="6" name="직선 화살표 연결선 5">
-            <a:extLst>
-              <a:ext uri="{FF2B5EF4-FFF2-40B4-BE49-F238E27FC236}">
-                <a16:creationId xmlns:a16="http://schemas.microsoft.com/office/drawing/2014/main" id="{3E5A85CD-FC7F-40D9-003F-F3D5BBFEE610}"/>
-              </a:ext>
-            </a:extLst>
-          </p:cNvPr>
-          <p:cNvCxnSpPr/>
-          <p:nvPr/>
-        </p:nvCxnSpPr>
-        <p:spPr>
-          <a:xfrm>
-            <a:off x="863600" y="3952240"/>
-            <a:ext cx="0" cy="1381760"/>
-          </a:xfrm>
-          <a:prstGeom prst="straightConnector1">
-            <a:avLst/>
-          </a:prstGeom>
-          <a:ln w="28575">
-            <a:headEnd type="triangle"/>
-            <a:tailEnd type="triangle"/>
-          </a:ln>
-        </p:spPr>
-        <p:style>
-          <a:lnRef idx="1">
-            <a:schemeClr val="dk1"/>
-          </a:lnRef>
-          <a:fillRef idx="0">
-            <a:schemeClr val="dk1"/>
-          </a:fillRef>
-          <a:effectRef idx="0">
-            <a:schemeClr val="dk1"/>
-          </a:effectRef>
-          <a:fontRef idx="minor">
-            <a:schemeClr val="tx1"/>
-          </a:fontRef>
-        </p:style>
-      </p:cxnSp>
-      <p:sp>
-        <p:nvSpPr>
-          <p:cNvPr id="2" name="슬라이드 번호 개체 틀 3">
-            <a:extLst>
-              <a:ext uri="{FF2B5EF4-FFF2-40B4-BE49-F238E27FC236}">
-                <a16:creationId xmlns:a16="http://schemas.microsoft.com/office/drawing/2014/main" id="{E8CF4A3C-95FD-ADF1-0BA7-F69FB71DD972}"/>
-              </a:ext>
-            </a:extLst>
-          </p:cNvPr>
-          <p:cNvSpPr txBox="1">
-            <a:spLocks/>
-          </p:cNvSpPr>
-          <p:nvPr/>
-        </p:nvSpPr>
-        <p:spPr>
-          <a:xfrm>
-            <a:off x="11162487" y="299420"/>
-            <a:ext cx="753545" cy="365125"/>
-          </a:xfrm>
-          <a:prstGeom prst="rect">
-            <a:avLst/>
-          </a:prstGeom>
-        </p:spPr>
-        <p:txBody>
-          <a:bodyPr vert="horz" lIns="91440" tIns="45720" rIns="91440" bIns="45720" rtlCol="0" anchor="ctr"/>
-          <a:lstStyle>
-            <a:defPPr rtl="0">
-              <a:defRPr lang="ko-KR"/>
-            </a:defPPr>
-            <a:lvl1pPr marL="0" algn="r" defTabSz="914400" rtl="0" eaLnBrk="1" latinLnBrk="0" hangingPunct="1">
-              <a:defRPr sz="1200" kern="1200" baseline="0">
-                <a:solidFill>
-                  <a:schemeClr val="tx1">
-                    <a:lumMod val="65000"/>
-                    <a:lumOff val="35000"/>
-                  </a:schemeClr>
-                </a:solidFill>
-                <a:latin typeface="맑은 고딕" panose="020B0503020000020004" pitchFamily="50" charset="-127"/>
-                <a:ea typeface="맑은 고딕" panose="020B0503020000020004" pitchFamily="50" charset="-127"/>
-                <a:cs typeface="+mn-cs"/>
-              </a:defRPr>
-            </a:lvl1pPr>
-            <a:lvl2pPr marL="457200" algn="l" defTabSz="914400" rtl="0" eaLnBrk="1" latinLnBrk="0" hangingPunct="1">
-              <a:defRPr sz="1800" kern="1200">
-                <a:solidFill>
-                  <a:schemeClr val="tx1"/>
-                </a:solidFill>
-                <a:latin typeface="+mn-lt"/>
-                <a:ea typeface="+mn-ea"/>
-                <a:cs typeface="+mn-cs"/>
-              </a:defRPr>
-            </a:lvl2pPr>
-            <a:lvl3pPr marL="914400" algn="l" defTabSz="914400" rtl="0" eaLnBrk="1" latinLnBrk="0" hangingPunct="1">
-              <a:defRPr sz="1800" kern="1200">
-                <a:solidFill>
-                  <a:schemeClr val="tx1"/>
-                </a:solidFill>
-                <a:latin typeface="+mn-lt"/>
-                <a:ea typeface="+mn-ea"/>
-                <a:cs typeface="+mn-cs"/>
-              </a:defRPr>
-            </a:lvl3pPr>
-            <a:lvl4pPr marL="1371600" algn="l" defTabSz="914400" rtl="0" eaLnBrk="1" latinLnBrk="0" hangingPunct="1">
-              <a:defRPr sz="1800" kern="1200">
-                <a:solidFill>
-                  <a:schemeClr val="tx1"/>
-                </a:solidFill>
-                <a:latin typeface="+mn-lt"/>
-                <a:ea typeface="+mn-ea"/>
-                <a:cs typeface="+mn-cs"/>
-              </a:defRPr>
-            </a:lvl4pPr>
-            <a:lvl5pPr marL="1828800" algn="l" defTabSz="914400" rtl="0" eaLnBrk="1" latinLnBrk="0" hangingPunct="1">
-              <a:defRPr sz="1800" kern="1200">
-                <a:solidFill>
-                  <a:schemeClr val="tx1"/>
-                </a:solidFill>
-                <a:latin typeface="+mn-lt"/>
-                <a:ea typeface="+mn-ea"/>
-                <a:cs typeface="+mn-cs"/>
-              </a:defRPr>
-            </a:lvl5pPr>
-            <a:lvl6pPr marL="2286000" algn="l" defTabSz="914400" rtl="0" eaLnBrk="1" latinLnBrk="0" hangingPunct="1">
-              <a:defRPr sz="1800" kern="1200">
-                <a:solidFill>
-                  <a:schemeClr val="tx1"/>
-                </a:solidFill>
-                <a:latin typeface="+mn-lt"/>
-                <a:ea typeface="+mn-ea"/>
-                <a:cs typeface="+mn-cs"/>
-              </a:defRPr>
-            </a:lvl6pPr>
-            <a:lvl7pPr marL="2743200" algn="l" defTabSz="914400" rtl="0" eaLnBrk="1" latinLnBrk="0" hangingPunct="1">
-              <a:defRPr sz="1800" kern="1200">
-                <a:solidFill>
-                  <a:schemeClr val="tx1"/>
-                </a:solidFill>
-                <a:latin typeface="+mn-lt"/>
-                <a:ea typeface="+mn-ea"/>
-                <a:cs typeface="+mn-cs"/>
-              </a:defRPr>
-            </a:lvl7pPr>
-            <a:lvl8pPr marL="3200400" algn="l" defTabSz="914400" rtl="0" eaLnBrk="1" latinLnBrk="0" hangingPunct="1">
-              <a:defRPr sz="1800" kern="1200">
-                <a:solidFill>
-                  <a:schemeClr val="tx1"/>
-                </a:solidFill>
-                <a:latin typeface="+mn-lt"/>
-                <a:ea typeface="+mn-ea"/>
-                <a:cs typeface="+mn-cs"/>
-              </a:defRPr>
-            </a:lvl8pPr>
-            <a:lvl9pPr marL="3657600" algn="l" defTabSz="914400" rtl="0" eaLnBrk="1" latinLnBrk="0" hangingPunct="1">
-              <a:defRPr sz="1800" kern="1200">
-                <a:solidFill>
-                  <a:schemeClr val="tx1"/>
-                </a:solidFill>
-                <a:latin typeface="+mn-lt"/>
-                <a:ea typeface="+mn-ea"/>
-                <a:cs typeface="+mn-cs"/>
-              </a:defRPr>
-            </a:lvl9pPr>
-          </a:lstStyle>
-          <a:p>
-            <a:fld id="{D57F1E4F-1CFF-5643-939E-217C01CDF565}" type="slidenum">
-              <a:rPr lang="en-US" sz="1400" b="1" smtClean="0">
-                <a:latin typeface="Times New Roman" panose="02020603050405020304" pitchFamily="18" charset="0"/>
-                <a:ea typeface="Verdana" panose="020B0604030504040204" pitchFamily="34" charset="0"/>
-                <a:cs typeface="Times New Roman" panose="02020603050405020304" pitchFamily="18" charset="0"/>
-              </a:rPr>
-              <a:pPr/>
-              <a:t>20</a:t>
-            </a:fld>
-            <a:endParaRPr lang="en-US" sz="1400" b="1" dirty="0">
-              <a:latin typeface="Times New Roman" panose="02020603050405020304" pitchFamily="18" charset="0"/>
-              <a:ea typeface="Verdana" panose="020B0604030504040204" pitchFamily="34" charset="0"/>
-              <a:cs typeface="Times New Roman" panose="02020603050405020304" pitchFamily="18" charset="0"/>
-            </a:endParaRPr>
-          </a:p>
-        </p:txBody>
-      </p:sp>
-    </p:spTree>
-    <p:extLst>
-      <p:ext uri="{BB962C8B-B14F-4D97-AF65-F5344CB8AC3E}">
-        <p14:creationId xmlns:p14="http://schemas.microsoft.com/office/powerpoint/2010/main" val="3941877566"/>
-      </p:ext>
-    </p:extLst>
-  </p:cSld>
-  <p:clrMapOvr>
-    <a:masterClrMapping/>
-  </p:clrMapOvr>
-</p:sld>
-</file>
-
-<file path=ppt/slides/slide21.xml><?xml version="1.0" encoding="utf-8"?>
 <p:sld xmlns:a="http://schemas.openxmlformats.org/drawingml/2006/main" xmlns:r="http://schemas.openxmlformats.org/officeDocument/2006/relationships" xmlns:p="http://schemas.openxmlformats.org/presentationml/2006/main">
   <p:cSld>
     <p:spTree>
@@ -10308,12 +9324,66 @@
                 <a:cs typeface="Times New Roman" panose="02020603050405020304" pitchFamily="18" charset="0"/>
               </a:rPr>
               <a:pPr/>
-              <a:t>21</a:t>
+              <a:t>18</a:t>
             </a:fld>
             <a:endParaRPr lang="en-US" sz="1400" b="1" dirty="0">
               <a:latin typeface="Times New Roman" panose="02020603050405020304" pitchFamily="18" charset="0"/>
               <a:ea typeface="Verdana" panose="020B0604030504040204" pitchFamily="34" charset="0"/>
               <a:cs typeface="Times New Roman" panose="02020603050405020304" pitchFamily="18" charset="0"/>
+            </a:endParaRPr>
+          </a:p>
+        </p:txBody>
+      </p:sp>
+      <p:sp>
+        <p:nvSpPr>
+          <p:cNvPr id="4" name="TextBox 3">
+            <a:extLst>
+              <a:ext uri="{FF2B5EF4-FFF2-40B4-BE49-F238E27FC236}">
+                <a16:creationId xmlns:a16="http://schemas.microsoft.com/office/drawing/2014/main" id="{77EDE48A-7735-DF53-6758-43BFE12F8300}"/>
+              </a:ext>
+            </a:extLst>
+          </p:cNvPr>
+          <p:cNvSpPr txBox="1"/>
+          <p:nvPr/>
+        </p:nvSpPr>
+        <p:spPr>
+          <a:xfrm>
+            <a:off x="5010149" y="1430985"/>
+            <a:ext cx="3482182" cy="369332"/>
+          </a:xfrm>
+          <a:prstGeom prst="rect">
+            <a:avLst/>
+          </a:prstGeom>
+          <a:noFill/>
+        </p:spPr>
+        <p:txBody>
+          <a:bodyPr wrap="square">
+            <a:spAutoFit/>
+          </a:bodyPr>
+          <a:lstStyle/>
+          <a:p>
+            <a:r>
+              <a:rPr lang="en-US" altLang="ko-KR" sz="1800" dirty="0">
+                <a:solidFill>
+                  <a:srgbClr val="00B0F0"/>
+                </a:solidFill>
+                <a:latin typeface="D2Coding" panose="020B0609020101020101" pitchFamily="49" charset="-127"/>
+                <a:ea typeface="D2Coding" panose="020B0609020101020101" pitchFamily="49" charset="-127"/>
+                <a:sym typeface="Wingdings" panose="05000000000000000000" pitchFamily="2" charset="2"/>
+                <a:hlinkClick r:id="rId3">
+                  <a:extLst>
+                    <a:ext uri="{A12FA001-AC4F-418D-AE19-62706E023703}">
+                      <ahyp:hlinkClr xmlns:ahyp="http://schemas.microsoft.com/office/drawing/2018/hyperlinkcolor" val="tx"/>
+                    </a:ext>
+                  </a:extLst>
+                </a:hlinkClick>
+              </a:rPr>
+              <a:t>https://word2vec.kr/search/</a:t>
+            </a:r>
+            <a:endParaRPr lang="ko-KR" altLang="en-US" dirty="0">
+              <a:solidFill>
+                <a:srgbClr val="00B0F0"/>
+              </a:solidFill>
             </a:endParaRPr>
           </a:p>
         </p:txBody>
@@ -10331,7 +9401,7 @@
 </p:sld>
 </file>
 
-<file path=ppt/slides/slide22.xml><?xml version="1.0" encoding="utf-8"?>
+<file path=ppt/slides/slide19.xml><?xml version="1.0" encoding="utf-8"?>
 <p:sld xmlns:a="http://schemas.openxmlformats.org/drawingml/2006/main" xmlns:r="http://schemas.openxmlformats.org/officeDocument/2006/relationships" xmlns:p="http://schemas.openxmlformats.org/presentationml/2006/main">
   <p:cSld>
     <p:spTree>
@@ -10339,7 +9409,7 @@
         <p:cNvPr id="1" name="">
           <a:extLst>
             <a:ext uri="{FF2B5EF4-FFF2-40B4-BE49-F238E27FC236}">
-              <a16:creationId xmlns:a16="http://schemas.microsoft.com/office/drawing/2014/main" id="{FDE3BB4C-FA2C-D41A-F666-11CD79ABAD59}"/>
+              <a16:creationId xmlns:a16="http://schemas.microsoft.com/office/drawing/2014/main" id="{73E890B5-04FF-286C-8FB9-B7246B7A8470}"/>
             </a:ext>
           </a:extLst>
         </p:cNvPr>
@@ -10359,7 +9429,7 @@
           <p:cNvPr id="3" name="제목 1">
             <a:extLst>
               <a:ext uri="{FF2B5EF4-FFF2-40B4-BE49-F238E27FC236}">
-                <a16:creationId xmlns:a16="http://schemas.microsoft.com/office/drawing/2014/main" id="{76231364-F4C0-F2DD-71F2-7BAA7651859D}"/>
+                <a16:creationId xmlns:a16="http://schemas.microsoft.com/office/drawing/2014/main" id="{62039274-757B-323D-5A99-F47967AFFAF8}"/>
               </a:ext>
             </a:extLst>
           </p:cNvPr>
@@ -10414,22 +9484,22 @@
                 <a:ea typeface="D2Coding" panose="020B0609020101020101" pitchFamily="49" charset="-127"/>
                 <a:cs typeface="Segoe UI Light" panose="020B0502040204020203" pitchFamily="34" charset="0"/>
               </a:rPr>
-              <a:t>Using a word embedding</a:t>
+              <a:t>Understanding word embeddings</a:t>
             </a:r>
           </a:p>
         </p:txBody>
       </p:sp>
       <p:pic>
         <p:nvPicPr>
-          <p:cNvPr id="2" name="그림 1">
+          <p:cNvPr id="13314" name="Picture 2">
             <a:extLst>
               <a:ext uri="{FF2B5EF4-FFF2-40B4-BE49-F238E27FC236}">
-                <a16:creationId xmlns:a16="http://schemas.microsoft.com/office/drawing/2014/main" id="{E0F89228-2350-87E1-BECA-28B7A62E75E1}"/>
+                <a16:creationId xmlns:a16="http://schemas.microsoft.com/office/drawing/2014/main" id="{1EC78B33-0570-791A-C3C2-F37E7B6145BC}"/>
               </a:ext>
             </a:extLst>
           </p:cNvPr>
           <p:cNvPicPr>
-            <a:picLocks noChangeAspect="1"/>
+            <a:picLocks noChangeAspect="1" noChangeArrowheads="1"/>
           </p:cNvPicPr>
           <p:nvPr/>
         </p:nvPicPr>
@@ -10441,26 +9511,37 @@
               </a:ext>
             </a:extLst>
           </a:blip>
+          <a:srcRect/>
           <a:stretch>
             <a:fillRect/>
           </a:stretch>
         </p:blipFill>
-        <p:spPr>
+        <p:spPr bwMode="auto">
           <a:xfrm>
-            <a:off x="1478655" y="2450886"/>
-            <a:ext cx="5174880" cy="2407718"/>
+            <a:off x="1209040" y="3549720"/>
+            <a:ext cx="10196284" cy="1916360"/>
           </a:xfrm>
           <a:prstGeom prst="rect">
             <a:avLst/>
           </a:prstGeom>
+          <a:noFill/>
+          <a:extLst>
+            <a:ext uri="{909E8E84-426E-40DD-AFC4-6F175D3DCCD1}">
+              <a14:hiddenFill xmlns:a14="http://schemas.microsoft.com/office/drawing/2010/main">
+                <a:solidFill>
+                  <a:srgbClr val="FFFFFF"/>
+                </a:solidFill>
+              </a14:hiddenFill>
+            </a:ext>
+          </a:extLst>
         </p:spPr>
       </p:pic>
       <p:sp>
         <p:nvSpPr>
-          <p:cNvPr id="4" name="TextBox 3">
+          <p:cNvPr id="11" name="TextBox 10">
             <a:extLst>
               <a:ext uri="{FF2B5EF4-FFF2-40B4-BE49-F238E27FC236}">
-                <a16:creationId xmlns:a16="http://schemas.microsoft.com/office/drawing/2014/main" id="{77EDE48A-7735-DF53-6758-43BFE12F8300}"/>
+                <a16:creationId xmlns:a16="http://schemas.microsoft.com/office/drawing/2014/main" id="{B256FF4A-0A59-8AD1-49D2-5C71C23AD6A0}"/>
               </a:ext>
             </a:extLst>
           </p:cNvPr>
@@ -10469,8 +9550,8 @@
         </p:nvSpPr>
         <p:spPr>
           <a:xfrm>
-            <a:off x="1358005" y="1909036"/>
-            <a:ext cx="3482182" cy="369332"/>
+            <a:off x="536605" y="1248422"/>
+            <a:ext cx="10891520" cy="2059859"/>
           </a:xfrm>
           <a:prstGeom prst="rect">
             <a:avLst/>
@@ -10483,38 +9564,290 @@
           </a:bodyPr>
           <a:lstStyle/>
           <a:p>
-            <a:r>
-              <a:rPr lang="en-US" altLang="ko-KR" sz="1800" dirty="0">
-                <a:solidFill>
-                  <a:schemeClr val="accent1"/>
-                </a:solidFill>
-                <a:latin typeface="D2Coding" panose="020B0609020101020101" pitchFamily="49" charset="-127"/>
-                <a:ea typeface="D2Coding" panose="020B0609020101020101" pitchFamily="49" charset="-127"/>
-                <a:sym typeface="Wingdings" panose="05000000000000000000" pitchFamily="2" charset="2"/>
-                <a:hlinkClick r:id="rId3">
-                  <a:extLst>
-                    <a:ext uri="{A12FA001-AC4F-418D-AE19-62706E023703}">
-                      <ahyp:hlinkClr xmlns:ahyp="http://schemas.microsoft.com/office/drawing/2018/hyperlinkcolor" val="tx"/>
-                    </a:ext>
-                  </a:extLst>
-                </a:hlinkClick>
-              </a:rPr>
-              <a:t>https://word2vec.kr/search/</a:t>
-            </a:r>
-            <a:endParaRPr lang="ko-KR" altLang="en-US" dirty="0">
-              <a:solidFill>
-                <a:schemeClr val="accent1"/>
-              </a:solidFill>
+            <a:pPr marL="285750" indent="-285750">
+              <a:buFont typeface="Wingdings" panose="05000000000000000000" pitchFamily="2" charset="2"/>
+              <a:buChar char="§"/>
+            </a:pPr>
+            <a:endParaRPr lang="en-US" altLang="ko-KR" sz="1400" dirty="0">
+              <a:latin typeface="D2Coding" panose="020B0609020101020101" pitchFamily="49" charset="-127"/>
+              <a:ea typeface="D2Coding" panose="020B0609020101020101" pitchFamily="49" charset="-127"/>
             </a:endParaRPr>
+          </a:p>
+          <a:p>
+            <a:r>
+              <a:rPr lang="ko-KR" altLang="en-US" dirty="0">
+                <a:latin typeface="D2Coding" panose="020B0609020101020101" pitchFamily="49" charset="-127"/>
+                <a:ea typeface="D2Coding" panose="020B0609020101020101" pitchFamily="49" charset="-127"/>
+              </a:rPr>
+              <a:t>단어가 가진 </a:t>
+            </a:r>
+            <a:r>
+              <a:rPr lang="en-US" altLang="ko-KR" dirty="0">
+                <a:latin typeface="D2Coding" panose="020B0609020101020101" pitchFamily="49" charset="-127"/>
+                <a:ea typeface="D2Coding" panose="020B0609020101020101" pitchFamily="49" charset="-127"/>
+              </a:rPr>
+              <a:t>'</a:t>
+            </a:r>
+            <a:r>
+              <a:rPr lang="ko-KR" altLang="en-US" dirty="0">
+                <a:latin typeface="D2Coding" panose="020B0609020101020101" pitchFamily="49" charset="-127"/>
+                <a:ea typeface="D2Coding" panose="020B0609020101020101" pitchFamily="49" charset="-127"/>
+              </a:rPr>
+              <a:t>잠재적 특징</a:t>
+            </a:r>
+            <a:r>
+              <a:rPr lang="en-US" altLang="ko-KR" dirty="0">
+                <a:latin typeface="D2Coding" panose="020B0609020101020101" pitchFamily="49" charset="-127"/>
+                <a:ea typeface="D2Coding" panose="020B0609020101020101" pitchFamily="49" charset="-127"/>
+              </a:rPr>
+              <a:t>(Latent Features)'</a:t>
+            </a:r>
+            <a:r>
+              <a:rPr lang="ko-KR" altLang="en-US" dirty="0">
+                <a:latin typeface="D2Coding" panose="020B0609020101020101" pitchFamily="49" charset="-127"/>
+                <a:ea typeface="D2Coding" panose="020B0609020101020101" pitchFamily="49" charset="-127"/>
+              </a:rPr>
+              <a:t>의 개수</a:t>
+            </a:r>
+            <a:endParaRPr lang="en-US" altLang="ko-KR" dirty="0">
+              <a:latin typeface="D2Coding" panose="020B0609020101020101" pitchFamily="49" charset="-127"/>
+              <a:ea typeface="D2Coding" panose="020B0609020101020101" pitchFamily="49" charset="-127"/>
+            </a:endParaRPr>
+          </a:p>
+          <a:p>
+            <a:pPr marL="285750" indent="-285750">
+              <a:buFont typeface="Wingdings" panose="05000000000000000000" pitchFamily="2" charset="2"/>
+              <a:buChar char="§"/>
+            </a:pPr>
+            <a:endParaRPr lang="en-US" altLang="ko-KR" sz="1400" dirty="0">
+              <a:latin typeface="D2Coding" panose="020B0609020101020101" pitchFamily="49" charset="-127"/>
+              <a:ea typeface="D2Coding" panose="020B0609020101020101" pitchFamily="49" charset="-127"/>
+            </a:endParaRPr>
+          </a:p>
+          <a:p>
+            <a:pPr marL="742950" lvl="1" indent="-285750">
+              <a:lnSpc>
+                <a:spcPct val="150000"/>
+              </a:lnSpc>
+              <a:buFont typeface="Wingdings" panose="05000000000000000000" pitchFamily="2" charset="2"/>
+              <a:buChar char="§"/>
+            </a:pPr>
+            <a:r>
+              <a:rPr lang="ko-KR" altLang="en-US" sz="1400" dirty="0">
+                <a:latin typeface="D2Coding" panose="020B0609020101020101" pitchFamily="49" charset="-127"/>
+                <a:ea typeface="D2Coding" panose="020B0609020101020101" pitchFamily="49" charset="-127"/>
+              </a:rPr>
+              <a:t>1번 차원: 단어가 '</a:t>
+            </a:r>
+            <a:r>
+              <a:rPr lang="ko-KR" altLang="en-US" sz="1400" dirty="0" err="1">
+                <a:latin typeface="D2Coding" panose="020B0609020101020101" pitchFamily="49" charset="-127"/>
+                <a:ea typeface="D2Coding" panose="020B0609020101020101" pitchFamily="49" charset="-127"/>
+              </a:rPr>
+              <a:t>인간'에</a:t>
+            </a:r>
+            <a:r>
+              <a:rPr lang="ko-KR" altLang="en-US" sz="1400" dirty="0">
+                <a:latin typeface="D2Coding" panose="020B0609020101020101" pitchFamily="49" charset="-127"/>
+                <a:ea typeface="D2Coding" panose="020B0609020101020101" pitchFamily="49" charset="-127"/>
+              </a:rPr>
+              <a:t> 가까운가? (예: </a:t>
+            </a:r>
+            <a:r>
+              <a:rPr lang="ko-KR" altLang="en-US" sz="1400" dirty="0" err="1">
+                <a:latin typeface="D2Coding" panose="020B0609020101020101" pitchFamily="49" charset="-127"/>
+                <a:ea typeface="D2Coding" panose="020B0609020101020101" pitchFamily="49" charset="-127"/>
+              </a:rPr>
+              <a:t>King은</a:t>
+            </a:r>
+            <a:r>
+              <a:rPr lang="ko-KR" altLang="en-US" sz="1400" dirty="0">
+                <a:latin typeface="D2Coding" panose="020B0609020101020101" pitchFamily="49" charset="-127"/>
+                <a:ea typeface="D2Coding" panose="020B0609020101020101" pitchFamily="49" charset="-127"/>
+              </a:rPr>
+              <a:t> 높은 값, Apple은 낮은 값)</a:t>
+            </a:r>
+          </a:p>
+          <a:p>
+            <a:pPr marL="742950" lvl="1" indent="-285750">
+              <a:lnSpc>
+                <a:spcPct val="150000"/>
+              </a:lnSpc>
+              <a:buFont typeface="Wingdings" panose="05000000000000000000" pitchFamily="2" charset="2"/>
+              <a:buChar char="§"/>
+            </a:pPr>
+            <a:r>
+              <a:rPr lang="ko-KR" altLang="en-US" sz="1400" dirty="0">
+                <a:latin typeface="D2Coding" panose="020B0609020101020101" pitchFamily="49" charset="-127"/>
+                <a:ea typeface="D2Coding" panose="020B0609020101020101" pitchFamily="49" charset="-127"/>
+              </a:rPr>
+              <a:t>2번 차원: 단어가 '</a:t>
+            </a:r>
+            <a:r>
+              <a:rPr lang="ko-KR" altLang="en-US" sz="1400" dirty="0" err="1">
+                <a:latin typeface="D2Coding" panose="020B0609020101020101" pitchFamily="49" charset="-127"/>
+                <a:ea typeface="D2Coding" panose="020B0609020101020101" pitchFamily="49" charset="-127"/>
+              </a:rPr>
+              <a:t>여성성'을</a:t>
+            </a:r>
+            <a:r>
+              <a:rPr lang="ko-KR" altLang="en-US" sz="1400" dirty="0">
+                <a:latin typeface="D2Coding" panose="020B0609020101020101" pitchFamily="49" charset="-127"/>
+                <a:ea typeface="D2Coding" panose="020B0609020101020101" pitchFamily="49" charset="-127"/>
+              </a:rPr>
+              <a:t> 띠는가? (예: </a:t>
+            </a:r>
+            <a:r>
+              <a:rPr lang="ko-KR" altLang="en-US" sz="1400" dirty="0" err="1">
+                <a:latin typeface="D2Coding" panose="020B0609020101020101" pitchFamily="49" charset="-127"/>
+                <a:ea typeface="D2Coding" panose="020B0609020101020101" pitchFamily="49" charset="-127"/>
+              </a:rPr>
+              <a:t>Queen은</a:t>
+            </a:r>
+            <a:r>
+              <a:rPr lang="ko-KR" altLang="en-US" sz="1400" dirty="0">
+                <a:latin typeface="D2Coding" panose="020B0609020101020101" pitchFamily="49" charset="-127"/>
+                <a:ea typeface="D2Coding" panose="020B0609020101020101" pitchFamily="49" charset="-127"/>
+              </a:rPr>
+              <a:t> 높은 값, </a:t>
+            </a:r>
+            <a:r>
+              <a:rPr lang="ko-KR" altLang="en-US" sz="1400" dirty="0" err="1">
+                <a:latin typeface="D2Coding" panose="020B0609020101020101" pitchFamily="49" charset="-127"/>
+                <a:ea typeface="D2Coding" panose="020B0609020101020101" pitchFamily="49" charset="-127"/>
+              </a:rPr>
+              <a:t>King은</a:t>
+            </a:r>
+            <a:r>
+              <a:rPr lang="ko-KR" altLang="en-US" sz="1400" dirty="0">
+                <a:latin typeface="D2Coding" panose="020B0609020101020101" pitchFamily="49" charset="-127"/>
+                <a:ea typeface="D2Coding" panose="020B0609020101020101" pitchFamily="49" charset="-127"/>
+              </a:rPr>
+              <a:t> 낮은 값)</a:t>
+            </a:r>
+          </a:p>
+          <a:p>
+            <a:pPr marL="742950" lvl="1" indent="-285750">
+              <a:lnSpc>
+                <a:spcPct val="150000"/>
+              </a:lnSpc>
+              <a:buFont typeface="Wingdings" panose="05000000000000000000" pitchFamily="2" charset="2"/>
+              <a:buChar char="§"/>
+            </a:pPr>
+            <a:r>
+              <a:rPr lang="ko-KR" altLang="en-US" sz="1400" dirty="0">
+                <a:latin typeface="D2Coding" panose="020B0609020101020101" pitchFamily="49" charset="-127"/>
+                <a:ea typeface="D2Coding" panose="020B0609020101020101" pitchFamily="49" charset="-127"/>
+              </a:rPr>
+              <a:t>3번 차원: 단어가 '시간(과거/현재)'과 관련이 있는가?</a:t>
+            </a:r>
+          </a:p>
+          <a:p>
+            <a:pPr marL="742950" lvl="1" indent="-285750">
+              <a:lnSpc>
+                <a:spcPct val="150000"/>
+              </a:lnSpc>
+              <a:buFont typeface="Wingdings" panose="05000000000000000000" pitchFamily="2" charset="2"/>
+              <a:buChar char="§"/>
+            </a:pPr>
+            <a:r>
+              <a:rPr lang="ko-KR" altLang="en-US" sz="1400" dirty="0">
+                <a:latin typeface="D2Coding" panose="020B0609020101020101" pitchFamily="49" charset="-127"/>
+                <a:ea typeface="D2Coding" panose="020B0609020101020101" pitchFamily="49" charset="-127"/>
+              </a:rPr>
+              <a:t>4번 차원: 단어가 '부정적인 </a:t>
+            </a:r>
+            <a:r>
+              <a:rPr lang="ko-KR" altLang="en-US" sz="1400" dirty="0" err="1">
+                <a:latin typeface="D2Coding" panose="020B0609020101020101" pitchFamily="49" charset="-127"/>
+                <a:ea typeface="D2Coding" panose="020B0609020101020101" pitchFamily="49" charset="-127"/>
+              </a:rPr>
+              <a:t>뉘앙스'를</a:t>
+            </a:r>
+            <a:r>
+              <a:rPr lang="ko-KR" altLang="en-US" sz="1400" dirty="0">
+                <a:latin typeface="D2Coding" panose="020B0609020101020101" pitchFamily="49" charset="-127"/>
+                <a:ea typeface="D2Coding" panose="020B0609020101020101" pitchFamily="49" charset="-127"/>
+              </a:rPr>
+              <a:t> 풍기는가? (예: </a:t>
+            </a:r>
+            <a:r>
+              <a:rPr lang="ko-KR" altLang="en-US" sz="1400" dirty="0" err="1">
+                <a:latin typeface="D2Coding" panose="020B0609020101020101" pitchFamily="49" charset="-127"/>
+                <a:ea typeface="D2Coding" panose="020B0609020101020101" pitchFamily="49" charset="-127"/>
+              </a:rPr>
+              <a:t>bad</a:t>
+            </a:r>
+            <a:r>
+              <a:rPr lang="ko-KR" altLang="en-US" sz="1400" dirty="0">
+                <a:latin typeface="D2Coding" panose="020B0609020101020101" pitchFamily="49" charset="-127"/>
+                <a:ea typeface="D2Coding" panose="020B0609020101020101" pitchFamily="49" charset="-127"/>
+              </a:rPr>
+              <a:t>, </a:t>
+            </a:r>
+            <a:r>
+              <a:rPr lang="ko-KR" altLang="en-US" sz="1400" dirty="0" err="1">
+                <a:latin typeface="D2Coding" panose="020B0609020101020101" pitchFamily="49" charset="-127"/>
+                <a:ea typeface="D2Coding" panose="020B0609020101020101" pitchFamily="49" charset="-127"/>
+              </a:rPr>
+              <a:t>awful은</a:t>
+            </a:r>
+            <a:r>
+              <a:rPr lang="ko-KR" altLang="en-US" sz="1400" dirty="0">
+                <a:latin typeface="D2Coding" panose="020B0609020101020101" pitchFamily="49" charset="-127"/>
+                <a:ea typeface="D2Coding" panose="020B0609020101020101" pitchFamily="49" charset="-127"/>
+              </a:rPr>
+              <a:t> 높은 값)</a:t>
+            </a:r>
           </a:p>
         </p:txBody>
       </p:sp>
+      <p:cxnSp>
+        <p:nvCxnSpPr>
+          <p:cNvPr id="6" name="직선 화살표 연결선 5">
+            <a:extLst>
+              <a:ext uri="{FF2B5EF4-FFF2-40B4-BE49-F238E27FC236}">
+                <a16:creationId xmlns:a16="http://schemas.microsoft.com/office/drawing/2014/main" id="{3E5A85CD-FC7F-40D9-003F-F3D5BBFEE610}"/>
+              </a:ext>
+            </a:extLst>
+          </p:cNvPr>
+          <p:cNvCxnSpPr/>
+          <p:nvPr/>
+        </p:nvCxnSpPr>
+        <p:spPr>
+          <a:xfrm>
+            <a:off x="863600" y="3952240"/>
+            <a:ext cx="0" cy="1381760"/>
+          </a:xfrm>
+          <a:prstGeom prst="straightConnector1">
+            <a:avLst/>
+          </a:prstGeom>
+          <a:ln w="28575">
+            <a:headEnd type="triangle"/>
+            <a:tailEnd type="triangle"/>
+          </a:ln>
+        </p:spPr>
+        <p:style>
+          <a:lnRef idx="1">
+            <a:schemeClr val="dk1"/>
+          </a:lnRef>
+          <a:fillRef idx="0">
+            <a:schemeClr val="dk1"/>
+          </a:fillRef>
+          <a:effectRef idx="0">
+            <a:schemeClr val="dk1"/>
+          </a:effectRef>
+          <a:fontRef idx="minor">
+            <a:schemeClr val="tx1"/>
+          </a:fontRef>
+        </p:style>
+      </p:cxnSp>
       <p:sp>
         <p:nvSpPr>
-          <p:cNvPr id="5" name="슬라이드 번호 개체 틀 3">
+          <p:cNvPr id="2" name="슬라이드 번호 개체 틀 3">
             <a:extLst>
               <a:ext uri="{FF2B5EF4-FFF2-40B4-BE49-F238E27FC236}">
-                <a16:creationId xmlns:a16="http://schemas.microsoft.com/office/drawing/2014/main" id="{57028304-34AE-3611-5D02-2AB409D25496}"/>
+                <a16:creationId xmlns:a16="http://schemas.microsoft.com/office/drawing/2014/main" id="{E8CF4A3C-95FD-ADF1-0BA7-F69FB71DD972}"/>
               </a:ext>
             </a:extLst>
           </p:cNvPr>
@@ -10640,7 +9973,7 @@
                 <a:cs typeface="Times New Roman" panose="02020603050405020304" pitchFamily="18" charset="0"/>
               </a:rPr>
               <a:pPr/>
-              <a:t>22</a:t>
+              <a:t>19</a:t>
             </a:fld>
             <a:endParaRPr lang="en-US" sz="1400" b="1" dirty="0">
               <a:latin typeface="Times New Roman" panose="02020603050405020304" pitchFamily="18" charset="0"/>
@@ -10653,7 +9986,7 @@
     </p:spTree>
     <p:extLst>
       <p:ext uri="{BB962C8B-B14F-4D97-AF65-F5344CB8AC3E}">
-        <p14:creationId xmlns:p14="http://schemas.microsoft.com/office/powerpoint/2010/main" val="2240412818"/>
+        <p14:creationId xmlns:p14="http://schemas.microsoft.com/office/powerpoint/2010/main" val="3941877566"/>
       </p:ext>
     </p:extLst>
   </p:cSld>
@@ -10663,7 +9996,597 @@
 </p:sld>
 </file>
 
-<file path=ppt/slides/slide23.xml><?xml version="1.0" encoding="utf-8"?>
+<file path=ppt/slides/slide2.xml><?xml version="1.0" encoding="utf-8"?>
+<p:sld xmlns:a="http://schemas.openxmlformats.org/drawingml/2006/main" xmlns:r="http://schemas.openxmlformats.org/officeDocument/2006/relationships" xmlns:p="http://schemas.openxmlformats.org/presentationml/2006/main">
+  <p:cSld>
+    <p:spTree>
+      <p:nvGrpSpPr>
+        <p:cNvPr id="1" name="">
+          <a:extLst>
+            <a:ext uri="{FF2B5EF4-FFF2-40B4-BE49-F238E27FC236}">
+              <a16:creationId xmlns:a16="http://schemas.microsoft.com/office/drawing/2014/main" id="{1FF720D6-5AE6-3C71-71A9-7178299E6F89}"/>
+            </a:ext>
+          </a:extLst>
+        </p:cNvPr>
+        <p:cNvGrpSpPr/>
+        <p:nvPr/>
+      </p:nvGrpSpPr>
+      <p:grpSpPr>
+        <a:xfrm>
+          <a:off x="0" y="0"/>
+          <a:ext cx="0" cy="0"/>
+          <a:chOff x="0" y="0"/>
+          <a:chExt cx="0" cy="0"/>
+        </a:xfrm>
+      </p:grpSpPr>
+      <p:sp>
+        <p:nvSpPr>
+          <p:cNvPr id="4" name="슬라이드 번호 개체 틀 3">
+            <a:extLst>
+              <a:ext uri="{FF2B5EF4-FFF2-40B4-BE49-F238E27FC236}">
+                <a16:creationId xmlns:a16="http://schemas.microsoft.com/office/drawing/2014/main" id="{9BA99687-4C48-8DA7-5F76-6B7712A597D4}"/>
+              </a:ext>
+            </a:extLst>
+          </p:cNvPr>
+          <p:cNvSpPr>
+            <a:spLocks noGrp="1"/>
+          </p:cNvSpPr>
+          <p:nvPr>
+            <p:ph type="sldNum" sz="quarter" idx="12"/>
+          </p:nvPr>
+        </p:nvSpPr>
+        <p:spPr>
+          <a:xfrm>
+            <a:off x="10514011" y="6036261"/>
+            <a:ext cx="753545" cy="365125"/>
+          </a:xfrm>
+        </p:spPr>
+        <p:txBody>
+          <a:bodyPr/>
+          <a:lstStyle/>
+          <a:p>
+            <a:fld id="{D57F1E4F-1CFF-5643-939E-217C01CDF565}" type="slidenum">
+              <a:rPr lang="en-US" smtClean="0"/>
+              <a:pPr/>
+              <a:t>2</a:t>
+            </a:fld>
+            <a:endParaRPr lang="en-US" dirty="0"/>
+          </a:p>
+        </p:txBody>
+      </p:sp>
+      <p:sp>
+        <p:nvSpPr>
+          <p:cNvPr id="3" name="제목 1">
+            <a:extLst>
+              <a:ext uri="{FF2B5EF4-FFF2-40B4-BE49-F238E27FC236}">
+                <a16:creationId xmlns:a16="http://schemas.microsoft.com/office/drawing/2014/main" id="{FD810985-A788-B5F8-19D5-7D75D19399E4}"/>
+              </a:ext>
+            </a:extLst>
+          </p:cNvPr>
+          <p:cNvSpPr txBox="1">
+            <a:spLocks/>
+          </p:cNvSpPr>
+          <p:nvPr/>
+        </p:nvSpPr>
+        <p:spPr>
+          <a:xfrm>
+            <a:off x="475645" y="481983"/>
+            <a:ext cx="10353762" cy="766439"/>
+          </a:xfrm>
+          <a:prstGeom prst="rect">
+            <a:avLst/>
+          </a:prstGeom>
+        </p:spPr>
+        <p:txBody>
+          <a:bodyPr vert="horz" lIns="91440" tIns="45720" rIns="91440" bIns="45720" rtlCol="0" anchor="ctr">
+            <a:normAutofit/>
+          </a:bodyPr>
+          <a:lstStyle>
+            <a:lvl1pPr algn="ctr" defTabSz="914400" rtl="0" eaLnBrk="1" latinLnBrk="1" hangingPunct="1">
+              <a:lnSpc>
+                <a:spcPct val="90000"/>
+              </a:lnSpc>
+              <a:spcBef>
+                <a:spcPct val="0"/>
+              </a:spcBef>
+              <a:buNone/>
+              <a:defRPr sz="3200" kern="1200" cap="all" baseline="0">
+                <a:solidFill>
+                  <a:schemeClr val="tx1"/>
+                </a:solidFill>
+                <a:effectLst/>
+                <a:latin typeface="Batang" panose="02030600000101010101" pitchFamily="18" charset="-127"/>
+                <a:ea typeface="Batang" panose="02030600000101010101" pitchFamily="18" charset="-127"/>
+                <a:cs typeface="+mj-cs"/>
+              </a:defRPr>
+            </a:lvl1pPr>
+          </a:lstStyle>
+          <a:p>
+            <a:pPr algn="l"/>
+            <a:r>
+              <a:rPr lang="en-US" altLang="ko-KR" sz="2800" cap="none" dirty="0">
+                <a:solidFill>
+                  <a:schemeClr val="bg2">
+                    <a:lumMod val="25000"/>
+                  </a:schemeClr>
+                </a:solidFill>
+                <a:latin typeface="D2Coding" panose="020B0609020101020101" pitchFamily="49" charset="-127"/>
+                <a:ea typeface="D2Coding" panose="020B0609020101020101" pitchFamily="49" charset="-127"/>
+                <a:cs typeface="Segoe UI Light" panose="020B0502040204020203" pitchFamily="34" charset="0"/>
+              </a:rPr>
+              <a:t>Goals</a:t>
+            </a:r>
+            <a:endParaRPr lang="ko-KR" altLang="en-US" sz="2800" cap="none" dirty="0">
+              <a:solidFill>
+                <a:schemeClr val="bg2">
+                  <a:lumMod val="25000"/>
+                </a:schemeClr>
+              </a:solidFill>
+              <a:latin typeface="D2Coding" panose="020B0609020101020101" pitchFamily="49" charset="-127"/>
+              <a:ea typeface="D2Coding" panose="020B0609020101020101" pitchFamily="49" charset="-127"/>
+              <a:cs typeface="Segoe UI Light" panose="020B0502040204020203" pitchFamily="34" charset="0"/>
+            </a:endParaRPr>
+          </a:p>
+        </p:txBody>
+      </p:sp>
+      <p:sp>
+        <p:nvSpPr>
+          <p:cNvPr id="5" name="TextBox 4">
+            <a:extLst>
+              <a:ext uri="{FF2B5EF4-FFF2-40B4-BE49-F238E27FC236}">
+                <a16:creationId xmlns:a16="http://schemas.microsoft.com/office/drawing/2014/main" id="{3EAAB68B-A2BA-07A3-DB75-5B56921FF4A0}"/>
+              </a:ext>
+            </a:extLst>
+          </p:cNvPr>
+          <p:cNvSpPr txBox="1"/>
+          <p:nvPr/>
+        </p:nvSpPr>
+        <p:spPr>
+          <a:xfrm>
+            <a:off x="526588" y="1905647"/>
+            <a:ext cx="11138824" cy="1853264"/>
+          </a:xfrm>
+          <a:prstGeom prst="rect">
+            <a:avLst/>
+          </a:prstGeom>
+          <a:noFill/>
+        </p:spPr>
+        <p:txBody>
+          <a:bodyPr wrap="square">
+            <a:spAutoFit/>
+          </a:bodyPr>
+          <a:lstStyle/>
+          <a:p>
+            <a:pPr marL="800100" lvl="1" indent="-342900">
+              <a:lnSpc>
+                <a:spcPct val="200000"/>
+              </a:lnSpc>
+              <a:buFont typeface="Wingdings" panose="05000000000000000000" pitchFamily="2" charset="2"/>
+              <a:buChar char="v"/>
+            </a:pPr>
+            <a:r>
+              <a:rPr lang="en-US" altLang="ko-KR" sz="2000" dirty="0">
+                <a:latin typeface="D2Coding" panose="020B0609020101020101" pitchFamily="49" charset="-127"/>
+                <a:ea typeface="D2Coding" panose="020B0609020101020101" pitchFamily="49" charset="-127"/>
+              </a:rPr>
+              <a:t>An introduction to the field of natural language processing (NLP)</a:t>
+            </a:r>
+          </a:p>
+          <a:p>
+            <a:pPr marL="800100" lvl="1" indent="-342900">
+              <a:lnSpc>
+                <a:spcPct val="200000"/>
+              </a:lnSpc>
+              <a:buFont typeface="Wingdings" panose="05000000000000000000" pitchFamily="2" charset="2"/>
+              <a:buChar char="v"/>
+            </a:pPr>
+            <a:r>
+              <a:rPr lang="en-US" altLang="ko-KR" sz="2000" dirty="0">
+                <a:latin typeface="D2Coding" panose="020B0609020101020101" pitchFamily="49" charset="-127"/>
+                <a:ea typeface="D2Coding" panose="020B0609020101020101" pitchFamily="49" charset="-127"/>
+              </a:rPr>
+              <a:t>Preprocessing text input into numeric input</a:t>
+            </a:r>
+          </a:p>
+          <a:p>
+            <a:pPr marL="800100" lvl="1" indent="-342900">
+              <a:lnSpc>
+                <a:spcPct val="200000"/>
+              </a:lnSpc>
+              <a:buFont typeface="Wingdings" panose="05000000000000000000" pitchFamily="2" charset="2"/>
+              <a:buChar char="v"/>
+            </a:pPr>
+            <a:r>
+              <a:rPr lang="en-US" altLang="ko-KR" sz="2000" dirty="0">
+                <a:latin typeface="D2Coding" panose="020B0609020101020101" pitchFamily="49" charset="-127"/>
+                <a:ea typeface="D2Coding" panose="020B0609020101020101" pitchFamily="49" charset="-127"/>
+              </a:rPr>
+              <a:t>Building simple text classification models</a:t>
+            </a:r>
+          </a:p>
+        </p:txBody>
+      </p:sp>
+    </p:spTree>
+    <p:extLst>
+      <p:ext uri="{BB962C8B-B14F-4D97-AF65-F5344CB8AC3E}">
+        <p14:creationId xmlns:p14="http://schemas.microsoft.com/office/powerpoint/2010/main" val="578434090"/>
+      </p:ext>
+    </p:extLst>
+  </p:cSld>
+  <p:clrMapOvr>
+    <a:masterClrMapping/>
+  </p:clrMapOvr>
+</p:sld>
+</file>
+
+<file path=ppt/slides/slide20.xml><?xml version="1.0" encoding="utf-8"?>
+<p:sld xmlns:a="http://schemas.openxmlformats.org/drawingml/2006/main" xmlns:r="http://schemas.openxmlformats.org/officeDocument/2006/relationships" xmlns:p="http://schemas.openxmlformats.org/presentationml/2006/main">
+  <p:cSld>
+    <p:spTree>
+      <p:nvGrpSpPr>
+        <p:cNvPr id="1" name="">
+          <a:extLst>
+            <a:ext uri="{FF2B5EF4-FFF2-40B4-BE49-F238E27FC236}">
+              <a16:creationId xmlns:a16="http://schemas.microsoft.com/office/drawing/2014/main" id="{F686BB75-EA64-8A67-64D7-5F96C1CC71DC}"/>
+            </a:ext>
+          </a:extLst>
+        </p:cNvPr>
+        <p:cNvGrpSpPr/>
+        <p:nvPr/>
+      </p:nvGrpSpPr>
+      <p:grpSpPr>
+        <a:xfrm>
+          <a:off x="0" y="0"/>
+          <a:ext cx="0" cy="0"/>
+          <a:chOff x="0" y="0"/>
+          <a:chExt cx="0" cy="0"/>
+        </a:xfrm>
+      </p:grpSpPr>
+      <p:sp>
+        <p:nvSpPr>
+          <p:cNvPr id="3" name="제목 1">
+            <a:extLst>
+              <a:ext uri="{FF2B5EF4-FFF2-40B4-BE49-F238E27FC236}">
+                <a16:creationId xmlns:a16="http://schemas.microsoft.com/office/drawing/2014/main" id="{A5988A04-D654-7F33-F67D-305715A38AAE}"/>
+              </a:ext>
+            </a:extLst>
+          </p:cNvPr>
+          <p:cNvSpPr txBox="1">
+            <a:spLocks/>
+          </p:cNvSpPr>
+          <p:nvPr/>
+        </p:nvSpPr>
+        <p:spPr>
+          <a:xfrm>
+            <a:off x="475645" y="481983"/>
+            <a:ext cx="11076274" cy="766439"/>
+          </a:xfrm>
+          <a:prstGeom prst="rect">
+            <a:avLst/>
+          </a:prstGeom>
+        </p:spPr>
+        <p:txBody>
+          <a:bodyPr vert="horz" lIns="91440" tIns="45720" rIns="91440" bIns="45720" rtlCol="0" anchor="ctr">
+            <a:normAutofit/>
+          </a:bodyPr>
+          <a:lstStyle>
+            <a:lvl1pPr algn="ctr" defTabSz="914400" rtl="0" eaLnBrk="1" latinLnBrk="1" hangingPunct="1">
+              <a:lnSpc>
+                <a:spcPct val="90000"/>
+              </a:lnSpc>
+              <a:spcBef>
+                <a:spcPct val="0"/>
+              </a:spcBef>
+              <a:buNone/>
+              <a:defRPr sz="3200" kern="1200" cap="all" baseline="0">
+                <a:solidFill>
+                  <a:schemeClr val="tx1"/>
+                </a:solidFill>
+                <a:effectLst/>
+                <a:latin typeface="Batang" panose="02030600000101010101" pitchFamily="18" charset="-127"/>
+                <a:ea typeface="Batang" panose="02030600000101010101" pitchFamily="18" charset="-127"/>
+                <a:cs typeface="+mj-cs"/>
+              </a:defRPr>
+            </a:lvl1pPr>
+          </a:lstStyle>
+          <a:p>
+            <a:pPr algn="l"/>
+            <a:r>
+              <a:rPr lang="en-US" altLang="ko-KR" sz="2800" cap="none" dirty="0">
+                <a:solidFill>
+                  <a:schemeClr val="bg2">
+                    <a:lumMod val="25000"/>
+                  </a:schemeClr>
+                </a:solidFill>
+                <a:latin typeface="D2Coding" panose="020B0609020101020101" pitchFamily="49" charset="-127"/>
+                <a:ea typeface="D2Coding" panose="020B0609020101020101" pitchFamily="49" charset="-127"/>
+                <a:cs typeface="Segoe UI Light" panose="020B0502040204020203" pitchFamily="34" charset="0"/>
+              </a:rPr>
+              <a:t>Using a word embedding</a:t>
+            </a:r>
+          </a:p>
+        </p:txBody>
+      </p:sp>
+      <p:pic>
+        <p:nvPicPr>
+          <p:cNvPr id="3074" name="Picture 2">
+            <a:extLst>
+              <a:ext uri="{FF2B5EF4-FFF2-40B4-BE49-F238E27FC236}">
+                <a16:creationId xmlns:a16="http://schemas.microsoft.com/office/drawing/2014/main" id="{7F5011C3-1E6F-8149-2411-669657317B09}"/>
+              </a:ext>
+            </a:extLst>
+          </p:cNvPr>
+          <p:cNvPicPr>
+            <a:picLocks noChangeAspect="1" noChangeArrowheads="1"/>
+          </p:cNvPicPr>
+          <p:nvPr/>
+        </p:nvPicPr>
+        <p:blipFill>
+          <a:blip r:embed="rId2">
+            <a:extLst>
+              <a:ext uri="{28A0092B-C50C-407E-A947-70E740481C1C}">
+                <a14:useLocalDpi xmlns:a14="http://schemas.microsoft.com/office/drawing/2010/main" val="0"/>
+              </a:ext>
+            </a:extLst>
+          </a:blip>
+          <a:srcRect/>
+          <a:stretch>
+            <a:fillRect/>
+          </a:stretch>
+        </p:blipFill>
+        <p:spPr bwMode="auto">
+          <a:xfrm>
+            <a:off x="1223963" y="1990725"/>
+            <a:ext cx="9577387" cy="3158748"/>
+          </a:xfrm>
+          <a:prstGeom prst="rect">
+            <a:avLst/>
+          </a:prstGeom>
+          <a:noFill/>
+          <a:extLst>
+            <a:ext uri="{909E8E84-426E-40DD-AFC4-6F175D3DCCD1}">
+              <a14:hiddenFill xmlns:a14="http://schemas.microsoft.com/office/drawing/2010/main">
+                <a:solidFill>
+                  <a:srgbClr val="FFFFFF"/>
+                </a:solidFill>
+              </a14:hiddenFill>
+            </a:ext>
+          </a:extLst>
+        </p:spPr>
+      </p:pic>
+      <p:sp>
+        <p:nvSpPr>
+          <p:cNvPr id="4" name="TextBox 3">
+            <a:extLst>
+              <a:ext uri="{FF2B5EF4-FFF2-40B4-BE49-F238E27FC236}">
+                <a16:creationId xmlns:a16="http://schemas.microsoft.com/office/drawing/2014/main" id="{3CEB2046-CD8A-18BD-836A-71B0B6E07825}"/>
+              </a:ext>
+            </a:extLst>
+          </p:cNvPr>
+          <p:cNvSpPr txBox="1"/>
+          <p:nvPr/>
+        </p:nvSpPr>
+        <p:spPr>
+          <a:xfrm>
+            <a:off x="1152525" y="5245445"/>
+            <a:ext cx="9467850" cy="338554"/>
+          </a:xfrm>
+          <a:prstGeom prst="rect">
+            <a:avLst/>
+          </a:prstGeom>
+          <a:noFill/>
+        </p:spPr>
+        <p:txBody>
+          <a:bodyPr wrap="square">
+            <a:spAutoFit/>
+          </a:bodyPr>
+          <a:lstStyle/>
+          <a:p>
+            <a:r>
+              <a:rPr lang="en-US" altLang="ko-KR" sz="1600" b="0" i="0" dirty="0">
+                <a:effectLst/>
+                <a:latin typeface="D2Coding" panose="020B0609020101020101" pitchFamily="49" charset="-127"/>
+                <a:ea typeface="D2Coding" panose="020B0609020101020101" pitchFamily="49" charset="-127"/>
+              </a:rPr>
+              <a:t>An </a:t>
+            </a:r>
+            <a:r>
+              <a:rPr lang="en-US" altLang="ko-KR" sz="1600" b="0" i="0" dirty="0">
+                <a:solidFill>
+                  <a:srgbClr val="990055"/>
+                </a:solidFill>
+                <a:effectLst/>
+                <a:latin typeface="D2Coding" panose="020B0609020101020101" pitchFamily="49" charset="-127"/>
+                <a:ea typeface="D2Coding" panose="020B0609020101020101" pitchFamily="49" charset="-127"/>
+              </a:rPr>
+              <a:t>Embedding</a:t>
+            </a:r>
+            <a:r>
+              <a:rPr lang="en-US" altLang="ko-KR" sz="1600" b="0" i="0" dirty="0">
+                <a:effectLst/>
+                <a:latin typeface="D2Coding" panose="020B0609020101020101" pitchFamily="49" charset="-127"/>
+                <a:ea typeface="D2Coding" panose="020B0609020101020101" pitchFamily="49" charset="-127"/>
+              </a:rPr>
+              <a:t> layer acts as a dictionary mapping </a:t>
+            </a:r>
+            <a:r>
+              <a:rPr lang="en-US" altLang="ko-KR" sz="1600" b="0" i="0" dirty="0" err="1">
+                <a:effectLst/>
+                <a:latin typeface="D2Coding" panose="020B0609020101020101" pitchFamily="49" charset="-127"/>
+                <a:ea typeface="D2Coding" panose="020B0609020101020101" pitchFamily="49" charset="-127"/>
+              </a:rPr>
+              <a:t>ints</a:t>
+            </a:r>
+            <a:r>
+              <a:rPr lang="en-US" altLang="ko-KR" sz="1600" b="0" i="0" dirty="0">
+                <a:effectLst/>
+                <a:latin typeface="D2Coding" panose="020B0609020101020101" pitchFamily="49" charset="-127"/>
+                <a:ea typeface="D2Coding" panose="020B0609020101020101" pitchFamily="49" charset="-127"/>
+              </a:rPr>
+              <a:t> to floating point vectors.</a:t>
+            </a:r>
+            <a:endParaRPr lang="ko-KR" altLang="en-US" sz="1600" dirty="0">
+              <a:latin typeface="D2Coding" panose="020B0609020101020101" pitchFamily="49" charset="-127"/>
+              <a:ea typeface="D2Coding" panose="020B0609020101020101" pitchFamily="49" charset="-127"/>
+            </a:endParaRPr>
+          </a:p>
+        </p:txBody>
+      </p:sp>
+      <p:sp>
+        <p:nvSpPr>
+          <p:cNvPr id="6" name="슬라이드 번호 개체 틀 3">
+            <a:extLst>
+              <a:ext uri="{FF2B5EF4-FFF2-40B4-BE49-F238E27FC236}">
+                <a16:creationId xmlns:a16="http://schemas.microsoft.com/office/drawing/2014/main" id="{F333B767-49D8-C742-A6E3-BC33943A14EE}"/>
+              </a:ext>
+            </a:extLst>
+          </p:cNvPr>
+          <p:cNvSpPr txBox="1">
+            <a:spLocks/>
+          </p:cNvSpPr>
+          <p:nvPr/>
+        </p:nvSpPr>
+        <p:spPr>
+          <a:xfrm>
+            <a:off x="11162487" y="299420"/>
+            <a:ext cx="753545" cy="365125"/>
+          </a:xfrm>
+          <a:prstGeom prst="rect">
+            <a:avLst/>
+          </a:prstGeom>
+        </p:spPr>
+        <p:txBody>
+          <a:bodyPr vert="horz" lIns="91440" tIns="45720" rIns="91440" bIns="45720" rtlCol="0" anchor="ctr"/>
+          <a:lstStyle>
+            <a:defPPr rtl="0">
+              <a:defRPr lang="ko-KR"/>
+            </a:defPPr>
+            <a:lvl1pPr marL="0" algn="r" defTabSz="914400" rtl="0" eaLnBrk="1" latinLnBrk="0" hangingPunct="1">
+              <a:defRPr sz="1200" kern="1200" baseline="0">
+                <a:solidFill>
+                  <a:schemeClr val="tx1">
+                    <a:lumMod val="65000"/>
+                    <a:lumOff val="35000"/>
+                  </a:schemeClr>
+                </a:solidFill>
+                <a:latin typeface="맑은 고딕" panose="020B0503020000020004" pitchFamily="50" charset="-127"/>
+                <a:ea typeface="맑은 고딕" panose="020B0503020000020004" pitchFamily="50" charset="-127"/>
+                <a:cs typeface="+mn-cs"/>
+              </a:defRPr>
+            </a:lvl1pPr>
+            <a:lvl2pPr marL="457200" algn="l" defTabSz="914400" rtl="0" eaLnBrk="1" latinLnBrk="0" hangingPunct="1">
+              <a:defRPr sz="1800" kern="1200">
+                <a:solidFill>
+                  <a:schemeClr val="tx1"/>
+                </a:solidFill>
+                <a:latin typeface="+mn-lt"/>
+                <a:ea typeface="+mn-ea"/>
+                <a:cs typeface="+mn-cs"/>
+              </a:defRPr>
+            </a:lvl2pPr>
+            <a:lvl3pPr marL="914400" algn="l" defTabSz="914400" rtl="0" eaLnBrk="1" latinLnBrk="0" hangingPunct="1">
+              <a:defRPr sz="1800" kern="1200">
+                <a:solidFill>
+                  <a:schemeClr val="tx1"/>
+                </a:solidFill>
+                <a:latin typeface="+mn-lt"/>
+                <a:ea typeface="+mn-ea"/>
+                <a:cs typeface="+mn-cs"/>
+              </a:defRPr>
+            </a:lvl3pPr>
+            <a:lvl4pPr marL="1371600" algn="l" defTabSz="914400" rtl="0" eaLnBrk="1" latinLnBrk="0" hangingPunct="1">
+              <a:defRPr sz="1800" kern="1200">
+                <a:solidFill>
+                  <a:schemeClr val="tx1"/>
+                </a:solidFill>
+                <a:latin typeface="+mn-lt"/>
+                <a:ea typeface="+mn-ea"/>
+                <a:cs typeface="+mn-cs"/>
+              </a:defRPr>
+            </a:lvl4pPr>
+            <a:lvl5pPr marL="1828800" algn="l" defTabSz="914400" rtl="0" eaLnBrk="1" latinLnBrk="0" hangingPunct="1">
+              <a:defRPr sz="1800" kern="1200">
+                <a:solidFill>
+                  <a:schemeClr val="tx1"/>
+                </a:solidFill>
+                <a:latin typeface="+mn-lt"/>
+                <a:ea typeface="+mn-ea"/>
+                <a:cs typeface="+mn-cs"/>
+              </a:defRPr>
+            </a:lvl5pPr>
+            <a:lvl6pPr marL="2286000" algn="l" defTabSz="914400" rtl="0" eaLnBrk="1" latinLnBrk="0" hangingPunct="1">
+              <a:defRPr sz="1800" kern="1200">
+                <a:solidFill>
+                  <a:schemeClr val="tx1"/>
+                </a:solidFill>
+                <a:latin typeface="+mn-lt"/>
+                <a:ea typeface="+mn-ea"/>
+                <a:cs typeface="+mn-cs"/>
+              </a:defRPr>
+            </a:lvl6pPr>
+            <a:lvl7pPr marL="2743200" algn="l" defTabSz="914400" rtl="0" eaLnBrk="1" latinLnBrk="0" hangingPunct="1">
+              <a:defRPr sz="1800" kern="1200">
+                <a:solidFill>
+                  <a:schemeClr val="tx1"/>
+                </a:solidFill>
+                <a:latin typeface="+mn-lt"/>
+                <a:ea typeface="+mn-ea"/>
+                <a:cs typeface="+mn-cs"/>
+              </a:defRPr>
+            </a:lvl7pPr>
+            <a:lvl8pPr marL="3200400" algn="l" defTabSz="914400" rtl="0" eaLnBrk="1" latinLnBrk="0" hangingPunct="1">
+              <a:defRPr sz="1800" kern="1200">
+                <a:solidFill>
+                  <a:schemeClr val="tx1"/>
+                </a:solidFill>
+                <a:latin typeface="+mn-lt"/>
+                <a:ea typeface="+mn-ea"/>
+                <a:cs typeface="+mn-cs"/>
+              </a:defRPr>
+            </a:lvl8pPr>
+            <a:lvl9pPr marL="3657600" algn="l" defTabSz="914400" rtl="0" eaLnBrk="1" latinLnBrk="0" hangingPunct="1">
+              <a:defRPr sz="1800" kern="1200">
+                <a:solidFill>
+                  <a:schemeClr val="tx1"/>
+                </a:solidFill>
+                <a:latin typeface="+mn-lt"/>
+                <a:ea typeface="+mn-ea"/>
+                <a:cs typeface="+mn-cs"/>
+              </a:defRPr>
+            </a:lvl9pPr>
+          </a:lstStyle>
+          <a:p>
+            <a:fld id="{D57F1E4F-1CFF-5643-939E-217C01CDF565}" type="slidenum">
+              <a:rPr lang="en-US" sz="1400" b="1" smtClean="0">
+                <a:latin typeface="Times New Roman" panose="02020603050405020304" pitchFamily="18" charset="0"/>
+                <a:ea typeface="Verdana" panose="020B0604030504040204" pitchFamily="34" charset="0"/>
+                <a:cs typeface="Times New Roman" panose="02020603050405020304" pitchFamily="18" charset="0"/>
+              </a:rPr>
+              <a:pPr/>
+              <a:t>20</a:t>
+            </a:fld>
+            <a:endParaRPr lang="en-US" sz="1400" b="1" dirty="0">
+              <a:latin typeface="Times New Roman" panose="02020603050405020304" pitchFamily="18" charset="0"/>
+              <a:ea typeface="Verdana" panose="020B0604030504040204" pitchFamily="34" charset="0"/>
+              <a:cs typeface="Times New Roman" panose="02020603050405020304" pitchFamily="18" charset="0"/>
+            </a:endParaRPr>
+          </a:p>
+        </p:txBody>
+      </p:sp>
+    </p:spTree>
+    <p:extLst>
+      <p:ext uri="{BB962C8B-B14F-4D97-AF65-F5344CB8AC3E}">
+        <p14:creationId xmlns:p14="http://schemas.microsoft.com/office/powerpoint/2010/main" val="1160981635"/>
+      </p:ext>
+    </p:extLst>
+  </p:cSld>
+  <p:clrMapOvr>
+    <a:masterClrMapping/>
+  </p:clrMapOvr>
+</p:sld>
+</file>
+
+<file path=ppt/slides/slide21.xml><?xml version="1.0" encoding="utf-8"?>
 <p:sld xmlns:a="http://schemas.openxmlformats.org/drawingml/2006/main" xmlns:r="http://schemas.openxmlformats.org/officeDocument/2006/relationships" xmlns:p="http://schemas.openxmlformats.org/presentationml/2006/main">
   <p:cSld>
     <p:spTree>
@@ -10861,7 +10784,7 @@
                 <a:cs typeface="Times New Roman" panose="02020603050405020304" pitchFamily="18" charset="0"/>
               </a:rPr>
               <a:pPr/>
-              <a:t>23</a:t>
+              <a:t>21</a:t>
             </a:fld>
             <a:endParaRPr lang="en-US" sz="1400" b="1" dirty="0">
               <a:latin typeface="Times New Roman" panose="02020603050405020304" pitchFamily="18" charset="0"/>
@@ -11002,7 +10925,7 @@
                 <a:cs typeface="Times New Roman" panose="02020603050405020304" pitchFamily="18" charset="0"/>
               </a:rPr>
               <a:pPr/>
-              <a:t>23</a:t>
+              <a:t>21</a:t>
             </a:fld>
             <a:endParaRPr lang="en-US" sz="1400" b="1" dirty="0">
               <a:latin typeface="Times New Roman" panose="02020603050405020304" pitchFamily="18" charset="0"/>
@@ -11025,571 +10948,7 @@
 </p:sld>
 </file>
 
-<file path=ppt/slides/slide24.xml><?xml version="1.0" encoding="utf-8"?>
-<p:sld xmlns:a="http://schemas.openxmlformats.org/drawingml/2006/main" xmlns:r="http://schemas.openxmlformats.org/officeDocument/2006/relationships" xmlns:p="http://schemas.openxmlformats.org/presentationml/2006/main">
-  <p:cSld>
-    <p:spTree>
-      <p:nvGrpSpPr>
-        <p:cNvPr id="1" name="">
-          <a:extLst>
-            <a:ext uri="{FF2B5EF4-FFF2-40B4-BE49-F238E27FC236}">
-              <a16:creationId xmlns:a16="http://schemas.microsoft.com/office/drawing/2014/main" id="{5A627C3A-51DD-635B-EF83-A40215BABB9C}"/>
-            </a:ext>
-          </a:extLst>
-        </p:cNvPr>
-        <p:cNvGrpSpPr/>
-        <p:nvPr/>
-      </p:nvGrpSpPr>
-      <p:grpSpPr>
-        <a:xfrm>
-          <a:off x="0" y="0"/>
-          <a:ext cx="0" cy="0"/>
-          <a:chOff x="0" y="0"/>
-          <a:chExt cx="0" cy="0"/>
-        </a:xfrm>
-      </p:grpSpPr>
-      <p:sp>
-        <p:nvSpPr>
-          <p:cNvPr id="3" name="제목 1">
-            <a:extLst>
-              <a:ext uri="{FF2B5EF4-FFF2-40B4-BE49-F238E27FC236}">
-                <a16:creationId xmlns:a16="http://schemas.microsoft.com/office/drawing/2014/main" id="{7EBD2522-979D-112D-215E-E0216EB7981F}"/>
-              </a:ext>
-            </a:extLst>
-          </p:cNvPr>
-          <p:cNvSpPr txBox="1">
-            <a:spLocks/>
-          </p:cNvSpPr>
-          <p:nvPr/>
-        </p:nvSpPr>
-        <p:spPr>
-          <a:xfrm>
-            <a:off x="475645" y="481983"/>
-            <a:ext cx="11076274" cy="766439"/>
-          </a:xfrm>
-          <a:prstGeom prst="rect">
-            <a:avLst/>
-          </a:prstGeom>
-        </p:spPr>
-        <p:txBody>
-          <a:bodyPr vert="horz" lIns="91440" tIns="45720" rIns="91440" bIns="45720" rtlCol="0" anchor="ctr">
-            <a:normAutofit/>
-          </a:bodyPr>
-          <a:lstStyle>
-            <a:lvl1pPr algn="ctr" defTabSz="914400" rtl="0" eaLnBrk="1" latinLnBrk="1" hangingPunct="1">
-              <a:lnSpc>
-                <a:spcPct val="90000"/>
-              </a:lnSpc>
-              <a:spcBef>
-                <a:spcPct val="0"/>
-              </a:spcBef>
-              <a:buNone/>
-              <a:defRPr sz="3200" kern="1200" cap="all" baseline="0">
-                <a:solidFill>
-                  <a:schemeClr val="tx1"/>
-                </a:solidFill>
-                <a:effectLst/>
-                <a:latin typeface="Batang" panose="02030600000101010101" pitchFamily="18" charset="-127"/>
-                <a:ea typeface="Batang" panose="02030600000101010101" pitchFamily="18" charset="-127"/>
-                <a:cs typeface="+mj-cs"/>
-              </a:defRPr>
-            </a:lvl1pPr>
-          </a:lstStyle>
-          <a:p>
-            <a:pPr algn="l"/>
-            <a:r>
-              <a:rPr lang="en-US" altLang="ko-KR" sz="2800" cap="none" dirty="0">
-                <a:solidFill>
-                  <a:schemeClr val="bg2">
-                    <a:lumMod val="25000"/>
-                  </a:schemeClr>
-                </a:solidFill>
-                <a:latin typeface="D2Coding" panose="020B0609020101020101" pitchFamily="49" charset="-127"/>
-                <a:ea typeface="D2Coding" panose="020B0609020101020101" pitchFamily="49" charset="-127"/>
-                <a:cs typeface="Segoe UI Light" panose="020B0502040204020203" pitchFamily="34" charset="0"/>
-              </a:rPr>
-              <a:t>Understanding word embeddings</a:t>
-            </a:r>
-          </a:p>
-        </p:txBody>
-      </p:sp>
-      <p:pic>
-        <p:nvPicPr>
-          <p:cNvPr id="2" name="Picture 2">
-            <a:extLst>
-              <a:ext uri="{FF2B5EF4-FFF2-40B4-BE49-F238E27FC236}">
-                <a16:creationId xmlns:a16="http://schemas.microsoft.com/office/drawing/2014/main" id="{6E378C00-FD83-8248-F532-ECF047D1D304}"/>
-              </a:ext>
-            </a:extLst>
-          </p:cNvPr>
-          <p:cNvPicPr>
-            <a:picLocks noChangeAspect="1" noChangeArrowheads="1"/>
-          </p:cNvPicPr>
-          <p:nvPr/>
-        </p:nvPicPr>
-        <p:blipFill>
-          <a:blip r:embed="rId2">
-            <a:extLst>
-              <a:ext uri="{28A0092B-C50C-407E-A947-70E740481C1C}">
-                <a14:useLocalDpi xmlns:a14="http://schemas.microsoft.com/office/drawing/2010/main" val="0"/>
-              </a:ext>
-            </a:extLst>
-          </a:blip>
-          <a:srcRect/>
-          <a:stretch>
-            <a:fillRect/>
-          </a:stretch>
-        </p:blipFill>
-        <p:spPr bwMode="auto">
-          <a:xfrm>
-            <a:off x="629743" y="3207328"/>
-            <a:ext cx="5307538" cy="3051232"/>
-          </a:xfrm>
-          <a:prstGeom prst="rect">
-            <a:avLst/>
-          </a:prstGeom>
-          <a:noFill/>
-          <a:extLst>
-            <a:ext uri="{909E8E84-426E-40DD-AFC4-6F175D3DCCD1}">
-              <a14:hiddenFill xmlns:a14="http://schemas.microsoft.com/office/drawing/2010/main">
-                <a:solidFill>
-                  <a:srgbClr val="FFFFFF"/>
-                </a:solidFill>
-              </a14:hiddenFill>
-            </a:ext>
-          </a:extLst>
-        </p:spPr>
-      </p:pic>
-      <p:sp>
-        <p:nvSpPr>
-          <p:cNvPr id="9" name="TextBox 8">
-            <a:extLst>
-              <a:ext uri="{FF2B5EF4-FFF2-40B4-BE49-F238E27FC236}">
-                <a16:creationId xmlns:a16="http://schemas.microsoft.com/office/drawing/2014/main" id="{2848D389-B97F-24D4-4FE4-21BB63ECEB23}"/>
-              </a:ext>
-            </a:extLst>
-          </p:cNvPr>
-          <p:cNvSpPr txBox="1"/>
-          <p:nvPr/>
-        </p:nvSpPr>
-        <p:spPr>
-          <a:xfrm>
-            <a:off x="629743" y="1326722"/>
-            <a:ext cx="11330275" cy="1296317"/>
-          </a:xfrm>
-          <a:prstGeom prst="rect">
-            <a:avLst/>
-          </a:prstGeom>
-          <a:noFill/>
-        </p:spPr>
-        <p:txBody>
-          <a:bodyPr wrap="square">
-            <a:spAutoFit/>
-          </a:bodyPr>
-          <a:lstStyle/>
-          <a:p>
-            <a:pPr>
-              <a:lnSpc>
-                <a:spcPct val="150000"/>
-              </a:lnSpc>
-            </a:pPr>
-            <a:r>
-              <a:rPr lang="ko-KR" altLang="en-US" dirty="0" err="1">
-                <a:latin typeface="D2Coding" panose="020B0609020101020101" pitchFamily="49" charset="-127"/>
-                <a:ea typeface="D2Coding" panose="020B0609020101020101" pitchFamily="49" charset="-127"/>
-              </a:rPr>
-              <a:t>임베딩</a:t>
-            </a:r>
-            <a:r>
-              <a:rPr lang="ko-KR" altLang="en-US" dirty="0">
-                <a:latin typeface="D2Coding" panose="020B0609020101020101" pitchFamily="49" charset="-127"/>
-                <a:ea typeface="D2Coding" panose="020B0609020101020101" pitchFamily="49" charset="-127"/>
-              </a:rPr>
-              <a:t> 차원이 </a:t>
-            </a:r>
-            <a:r>
-              <a:rPr lang="en-US" altLang="ko-KR" dirty="0">
-                <a:latin typeface="D2Coding" panose="020B0609020101020101" pitchFamily="49" charset="-127"/>
-                <a:ea typeface="D2Coding" panose="020B0609020101020101" pitchFamily="49" charset="-127"/>
-              </a:rPr>
-              <a:t>128</a:t>
-            </a:r>
-            <a:r>
-              <a:rPr lang="ko-KR" altLang="en-US" dirty="0">
-                <a:latin typeface="D2Coding" panose="020B0609020101020101" pitchFamily="49" charset="-127"/>
-                <a:ea typeface="D2Coding" panose="020B0609020101020101" pitchFamily="49" charset="-127"/>
-              </a:rPr>
-              <a:t>이라는 것은</a:t>
-            </a:r>
-            <a:r>
-              <a:rPr lang="en-US" altLang="ko-KR" dirty="0">
-                <a:latin typeface="D2Coding" panose="020B0609020101020101" pitchFamily="49" charset="-127"/>
-                <a:ea typeface="D2Coding" panose="020B0609020101020101" pitchFamily="49" charset="-127"/>
-              </a:rPr>
-              <a:t>, </a:t>
-            </a:r>
-            <a:r>
-              <a:rPr lang="ko-KR" altLang="en-US" dirty="0">
-                <a:latin typeface="D2Coding" panose="020B0609020101020101" pitchFamily="49" charset="-127"/>
-                <a:ea typeface="D2Coding" panose="020B0609020101020101" pitchFamily="49" charset="-127"/>
-              </a:rPr>
-              <a:t>단어 가방</a:t>
-            </a:r>
-            <a:r>
-              <a:rPr lang="en-US" altLang="ko-KR" dirty="0">
-                <a:latin typeface="D2Coding" panose="020B0609020101020101" pitchFamily="49" charset="-127"/>
-                <a:ea typeface="D2Coding" panose="020B0609020101020101" pitchFamily="49" charset="-127"/>
-              </a:rPr>
-              <a:t>(Bag) </a:t>
-            </a:r>
-            <a:r>
-              <a:rPr lang="ko-KR" altLang="en-US" dirty="0">
-                <a:latin typeface="D2Coding" panose="020B0609020101020101" pitchFamily="49" charset="-127"/>
-                <a:ea typeface="D2Coding" panose="020B0609020101020101" pitchFamily="49" charset="-127"/>
-              </a:rPr>
-              <a:t>속에 갇혀 있던 단어들에게 </a:t>
-            </a:r>
-            <a:r>
-              <a:rPr lang="en-US" altLang="ko-KR" dirty="0">
-                <a:latin typeface="D2Coding" panose="020B0609020101020101" pitchFamily="49" charset="-127"/>
-                <a:ea typeface="D2Coding" panose="020B0609020101020101" pitchFamily="49" charset="-127"/>
-              </a:rPr>
-              <a:t>128</a:t>
-            </a:r>
-            <a:r>
-              <a:rPr lang="ko-KR" altLang="en-US" dirty="0">
-                <a:latin typeface="D2Coding" panose="020B0609020101020101" pitchFamily="49" charset="-127"/>
-                <a:ea typeface="D2Coding" panose="020B0609020101020101" pitchFamily="49" charset="-127"/>
-              </a:rPr>
-              <a:t>가지의 서로 다른 성질</a:t>
-            </a:r>
-            <a:r>
-              <a:rPr lang="en-US" altLang="ko-KR" dirty="0">
-                <a:latin typeface="D2Coding" panose="020B0609020101020101" pitchFamily="49" charset="-127"/>
-                <a:ea typeface="D2Coding" panose="020B0609020101020101" pitchFamily="49" charset="-127"/>
-              </a:rPr>
-              <a:t>(</a:t>
-            </a:r>
-            <a:r>
-              <a:rPr lang="ko-KR" altLang="en-US" dirty="0">
-                <a:latin typeface="D2Coding" panose="020B0609020101020101" pitchFamily="49" charset="-127"/>
-                <a:ea typeface="D2Coding" panose="020B0609020101020101" pitchFamily="49" charset="-127"/>
-              </a:rPr>
-              <a:t>특징 축</a:t>
-            </a:r>
-            <a:r>
-              <a:rPr lang="en-US" altLang="ko-KR" dirty="0">
-                <a:latin typeface="D2Coding" panose="020B0609020101020101" pitchFamily="49" charset="-127"/>
-                <a:ea typeface="D2Coding" panose="020B0609020101020101" pitchFamily="49" charset="-127"/>
-              </a:rPr>
-              <a:t>)</a:t>
-            </a:r>
-            <a:r>
-              <a:rPr lang="ko-KR" altLang="en-US" dirty="0">
-                <a:latin typeface="D2Coding" panose="020B0609020101020101" pitchFamily="49" charset="-127"/>
-                <a:ea typeface="D2Coding" panose="020B0609020101020101" pitchFamily="49" charset="-127"/>
-              </a:rPr>
-              <a:t>을 부여하여</a:t>
-            </a:r>
-            <a:r>
-              <a:rPr lang="en-US" altLang="ko-KR" dirty="0">
-                <a:latin typeface="D2Coding" panose="020B0609020101020101" pitchFamily="49" charset="-127"/>
-                <a:ea typeface="D2Coding" panose="020B0609020101020101" pitchFamily="49" charset="-127"/>
-              </a:rPr>
-              <a:t>, </a:t>
-            </a:r>
-            <a:r>
-              <a:rPr lang="ko-KR" altLang="en-US" dirty="0">
-                <a:latin typeface="D2Coding" panose="020B0609020101020101" pitchFamily="49" charset="-127"/>
-                <a:ea typeface="D2Coding" panose="020B0609020101020101" pitchFamily="49" charset="-127"/>
-              </a:rPr>
-              <a:t>단어 간의 유사도와 문맥적 뉘앙스를 컴퓨터가 다차원 좌표계 위에서 정교하게 계산할 수 있도록 만든 방의 개수</a:t>
-            </a:r>
-            <a:r>
-              <a:rPr lang="en-US" altLang="ko-KR" dirty="0">
-                <a:latin typeface="D2Coding" panose="020B0609020101020101" pitchFamily="49" charset="-127"/>
-                <a:ea typeface="D2Coding" panose="020B0609020101020101" pitchFamily="49" charset="-127"/>
-              </a:rPr>
-              <a:t>(</a:t>
-            </a:r>
-            <a:r>
-              <a:rPr lang="ko-KR" altLang="en-US" dirty="0">
-                <a:latin typeface="D2Coding" panose="020B0609020101020101" pitchFamily="49" charset="-127"/>
-                <a:ea typeface="D2Coding" panose="020B0609020101020101" pitchFamily="49" charset="-127"/>
-              </a:rPr>
-              <a:t>차원</a:t>
-            </a:r>
-            <a:r>
-              <a:rPr lang="en-US" altLang="ko-KR" dirty="0">
-                <a:latin typeface="D2Coding" panose="020B0609020101020101" pitchFamily="49" charset="-127"/>
-                <a:ea typeface="D2Coding" panose="020B0609020101020101" pitchFamily="49" charset="-127"/>
-              </a:rPr>
-              <a:t>)</a:t>
-            </a:r>
-            <a:endParaRPr lang="ko-KR" altLang="en-US" dirty="0">
-              <a:latin typeface="D2Coding" panose="020B0609020101020101" pitchFamily="49" charset="-127"/>
-              <a:ea typeface="D2Coding" panose="020B0609020101020101" pitchFamily="49" charset="-127"/>
-            </a:endParaRPr>
-          </a:p>
-        </p:txBody>
-      </p:sp>
-      <p:sp>
-        <p:nvSpPr>
-          <p:cNvPr id="10" name="TextBox 9">
-            <a:extLst>
-              <a:ext uri="{FF2B5EF4-FFF2-40B4-BE49-F238E27FC236}">
-                <a16:creationId xmlns:a16="http://schemas.microsoft.com/office/drawing/2014/main" id="{16CBE333-2335-6573-5323-36199925A0A7}"/>
-              </a:ext>
-            </a:extLst>
-          </p:cNvPr>
-          <p:cNvSpPr txBox="1"/>
-          <p:nvPr/>
-        </p:nvSpPr>
-        <p:spPr>
-          <a:xfrm>
-            <a:off x="7426960" y="3540464"/>
-            <a:ext cx="2331087" cy="369332"/>
-          </a:xfrm>
-          <a:prstGeom prst="rect">
-            <a:avLst/>
-          </a:prstGeom>
-          <a:noFill/>
-        </p:spPr>
-        <p:txBody>
-          <a:bodyPr wrap="none" rtlCol="0">
-            <a:spAutoFit/>
-          </a:bodyPr>
-          <a:lstStyle/>
-          <a:p>
-            <a:r>
-              <a:rPr lang="en-US" altLang="ko-KR" dirty="0">
-                <a:solidFill>
-                  <a:schemeClr val="accent5"/>
-                </a:solidFill>
-                <a:hlinkClick r:id="rId3">
-                  <a:extLst>
-                    <a:ext uri="{A12FA001-AC4F-418D-AE19-62706E023703}">
-                      <ahyp:hlinkClr xmlns:ahyp="http://schemas.microsoft.com/office/drawing/2018/hyperlinkcolor" val="tx"/>
-                    </a:ext>
-                  </a:extLst>
-                </a:hlinkClick>
-              </a:rPr>
-              <a:t>Embedding Projector</a:t>
-            </a:r>
-            <a:endParaRPr lang="ko-KR" altLang="en-US" dirty="0">
-              <a:solidFill>
-                <a:schemeClr val="accent5"/>
-              </a:solidFill>
-            </a:endParaRPr>
-          </a:p>
-        </p:txBody>
-      </p:sp>
-      <p:sp>
-        <p:nvSpPr>
-          <p:cNvPr id="11" name="TextBox 10">
-            <a:extLst>
-              <a:ext uri="{FF2B5EF4-FFF2-40B4-BE49-F238E27FC236}">
-                <a16:creationId xmlns:a16="http://schemas.microsoft.com/office/drawing/2014/main" id="{3C781393-915C-0C49-25CB-595BCB55F9BB}"/>
-              </a:ext>
-            </a:extLst>
-          </p:cNvPr>
-          <p:cNvSpPr txBox="1"/>
-          <p:nvPr/>
-        </p:nvSpPr>
-        <p:spPr>
-          <a:xfrm>
-            <a:off x="7426960" y="4466245"/>
-            <a:ext cx="2283126" cy="369332"/>
-          </a:xfrm>
-          <a:prstGeom prst="rect">
-            <a:avLst/>
-          </a:prstGeom>
-          <a:noFill/>
-        </p:spPr>
-        <p:txBody>
-          <a:bodyPr wrap="none" rtlCol="0">
-            <a:spAutoFit/>
-          </a:bodyPr>
-          <a:lstStyle/>
-          <a:p>
-            <a:r>
-              <a:rPr lang="en-US" altLang="ko-KR" dirty="0">
-                <a:solidFill>
-                  <a:schemeClr val="accent5"/>
-                </a:solidFill>
-                <a:hlinkClick r:id="rId4">
-                  <a:extLst>
-                    <a:ext uri="{A12FA001-AC4F-418D-AE19-62706E023703}">
-                      <ahyp:hlinkClr xmlns:ahyp="http://schemas.microsoft.com/office/drawing/2018/hyperlinkcolor" val="tx"/>
-                    </a:ext>
-                  </a:extLst>
-                </a:hlinkClick>
-              </a:rPr>
-              <a:t>word2vec for Korean</a:t>
-            </a:r>
-            <a:endParaRPr lang="ko-KR" altLang="en-US" dirty="0">
-              <a:solidFill>
-                <a:schemeClr val="accent5"/>
-              </a:solidFill>
-            </a:endParaRPr>
-          </a:p>
-        </p:txBody>
-      </p:sp>
-      <p:sp>
-        <p:nvSpPr>
-          <p:cNvPr id="5" name="슬라이드 번호 개체 틀 3">
-            <a:extLst>
-              <a:ext uri="{FF2B5EF4-FFF2-40B4-BE49-F238E27FC236}">
-                <a16:creationId xmlns:a16="http://schemas.microsoft.com/office/drawing/2014/main" id="{C33DB487-5AD7-0F9D-C908-CAA437C86B45}"/>
-              </a:ext>
-            </a:extLst>
-          </p:cNvPr>
-          <p:cNvSpPr txBox="1">
-            <a:spLocks/>
-          </p:cNvSpPr>
-          <p:nvPr/>
-        </p:nvSpPr>
-        <p:spPr>
-          <a:xfrm>
-            <a:off x="11162487" y="299420"/>
-            <a:ext cx="753545" cy="365125"/>
-          </a:xfrm>
-          <a:prstGeom prst="rect">
-            <a:avLst/>
-          </a:prstGeom>
-        </p:spPr>
-        <p:txBody>
-          <a:bodyPr vert="horz" lIns="91440" tIns="45720" rIns="91440" bIns="45720" rtlCol="0" anchor="ctr"/>
-          <a:lstStyle>
-            <a:defPPr rtl="0">
-              <a:defRPr lang="ko-KR"/>
-            </a:defPPr>
-            <a:lvl1pPr marL="0" algn="r" defTabSz="914400" rtl="0" eaLnBrk="1" latinLnBrk="0" hangingPunct="1">
-              <a:defRPr sz="1200" kern="1200" baseline="0">
-                <a:solidFill>
-                  <a:schemeClr val="tx1">
-                    <a:lumMod val="65000"/>
-                    <a:lumOff val="35000"/>
-                  </a:schemeClr>
-                </a:solidFill>
-                <a:latin typeface="맑은 고딕" panose="020B0503020000020004" pitchFamily="50" charset="-127"/>
-                <a:ea typeface="맑은 고딕" panose="020B0503020000020004" pitchFamily="50" charset="-127"/>
-                <a:cs typeface="+mn-cs"/>
-              </a:defRPr>
-            </a:lvl1pPr>
-            <a:lvl2pPr marL="457200" algn="l" defTabSz="914400" rtl="0" eaLnBrk="1" latinLnBrk="0" hangingPunct="1">
-              <a:defRPr sz="1800" kern="1200">
-                <a:solidFill>
-                  <a:schemeClr val="tx1"/>
-                </a:solidFill>
-                <a:latin typeface="+mn-lt"/>
-                <a:ea typeface="+mn-ea"/>
-                <a:cs typeface="+mn-cs"/>
-              </a:defRPr>
-            </a:lvl2pPr>
-            <a:lvl3pPr marL="914400" algn="l" defTabSz="914400" rtl="0" eaLnBrk="1" latinLnBrk="0" hangingPunct="1">
-              <a:defRPr sz="1800" kern="1200">
-                <a:solidFill>
-                  <a:schemeClr val="tx1"/>
-                </a:solidFill>
-                <a:latin typeface="+mn-lt"/>
-                <a:ea typeface="+mn-ea"/>
-                <a:cs typeface="+mn-cs"/>
-              </a:defRPr>
-            </a:lvl3pPr>
-            <a:lvl4pPr marL="1371600" algn="l" defTabSz="914400" rtl="0" eaLnBrk="1" latinLnBrk="0" hangingPunct="1">
-              <a:defRPr sz="1800" kern="1200">
-                <a:solidFill>
-                  <a:schemeClr val="tx1"/>
-                </a:solidFill>
-                <a:latin typeface="+mn-lt"/>
-                <a:ea typeface="+mn-ea"/>
-                <a:cs typeface="+mn-cs"/>
-              </a:defRPr>
-            </a:lvl4pPr>
-            <a:lvl5pPr marL="1828800" algn="l" defTabSz="914400" rtl="0" eaLnBrk="1" latinLnBrk="0" hangingPunct="1">
-              <a:defRPr sz="1800" kern="1200">
-                <a:solidFill>
-                  <a:schemeClr val="tx1"/>
-                </a:solidFill>
-                <a:latin typeface="+mn-lt"/>
-                <a:ea typeface="+mn-ea"/>
-                <a:cs typeface="+mn-cs"/>
-              </a:defRPr>
-            </a:lvl5pPr>
-            <a:lvl6pPr marL="2286000" algn="l" defTabSz="914400" rtl="0" eaLnBrk="1" latinLnBrk="0" hangingPunct="1">
-              <a:defRPr sz="1800" kern="1200">
-                <a:solidFill>
-                  <a:schemeClr val="tx1"/>
-                </a:solidFill>
-                <a:latin typeface="+mn-lt"/>
-                <a:ea typeface="+mn-ea"/>
-                <a:cs typeface="+mn-cs"/>
-              </a:defRPr>
-            </a:lvl6pPr>
-            <a:lvl7pPr marL="2743200" algn="l" defTabSz="914400" rtl="0" eaLnBrk="1" latinLnBrk="0" hangingPunct="1">
-              <a:defRPr sz="1800" kern="1200">
-                <a:solidFill>
-                  <a:schemeClr val="tx1"/>
-                </a:solidFill>
-                <a:latin typeface="+mn-lt"/>
-                <a:ea typeface="+mn-ea"/>
-                <a:cs typeface="+mn-cs"/>
-              </a:defRPr>
-            </a:lvl7pPr>
-            <a:lvl8pPr marL="3200400" algn="l" defTabSz="914400" rtl="0" eaLnBrk="1" latinLnBrk="0" hangingPunct="1">
-              <a:defRPr sz="1800" kern="1200">
-                <a:solidFill>
-                  <a:schemeClr val="tx1"/>
-                </a:solidFill>
-                <a:latin typeface="+mn-lt"/>
-                <a:ea typeface="+mn-ea"/>
-                <a:cs typeface="+mn-cs"/>
-              </a:defRPr>
-            </a:lvl8pPr>
-            <a:lvl9pPr marL="3657600" algn="l" defTabSz="914400" rtl="0" eaLnBrk="1" latinLnBrk="0" hangingPunct="1">
-              <a:defRPr sz="1800" kern="1200">
-                <a:solidFill>
-                  <a:schemeClr val="tx1"/>
-                </a:solidFill>
-                <a:latin typeface="+mn-lt"/>
-                <a:ea typeface="+mn-ea"/>
-                <a:cs typeface="+mn-cs"/>
-              </a:defRPr>
-            </a:lvl9pPr>
-          </a:lstStyle>
-          <a:p>
-            <a:fld id="{D57F1E4F-1CFF-5643-939E-217C01CDF565}" type="slidenum">
-              <a:rPr lang="en-US" sz="1400" b="1" smtClean="0">
-                <a:latin typeface="Times New Roman" panose="02020603050405020304" pitchFamily="18" charset="0"/>
-                <a:ea typeface="Verdana" panose="020B0604030504040204" pitchFamily="34" charset="0"/>
-                <a:cs typeface="Times New Roman" panose="02020603050405020304" pitchFamily="18" charset="0"/>
-              </a:rPr>
-              <a:pPr/>
-              <a:t>24</a:t>
-            </a:fld>
-            <a:endParaRPr lang="en-US" sz="1400" b="1" dirty="0">
-              <a:latin typeface="Times New Roman" panose="02020603050405020304" pitchFamily="18" charset="0"/>
-              <a:ea typeface="Verdana" panose="020B0604030504040204" pitchFamily="34" charset="0"/>
-              <a:cs typeface="Times New Roman" panose="02020603050405020304" pitchFamily="18" charset="0"/>
-            </a:endParaRPr>
-          </a:p>
-        </p:txBody>
-      </p:sp>
-    </p:spTree>
-    <p:extLst>
-      <p:ext uri="{BB962C8B-B14F-4D97-AF65-F5344CB8AC3E}">
-        <p14:creationId xmlns:p14="http://schemas.microsoft.com/office/powerpoint/2010/main" val="2537073889"/>
-      </p:ext>
-    </p:extLst>
-  </p:cSld>
-  <p:clrMapOvr>
-    <a:masterClrMapping/>
-  </p:clrMapOvr>
-</p:sld>
-</file>
-
-<file path=ppt/slides/slide25.xml><?xml version="1.0" encoding="utf-8"?>
+<file path=ppt/slides/slide22.xml><?xml version="1.0" encoding="utf-8"?>
 <p:sld xmlns:a="http://schemas.openxmlformats.org/drawingml/2006/main" xmlns:r="http://schemas.openxmlformats.org/officeDocument/2006/relationships" xmlns:p="http://schemas.openxmlformats.org/presentationml/2006/main">
   <p:cSld>
     <p:spTree>
@@ -12052,7 +11411,7 @@
                 <a:cs typeface="Times New Roman" panose="02020603050405020304" pitchFamily="18" charset="0"/>
               </a:rPr>
               <a:pPr/>
-              <a:t>25</a:t>
+              <a:t>22</a:t>
             </a:fld>
             <a:endParaRPr lang="en-US" sz="1400" b="1" dirty="0">
               <a:latin typeface="Times New Roman" panose="02020603050405020304" pitchFamily="18" charset="0"/>
@@ -16489,13 +15848,18 @@
         </p:blipFill>
         <p:spPr bwMode="auto">
           <a:xfrm>
-            <a:off x="2604526" y="1895476"/>
+            <a:off x="2680726" y="1718653"/>
             <a:ext cx="5305425" cy="4018466"/>
           </a:xfrm>
           <a:prstGeom prst="rect">
             <a:avLst/>
           </a:prstGeom>
           <a:noFill/>
+          <a:ln>
+            <a:solidFill>
+              <a:schemeClr val="tx1"/>
+            </a:solidFill>
+          </a:ln>
           <a:extLst>
             <a:ext uri="{909E8E84-426E-40DD-AFC4-6F175D3DCCD1}">
               <a14:hiddenFill xmlns:a14="http://schemas.microsoft.com/office/drawing/2010/main">
@@ -16521,7 +15885,7 @@
         </p:nvSpPr>
         <p:spPr>
           <a:xfrm>
-            <a:off x="2604526" y="6020214"/>
+            <a:off x="2604526" y="1422823"/>
             <a:ext cx="6096000" cy="307777"/>
           </a:xfrm>
           <a:prstGeom prst="rect">
@@ -16687,6 +16051,87 @@
               <a:latin typeface="Times New Roman" panose="02020603050405020304" pitchFamily="18" charset="0"/>
               <a:ea typeface="Verdana" panose="020B0604030504040204" pitchFamily="34" charset="0"/>
               <a:cs typeface="Times New Roman" panose="02020603050405020304" pitchFamily="18" charset="0"/>
+            </a:endParaRPr>
+          </a:p>
+        </p:txBody>
+      </p:sp>
+      <p:sp>
+        <p:nvSpPr>
+          <p:cNvPr id="2" name="TextBox 1">
+            <a:extLst>
+              <a:ext uri="{FF2B5EF4-FFF2-40B4-BE49-F238E27FC236}">
+                <a16:creationId xmlns:a16="http://schemas.microsoft.com/office/drawing/2014/main" id="{DA19C123-BA6B-4705-02E3-F826178F1124}"/>
+              </a:ext>
+            </a:extLst>
+          </p:cNvPr>
+          <p:cNvSpPr txBox="1"/>
+          <p:nvPr/>
+        </p:nvSpPr>
+        <p:spPr>
+          <a:xfrm>
+            <a:off x="2596638" y="6010922"/>
+            <a:ext cx="8196475" cy="577081"/>
+          </a:xfrm>
+          <a:prstGeom prst="rect">
+            <a:avLst/>
+          </a:prstGeom>
+          <a:noFill/>
+        </p:spPr>
+        <p:txBody>
+          <a:bodyPr wrap="none" rtlCol="0">
+            <a:spAutoFit/>
+          </a:bodyPr>
+          <a:lstStyle/>
+          <a:p>
+            <a:r>
+              <a:rPr lang="en-US" altLang="ko-KR" sz="1050" dirty="0">
+                <a:latin typeface="D2Coding" panose="020B0609020101020101" pitchFamily="49" charset="-127"/>
+                <a:ea typeface="D2Coding" panose="020B0609020101020101" pitchFamily="49" charset="-127"/>
+                <a:hlinkClick r:id="rId3"/>
+              </a:rPr>
+              <a:t>https://github.com/ancestor9/2026_Fall_Deep-Learning-with-Python/blob/main/scripts/02_Introduction_to_LLM.ipynb</a:t>
+            </a:r>
+            <a:r>
+              <a:rPr lang="en-US" altLang="ko-KR" sz="1050" dirty="0">
+                <a:latin typeface="D2Coding" panose="020B0609020101020101" pitchFamily="49" charset="-127"/>
+                <a:ea typeface="D2Coding" panose="020B0609020101020101" pitchFamily="49" charset="-127"/>
+              </a:rPr>
+              <a:t> </a:t>
+            </a:r>
+          </a:p>
+          <a:p>
+            <a:r>
+              <a:rPr lang="en-US" altLang="ko-KR" sz="1050" dirty="0">
+                <a:latin typeface="D2Coding" panose="020B0609020101020101" pitchFamily="49" charset="-127"/>
+                <a:ea typeface="D2Coding" panose="020B0609020101020101" pitchFamily="49" charset="-127"/>
+                <a:hlinkClick r:id="rId4"/>
+              </a:rPr>
+              <a:t>https://github.com/ancestor9/2026_Fall_Deep-Learning-with-Python/blob/main/scripts/03_Tokens_and_Token_Embeddings.ipynb</a:t>
+            </a:r>
+            <a:endParaRPr lang="en-US" altLang="ko-KR" sz="1050" dirty="0">
+              <a:latin typeface="D2Coding" panose="020B0609020101020101" pitchFamily="49" charset="-127"/>
+              <a:ea typeface="D2Coding" panose="020B0609020101020101" pitchFamily="49" charset="-127"/>
+            </a:endParaRPr>
+          </a:p>
+          <a:p>
+            <a:r>
+              <a:rPr lang="en-US" altLang="ko-KR" sz="1050" dirty="0">
+                <a:latin typeface="D2Coding" panose="020B0609020101020101" pitchFamily="49" charset="-127"/>
+                <a:ea typeface="D2Coding" panose="020B0609020101020101" pitchFamily="49" charset="-127"/>
+                <a:hlinkClick r:id="rId5"/>
+              </a:rPr>
+              <a:t>https://platform.openai.com/tokenizer</a:t>
+            </a:r>
+            <a:r>
+              <a:rPr lang="en-US" altLang="ko-KR" sz="1050" dirty="0">
+                <a:latin typeface="D2Coding" panose="020B0609020101020101" pitchFamily="49" charset="-127"/>
+                <a:ea typeface="D2Coding" panose="020B0609020101020101" pitchFamily="49" charset="-127"/>
+              </a:rPr>
+              <a:t>  </a:t>
+            </a:r>
+            <a:endParaRPr lang="ko-KR" altLang="en-US" sz="1050" dirty="0">
+              <a:latin typeface="D2Coding" panose="020B0609020101020101" pitchFamily="49" charset="-127"/>
+              <a:ea typeface="D2Coding" panose="020B0609020101020101" pitchFamily="49" charset="-127"/>
             </a:endParaRPr>
           </a:p>
         </p:txBody>

--- a/Chapter 14 Text classification.pptx
+++ b/Chapter 14 Text classification.pptx
@@ -286,7 +286,7 @@
                 <a:latin typeface="맑은 고딕" panose="020B0503020000020004" pitchFamily="50" charset="-127"/>
                 <a:ea typeface="맑은 고딕" panose="020B0503020000020004" pitchFamily="50" charset="-127"/>
               </a:rPr>
-              <a:t>2026-09-26</a:t>
+              <a:t>2026-10-07</a:t>
             </a:fld>
             <a:endParaRPr lang="ko-KR" altLang="en-US">
               <a:latin typeface="맑은 고딕" panose="020B0503020000020004" pitchFamily="50" charset="-127"/>
@@ -472,7 +472,7 @@
           <a:p>
             <a:fld id="{43E1C3DD-4A19-441D-907C-380838DB51C4}" type="datetime1">
               <a:rPr lang="ko-KR" altLang="en-US" noProof="0" smtClean="0"/>
-              <a:t>2026-09-26</a:t>
+              <a:t>2026-10-07</a:t>
             </a:fld>
             <a:endParaRPr lang="ko-KR" altLang="en-US" noProof="0"/>
           </a:p>
@@ -1320,7 +1320,7 @@
           <a:p>
             <a:fld id="{990475B5-67CA-4281-BDCA-DA943C3C8EB3}" type="datetime1">
               <a:rPr lang="ko-KR" altLang="en-US" noProof="0" smtClean="0"/>
-              <a:t>2026-09-26</a:t>
+              <a:t>2026-10-07</a:t>
             </a:fld>
             <a:endParaRPr lang="ko-KR" altLang="en-US" noProof="0"/>
           </a:p>
@@ -1974,7 +1974,7 @@
           <a:p>
             <a:fld id="{48A87A34-81AB-432B-8DAE-1953F412C126}" type="datetimeFigureOut">
               <a:rPr lang="en-US" smtClean="0"/>
-              <a:t>9/26/2026</a:t>
+              <a:t>10/7/2026</a:t>
             </a:fld>
             <a:endParaRPr lang="en-US" dirty="0"/>
           </a:p>
@@ -2270,7 +2270,7 @@
           <a:p>
             <a:fld id="{C655C81E-72E7-4D05-94B5-F45B321A525D}" type="datetime1">
               <a:rPr lang="ko-KR" altLang="en-US" noProof="0" smtClean="0"/>
-              <a:t>2026-09-26</a:t>
+              <a:t>2026-10-07</a:t>
             </a:fld>
             <a:endParaRPr lang="ko-KR" altLang="en-US" noProof="0" dirty="0">
               <a:latin typeface="맑은 고딕" panose="020B0503020000020004" pitchFamily="50" charset="-127"/>
@@ -3899,8 +3899,8 @@
         </p:nvSpPr>
         <p:spPr>
           <a:xfrm>
-            <a:off x="607725" y="3233396"/>
-            <a:ext cx="11104881" cy="1531830"/>
+            <a:off x="464850" y="3233396"/>
+            <a:ext cx="11389633" cy="1531830"/>
           </a:xfrm>
           <a:prstGeom prst="rect">
             <a:avLst/>
@@ -3918,10 +3918,12 @@
           </a:bodyPr>
           <a:lstStyle/>
           <a:p>
-            <a:pPr>
+            <a:pPr marL="285750" indent="-285750">
               <a:lnSpc>
                 <a:spcPct val="150000"/>
               </a:lnSpc>
+              <a:buFont typeface="Wingdings" panose="05000000000000000000" pitchFamily="2" charset="2"/>
+              <a:buChar char="§"/>
             </a:pPr>
             <a:r>
               <a:rPr lang="en-US" altLang="ko-KR" sz="1600" b="1" i="0" dirty="0">
@@ -3945,12 +3947,15 @@
               </a:rPr>
               <a:t>grams : an, adorable, little, boy, is, spreading, smiles</a:t>
             </a:r>
-            <a:br>
-              <a:rPr lang="en-US" altLang="ko-KR" sz="1600" dirty="0">
-                <a:latin typeface="D2Coding" panose="020B0609020101020101" pitchFamily="49" charset="-127"/>
-                <a:ea typeface="D2Coding" panose="020B0609020101020101" pitchFamily="49" charset="-127"/>
-              </a:rPr>
-            </a:br>
+          </a:p>
+          <a:p>
+            <a:pPr marL="285750" indent="-285750">
+              <a:lnSpc>
+                <a:spcPct val="150000"/>
+              </a:lnSpc>
+              <a:buFont typeface="Wingdings" panose="05000000000000000000" pitchFamily="2" charset="2"/>
+              <a:buChar char="§"/>
+            </a:pPr>
             <a:r>
               <a:rPr lang="en-US" altLang="ko-KR" sz="1600" b="1" i="0" dirty="0">
                 <a:solidFill>
@@ -3973,12 +3978,15 @@
               </a:rPr>
               <a:t>grams : an adorable, adorable little, little boy, boy is, is spreading, spreading smiles</a:t>
             </a:r>
-            <a:br>
-              <a:rPr lang="en-US" altLang="ko-KR" sz="1600" dirty="0">
-                <a:latin typeface="D2Coding" panose="020B0609020101020101" pitchFamily="49" charset="-127"/>
-                <a:ea typeface="D2Coding" panose="020B0609020101020101" pitchFamily="49" charset="-127"/>
-              </a:rPr>
-            </a:br>
+          </a:p>
+          <a:p>
+            <a:pPr marL="285750" indent="-285750">
+              <a:lnSpc>
+                <a:spcPct val="150000"/>
+              </a:lnSpc>
+              <a:buFont typeface="Wingdings" panose="05000000000000000000" pitchFamily="2" charset="2"/>
+              <a:buChar char="§"/>
+            </a:pPr>
             <a:r>
               <a:rPr lang="en-US" altLang="ko-KR" sz="1600" b="1" i="0" dirty="0">
                 <a:solidFill>
@@ -4001,12 +4009,15 @@
               </a:rPr>
               <a:t>grams : an adorable little, adorable little boy, little boy is, boy is spreading, is spreading smiles</a:t>
             </a:r>
-            <a:br>
-              <a:rPr lang="en-US" altLang="ko-KR" sz="1600" dirty="0">
-                <a:latin typeface="D2Coding" panose="020B0609020101020101" pitchFamily="49" charset="-127"/>
-                <a:ea typeface="D2Coding" panose="020B0609020101020101" pitchFamily="49" charset="-127"/>
-              </a:rPr>
-            </a:br>
+          </a:p>
+          <a:p>
+            <a:pPr marL="285750" indent="-285750">
+              <a:lnSpc>
+                <a:spcPct val="150000"/>
+              </a:lnSpc>
+              <a:buFont typeface="Wingdings" panose="05000000000000000000" pitchFamily="2" charset="2"/>
+              <a:buChar char="§"/>
+            </a:pPr>
             <a:r>
               <a:rPr lang="en-US" altLang="ko-KR" sz="1600" b="1" i="0" dirty="0">
                 <a:solidFill>
@@ -4149,7 +4160,7 @@
         <p:spPr>
           <a:xfrm>
             <a:off x="1207166" y="2408539"/>
-            <a:ext cx="4888834" cy="465320"/>
+            <a:ext cx="4888834" cy="423834"/>
           </a:xfrm>
           <a:prstGeom prst="rect">
             <a:avLst/>
@@ -4170,7 +4181,7 @@
               </a:lnSpc>
             </a:pPr>
             <a:r>
-              <a:rPr lang="en-US" altLang="ko-KR" dirty="0">
+              <a:rPr lang="en-US" altLang="ko-KR" sz="1600" dirty="0">
                 <a:solidFill>
                   <a:schemeClr val="bg1"/>
                 </a:solidFill>
@@ -4180,7 +4191,7 @@
               <a:t>N-gram </a:t>
             </a:r>
             <a:r>
-              <a:rPr lang="ko-KR" altLang="en-US" dirty="0">
+              <a:rPr lang="ko-KR" altLang="en-US" sz="1600" dirty="0">
                 <a:solidFill>
                   <a:schemeClr val="bg1"/>
                 </a:solidFill>
@@ -4190,7 +4201,7 @@
               <a:t>언어 모델</a:t>
             </a:r>
             <a:r>
-              <a:rPr lang="en-US" altLang="ko-KR" dirty="0">
+              <a:rPr lang="en-US" altLang="ko-KR" sz="1600" dirty="0">
                 <a:solidFill>
                   <a:schemeClr val="bg1"/>
                 </a:solidFill>
@@ -4199,7 +4210,7 @@
               </a:rPr>
               <a:t>(N-gram Language Model)</a:t>
             </a:r>
-            <a:endParaRPr lang="ko-KR" altLang="en-US" dirty="0">
+            <a:endParaRPr lang="ko-KR" altLang="en-US" sz="1600" dirty="0">
               <a:solidFill>
                 <a:schemeClr val="bg1"/>
               </a:solidFill>
@@ -4223,7 +4234,7 @@
         </p:nvSpPr>
         <p:spPr>
           <a:xfrm>
-            <a:off x="607725" y="5388923"/>
+            <a:off x="1045875" y="5207948"/>
             <a:ext cx="9023955" cy="1162498"/>
           </a:xfrm>
           <a:prstGeom prst="rect">
@@ -4367,7 +4378,7 @@
         </p:nvSpPr>
         <p:spPr>
           <a:xfrm>
-            <a:off x="6238750" y="2850919"/>
+            <a:off x="6391150" y="2850919"/>
             <a:ext cx="5473856" cy="382477"/>
           </a:xfrm>
           <a:prstGeom prst="rect">
@@ -6507,7 +6518,7 @@
         </p:nvSpPr>
         <p:spPr>
           <a:xfrm>
-            <a:off x="619125" y="4591049"/>
+            <a:off x="619125" y="4229099"/>
             <a:ext cx="10277475" cy="390525"/>
           </a:xfrm>
           <a:prstGeom prst="rect">
@@ -6637,7 +6648,7 @@
         <p:spPr>
           <a:xfrm>
             <a:off x="861450" y="1400822"/>
-            <a:ext cx="10778099" cy="5009064"/>
+            <a:ext cx="10778099" cy="4416594"/>
           </a:xfrm>
           <a:prstGeom prst="rect">
             <a:avLst/>
@@ -6655,90 +6666,90 @@
               <a:buAutoNum type="arabicPeriod"/>
             </a:pPr>
             <a:r>
-              <a:rPr lang="ko-KR" altLang="en-US" dirty="0" err="1">
+              <a:rPr lang="ko-KR" altLang="en-US" sz="1600" dirty="0" err="1">
                 <a:latin typeface="D2Coding" panose="020B0609020101020101" pitchFamily="49" charset="-127"/>
                 <a:ea typeface="D2Coding" panose="020B0609020101020101" pitchFamily="49" charset="-127"/>
               </a:rPr>
               <a:t>A</a:t>
             </a:r>
             <a:r>
-              <a:rPr lang="ko-KR" altLang="en-US" dirty="0">
+              <a:rPr lang="ko-KR" altLang="en-US" sz="1600" dirty="0">
                 <a:latin typeface="D2Coding" panose="020B0609020101020101" pitchFamily="49" charset="-127"/>
                 <a:ea typeface="D2Coding" panose="020B0609020101020101" pitchFamily="49" charset="-127"/>
               </a:rPr>
               <a:t> </a:t>
             </a:r>
             <a:r>
-              <a:rPr lang="ko-KR" altLang="en-US" dirty="0" err="1">
+              <a:rPr lang="ko-KR" altLang="en-US" sz="1600" dirty="0" err="1">
                 <a:latin typeface="D2Coding" panose="020B0609020101020101" pitchFamily="49" charset="-127"/>
                 <a:ea typeface="D2Coding" panose="020B0609020101020101" pitchFamily="49" charset="-127"/>
               </a:rPr>
               <a:t>brief</a:t>
             </a:r>
             <a:r>
-              <a:rPr lang="ko-KR" altLang="en-US" dirty="0">
+              <a:rPr lang="ko-KR" altLang="en-US" sz="1600" dirty="0">
                 <a:latin typeface="D2Coding" panose="020B0609020101020101" pitchFamily="49" charset="-127"/>
                 <a:ea typeface="D2Coding" panose="020B0609020101020101" pitchFamily="49" charset="-127"/>
               </a:rPr>
               <a:t> </a:t>
             </a:r>
             <a:r>
-              <a:rPr lang="ko-KR" altLang="en-US" dirty="0" err="1">
+              <a:rPr lang="ko-KR" altLang="en-US" sz="1600" dirty="0" err="1">
                 <a:latin typeface="D2Coding" panose="020B0609020101020101" pitchFamily="49" charset="-127"/>
                 <a:ea typeface="D2Coding" panose="020B0609020101020101" pitchFamily="49" charset="-127"/>
               </a:rPr>
               <a:t>history</a:t>
             </a:r>
             <a:r>
-              <a:rPr lang="ko-KR" altLang="en-US" dirty="0">
+              <a:rPr lang="ko-KR" altLang="en-US" sz="1600" dirty="0">
                 <a:latin typeface="D2Coding" panose="020B0609020101020101" pitchFamily="49" charset="-127"/>
                 <a:ea typeface="D2Coding" panose="020B0609020101020101" pitchFamily="49" charset="-127"/>
               </a:rPr>
               <a:t> of </a:t>
             </a:r>
             <a:r>
-              <a:rPr lang="ko-KR" altLang="en-US" dirty="0" err="1">
+              <a:rPr lang="ko-KR" altLang="en-US" sz="1600" dirty="0" err="1">
                 <a:latin typeface="D2Coding" panose="020B0609020101020101" pitchFamily="49" charset="-127"/>
                 <a:ea typeface="D2Coding" panose="020B0609020101020101" pitchFamily="49" charset="-127"/>
               </a:rPr>
               <a:t>natural</a:t>
             </a:r>
             <a:r>
-              <a:rPr lang="ko-KR" altLang="en-US" dirty="0">
+              <a:rPr lang="ko-KR" altLang="en-US" sz="1600" dirty="0">
                 <a:latin typeface="D2Coding" panose="020B0609020101020101" pitchFamily="49" charset="-127"/>
                 <a:ea typeface="D2Coding" panose="020B0609020101020101" pitchFamily="49" charset="-127"/>
               </a:rPr>
               <a:t> </a:t>
             </a:r>
             <a:r>
-              <a:rPr lang="ko-KR" altLang="en-US" dirty="0" err="1">
+              <a:rPr lang="ko-KR" altLang="en-US" sz="1600" dirty="0" err="1">
                 <a:latin typeface="D2Coding" panose="020B0609020101020101" pitchFamily="49" charset="-127"/>
                 <a:ea typeface="D2Coding" panose="020B0609020101020101" pitchFamily="49" charset="-127"/>
               </a:rPr>
               <a:t>language</a:t>
             </a:r>
             <a:r>
-              <a:rPr lang="ko-KR" altLang="en-US" dirty="0">
+              <a:rPr lang="ko-KR" altLang="en-US" sz="1600" dirty="0">
                 <a:latin typeface="D2Coding" panose="020B0609020101020101" pitchFamily="49" charset="-127"/>
                 <a:ea typeface="D2Coding" panose="020B0609020101020101" pitchFamily="49" charset="-127"/>
               </a:rPr>
               <a:t> </a:t>
             </a:r>
             <a:r>
-              <a:rPr lang="ko-KR" altLang="en-US" dirty="0" err="1">
+              <a:rPr lang="ko-KR" altLang="en-US" sz="1600" dirty="0" err="1">
                 <a:latin typeface="D2Coding" panose="020B0609020101020101" pitchFamily="49" charset="-127"/>
                 <a:ea typeface="D2Coding" panose="020B0609020101020101" pitchFamily="49" charset="-127"/>
               </a:rPr>
               <a:t>processing</a:t>
             </a:r>
             <a:r>
-              <a:rPr lang="ko-KR" altLang="en-US" dirty="0">
+              <a:rPr lang="ko-KR" altLang="en-US" sz="1600" dirty="0">
                 <a:latin typeface="D2Coding" panose="020B0609020101020101" pitchFamily="49" charset="-127"/>
                 <a:ea typeface="D2Coding" panose="020B0609020101020101" pitchFamily="49" charset="-127"/>
               </a:rPr>
               <a:t> (자연어 처리의 개요/역사)</a:t>
             </a:r>
-            <a:endParaRPr lang="en-US" altLang="ko-KR" dirty="0">
+            <a:endParaRPr lang="en-US" altLang="ko-KR" sz="1600" dirty="0">
               <a:latin typeface="D2Coding" panose="020B0609020101020101" pitchFamily="49" charset="-127"/>
               <a:ea typeface="D2Coding" panose="020B0609020101020101" pitchFamily="49" charset="-127"/>
             </a:endParaRPr>
@@ -6748,7 +6759,7 @@
               <a:buFont typeface="+mj-lt"/>
               <a:buAutoNum type="arabicPeriod"/>
             </a:pPr>
-            <a:endParaRPr lang="ko-KR" altLang="en-US" sz="1050" dirty="0">
+            <a:endParaRPr lang="ko-KR" altLang="en-US" sz="1000" dirty="0">
               <a:latin typeface="D2Coding" panose="020B0609020101020101" pitchFamily="49" charset="-127"/>
               <a:ea typeface="D2Coding" panose="020B0609020101020101" pitchFamily="49" charset="-127"/>
             </a:endParaRPr>
@@ -6759,62 +6770,62 @@
               <a:buAutoNum type="arabicPeriod"/>
             </a:pPr>
             <a:r>
-              <a:rPr lang="ko-KR" altLang="en-US" dirty="0" err="1">
+              <a:rPr lang="ko-KR" altLang="en-US" sz="1600" dirty="0" err="1">
                 <a:latin typeface="D2Coding" panose="020B0609020101020101" pitchFamily="49" charset="-127"/>
                 <a:ea typeface="D2Coding" panose="020B0609020101020101" pitchFamily="49" charset="-127"/>
               </a:rPr>
               <a:t>Preparing</a:t>
             </a:r>
             <a:r>
-              <a:rPr lang="ko-KR" altLang="en-US" dirty="0">
+              <a:rPr lang="ko-KR" altLang="en-US" sz="1600" dirty="0">
                 <a:latin typeface="D2Coding" panose="020B0609020101020101" pitchFamily="49" charset="-127"/>
                 <a:ea typeface="D2Coding" panose="020B0609020101020101" pitchFamily="49" charset="-127"/>
               </a:rPr>
               <a:t> </a:t>
             </a:r>
             <a:r>
-              <a:rPr lang="ko-KR" altLang="en-US" dirty="0" err="1">
+              <a:rPr lang="ko-KR" altLang="en-US" sz="1600" dirty="0" err="1">
                 <a:latin typeface="D2Coding" panose="020B0609020101020101" pitchFamily="49" charset="-127"/>
                 <a:ea typeface="D2Coding" panose="020B0609020101020101" pitchFamily="49" charset="-127"/>
               </a:rPr>
               <a:t>text</a:t>
             </a:r>
             <a:r>
-              <a:rPr lang="ko-KR" altLang="en-US" dirty="0">
+              <a:rPr lang="ko-KR" altLang="en-US" sz="1600" dirty="0">
                 <a:latin typeface="D2Coding" panose="020B0609020101020101" pitchFamily="49" charset="-127"/>
                 <a:ea typeface="D2Coding" panose="020B0609020101020101" pitchFamily="49" charset="-127"/>
               </a:rPr>
               <a:t> </a:t>
             </a:r>
             <a:r>
-              <a:rPr lang="ko-KR" altLang="en-US" dirty="0" err="1">
+              <a:rPr lang="ko-KR" altLang="en-US" sz="1600" dirty="0" err="1">
                 <a:latin typeface="D2Coding" panose="020B0609020101020101" pitchFamily="49" charset="-127"/>
                 <a:ea typeface="D2Coding" panose="020B0609020101020101" pitchFamily="49" charset="-127"/>
               </a:rPr>
               <a:t>data</a:t>
             </a:r>
             <a:r>
-              <a:rPr lang="ko-KR" altLang="en-US" dirty="0">
+              <a:rPr lang="ko-KR" altLang="en-US" sz="1600" dirty="0">
                 <a:latin typeface="D2Coding" panose="020B0609020101020101" pitchFamily="49" charset="-127"/>
                 <a:ea typeface="D2Coding" panose="020B0609020101020101" pitchFamily="49" charset="-127"/>
               </a:rPr>
               <a:t> (텍스트 데이터 </a:t>
             </a:r>
             <a:r>
-              <a:rPr lang="ko-KR" altLang="en-US" dirty="0" err="1">
+              <a:rPr lang="ko-KR" altLang="en-US" sz="1600" dirty="0" err="1">
                 <a:latin typeface="D2Coding" panose="020B0609020101020101" pitchFamily="49" charset="-127"/>
                 <a:ea typeface="D2Coding" panose="020B0609020101020101" pitchFamily="49" charset="-127"/>
               </a:rPr>
               <a:t>전처리</a:t>
             </a:r>
             <a:r>
-              <a:rPr lang="ko-KR" altLang="en-US" dirty="0">
+              <a:rPr lang="ko-KR" altLang="en-US" sz="1600" dirty="0">
                 <a:latin typeface="D2Coding" panose="020B0609020101020101" pitchFamily="49" charset="-127"/>
                 <a:ea typeface="D2Coding" panose="020B0609020101020101" pitchFamily="49" charset="-127"/>
               </a:rPr>
               <a:t>)</a:t>
             </a:r>
-            <a:endParaRPr lang="en-US" altLang="ko-KR" dirty="0">
+            <a:endParaRPr lang="en-US" altLang="ko-KR" sz="1600" dirty="0">
               <a:latin typeface="D2Coding" panose="020B0609020101020101" pitchFamily="49" charset="-127"/>
               <a:ea typeface="D2Coding" panose="020B0609020101020101" pitchFamily="49" charset="-127"/>
             </a:endParaRPr>
@@ -6828,46 +6839,156 @@
               <a:buAutoNum type="arabicPeriod"/>
             </a:pPr>
             <a:r>
+              <a:rPr lang="ko-KR" altLang="en-US" sz="1400" dirty="0" err="1">
+                <a:latin typeface="D2Coding" panose="020B0609020101020101" pitchFamily="49" charset="-127"/>
+                <a:ea typeface="D2Coding" panose="020B0609020101020101" pitchFamily="49" charset="-127"/>
+              </a:rPr>
+              <a:t>Character</a:t>
+            </a:r>
+            <a:r>
+              <a:rPr lang="ko-KR" altLang="en-US" sz="1400" dirty="0">
+                <a:latin typeface="D2Coding" panose="020B0609020101020101" pitchFamily="49" charset="-127"/>
+                <a:ea typeface="D2Coding" panose="020B0609020101020101" pitchFamily="49" charset="-127"/>
+              </a:rPr>
+              <a:t> and </a:t>
+            </a:r>
+            <a:r>
+              <a:rPr lang="ko-KR" altLang="en-US" sz="1400" dirty="0" err="1">
+                <a:latin typeface="D2Coding" panose="020B0609020101020101" pitchFamily="49" charset="-127"/>
+                <a:ea typeface="D2Coding" panose="020B0609020101020101" pitchFamily="49" charset="-127"/>
+              </a:rPr>
+              <a:t>word</a:t>
+            </a:r>
+            <a:r>
+              <a:rPr lang="ko-KR" altLang="en-US" sz="1400" dirty="0">
+                <a:latin typeface="D2Coding" panose="020B0609020101020101" pitchFamily="49" charset="-127"/>
+                <a:ea typeface="D2Coding" panose="020B0609020101020101" pitchFamily="49" charset="-127"/>
+              </a:rPr>
+              <a:t> </a:t>
+            </a:r>
+            <a:r>
+              <a:rPr lang="ko-KR" altLang="en-US" sz="1400" dirty="0" err="1">
+                <a:latin typeface="D2Coding" panose="020B0609020101020101" pitchFamily="49" charset="-127"/>
+                <a:ea typeface="D2Coding" panose="020B0609020101020101" pitchFamily="49" charset="-127"/>
+              </a:rPr>
+              <a:t>tokenization</a:t>
+            </a:r>
+            <a:r>
+              <a:rPr lang="ko-KR" altLang="en-US" sz="1400" dirty="0">
+                <a:latin typeface="D2Coding" panose="020B0609020101020101" pitchFamily="49" charset="-127"/>
+                <a:ea typeface="D2Coding" panose="020B0609020101020101" pitchFamily="49" charset="-127"/>
+              </a:rPr>
+              <a:t> (문자 및 단어 단위 토큰화)</a:t>
+            </a:r>
+            <a:endParaRPr lang="en-US" altLang="ko-KR" sz="1400" dirty="0">
+              <a:latin typeface="D2Coding" panose="020B0609020101020101" pitchFamily="49" charset="-127"/>
+              <a:ea typeface="D2Coding" panose="020B0609020101020101" pitchFamily="49" charset="-127"/>
+            </a:endParaRPr>
+          </a:p>
+          <a:p>
+            <a:pPr marL="800100" lvl="1" indent="-342900">
+              <a:buFont typeface="+mj-lt"/>
+              <a:buAutoNum type="arabicPeriod"/>
+            </a:pPr>
+            <a:r>
+              <a:rPr lang="ko-KR" altLang="en-US" sz="1400" dirty="0" err="1">
+                <a:latin typeface="D2Coding" panose="020B0609020101020101" pitchFamily="49" charset="-127"/>
+                <a:ea typeface="D2Coding" panose="020B0609020101020101" pitchFamily="49" charset="-127"/>
+              </a:rPr>
+              <a:t>Subword</a:t>
+            </a:r>
+            <a:r>
+              <a:rPr lang="ko-KR" altLang="en-US" sz="1400" dirty="0">
+                <a:latin typeface="D2Coding" panose="020B0609020101020101" pitchFamily="49" charset="-127"/>
+                <a:ea typeface="D2Coding" panose="020B0609020101020101" pitchFamily="49" charset="-127"/>
+              </a:rPr>
+              <a:t> </a:t>
+            </a:r>
+            <a:r>
+              <a:rPr lang="ko-KR" altLang="en-US" sz="1400" dirty="0" err="1">
+                <a:latin typeface="D2Coding" panose="020B0609020101020101" pitchFamily="49" charset="-127"/>
+                <a:ea typeface="D2Coding" panose="020B0609020101020101" pitchFamily="49" charset="-127"/>
+              </a:rPr>
+              <a:t>tokenization</a:t>
+            </a:r>
+            <a:r>
+              <a:rPr lang="ko-KR" altLang="en-US" sz="1400" dirty="0">
+                <a:latin typeface="D2Coding" panose="020B0609020101020101" pitchFamily="49" charset="-127"/>
+                <a:ea typeface="D2Coding" panose="020B0609020101020101" pitchFamily="49" charset="-127"/>
+              </a:rPr>
+              <a:t> (</a:t>
+            </a:r>
+            <a:r>
+              <a:rPr lang="ko-KR" altLang="en-US" sz="1400" dirty="0" err="1">
+                <a:latin typeface="D2Coding" panose="020B0609020101020101" pitchFamily="49" charset="-127"/>
+                <a:ea typeface="D2Coding" panose="020B0609020101020101" pitchFamily="49" charset="-127"/>
+              </a:rPr>
+              <a:t>서브워드</a:t>
+            </a:r>
+            <a:r>
+              <a:rPr lang="ko-KR" altLang="en-US" sz="1400" dirty="0">
+                <a:latin typeface="D2Coding" panose="020B0609020101020101" pitchFamily="49" charset="-127"/>
+                <a:ea typeface="D2Coding" panose="020B0609020101020101" pitchFamily="49" charset="-127"/>
+              </a:rPr>
+              <a:t> 단위 토큰화)</a:t>
+            </a:r>
+          </a:p>
+          <a:p>
+            <a:pPr marL="342900" indent="-342900">
+              <a:buFont typeface="+mj-lt"/>
+              <a:buAutoNum type="arabicPeriod"/>
+            </a:pPr>
+            <a:endParaRPr lang="ko-KR" altLang="en-US" sz="1000" dirty="0">
+              <a:latin typeface="D2Coding" panose="020B0609020101020101" pitchFamily="49" charset="-127"/>
+              <a:ea typeface="D2Coding" panose="020B0609020101020101" pitchFamily="49" charset="-127"/>
+            </a:endParaRPr>
+          </a:p>
+          <a:p>
+            <a:pPr marL="342900" indent="-342900">
+              <a:buFont typeface="+mj-lt"/>
+              <a:buAutoNum type="arabicPeriod"/>
+            </a:pPr>
+            <a:r>
               <a:rPr lang="ko-KR" altLang="en-US" sz="1600" dirty="0" err="1">
                 <a:latin typeface="D2Coding" panose="020B0609020101020101" pitchFamily="49" charset="-127"/>
                 <a:ea typeface="D2Coding" panose="020B0609020101020101" pitchFamily="49" charset="-127"/>
               </a:rPr>
-              <a:t>Character</a:t>
+              <a:t>Sets</a:t>
             </a:r>
             <a:r>
               <a:rPr lang="ko-KR" altLang="en-US" sz="1600" dirty="0">
                 <a:latin typeface="D2Coding" panose="020B0609020101020101" pitchFamily="49" charset="-127"/>
                 <a:ea typeface="D2Coding" panose="020B0609020101020101" pitchFamily="49" charset="-127"/>
               </a:rPr>
-              <a:t> and </a:t>
+              <a:t> </a:t>
             </a:r>
             <a:r>
               <a:rPr lang="ko-KR" altLang="en-US" sz="1600" dirty="0" err="1">
                 <a:latin typeface="D2Coding" panose="020B0609020101020101" pitchFamily="49" charset="-127"/>
                 <a:ea typeface="D2Coding" panose="020B0609020101020101" pitchFamily="49" charset="-127"/>
               </a:rPr>
-              <a:t>word</a:t>
+              <a:t>vs</a:t>
             </a:r>
             <a:r>
               <a:rPr lang="ko-KR" altLang="en-US" sz="1600" dirty="0">
                 <a:latin typeface="D2Coding" panose="020B0609020101020101" pitchFamily="49" charset="-127"/>
                 <a:ea typeface="D2Coding" panose="020B0609020101020101" pitchFamily="49" charset="-127"/>
               </a:rPr>
-              <a:t> </a:t>
+              <a:t>. </a:t>
             </a:r>
             <a:r>
               <a:rPr lang="ko-KR" altLang="en-US" sz="1600" dirty="0" err="1">
                 <a:latin typeface="D2Coding" panose="020B0609020101020101" pitchFamily="49" charset="-127"/>
                 <a:ea typeface="D2Coding" panose="020B0609020101020101" pitchFamily="49" charset="-127"/>
               </a:rPr>
-              <a:t>tokenization</a:t>
+              <a:t>sequences</a:t>
             </a:r>
             <a:r>
               <a:rPr lang="ko-KR" altLang="en-US" sz="1600" dirty="0">
                 <a:latin typeface="D2Coding" panose="020B0609020101020101" pitchFamily="49" charset="-127"/>
                 <a:ea typeface="D2Coding" panose="020B0609020101020101" pitchFamily="49" charset="-127"/>
               </a:rPr>
-              <a:t> (문자 및 단어 단위 토큰화)</a:t>
+              <a:t> (텍스트 표현 관점의 비교)</a:t>
             </a:r>
             <a:endParaRPr lang="en-US" altLang="ko-KR" sz="1600" dirty="0">
               <a:latin typeface="D2Coding" panose="020B0609020101020101" pitchFamily="49" charset="-127"/>
@@ -6880,46 +7001,88 @@
               <a:buAutoNum type="arabicPeriod"/>
             </a:pPr>
             <a:r>
-              <a:rPr lang="ko-KR" altLang="en-US" sz="1600" dirty="0" err="1">
-                <a:latin typeface="D2Coding" panose="020B0609020101020101" pitchFamily="49" charset="-127"/>
-                <a:ea typeface="D2Coding" panose="020B0609020101020101" pitchFamily="49" charset="-127"/>
-              </a:rPr>
-              <a:t>Subword</a:t>
-            </a:r>
-            <a:r>
-              <a:rPr lang="ko-KR" altLang="en-US" sz="1600" dirty="0">
+              <a:rPr lang="ko-KR" altLang="en-US" sz="1400" dirty="0" err="1">
+                <a:latin typeface="D2Coding" panose="020B0609020101020101" pitchFamily="49" charset="-127"/>
+                <a:ea typeface="D2Coding" panose="020B0609020101020101" pitchFamily="49" charset="-127"/>
+              </a:rPr>
+              <a:t>Loading</a:t>
+            </a:r>
+            <a:r>
+              <a:rPr lang="ko-KR" altLang="en-US" sz="1400" dirty="0">
                 <a:latin typeface="D2Coding" panose="020B0609020101020101" pitchFamily="49" charset="-127"/>
                 <a:ea typeface="D2Coding" panose="020B0609020101020101" pitchFamily="49" charset="-127"/>
               </a:rPr>
               <a:t> </a:t>
             </a:r>
             <a:r>
-              <a:rPr lang="ko-KR" altLang="en-US" sz="1600" dirty="0" err="1">
-                <a:latin typeface="D2Coding" panose="020B0609020101020101" pitchFamily="49" charset="-127"/>
-                <a:ea typeface="D2Coding" panose="020B0609020101020101" pitchFamily="49" charset="-127"/>
-              </a:rPr>
-              <a:t>tokenization</a:t>
-            </a:r>
-            <a:r>
-              <a:rPr lang="ko-KR" altLang="en-US" sz="1600" dirty="0">
+              <a:rPr lang="ko-KR" altLang="en-US" sz="1400" dirty="0" err="1">
+                <a:latin typeface="D2Coding" panose="020B0609020101020101" pitchFamily="49" charset="-127"/>
+                <a:ea typeface="D2Coding" panose="020B0609020101020101" pitchFamily="49" charset="-127"/>
+              </a:rPr>
+              <a:t>the</a:t>
+            </a:r>
+            <a:r>
+              <a:rPr lang="ko-KR" altLang="en-US" sz="1400" dirty="0">
+                <a:latin typeface="D2Coding" panose="020B0609020101020101" pitchFamily="49" charset="-127"/>
+                <a:ea typeface="D2Coding" panose="020B0609020101020101" pitchFamily="49" charset="-127"/>
+              </a:rPr>
+              <a:t> </a:t>
+            </a:r>
+            <a:r>
+              <a:rPr lang="ko-KR" altLang="en-US" sz="1400" dirty="0" err="1">
+                <a:latin typeface="D2Coding" panose="020B0609020101020101" pitchFamily="49" charset="-127"/>
+                <a:ea typeface="D2Coding" panose="020B0609020101020101" pitchFamily="49" charset="-127"/>
+              </a:rPr>
+              <a:t>IMDb</a:t>
+            </a:r>
+            <a:r>
+              <a:rPr lang="ko-KR" altLang="en-US" sz="1400" dirty="0">
+                <a:latin typeface="D2Coding" panose="020B0609020101020101" pitchFamily="49" charset="-127"/>
+                <a:ea typeface="D2Coding" panose="020B0609020101020101" pitchFamily="49" charset="-127"/>
+              </a:rPr>
+              <a:t> </a:t>
+            </a:r>
+            <a:r>
+              <a:rPr lang="ko-KR" altLang="en-US" sz="1400" dirty="0" err="1">
+                <a:latin typeface="D2Coding" panose="020B0609020101020101" pitchFamily="49" charset="-127"/>
+                <a:ea typeface="D2Coding" panose="020B0609020101020101" pitchFamily="49" charset="-127"/>
+              </a:rPr>
+              <a:t>classification</a:t>
+            </a:r>
+            <a:r>
+              <a:rPr lang="ko-KR" altLang="en-US" sz="1400" dirty="0">
+                <a:latin typeface="D2Coding" panose="020B0609020101020101" pitchFamily="49" charset="-127"/>
+                <a:ea typeface="D2Coding" panose="020B0609020101020101" pitchFamily="49" charset="-127"/>
+              </a:rPr>
+              <a:t> </a:t>
+            </a:r>
+            <a:r>
+              <a:rPr lang="ko-KR" altLang="en-US" sz="1400" dirty="0" err="1">
+                <a:latin typeface="D2Coding" panose="020B0609020101020101" pitchFamily="49" charset="-127"/>
+                <a:ea typeface="D2Coding" panose="020B0609020101020101" pitchFamily="49" charset="-127"/>
+              </a:rPr>
+              <a:t>dataset</a:t>
+            </a:r>
+            <a:r>
+              <a:rPr lang="ko-KR" altLang="en-US" sz="1400" dirty="0">
                 <a:latin typeface="D2Coding" panose="020B0609020101020101" pitchFamily="49" charset="-127"/>
                 <a:ea typeface="D2Coding" panose="020B0609020101020101" pitchFamily="49" charset="-127"/>
               </a:rPr>
               <a:t> (</a:t>
             </a:r>
             <a:r>
-              <a:rPr lang="ko-KR" altLang="en-US" sz="1600" dirty="0" err="1">
-                <a:latin typeface="D2Coding" panose="020B0609020101020101" pitchFamily="49" charset="-127"/>
-                <a:ea typeface="D2Coding" panose="020B0609020101020101" pitchFamily="49" charset="-127"/>
-              </a:rPr>
-              <a:t>서브워드</a:t>
-            </a:r>
-            <a:r>
-              <a:rPr lang="ko-KR" altLang="en-US" sz="1600" dirty="0">
-                <a:latin typeface="D2Coding" panose="020B0609020101020101" pitchFamily="49" charset="-127"/>
-                <a:ea typeface="D2Coding" panose="020B0609020101020101" pitchFamily="49" charset="-127"/>
-              </a:rPr>
-              <a:t> 단위 토큰화)</a:t>
+              <a:rPr lang="ko-KR" altLang="en-US" sz="1400" dirty="0" err="1">
+                <a:latin typeface="D2Coding" panose="020B0609020101020101" pitchFamily="49" charset="-127"/>
+                <a:ea typeface="D2Coding" panose="020B0609020101020101" pitchFamily="49" charset="-127"/>
+              </a:rPr>
+              <a:t>IMDb</a:t>
+            </a:r>
+            <a:r>
+              <a:rPr lang="ko-KR" altLang="en-US" sz="1400" dirty="0">
+                <a:latin typeface="D2Coding" panose="020B0609020101020101" pitchFamily="49" charset="-127"/>
+                <a:ea typeface="D2Coding" panose="020B0609020101020101" pitchFamily="49" charset="-127"/>
+              </a:rPr>
+              <a:t> 영화 리뷰 분류 데이터셋 로딩)</a:t>
             </a:r>
           </a:p>
           <a:p>
@@ -6927,7 +7090,7 @@
               <a:buFont typeface="+mj-lt"/>
               <a:buAutoNum type="arabicPeriod"/>
             </a:pPr>
-            <a:endParaRPr lang="ko-KR" altLang="en-US" sz="1050" dirty="0">
+            <a:endParaRPr lang="ko-KR" altLang="en-US" sz="1000" dirty="0">
               <a:latin typeface="D2Coding" panose="020B0609020101020101" pitchFamily="49" charset="-127"/>
               <a:ea typeface="D2Coding" panose="020B0609020101020101" pitchFamily="49" charset="-127"/>
             </a:endParaRPr>
@@ -6938,186 +7101,34 @@
               <a:buAutoNum type="arabicPeriod"/>
             </a:pPr>
             <a:r>
-              <a:rPr lang="ko-KR" altLang="en-US" dirty="0" err="1">
-                <a:latin typeface="D2Coding" panose="020B0609020101020101" pitchFamily="49" charset="-127"/>
-                <a:ea typeface="D2Coding" panose="020B0609020101020101" pitchFamily="49" charset="-127"/>
-              </a:rPr>
-              <a:t>Sets</a:t>
-            </a:r>
-            <a:r>
-              <a:rPr lang="ko-KR" altLang="en-US" dirty="0">
+              <a:rPr lang="ko-KR" altLang="en-US" sz="1600" dirty="0" err="1">
+                <a:latin typeface="D2Coding" panose="020B0609020101020101" pitchFamily="49" charset="-127"/>
+                <a:ea typeface="D2Coding" panose="020B0609020101020101" pitchFamily="49" charset="-127"/>
+              </a:rPr>
+              <a:t>Set</a:t>
+            </a:r>
+            <a:r>
+              <a:rPr lang="ko-KR" altLang="en-US" sz="1600" dirty="0">
                 <a:latin typeface="D2Coding" panose="020B0609020101020101" pitchFamily="49" charset="-127"/>
                 <a:ea typeface="D2Coding" panose="020B0609020101020101" pitchFamily="49" charset="-127"/>
               </a:rPr>
               <a:t> </a:t>
             </a:r>
             <a:r>
-              <a:rPr lang="ko-KR" altLang="en-US" dirty="0" err="1">
-                <a:latin typeface="D2Coding" panose="020B0609020101020101" pitchFamily="49" charset="-127"/>
-                <a:ea typeface="D2Coding" panose="020B0609020101020101" pitchFamily="49" charset="-127"/>
-              </a:rPr>
-              <a:t>vs</a:t>
-            </a:r>
-            <a:r>
-              <a:rPr lang="ko-KR" altLang="en-US" dirty="0">
-                <a:latin typeface="D2Coding" panose="020B0609020101020101" pitchFamily="49" charset="-127"/>
-                <a:ea typeface="D2Coding" panose="020B0609020101020101" pitchFamily="49" charset="-127"/>
-              </a:rPr>
-              <a:t>. </a:t>
-            </a:r>
-            <a:r>
-              <a:rPr lang="ko-KR" altLang="en-US" dirty="0" err="1">
-                <a:latin typeface="D2Coding" panose="020B0609020101020101" pitchFamily="49" charset="-127"/>
-                <a:ea typeface="D2Coding" panose="020B0609020101020101" pitchFamily="49" charset="-127"/>
-              </a:rPr>
-              <a:t>sequences</a:t>
-            </a:r>
-            <a:r>
-              <a:rPr lang="ko-KR" altLang="en-US" dirty="0">
-                <a:latin typeface="D2Coding" panose="020B0609020101020101" pitchFamily="49" charset="-127"/>
-                <a:ea typeface="D2Coding" panose="020B0609020101020101" pitchFamily="49" charset="-127"/>
-              </a:rPr>
-              <a:t> (텍스트 표현 관점의 비교)</a:t>
-            </a:r>
-            <a:endParaRPr lang="en-US" altLang="ko-KR" dirty="0">
-              <a:latin typeface="D2Coding" panose="020B0609020101020101" pitchFamily="49" charset="-127"/>
-              <a:ea typeface="D2Coding" panose="020B0609020101020101" pitchFamily="49" charset="-127"/>
-            </a:endParaRPr>
-          </a:p>
-          <a:p>
-            <a:pPr marL="800100" lvl="1" indent="-342900">
-              <a:buFont typeface="+mj-lt"/>
-              <a:buAutoNum type="arabicPeriod"/>
-            </a:pPr>
-            <a:r>
               <a:rPr lang="ko-KR" altLang="en-US" sz="1600" dirty="0" err="1">
                 <a:latin typeface="D2Coding" panose="020B0609020101020101" pitchFamily="49" charset="-127"/>
                 <a:ea typeface="D2Coding" panose="020B0609020101020101" pitchFamily="49" charset="-127"/>
               </a:rPr>
-              <a:t>Loading</a:t>
+              <a:t>models</a:t>
             </a:r>
             <a:r>
               <a:rPr lang="ko-KR" altLang="en-US" sz="1600" dirty="0">
                 <a:latin typeface="D2Coding" panose="020B0609020101020101" pitchFamily="49" charset="-127"/>
                 <a:ea typeface="D2Coding" panose="020B0609020101020101" pitchFamily="49" charset="-127"/>
               </a:rPr>
-              <a:t> </a:t>
-            </a:r>
-            <a:r>
-              <a:rPr lang="ko-KR" altLang="en-US" sz="1600" dirty="0" err="1">
-                <a:latin typeface="D2Coding" panose="020B0609020101020101" pitchFamily="49" charset="-127"/>
-                <a:ea typeface="D2Coding" panose="020B0609020101020101" pitchFamily="49" charset="-127"/>
-              </a:rPr>
-              <a:t>the</a:t>
-            </a:r>
-            <a:r>
-              <a:rPr lang="ko-KR" altLang="en-US" sz="1600" dirty="0">
-                <a:latin typeface="D2Coding" panose="020B0609020101020101" pitchFamily="49" charset="-127"/>
-                <a:ea typeface="D2Coding" panose="020B0609020101020101" pitchFamily="49" charset="-127"/>
-              </a:rPr>
-              <a:t> </a:t>
-            </a:r>
-            <a:r>
-              <a:rPr lang="ko-KR" altLang="en-US" sz="1600" dirty="0" err="1">
-                <a:latin typeface="D2Coding" panose="020B0609020101020101" pitchFamily="49" charset="-127"/>
-                <a:ea typeface="D2Coding" panose="020B0609020101020101" pitchFamily="49" charset="-127"/>
-              </a:rPr>
-              <a:t>IMDb</a:t>
-            </a:r>
-            <a:r>
-              <a:rPr lang="ko-KR" altLang="en-US" sz="1600" dirty="0">
-                <a:latin typeface="D2Coding" panose="020B0609020101020101" pitchFamily="49" charset="-127"/>
-                <a:ea typeface="D2Coding" panose="020B0609020101020101" pitchFamily="49" charset="-127"/>
-              </a:rPr>
-              <a:t> </a:t>
-            </a:r>
-            <a:r>
-              <a:rPr lang="ko-KR" altLang="en-US" sz="1600" dirty="0" err="1">
-                <a:latin typeface="D2Coding" panose="020B0609020101020101" pitchFamily="49" charset="-127"/>
-                <a:ea typeface="D2Coding" panose="020B0609020101020101" pitchFamily="49" charset="-127"/>
-              </a:rPr>
-              <a:t>classification</a:t>
-            </a:r>
-            <a:r>
-              <a:rPr lang="ko-KR" altLang="en-US" sz="1600" dirty="0">
-                <a:latin typeface="D2Coding" panose="020B0609020101020101" pitchFamily="49" charset="-127"/>
-                <a:ea typeface="D2Coding" panose="020B0609020101020101" pitchFamily="49" charset="-127"/>
-              </a:rPr>
-              <a:t> </a:t>
-            </a:r>
-            <a:r>
-              <a:rPr lang="ko-KR" altLang="en-US" sz="1600" dirty="0" err="1">
-                <a:latin typeface="D2Coding" panose="020B0609020101020101" pitchFamily="49" charset="-127"/>
-                <a:ea typeface="D2Coding" panose="020B0609020101020101" pitchFamily="49" charset="-127"/>
-              </a:rPr>
-              <a:t>dataset</a:t>
-            </a:r>
-            <a:r>
-              <a:rPr lang="ko-KR" altLang="en-US" sz="1600" dirty="0">
-                <a:latin typeface="D2Coding" panose="020B0609020101020101" pitchFamily="49" charset="-127"/>
-                <a:ea typeface="D2Coding" panose="020B0609020101020101" pitchFamily="49" charset="-127"/>
-              </a:rPr>
-              <a:t> (</a:t>
-            </a:r>
-            <a:r>
-              <a:rPr lang="ko-KR" altLang="en-US" sz="1600" dirty="0" err="1">
-                <a:latin typeface="D2Coding" panose="020B0609020101020101" pitchFamily="49" charset="-127"/>
-                <a:ea typeface="D2Coding" panose="020B0609020101020101" pitchFamily="49" charset="-127"/>
-              </a:rPr>
-              <a:t>IMDb</a:t>
-            </a:r>
-            <a:r>
-              <a:rPr lang="ko-KR" altLang="en-US" sz="1600" dirty="0">
-                <a:latin typeface="D2Coding" panose="020B0609020101020101" pitchFamily="49" charset="-127"/>
-                <a:ea typeface="D2Coding" panose="020B0609020101020101" pitchFamily="49" charset="-127"/>
-              </a:rPr>
-              <a:t> 영화 리뷰 분류 데이터셋 로딩)</a:t>
-            </a:r>
-          </a:p>
-          <a:p>
-            <a:pPr marL="342900" indent="-342900">
-              <a:buFont typeface="+mj-lt"/>
-              <a:buAutoNum type="arabicPeriod"/>
-            </a:pPr>
-            <a:endParaRPr lang="ko-KR" altLang="en-US" sz="1050" dirty="0">
-              <a:latin typeface="D2Coding" panose="020B0609020101020101" pitchFamily="49" charset="-127"/>
-              <a:ea typeface="D2Coding" panose="020B0609020101020101" pitchFamily="49" charset="-127"/>
-            </a:endParaRPr>
-          </a:p>
-          <a:p>
-            <a:pPr marL="342900" indent="-342900">
-              <a:buFont typeface="+mj-lt"/>
-              <a:buAutoNum type="arabicPeriod"/>
-            </a:pPr>
-            <a:r>
-              <a:rPr lang="ko-KR" altLang="en-US" dirty="0" err="1">
-                <a:latin typeface="D2Coding" panose="020B0609020101020101" pitchFamily="49" charset="-127"/>
-                <a:ea typeface="D2Coding" panose="020B0609020101020101" pitchFamily="49" charset="-127"/>
-              </a:rPr>
-              <a:t>Set</a:t>
-            </a:r>
-            <a:r>
-              <a:rPr lang="ko-KR" altLang="en-US" dirty="0">
-                <a:latin typeface="D2Coding" panose="020B0609020101020101" pitchFamily="49" charset="-127"/>
-                <a:ea typeface="D2Coding" panose="020B0609020101020101" pitchFamily="49" charset="-127"/>
-              </a:rPr>
-              <a:t> </a:t>
-            </a:r>
-            <a:r>
-              <a:rPr lang="ko-KR" altLang="en-US" dirty="0" err="1">
-                <a:latin typeface="D2Coding" panose="020B0609020101020101" pitchFamily="49" charset="-127"/>
-                <a:ea typeface="D2Coding" panose="020B0609020101020101" pitchFamily="49" charset="-127"/>
-              </a:rPr>
-              <a:t>models</a:t>
-            </a:r>
-            <a:r>
-              <a:rPr lang="ko-KR" altLang="en-US" dirty="0">
-                <a:latin typeface="D2Coding" panose="020B0609020101020101" pitchFamily="49" charset="-127"/>
-                <a:ea typeface="D2Coding" panose="020B0609020101020101" pitchFamily="49" charset="-127"/>
-              </a:rPr>
               <a:t> (순서를 고려하지 않는 집합 기반 모델)</a:t>
             </a:r>
-            <a:endParaRPr lang="en-US" altLang="ko-KR" dirty="0">
+            <a:endParaRPr lang="en-US" altLang="ko-KR" sz="1600" dirty="0">
               <a:latin typeface="D2Coding" panose="020B0609020101020101" pitchFamily="49" charset="-127"/>
               <a:ea typeface="D2Coding" panose="020B0609020101020101" pitchFamily="49" charset="-127"/>
             </a:endParaRPr>
@@ -7131,104 +7142,104 @@
               <a:buAutoNum type="arabicPeriod"/>
             </a:pPr>
             <a:r>
-              <a:rPr lang="ko-KR" altLang="en-US" sz="1600" dirty="0" err="1">
+              <a:rPr lang="ko-KR" altLang="en-US" sz="1400" dirty="0" err="1">
                 <a:latin typeface="D2Coding" panose="020B0609020101020101" pitchFamily="49" charset="-127"/>
                 <a:ea typeface="D2Coding" panose="020B0609020101020101" pitchFamily="49" charset="-127"/>
               </a:rPr>
               <a:t>Training</a:t>
             </a:r>
             <a:r>
-              <a:rPr lang="ko-KR" altLang="en-US" sz="1600" dirty="0">
+              <a:rPr lang="ko-KR" altLang="en-US" sz="1400" dirty="0">
                 <a:latin typeface="D2Coding" panose="020B0609020101020101" pitchFamily="49" charset="-127"/>
                 <a:ea typeface="D2Coding" panose="020B0609020101020101" pitchFamily="49" charset="-127"/>
               </a:rPr>
               <a:t> </a:t>
             </a:r>
             <a:r>
-              <a:rPr lang="ko-KR" altLang="en-US" sz="1600" dirty="0" err="1">
+              <a:rPr lang="ko-KR" altLang="en-US" sz="1400" dirty="0" err="1">
                 <a:latin typeface="D2Coding" panose="020B0609020101020101" pitchFamily="49" charset="-127"/>
                 <a:ea typeface="D2Coding" panose="020B0609020101020101" pitchFamily="49" charset="-127"/>
               </a:rPr>
               <a:t>a</a:t>
             </a:r>
             <a:r>
-              <a:rPr lang="ko-KR" altLang="en-US" sz="1600" dirty="0">
+              <a:rPr lang="ko-KR" altLang="en-US" sz="1400" dirty="0">
                 <a:latin typeface="D2Coding" panose="020B0609020101020101" pitchFamily="49" charset="-127"/>
                 <a:ea typeface="D2Coding" panose="020B0609020101020101" pitchFamily="49" charset="-127"/>
               </a:rPr>
               <a:t> </a:t>
             </a:r>
             <a:r>
-              <a:rPr lang="ko-KR" altLang="en-US" sz="1600" dirty="0" err="1">
+              <a:rPr lang="ko-KR" altLang="en-US" sz="1400" dirty="0" err="1">
                 <a:latin typeface="D2Coding" panose="020B0609020101020101" pitchFamily="49" charset="-127"/>
                 <a:ea typeface="D2Coding" panose="020B0609020101020101" pitchFamily="49" charset="-127"/>
               </a:rPr>
               <a:t>bag</a:t>
             </a:r>
             <a:r>
-              <a:rPr lang="ko-KR" altLang="en-US" sz="1600" dirty="0">
+              <a:rPr lang="ko-KR" altLang="en-US" sz="1400" dirty="0">
                 <a:latin typeface="D2Coding" panose="020B0609020101020101" pitchFamily="49" charset="-127"/>
                 <a:ea typeface="D2Coding" panose="020B0609020101020101" pitchFamily="49" charset="-127"/>
               </a:rPr>
               <a:t>-of-</a:t>
             </a:r>
             <a:r>
-              <a:rPr lang="ko-KR" altLang="en-US" sz="1600" dirty="0" err="1">
+              <a:rPr lang="ko-KR" altLang="en-US" sz="1400" dirty="0" err="1">
                 <a:latin typeface="D2Coding" panose="020B0609020101020101" pitchFamily="49" charset="-127"/>
                 <a:ea typeface="D2Coding" panose="020B0609020101020101" pitchFamily="49" charset="-127"/>
               </a:rPr>
               <a:t>words</a:t>
             </a:r>
             <a:r>
-              <a:rPr lang="ko-KR" altLang="en-US" sz="1600" dirty="0">
+              <a:rPr lang="ko-KR" altLang="en-US" sz="1400" dirty="0">
                 <a:latin typeface="D2Coding" panose="020B0609020101020101" pitchFamily="49" charset="-127"/>
                 <a:ea typeface="D2Coding" panose="020B0609020101020101" pitchFamily="49" charset="-127"/>
               </a:rPr>
               <a:t> </a:t>
             </a:r>
             <a:r>
-              <a:rPr lang="ko-KR" altLang="en-US" sz="1600" dirty="0" err="1">
+              <a:rPr lang="ko-KR" altLang="en-US" sz="1400" dirty="0" err="1">
                 <a:latin typeface="D2Coding" panose="020B0609020101020101" pitchFamily="49" charset="-127"/>
                 <a:ea typeface="D2Coding" panose="020B0609020101020101" pitchFamily="49" charset="-127"/>
               </a:rPr>
               <a:t>model</a:t>
             </a:r>
             <a:r>
-              <a:rPr lang="ko-KR" altLang="en-US" sz="1600" dirty="0">
+              <a:rPr lang="ko-KR" altLang="en-US" sz="1400" dirty="0">
                 <a:latin typeface="D2Coding" panose="020B0609020101020101" pitchFamily="49" charset="-127"/>
                 <a:ea typeface="D2Coding" panose="020B0609020101020101" pitchFamily="49" charset="-127"/>
               </a:rPr>
               <a:t> (</a:t>
             </a:r>
             <a:r>
-              <a:rPr lang="ko-KR" altLang="en-US" sz="1600" dirty="0" err="1">
+              <a:rPr lang="ko-KR" altLang="en-US" sz="1400" dirty="0" err="1">
                 <a:latin typeface="D2Coding" panose="020B0609020101020101" pitchFamily="49" charset="-127"/>
                 <a:ea typeface="D2Coding" panose="020B0609020101020101" pitchFamily="49" charset="-127"/>
               </a:rPr>
               <a:t>Bag</a:t>
             </a:r>
             <a:r>
-              <a:rPr lang="ko-KR" altLang="en-US" sz="1600" dirty="0">
+              <a:rPr lang="ko-KR" altLang="en-US" sz="1400" dirty="0">
                 <a:latin typeface="D2Coding" panose="020B0609020101020101" pitchFamily="49" charset="-127"/>
                 <a:ea typeface="D2Coding" panose="020B0609020101020101" pitchFamily="49" charset="-127"/>
               </a:rPr>
               <a:t>-of-</a:t>
             </a:r>
             <a:r>
-              <a:rPr lang="ko-KR" altLang="en-US" sz="1600" dirty="0" err="1">
+              <a:rPr lang="ko-KR" altLang="en-US" sz="1400" dirty="0" err="1">
                 <a:latin typeface="D2Coding" panose="020B0609020101020101" pitchFamily="49" charset="-127"/>
                 <a:ea typeface="D2Coding" panose="020B0609020101020101" pitchFamily="49" charset="-127"/>
               </a:rPr>
               <a:t>Words</a:t>
             </a:r>
             <a:r>
-              <a:rPr lang="ko-KR" altLang="en-US" sz="1600" dirty="0">
+              <a:rPr lang="ko-KR" altLang="en-US" sz="1400" dirty="0">
                 <a:latin typeface="D2Coding" panose="020B0609020101020101" pitchFamily="49" charset="-127"/>
                 <a:ea typeface="D2Coding" panose="020B0609020101020101" pitchFamily="49" charset="-127"/>
               </a:rPr>
               <a:t> 모델 학습)</a:t>
             </a:r>
-            <a:endParaRPr lang="en-US" altLang="ko-KR" sz="1600" dirty="0">
+            <a:endParaRPr lang="en-US" altLang="ko-KR" sz="1400" dirty="0">
               <a:latin typeface="D2Coding" panose="020B0609020101020101" pitchFamily="49" charset="-127"/>
               <a:ea typeface="D2Coding" panose="020B0609020101020101" pitchFamily="49" charset="-127"/>
             </a:endParaRPr>
@@ -7239,70 +7250,70 @@
               <a:buAutoNum type="arabicPeriod"/>
             </a:pPr>
             <a:r>
-              <a:rPr lang="ko-KR" altLang="en-US" sz="1600" dirty="0" err="1">
+              <a:rPr lang="ko-KR" altLang="en-US" sz="1400" dirty="0" err="1">
                 <a:latin typeface="D2Coding" panose="020B0609020101020101" pitchFamily="49" charset="-127"/>
                 <a:ea typeface="D2Coding" panose="020B0609020101020101" pitchFamily="49" charset="-127"/>
               </a:rPr>
               <a:t>Training</a:t>
             </a:r>
             <a:r>
-              <a:rPr lang="ko-KR" altLang="en-US" sz="1600" dirty="0">
+              <a:rPr lang="ko-KR" altLang="en-US" sz="1400" dirty="0">
                 <a:latin typeface="D2Coding" panose="020B0609020101020101" pitchFamily="49" charset="-127"/>
                 <a:ea typeface="D2Coding" panose="020B0609020101020101" pitchFamily="49" charset="-127"/>
               </a:rPr>
               <a:t> </a:t>
             </a:r>
             <a:r>
-              <a:rPr lang="ko-KR" altLang="en-US" sz="1600" dirty="0" err="1">
+              <a:rPr lang="ko-KR" altLang="en-US" sz="1400" dirty="0" err="1">
                 <a:latin typeface="D2Coding" panose="020B0609020101020101" pitchFamily="49" charset="-127"/>
                 <a:ea typeface="D2Coding" panose="020B0609020101020101" pitchFamily="49" charset="-127"/>
               </a:rPr>
               <a:t>a</a:t>
             </a:r>
             <a:r>
-              <a:rPr lang="ko-KR" altLang="en-US" sz="1600" dirty="0">
+              <a:rPr lang="ko-KR" altLang="en-US" sz="1400" dirty="0">
                 <a:latin typeface="D2Coding" panose="020B0609020101020101" pitchFamily="49" charset="-127"/>
                 <a:ea typeface="D2Coding" panose="020B0609020101020101" pitchFamily="49" charset="-127"/>
               </a:rPr>
               <a:t> </a:t>
             </a:r>
             <a:r>
-              <a:rPr lang="ko-KR" altLang="en-US" sz="1600" dirty="0" err="1">
+              <a:rPr lang="ko-KR" altLang="en-US" sz="1400" dirty="0" err="1">
                 <a:latin typeface="D2Coding" panose="020B0609020101020101" pitchFamily="49" charset="-127"/>
                 <a:ea typeface="D2Coding" panose="020B0609020101020101" pitchFamily="49" charset="-127"/>
               </a:rPr>
               <a:t>bigram</a:t>
             </a:r>
             <a:r>
-              <a:rPr lang="ko-KR" altLang="en-US" sz="1600" dirty="0">
+              <a:rPr lang="ko-KR" altLang="en-US" sz="1400" dirty="0">
                 <a:latin typeface="D2Coding" panose="020B0609020101020101" pitchFamily="49" charset="-127"/>
                 <a:ea typeface="D2Coding" panose="020B0609020101020101" pitchFamily="49" charset="-127"/>
               </a:rPr>
               <a:t> </a:t>
             </a:r>
             <a:r>
-              <a:rPr lang="ko-KR" altLang="en-US" sz="1600" dirty="0" err="1">
+              <a:rPr lang="ko-KR" altLang="en-US" sz="1400" dirty="0" err="1">
                 <a:latin typeface="D2Coding" panose="020B0609020101020101" pitchFamily="49" charset="-127"/>
                 <a:ea typeface="D2Coding" panose="020B0609020101020101" pitchFamily="49" charset="-127"/>
               </a:rPr>
               <a:t>model</a:t>
             </a:r>
             <a:r>
-              <a:rPr lang="ko-KR" altLang="en-US" sz="1600" dirty="0">
+              <a:rPr lang="ko-KR" altLang="en-US" sz="1400" dirty="0">
                 <a:latin typeface="D2Coding" panose="020B0609020101020101" pitchFamily="49" charset="-127"/>
                 <a:ea typeface="D2Coding" panose="020B0609020101020101" pitchFamily="49" charset="-127"/>
               </a:rPr>
               <a:t> (</a:t>
             </a:r>
             <a:r>
-              <a:rPr lang="ko-KR" altLang="en-US" sz="1600" dirty="0" err="1">
+              <a:rPr lang="ko-KR" altLang="en-US" sz="1400" dirty="0" err="1">
                 <a:latin typeface="D2Coding" panose="020B0609020101020101" pitchFamily="49" charset="-127"/>
                 <a:ea typeface="D2Coding" panose="020B0609020101020101" pitchFamily="49" charset="-127"/>
               </a:rPr>
               <a:t>Bigram</a:t>
             </a:r>
             <a:r>
-              <a:rPr lang="ko-KR" altLang="en-US" sz="1600" dirty="0">
+              <a:rPr lang="ko-KR" altLang="en-US" sz="1400" dirty="0">
                 <a:latin typeface="D2Coding" panose="020B0609020101020101" pitchFamily="49" charset="-127"/>
                 <a:ea typeface="D2Coding" panose="020B0609020101020101" pitchFamily="49" charset="-127"/>
               </a:rPr>
@@ -7314,7 +7325,7 @@
               <a:buFont typeface="+mj-lt"/>
               <a:buAutoNum type="arabicPeriod"/>
             </a:pPr>
-            <a:endParaRPr lang="ko-KR" altLang="en-US" sz="1050" dirty="0">
+            <a:endParaRPr lang="ko-KR" altLang="en-US" sz="1000" dirty="0">
               <a:latin typeface="D2Coding" panose="020B0609020101020101" pitchFamily="49" charset="-127"/>
               <a:ea typeface="D2Coding" panose="020B0609020101020101" pitchFamily="49" charset="-127"/>
             </a:endParaRPr>
@@ -7325,28 +7336,28 @@
               <a:buAutoNum type="arabicPeriod"/>
             </a:pPr>
             <a:r>
-              <a:rPr lang="ko-KR" altLang="en-US" dirty="0" err="1">
+              <a:rPr lang="ko-KR" altLang="en-US" sz="1600" dirty="0" err="1">
                 <a:latin typeface="D2Coding" panose="020B0609020101020101" pitchFamily="49" charset="-127"/>
                 <a:ea typeface="D2Coding" panose="020B0609020101020101" pitchFamily="49" charset="-127"/>
               </a:rPr>
               <a:t>Sequence</a:t>
             </a:r>
             <a:r>
-              <a:rPr lang="ko-KR" altLang="en-US" dirty="0">
+              <a:rPr lang="ko-KR" altLang="en-US" sz="1600" dirty="0">
                 <a:latin typeface="D2Coding" panose="020B0609020101020101" pitchFamily="49" charset="-127"/>
                 <a:ea typeface="D2Coding" panose="020B0609020101020101" pitchFamily="49" charset="-127"/>
               </a:rPr>
               <a:t> </a:t>
             </a:r>
             <a:r>
-              <a:rPr lang="ko-KR" altLang="en-US" dirty="0" err="1">
+              <a:rPr lang="ko-KR" altLang="en-US" sz="1600" dirty="0" err="1">
                 <a:latin typeface="D2Coding" panose="020B0609020101020101" pitchFamily="49" charset="-127"/>
                 <a:ea typeface="D2Coding" panose="020B0609020101020101" pitchFamily="49" charset="-127"/>
               </a:rPr>
               <a:t>models</a:t>
             </a:r>
             <a:r>
-              <a:rPr lang="ko-KR" altLang="en-US" dirty="0">
+              <a:rPr lang="ko-KR" altLang="en-US" sz="1600" dirty="0">
                 <a:latin typeface="D2Coding" panose="020B0609020101020101" pitchFamily="49" charset="-127"/>
                 <a:ea typeface="D2Coding" panose="020B0609020101020101" pitchFamily="49" charset="-127"/>
               </a:rPr>
@@ -7362,56 +7373,56 @@
               <a:buAutoNum type="arabicPeriod"/>
             </a:pPr>
             <a:r>
-              <a:rPr lang="ko-KR" altLang="en-US" sz="1600" dirty="0" err="1">
+              <a:rPr lang="ko-KR" altLang="en-US" sz="1400" dirty="0" err="1">
                 <a:latin typeface="D2Coding" panose="020B0609020101020101" pitchFamily="49" charset="-127"/>
                 <a:ea typeface="D2Coding" panose="020B0609020101020101" pitchFamily="49" charset="-127"/>
               </a:rPr>
               <a:t>Training</a:t>
             </a:r>
             <a:r>
-              <a:rPr lang="ko-KR" altLang="en-US" sz="1600" dirty="0">
+              <a:rPr lang="ko-KR" altLang="en-US" sz="1400" dirty="0">
                 <a:latin typeface="D2Coding" panose="020B0609020101020101" pitchFamily="49" charset="-127"/>
                 <a:ea typeface="D2Coding" panose="020B0609020101020101" pitchFamily="49" charset="-127"/>
               </a:rPr>
               <a:t> </a:t>
             </a:r>
             <a:r>
-              <a:rPr lang="ko-KR" altLang="en-US" sz="1600" dirty="0" err="1">
+              <a:rPr lang="ko-KR" altLang="en-US" sz="1400" dirty="0" err="1">
                 <a:latin typeface="D2Coding" panose="020B0609020101020101" pitchFamily="49" charset="-127"/>
                 <a:ea typeface="D2Coding" panose="020B0609020101020101" pitchFamily="49" charset="-127"/>
               </a:rPr>
               <a:t>a</a:t>
             </a:r>
             <a:r>
-              <a:rPr lang="ko-KR" altLang="en-US" sz="1600" dirty="0">
+              <a:rPr lang="ko-KR" altLang="en-US" sz="1400" dirty="0">
                 <a:latin typeface="D2Coding" panose="020B0609020101020101" pitchFamily="49" charset="-127"/>
                 <a:ea typeface="D2Coding" panose="020B0609020101020101" pitchFamily="49" charset="-127"/>
               </a:rPr>
               <a:t> </a:t>
             </a:r>
             <a:r>
-              <a:rPr lang="ko-KR" altLang="en-US" sz="1600" dirty="0" err="1">
+              <a:rPr lang="ko-KR" altLang="en-US" sz="1400" dirty="0" err="1">
                 <a:latin typeface="D2Coding" panose="020B0609020101020101" pitchFamily="49" charset="-127"/>
                 <a:ea typeface="D2Coding" panose="020B0609020101020101" pitchFamily="49" charset="-127"/>
               </a:rPr>
               <a:t>recurrent</a:t>
             </a:r>
             <a:r>
-              <a:rPr lang="ko-KR" altLang="en-US" sz="1600" dirty="0">
+              <a:rPr lang="ko-KR" altLang="en-US" sz="1400" dirty="0">
                 <a:latin typeface="D2Coding" panose="020B0609020101020101" pitchFamily="49" charset="-127"/>
                 <a:ea typeface="D2Coding" panose="020B0609020101020101" pitchFamily="49" charset="-127"/>
               </a:rPr>
               <a:t> </a:t>
             </a:r>
             <a:r>
-              <a:rPr lang="ko-KR" altLang="en-US" sz="1600" dirty="0" err="1">
+              <a:rPr lang="ko-KR" altLang="en-US" sz="1400" dirty="0" err="1">
                 <a:latin typeface="D2Coding" panose="020B0609020101020101" pitchFamily="49" charset="-127"/>
                 <a:ea typeface="D2Coding" panose="020B0609020101020101" pitchFamily="49" charset="-127"/>
               </a:rPr>
               <a:t>model</a:t>
             </a:r>
             <a:r>
-              <a:rPr lang="ko-KR" altLang="en-US" sz="1600" dirty="0">
+              <a:rPr lang="ko-KR" altLang="en-US" sz="1400" dirty="0">
                 <a:latin typeface="D2Coding" panose="020B0609020101020101" pitchFamily="49" charset="-127"/>
                 <a:ea typeface="D2Coding" panose="020B0609020101020101" pitchFamily="49" charset="-127"/>
               </a:rPr>
@@ -7424,56 +7435,56 @@
               <a:buAutoNum type="arabicPeriod"/>
             </a:pPr>
             <a:r>
-              <a:rPr lang="ko-KR" altLang="en-US" sz="1600" dirty="0" err="1">
+              <a:rPr lang="ko-KR" altLang="en-US" sz="1400" dirty="0" err="1">
                 <a:latin typeface="D2Coding" panose="020B0609020101020101" pitchFamily="49" charset="-127"/>
                 <a:ea typeface="D2Coding" panose="020B0609020101020101" pitchFamily="49" charset="-127"/>
               </a:rPr>
               <a:t>Understanding</a:t>
             </a:r>
             <a:r>
-              <a:rPr lang="ko-KR" altLang="en-US" sz="1600" dirty="0">
+              <a:rPr lang="ko-KR" altLang="en-US" sz="1400" dirty="0">
                 <a:latin typeface="D2Coding" panose="020B0609020101020101" pitchFamily="49" charset="-127"/>
                 <a:ea typeface="D2Coding" panose="020B0609020101020101" pitchFamily="49" charset="-127"/>
               </a:rPr>
               <a:t> </a:t>
             </a:r>
             <a:r>
-              <a:rPr lang="ko-KR" altLang="en-US" sz="1600" dirty="0" err="1">
+              <a:rPr lang="ko-KR" altLang="en-US" sz="1400" dirty="0" err="1">
                 <a:latin typeface="D2Coding" panose="020B0609020101020101" pitchFamily="49" charset="-127"/>
                 <a:ea typeface="D2Coding" panose="020B0609020101020101" pitchFamily="49" charset="-127"/>
               </a:rPr>
               <a:t>word</a:t>
             </a:r>
             <a:r>
-              <a:rPr lang="ko-KR" altLang="en-US" sz="1600" dirty="0">
+              <a:rPr lang="ko-KR" altLang="en-US" sz="1400" dirty="0">
                 <a:latin typeface="D2Coding" panose="020B0609020101020101" pitchFamily="49" charset="-127"/>
                 <a:ea typeface="D2Coding" panose="020B0609020101020101" pitchFamily="49" charset="-127"/>
               </a:rPr>
               <a:t> </a:t>
             </a:r>
             <a:r>
-              <a:rPr lang="ko-KR" altLang="en-US" sz="1600" dirty="0" err="1">
+              <a:rPr lang="ko-KR" altLang="en-US" sz="1400" dirty="0" err="1">
                 <a:latin typeface="D2Coding" panose="020B0609020101020101" pitchFamily="49" charset="-127"/>
                 <a:ea typeface="D2Coding" panose="020B0609020101020101" pitchFamily="49" charset="-127"/>
               </a:rPr>
               <a:t>embeddings</a:t>
             </a:r>
             <a:r>
-              <a:rPr lang="ko-KR" altLang="en-US" sz="1600" dirty="0">
+              <a:rPr lang="ko-KR" altLang="en-US" sz="1400" dirty="0">
                 <a:latin typeface="D2Coding" panose="020B0609020101020101" pitchFamily="49" charset="-127"/>
                 <a:ea typeface="D2Coding" panose="020B0609020101020101" pitchFamily="49" charset="-127"/>
               </a:rPr>
               <a:t> (단어 </a:t>
             </a:r>
             <a:r>
-              <a:rPr lang="ko-KR" altLang="en-US" sz="1600" dirty="0" err="1">
+              <a:rPr lang="ko-KR" altLang="en-US" sz="1400" dirty="0" err="1">
                 <a:latin typeface="D2Coding" panose="020B0609020101020101" pitchFamily="49" charset="-127"/>
                 <a:ea typeface="D2Coding" panose="020B0609020101020101" pitchFamily="49" charset="-127"/>
               </a:rPr>
               <a:t>임베딩의</a:t>
             </a:r>
             <a:r>
-              <a:rPr lang="ko-KR" altLang="en-US" sz="1600" dirty="0">
+              <a:rPr lang="ko-KR" altLang="en-US" sz="1400" dirty="0">
                 <a:latin typeface="D2Coding" panose="020B0609020101020101" pitchFamily="49" charset="-127"/>
                 <a:ea typeface="D2Coding" panose="020B0609020101020101" pitchFamily="49" charset="-127"/>
               </a:rPr>
@@ -7486,70 +7497,70 @@
               <a:buAutoNum type="arabicPeriod"/>
             </a:pPr>
             <a:r>
-              <a:rPr lang="ko-KR" altLang="en-US" sz="1600" dirty="0" err="1">
+              <a:rPr lang="ko-KR" altLang="en-US" sz="1400" dirty="0" err="1">
                 <a:latin typeface="D2Coding" panose="020B0609020101020101" pitchFamily="49" charset="-127"/>
                 <a:ea typeface="D2Coding" panose="020B0609020101020101" pitchFamily="49" charset="-127"/>
               </a:rPr>
               <a:t>Using</a:t>
             </a:r>
             <a:r>
-              <a:rPr lang="ko-KR" altLang="en-US" sz="1600" dirty="0">
+              <a:rPr lang="ko-KR" altLang="en-US" sz="1400" dirty="0">
                 <a:latin typeface="D2Coding" panose="020B0609020101020101" pitchFamily="49" charset="-127"/>
                 <a:ea typeface="D2Coding" panose="020B0609020101020101" pitchFamily="49" charset="-127"/>
               </a:rPr>
               <a:t> </a:t>
             </a:r>
             <a:r>
-              <a:rPr lang="ko-KR" altLang="en-US" sz="1600" dirty="0" err="1">
+              <a:rPr lang="ko-KR" altLang="en-US" sz="1400" dirty="0" err="1">
                 <a:latin typeface="D2Coding" panose="020B0609020101020101" pitchFamily="49" charset="-127"/>
                 <a:ea typeface="D2Coding" panose="020B0609020101020101" pitchFamily="49" charset="-127"/>
               </a:rPr>
               <a:t>a</a:t>
             </a:r>
             <a:r>
-              <a:rPr lang="ko-KR" altLang="en-US" sz="1600" dirty="0">
+              <a:rPr lang="ko-KR" altLang="en-US" sz="1400" dirty="0">
                 <a:latin typeface="D2Coding" panose="020B0609020101020101" pitchFamily="49" charset="-127"/>
                 <a:ea typeface="D2Coding" panose="020B0609020101020101" pitchFamily="49" charset="-127"/>
               </a:rPr>
               <a:t> </a:t>
             </a:r>
             <a:r>
-              <a:rPr lang="ko-KR" altLang="en-US" sz="1600" dirty="0" err="1">
+              <a:rPr lang="ko-KR" altLang="en-US" sz="1400" dirty="0" err="1">
                 <a:latin typeface="D2Coding" panose="020B0609020101020101" pitchFamily="49" charset="-127"/>
                 <a:ea typeface="D2Coding" panose="020B0609020101020101" pitchFamily="49" charset="-127"/>
               </a:rPr>
               <a:t>word</a:t>
             </a:r>
             <a:r>
-              <a:rPr lang="ko-KR" altLang="en-US" sz="1600" dirty="0">
+              <a:rPr lang="ko-KR" altLang="en-US" sz="1400" dirty="0">
                 <a:latin typeface="D2Coding" panose="020B0609020101020101" pitchFamily="49" charset="-127"/>
                 <a:ea typeface="D2Coding" panose="020B0609020101020101" pitchFamily="49" charset="-127"/>
               </a:rPr>
               <a:t> </a:t>
             </a:r>
             <a:r>
-              <a:rPr lang="ko-KR" altLang="en-US" sz="1600" dirty="0" err="1">
+              <a:rPr lang="ko-KR" altLang="en-US" sz="1400" dirty="0" err="1">
                 <a:latin typeface="D2Coding" panose="020B0609020101020101" pitchFamily="49" charset="-127"/>
                 <a:ea typeface="D2Coding" panose="020B0609020101020101" pitchFamily="49" charset="-127"/>
               </a:rPr>
               <a:t>embedding</a:t>
             </a:r>
             <a:r>
-              <a:rPr lang="ko-KR" altLang="en-US" sz="1600" dirty="0">
+              <a:rPr lang="ko-KR" altLang="en-US" sz="1400" dirty="0">
                 <a:latin typeface="D2Coding" panose="020B0609020101020101" pitchFamily="49" charset="-127"/>
                 <a:ea typeface="D2Coding" panose="020B0609020101020101" pitchFamily="49" charset="-127"/>
               </a:rPr>
               <a:t> (단어 </a:t>
             </a:r>
             <a:r>
-              <a:rPr lang="ko-KR" altLang="en-US" sz="1600" dirty="0" err="1">
+              <a:rPr lang="ko-KR" altLang="en-US" sz="1400" dirty="0" err="1">
                 <a:latin typeface="D2Coding" panose="020B0609020101020101" pitchFamily="49" charset="-127"/>
                 <a:ea typeface="D2Coding" panose="020B0609020101020101" pitchFamily="49" charset="-127"/>
               </a:rPr>
               <a:t>임베딩</a:t>
             </a:r>
             <a:r>
-              <a:rPr lang="ko-KR" altLang="en-US" sz="1600" dirty="0">
+              <a:rPr lang="ko-KR" altLang="en-US" sz="1400" dirty="0">
                 <a:latin typeface="D2Coding" panose="020B0609020101020101" pitchFamily="49" charset="-127"/>
                 <a:ea typeface="D2Coding" panose="020B0609020101020101" pitchFamily="49" charset="-127"/>
               </a:rPr>
@@ -7562,70 +7573,70 @@
               <a:buAutoNum type="arabicPeriod"/>
             </a:pPr>
             <a:r>
-              <a:rPr lang="ko-KR" altLang="en-US" sz="1600" dirty="0" err="1">
+              <a:rPr lang="ko-KR" altLang="en-US" sz="1400" dirty="0" err="1">
                 <a:latin typeface="D2Coding" panose="020B0609020101020101" pitchFamily="49" charset="-127"/>
                 <a:ea typeface="D2Coding" panose="020B0609020101020101" pitchFamily="49" charset="-127"/>
               </a:rPr>
               <a:t>Pretraining</a:t>
             </a:r>
             <a:r>
-              <a:rPr lang="ko-KR" altLang="en-US" sz="1600" dirty="0">
+              <a:rPr lang="ko-KR" altLang="en-US" sz="1400" dirty="0">
                 <a:latin typeface="D2Coding" panose="020B0609020101020101" pitchFamily="49" charset="-127"/>
                 <a:ea typeface="D2Coding" panose="020B0609020101020101" pitchFamily="49" charset="-127"/>
               </a:rPr>
               <a:t> </a:t>
             </a:r>
             <a:r>
-              <a:rPr lang="ko-KR" altLang="en-US" sz="1600" dirty="0" err="1">
+              <a:rPr lang="ko-KR" altLang="en-US" sz="1400" dirty="0" err="1">
                 <a:latin typeface="D2Coding" panose="020B0609020101020101" pitchFamily="49" charset="-127"/>
                 <a:ea typeface="D2Coding" panose="020B0609020101020101" pitchFamily="49" charset="-127"/>
               </a:rPr>
               <a:t>a</a:t>
             </a:r>
             <a:r>
-              <a:rPr lang="ko-KR" altLang="en-US" sz="1600" dirty="0">
+              <a:rPr lang="ko-KR" altLang="en-US" sz="1400" dirty="0">
                 <a:latin typeface="D2Coding" panose="020B0609020101020101" pitchFamily="49" charset="-127"/>
                 <a:ea typeface="D2Coding" panose="020B0609020101020101" pitchFamily="49" charset="-127"/>
               </a:rPr>
               <a:t> </a:t>
             </a:r>
             <a:r>
-              <a:rPr lang="ko-KR" altLang="en-US" sz="1600" dirty="0" err="1">
+              <a:rPr lang="ko-KR" altLang="en-US" sz="1400" dirty="0" err="1">
                 <a:latin typeface="D2Coding" panose="020B0609020101020101" pitchFamily="49" charset="-127"/>
                 <a:ea typeface="D2Coding" panose="020B0609020101020101" pitchFamily="49" charset="-127"/>
               </a:rPr>
               <a:t>word</a:t>
             </a:r>
             <a:r>
-              <a:rPr lang="ko-KR" altLang="en-US" sz="1600" dirty="0">
+              <a:rPr lang="ko-KR" altLang="en-US" sz="1400" dirty="0">
                 <a:latin typeface="D2Coding" panose="020B0609020101020101" pitchFamily="49" charset="-127"/>
                 <a:ea typeface="D2Coding" panose="020B0609020101020101" pitchFamily="49" charset="-127"/>
               </a:rPr>
               <a:t> </a:t>
             </a:r>
             <a:r>
-              <a:rPr lang="ko-KR" altLang="en-US" sz="1600" dirty="0" err="1">
+              <a:rPr lang="ko-KR" altLang="en-US" sz="1400" dirty="0" err="1">
                 <a:latin typeface="D2Coding" panose="020B0609020101020101" pitchFamily="49" charset="-127"/>
                 <a:ea typeface="D2Coding" panose="020B0609020101020101" pitchFamily="49" charset="-127"/>
               </a:rPr>
               <a:t>embedding</a:t>
             </a:r>
             <a:r>
-              <a:rPr lang="ko-KR" altLang="en-US" sz="1600" dirty="0">
+              <a:rPr lang="ko-KR" altLang="en-US" sz="1400" dirty="0">
                 <a:latin typeface="D2Coding" panose="020B0609020101020101" pitchFamily="49" charset="-127"/>
                 <a:ea typeface="D2Coding" panose="020B0609020101020101" pitchFamily="49" charset="-127"/>
               </a:rPr>
               <a:t> (단어 </a:t>
             </a:r>
             <a:r>
-              <a:rPr lang="ko-KR" altLang="en-US" sz="1600" dirty="0" err="1">
+              <a:rPr lang="ko-KR" altLang="en-US" sz="1400" dirty="0" err="1">
                 <a:latin typeface="D2Coding" panose="020B0609020101020101" pitchFamily="49" charset="-127"/>
                 <a:ea typeface="D2Coding" panose="020B0609020101020101" pitchFamily="49" charset="-127"/>
               </a:rPr>
               <a:t>임베딩</a:t>
             </a:r>
             <a:r>
-              <a:rPr lang="ko-KR" altLang="en-US" sz="1600" dirty="0">
+              <a:rPr lang="ko-KR" altLang="en-US" sz="1400" dirty="0">
                 <a:latin typeface="D2Coding" panose="020B0609020101020101" pitchFamily="49" charset="-127"/>
                 <a:ea typeface="D2Coding" panose="020B0609020101020101" pitchFamily="49" charset="-127"/>
               </a:rPr>
@@ -7638,98 +7649,98 @@
               <a:buAutoNum type="arabicPeriod"/>
             </a:pPr>
             <a:r>
-              <a:rPr lang="ko-KR" altLang="en-US" sz="1600" dirty="0" err="1">
+              <a:rPr lang="ko-KR" altLang="en-US" sz="1400" dirty="0" err="1">
                 <a:latin typeface="D2Coding" panose="020B0609020101020101" pitchFamily="49" charset="-127"/>
                 <a:ea typeface="D2Coding" panose="020B0609020101020101" pitchFamily="49" charset="-127"/>
               </a:rPr>
               <a:t>Using</a:t>
             </a:r>
             <a:r>
-              <a:rPr lang="ko-KR" altLang="en-US" sz="1600" dirty="0">
+              <a:rPr lang="ko-KR" altLang="en-US" sz="1400" dirty="0">
                 <a:latin typeface="D2Coding" panose="020B0609020101020101" pitchFamily="49" charset="-127"/>
                 <a:ea typeface="D2Coding" panose="020B0609020101020101" pitchFamily="49" charset="-127"/>
               </a:rPr>
               <a:t> </a:t>
             </a:r>
             <a:r>
-              <a:rPr lang="ko-KR" altLang="en-US" sz="1600" dirty="0" err="1">
+              <a:rPr lang="ko-KR" altLang="en-US" sz="1400" dirty="0" err="1">
                 <a:latin typeface="D2Coding" panose="020B0609020101020101" pitchFamily="49" charset="-127"/>
                 <a:ea typeface="D2Coding" panose="020B0609020101020101" pitchFamily="49" charset="-127"/>
               </a:rPr>
               <a:t>the</a:t>
             </a:r>
             <a:r>
-              <a:rPr lang="ko-KR" altLang="en-US" sz="1600" dirty="0">
+              <a:rPr lang="ko-KR" altLang="en-US" sz="1400" dirty="0">
                 <a:latin typeface="D2Coding" panose="020B0609020101020101" pitchFamily="49" charset="-127"/>
                 <a:ea typeface="D2Coding" panose="020B0609020101020101" pitchFamily="49" charset="-127"/>
               </a:rPr>
               <a:t> </a:t>
             </a:r>
             <a:r>
-              <a:rPr lang="ko-KR" altLang="en-US" sz="1600" dirty="0" err="1">
+              <a:rPr lang="ko-KR" altLang="en-US" sz="1400" dirty="0" err="1">
                 <a:latin typeface="D2Coding" panose="020B0609020101020101" pitchFamily="49" charset="-127"/>
                 <a:ea typeface="D2Coding" panose="020B0609020101020101" pitchFamily="49" charset="-127"/>
               </a:rPr>
               <a:t>pretrained</a:t>
             </a:r>
             <a:r>
-              <a:rPr lang="ko-KR" altLang="en-US" sz="1600" dirty="0">
+              <a:rPr lang="ko-KR" altLang="en-US" sz="1400" dirty="0">
                 <a:latin typeface="D2Coding" panose="020B0609020101020101" pitchFamily="49" charset="-127"/>
                 <a:ea typeface="D2Coding" panose="020B0609020101020101" pitchFamily="49" charset="-127"/>
               </a:rPr>
               <a:t> </a:t>
             </a:r>
             <a:r>
-              <a:rPr lang="ko-KR" altLang="en-US" sz="1600" dirty="0" err="1">
+              <a:rPr lang="ko-KR" altLang="en-US" sz="1400" dirty="0" err="1">
                 <a:latin typeface="D2Coding" panose="020B0609020101020101" pitchFamily="49" charset="-127"/>
                 <a:ea typeface="D2Coding" panose="020B0609020101020101" pitchFamily="49" charset="-127"/>
               </a:rPr>
               <a:t>embedding</a:t>
             </a:r>
             <a:r>
-              <a:rPr lang="ko-KR" altLang="en-US" sz="1600" dirty="0">
+              <a:rPr lang="ko-KR" altLang="en-US" sz="1400" dirty="0">
                 <a:latin typeface="D2Coding" panose="020B0609020101020101" pitchFamily="49" charset="-127"/>
                 <a:ea typeface="D2Coding" panose="020B0609020101020101" pitchFamily="49" charset="-127"/>
               </a:rPr>
               <a:t> </a:t>
             </a:r>
             <a:r>
-              <a:rPr lang="ko-KR" altLang="en-US" sz="1600" dirty="0" err="1">
+              <a:rPr lang="ko-KR" altLang="en-US" sz="1400" dirty="0" err="1">
                 <a:latin typeface="D2Coding" panose="020B0609020101020101" pitchFamily="49" charset="-127"/>
                 <a:ea typeface="D2Coding" panose="020B0609020101020101" pitchFamily="49" charset="-127"/>
               </a:rPr>
               <a:t>for</a:t>
             </a:r>
             <a:r>
-              <a:rPr lang="ko-KR" altLang="en-US" sz="1600" dirty="0">
+              <a:rPr lang="ko-KR" altLang="en-US" sz="1400" dirty="0">
                 <a:latin typeface="D2Coding" panose="020B0609020101020101" pitchFamily="49" charset="-127"/>
                 <a:ea typeface="D2Coding" panose="020B0609020101020101" pitchFamily="49" charset="-127"/>
               </a:rPr>
               <a:t> </a:t>
             </a:r>
             <a:r>
-              <a:rPr lang="ko-KR" altLang="en-US" sz="1600" dirty="0" err="1">
+              <a:rPr lang="ko-KR" altLang="en-US" sz="1400" dirty="0" err="1">
                 <a:latin typeface="D2Coding" panose="020B0609020101020101" pitchFamily="49" charset="-127"/>
                 <a:ea typeface="D2Coding" panose="020B0609020101020101" pitchFamily="49" charset="-127"/>
               </a:rPr>
               <a:t>classification</a:t>
             </a:r>
             <a:r>
-              <a:rPr lang="ko-KR" altLang="en-US" sz="1600" dirty="0">
+              <a:rPr lang="ko-KR" altLang="en-US" sz="1400" dirty="0">
                 <a:latin typeface="D2Coding" panose="020B0609020101020101" pitchFamily="49" charset="-127"/>
                 <a:ea typeface="D2Coding" panose="020B0609020101020101" pitchFamily="49" charset="-127"/>
               </a:rPr>
               <a:t> (사전 학습된 </a:t>
             </a:r>
             <a:r>
-              <a:rPr lang="ko-KR" altLang="en-US" sz="1600" dirty="0" err="1">
+              <a:rPr lang="ko-KR" altLang="en-US" sz="1400" dirty="0" err="1">
                 <a:latin typeface="D2Coding" panose="020B0609020101020101" pitchFamily="49" charset="-127"/>
                 <a:ea typeface="D2Coding" panose="020B0609020101020101" pitchFamily="49" charset="-127"/>
               </a:rPr>
               <a:t>임베딩</a:t>
             </a:r>
             <a:r>
-              <a:rPr lang="ko-KR" altLang="en-US" sz="1600" dirty="0">
+              <a:rPr lang="ko-KR" altLang="en-US" sz="1400" dirty="0">
                 <a:latin typeface="D2Coding" panose="020B0609020101020101" pitchFamily="49" charset="-127"/>
                 <a:ea typeface="D2Coding" panose="020B0609020101020101" pitchFamily="49" charset="-127"/>
               </a:rPr>
@@ -11471,7 +11482,7 @@
         </p:nvSpPr>
         <p:spPr>
           <a:xfrm>
-            <a:off x="619125" y="1390649"/>
+            <a:off x="619125" y="1371599"/>
             <a:ext cx="10277475" cy="390525"/>
           </a:xfrm>
           <a:prstGeom prst="rect">
@@ -11601,7 +11612,7 @@
         <p:spPr>
           <a:xfrm>
             <a:off x="861450" y="1400822"/>
-            <a:ext cx="10778099" cy="5009064"/>
+            <a:ext cx="10778099" cy="4416594"/>
           </a:xfrm>
           <a:prstGeom prst="rect">
             <a:avLst/>
@@ -11619,90 +11630,90 @@
               <a:buAutoNum type="arabicPeriod"/>
             </a:pPr>
             <a:r>
-              <a:rPr lang="ko-KR" altLang="en-US" dirty="0" err="1">
+              <a:rPr lang="ko-KR" altLang="en-US" sz="1600" dirty="0" err="1">
                 <a:latin typeface="D2Coding" panose="020B0609020101020101" pitchFamily="49" charset="-127"/>
                 <a:ea typeface="D2Coding" panose="020B0609020101020101" pitchFamily="49" charset="-127"/>
               </a:rPr>
               <a:t>A</a:t>
             </a:r>
             <a:r>
-              <a:rPr lang="ko-KR" altLang="en-US" dirty="0">
+              <a:rPr lang="ko-KR" altLang="en-US" sz="1600" dirty="0">
                 <a:latin typeface="D2Coding" panose="020B0609020101020101" pitchFamily="49" charset="-127"/>
                 <a:ea typeface="D2Coding" panose="020B0609020101020101" pitchFamily="49" charset="-127"/>
               </a:rPr>
               <a:t> </a:t>
             </a:r>
             <a:r>
-              <a:rPr lang="ko-KR" altLang="en-US" dirty="0" err="1">
+              <a:rPr lang="ko-KR" altLang="en-US" sz="1600" dirty="0" err="1">
                 <a:latin typeface="D2Coding" panose="020B0609020101020101" pitchFamily="49" charset="-127"/>
                 <a:ea typeface="D2Coding" panose="020B0609020101020101" pitchFamily="49" charset="-127"/>
               </a:rPr>
               <a:t>brief</a:t>
             </a:r>
             <a:r>
-              <a:rPr lang="ko-KR" altLang="en-US" dirty="0">
+              <a:rPr lang="ko-KR" altLang="en-US" sz="1600" dirty="0">
                 <a:latin typeface="D2Coding" panose="020B0609020101020101" pitchFamily="49" charset="-127"/>
                 <a:ea typeface="D2Coding" panose="020B0609020101020101" pitchFamily="49" charset="-127"/>
               </a:rPr>
               <a:t> </a:t>
             </a:r>
             <a:r>
-              <a:rPr lang="ko-KR" altLang="en-US" dirty="0" err="1">
+              <a:rPr lang="ko-KR" altLang="en-US" sz="1600" dirty="0" err="1">
                 <a:latin typeface="D2Coding" panose="020B0609020101020101" pitchFamily="49" charset="-127"/>
                 <a:ea typeface="D2Coding" panose="020B0609020101020101" pitchFamily="49" charset="-127"/>
               </a:rPr>
               <a:t>history</a:t>
             </a:r>
             <a:r>
-              <a:rPr lang="ko-KR" altLang="en-US" dirty="0">
+              <a:rPr lang="ko-KR" altLang="en-US" sz="1600" dirty="0">
                 <a:latin typeface="D2Coding" panose="020B0609020101020101" pitchFamily="49" charset="-127"/>
                 <a:ea typeface="D2Coding" panose="020B0609020101020101" pitchFamily="49" charset="-127"/>
               </a:rPr>
               <a:t> of </a:t>
             </a:r>
             <a:r>
-              <a:rPr lang="ko-KR" altLang="en-US" dirty="0" err="1">
+              <a:rPr lang="ko-KR" altLang="en-US" sz="1600" dirty="0" err="1">
                 <a:latin typeface="D2Coding" panose="020B0609020101020101" pitchFamily="49" charset="-127"/>
                 <a:ea typeface="D2Coding" panose="020B0609020101020101" pitchFamily="49" charset="-127"/>
               </a:rPr>
               <a:t>natural</a:t>
             </a:r>
             <a:r>
-              <a:rPr lang="ko-KR" altLang="en-US" dirty="0">
+              <a:rPr lang="ko-KR" altLang="en-US" sz="1600" dirty="0">
                 <a:latin typeface="D2Coding" panose="020B0609020101020101" pitchFamily="49" charset="-127"/>
                 <a:ea typeface="D2Coding" panose="020B0609020101020101" pitchFamily="49" charset="-127"/>
               </a:rPr>
               <a:t> </a:t>
             </a:r>
             <a:r>
-              <a:rPr lang="ko-KR" altLang="en-US" dirty="0" err="1">
+              <a:rPr lang="ko-KR" altLang="en-US" sz="1600" dirty="0" err="1">
                 <a:latin typeface="D2Coding" panose="020B0609020101020101" pitchFamily="49" charset="-127"/>
                 <a:ea typeface="D2Coding" panose="020B0609020101020101" pitchFamily="49" charset="-127"/>
               </a:rPr>
               <a:t>language</a:t>
             </a:r>
             <a:r>
-              <a:rPr lang="ko-KR" altLang="en-US" dirty="0">
+              <a:rPr lang="ko-KR" altLang="en-US" sz="1600" dirty="0">
                 <a:latin typeface="D2Coding" panose="020B0609020101020101" pitchFamily="49" charset="-127"/>
                 <a:ea typeface="D2Coding" panose="020B0609020101020101" pitchFamily="49" charset="-127"/>
               </a:rPr>
               <a:t> </a:t>
             </a:r>
             <a:r>
-              <a:rPr lang="ko-KR" altLang="en-US" dirty="0" err="1">
+              <a:rPr lang="ko-KR" altLang="en-US" sz="1600" dirty="0" err="1">
                 <a:latin typeface="D2Coding" panose="020B0609020101020101" pitchFamily="49" charset="-127"/>
                 <a:ea typeface="D2Coding" panose="020B0609020101020101" pitchFamily="49" charset="-127"/>
               </a:rPr>
               <a:t>processing</a:t>
             </a:r>
             <a:r>
-              <a:rPr lang="ko-KR" altLang="en-US" dirty="0">
+              <a:rPr lang="ko-KR" altLang="en-US" sz="1600" dirty="0">
                 <a:latin typeface="D2Coding" panose="020B0609020101020101" pitchFamily="49" charset="-127"/>
                 <a:ea typeface="D2Coding" panose="020B0609020101020101" pitchFamily="49" charset="-127"/>
               </a:rPr>
               <a:t> (자연어 처리의 개요/역사)</a:t>
             </a:r>
-            <a:endParaRPr lang="en-US" altLang="ko-KR" dirty="0">
+            <a:endParaRPr lang="en-US" altLang="ko-KR" sz="1600" dirty="0">
               <a:latin typeface="D2Coding" panose="020B0609020101020101" pitchFamily="49" charset="-127"/>
               <a:ea typeface="D2Coding" panose="020B0609020101020101" pitchFamily="49" charset="-127"/>
             </a:endParaRPr>
@@ -11712,7 +11723,7 @@
               <a:buFont typeface="+mj-lt"/>
               <a:buAutoNum type="arabicPeriod"/>
             </a:pPr>
-            <a:endParaRPr lang="ko-KR" altLang="en-US" sz="1050" dirty="0">
+            <a:endParaRPr lang="ko-KR" altLang="en-US" sz="1000" dirty="0">
               <a:latin typeface="D2Coding" panose="020B0609020101020101" pitchFamily="49" charset="-127"/>
               <a:ea typeface="D2Coding" panose="020B0609020101020101" pitchFamily="49" charset="-127"/>
             </a:endParaRPr>
@@ -11723,62 +11734,62 @@
               <a:buAutoNum type="arabicPeriod"/>
             </a:pPr>
             <a:r>
-              <a:rPr lang="ko-KR" altLang="en-US" dirty="0" err="1">
+              <a:rPr lang="ko-KR" altLang="en-US" sz="1600" dirty="0" err="1">
                 <a:latin typeface="D2Coding" panose="020B0609020101020101" pitchFamily="49" charset="-127"/>
                 <a:ea typeface="D2Coding" panose="020B0609020101020101" pitchFamily="49" charset="-127"/>
               </a:rPr>
               <a:t>Preparing</a:t>
             </a:r>
             <a:r>
-              <a:rPr lang="ko-KR" altLang="en-US" dirty="0">
+              <a:rPr lang="ko-KR" altLang="en-US" sz="1600" dirty="0">
                 <a:latin typeface="D2Coding" panose="020B0609020101020101" pitchFamily="49" charset="-127"/>
                 <a:ea typeface="D2Coding" panose="020B0609020101020101" pitchFamily="49" charset="-127"/>
               </a:rPr>
               <a:t> </a:t>
             </a:r>
             <a:r>
-              <a:rPr lang="ko-KR" altLang="en-US" dirty="0" err="1">
+              <a:rPr lang="ko-KR" altLang="en-US" sz="1600" dirty="0" err="1">
                 <a:latin typeface="D2Coding" panose="020B0609020101020101" pitchFamily="49" charset="-127"/>
                 <a:ea typeface="D2Coding" panose="020B0609020101020101" pitchFamily="49" charset="-127"/>
               </a:rPr>
               <a:t>text</a:t>
             </a:r>
             <a:r>
-              <a:rPr lang="ko-KR" altLang="en-US" dirty="0">
+              <a:rPr lang="ko-KR" altLang="en-US" sz="1600" dirty="0">
                 <a:latin typeface="D2Coding" panose="020B0609020101020101" pitchFamily="49" charset="-127"/>
                 <a:ea typeface="D2Coding" panose="020B0609020101020101" pitchFamily="49" charset="-127"/>
               </a:rPr>
               <a:t> </a:t>
             </a:r>
             <a:r>
-              <a:rPr lang="ko-KR" altLang="en-US" dirty="0" err="1">
+              <a:rPr lang="ko-KR" altLang="en-US" sz="1600" dirty="0" err="1">
                 <a:latin typeface="D2Coding" panose="020B0609020101020101" pitchFamily="49" charset="-127"/>
                 <a:ea typeface="D2Coding" panose="020B0609020101020101" pitchFamily="49" charset="-127"/>
               </a:rPr>
               <a:t>data</a:t>
             </a:r>
             <a:r>
-              <a:rPr lang="ko-KR" altLang="en-US" dirty="0">
+              <a:rPr lang="ko-KR" altLang="en-US" sz="1600" dirty="0">
                 <a:latin typeface="D2Coding" panose="020B0609020101020101" pitchFamily="49" charset="-127"/>
                 <a:ea typeface="D2Coding" panose="020B0609020101020101" pitchFamily="49" charset="-127"/>
               </a:rPr>
               <a:t> (텍스트 데이터 </a:t>
             </a:r>
             <a:r>
-              <a:rPr lang="ko-KR" altLang="en-US" dirty="0" err="1">
+              <a:rPr lang="ko-KR" altLang="en-US" sz="1600" dirty="0" err="1">
                 <a:latin typeface="D2Coding" panose="020B0609020101020101" pitchFamily="49" charset="-127"/>
                 <a:ea typeface="D2Coding" panose="020B0609020101020101" pitchFamily="49" charset="-127"/>
               </a:rPr>
               <a:t>전처리</a:t>
             </a:r>
             <a:r>
-              <a:rPr lang="ko-KR" altLang="en-US" dirty="0">
+              <a:rPr lang="ko-KR" altLang="en-US" sz="1600" dirty="0">
                 <a:latin typeface="D2Coding" panose="020B0609020101020101" pitchFamily="49" charset="-127"/>
                 <a:ea typeface="D2Coding" panose="020B0609020101020101" pitchFamily="49" charset="-127"/>
               </a:rPr>
               <a:t>)</a:t>
             </a:r>
-            <a:endParaRPr lang="en-US" altLang="ko-KR" dirty="0">
+            <a:endParaRPr lang="en-US" altLang="ko-KR" sz="1600" dirty="0">
               <a:latin typeface="D2Coding" panose="020B0609020101020101" pitchFamily="49" charset="-127"/>
               <a:ea typeface="D2Coding" panose="020B0609020101020101" pitchFamily="49" charset="-127"/>
             </a:endParaRPr>
@@ -11792,46 +11803,156 @@
               <a:buAutoNum type="arabicPeriod"/>
             </a:pPr>
             <a:r>
+              <a:rPr lang="ko-KR" altLang="en-US" sz="1400" dirty="0" err="1">
+                <a:latin typeface="D2Coding" panose="020B0609020101020101" pitchFamily="49" charset="-127"/>
+                <a:ea typeface="D2Coding" panose="020B0609020101020101" pitchFamily="49" charset="-127"/>
+              </a:rPr>
+              <a:t>Character</a:t>
+            </a:r>
+            <a:r>
+              <a:rPr lang="ko-KR" altLang="en-US" sz="1400" dirty="0">
+                <a:latin typeface="D2Coding" panose="020B0609020101020101" pitchFamily="49" charset="-127"/>
+                <a:ea typeface="D2Coding" panose="020B0609020101020101" pitchFamily="49" charset="-127"/>
+              </a:rPr>
+              <a:t> and </a:t>
+            </a:r>
+            <a:r>
+              <a:rPr lang="ko-KR" altLang="en-US" sz="1400" dirty="0" err="1">
+                <a:latin typeface="D2Coding" panose="020B0609020101020101" pitchFamily="49" charset="-127"/>
+                <a:ea typeface="D2Coding" panose="020B0609020101020101" pitchFamily="49" charset="-127"/>
+              </a:rPr>
+              <a:t>word</a:t>
+            </a:r>
+            <a:r>
+              <a:rPr lang="ko-KR" altLang="en-US" sz="1400" dirty="0">
+                <a:latin typeface="D2Coding" panose="020B0609020101020101" pitchFamily="49" charset="-127"/>
+                <a:ea typeface="D2Coding" panose="020B0609020101020101" pitchFamily="49" charset="-127"/>
+              </a:rPr>
+              <a:t> </a:t>
+            </a:r>
+            <a:r>
+              <a:rPr lang="ko-KR" altLang="en-US" sz="1400" dirty="0" err="1">
+                <a:latin typeface="D2Coding" panose="020B0609020101020101" pitchFamily="49" charset="-127"/>
+                <a:ea typeface="D2Coding" panose="020B0609020101020101" pitchFamily="49" charset="-127"/>
+              </a:rPr>
+              <a:t>tokenization</a:t>
+            </a:r>
+            <a:r>
+              <a:rPr lang="ko-KR" altLang="en-US" sz="1400" dirty="0">
+                <a:latin typeface="D2Coding" panose="020B0609020101020101" pitchFamily="49" charset="-127"/>
+                <a:ea typeface="D2Coding" panose="020B0609020101020101" pitchFamily="49" charset="-127"/>
+              </a:rPr>
+              <a:t> (문자 및 단어 단위 토큰화)</a:t>
+            </a:r>
+            <a:endParaRPr lang="en-US" altLang="ko-KR" sz="1400" dirty="0">
+              <a:latin typeface="D2Coding" panose="020B0609020101020101" pitchFamily="49" charset="-127"/>
+              <a:ea typeface="D2Coding" panose="020B0609020101020101" pitchFamily="49" charset="-127"/>
+            </a:endParaRPr>
+          </a:p>
+          <a:p>
+            <a:pPr marL="800100" lvl="1" indent="-342900">
+              <a:buFont typeface="+mj-lt"/>
+              <a:buAutoNum type="arabicPeriod"/>
+            </a:pPr>
+            <a:r>
+              <a:rPr lang="ko-KR" altLang="en-US" sz="1400" dirty="0" err="1">
+                <a:latin typeface="D2Coding" panose="020B0609020101020101" pitchFamily="49" charset="-127"/>
+                <a:ea typeface="D2Coding" panose="020B0609020101020101" pitchFamily="49" charset="-127"/>
+              </a:rPr>
+              <a:t>Subword</a:t>
+            </a:r>
+            <a:r>
+              <a:rPr lang="ko-KR" altLang="en-US" sz="1400" dirty="0">
+                <a:latin typeface="D2Coding" panose="020B0609020101020101" pitchFamily="49" charset="-127"/>
+                <a:ea typeface="D2Coding" panose="020B0609020101020101" pitchFamily="49" charset="-127"/>
+              </a:rPr>
+              <a:t> </a:t>
+            </a:r>
+            <a:r>
+              <a:rPr lang="ko-KR" altLang="en-US" sz="1400" dirty="0" err="1">
+                <a:latin typeface="D2Coding" panose="020B0609020101020101" pitchFamily="49" charset="-127"/>
+                <a:ea typeface="D2Coding" panose="020B0609020101020101" pitchFamily="49" charset="-127"/>
+              </a:rPr>
+              <a:t>tokenization</a:t>
+            </a:r>
+            <a:r>
+              <a:rPr lang="ko-KR" altLang="en-US" sz="1400" dirty="0">
+                <a:latin typeface="D2Coding" panose="020B0609020101020101" pitchFamily="49" charset="-127"/>
+                <a:ea typeface="D2Coding" panose="020B0609020101020101" pitchFamily="49" charset="-127"/>
+              </a:rPr>
+              <a:t> (</a:t>
+            </a:r>
+            <a:r>
+              <a:rPr lang="ko-KR" altLang="en-US" sz="1400" dirty="0" err="1">
+                <a:latin typeface="D2Coding" panose="020B0609020101020101" pitchFamily="49" charset="-127"/>
+                <a:ea typeface="D2Coding" panose="020B0609020101020101" pitchFamily="49" charset="-127"/>
+              </a:rPr>
+              <a:t>서브워드</a:t>
+            </a:r>
+            <a:r>
+              <a:rPr lang="ko-KR" altLang="en-US" sz="1400" dirty="0">
+                <a:latin typeface="D2Coding" panose="020B0609020101020101" pitchFamily="49" charset="-127"/>
+                <a:ea typeface="D2Coding" panose="020B0609020101020101" pitchFamily="49" charset="-127"/>
+              </a:rPr>
+              <a:t> 단위 토큰화)</a:t>
+            </a:r>
+          </a:p>
+          <a:p>
+            <a:pPr marL="342900" indent="-342900">
+              <a:buFont typeface="+mj-lt"/>
+              <a:buAutoNum type="arabicPeriod"/>
+            </a:pPr>
+            <a:endParaRPr lang="ko-KR" altLang="en-US" sz="1000" dirty="0">
+              <a:latin typeface="D2Coding" panose="020B0609020101020101" pitchFamily="49" charset="-127"/>
+              <a:ea typeface="D2Coding" panose="020B0609020101020101" pitchFamily="49" charset="-127"/>
+            </a:endParaRPr>
+          </a:p>
+          <a:p>
+            <a:pPr marL="342900" indent="-342900">
+              <a:buFont typeface="+mj-lt"/>
+              <a:buAutoNum type="arabicPeriod"/>
+            </a:pPr>
+            <a:r>
               <a:rPr lang="ko-KR" altLang="en-US" sz="1600" dirty="0" err="1">
                 <a:latin typeface="D2Coding" panose="020B0609020101020101" pitchFamily="49" charset="-127"/>
                 <a:ea typeface="D2Coding" panose="020B0609020101020101" pitchFamily="49" charset="-127"/>
               </a:rPr>
-              <a:t>Character</a:t>
+              <a:t>Sets</a:t>
             </a:r>
             <a:r>
               <a:rPr lang="ko-KR" altLang="en-US" sz="1600" dirty="0">
                 <a:latin typeface="D2Coding" panose="020B0609020101020101" pitchFamily="49" charset="-127"/>
                 <a:ea typeface="D2Coding" panose="020B0609020101020101" pitchFamily="49" charset="-127"/>
               </a:rPr>
-              <a:t> and </a:t>
+              <a:t> </a:t>
             </a:r>
             <a:r>
               <a:rPr lang="ko-KR" altLang="en-US" sz="1600" dirty="0" err="1">
                 <a:latin typeface="D2Coding" panose="020B0609020101020101" pitchFamily="49" charset="-127"/>
                 <a:ea typeface="D2Coding" panose="020B0609020101020101" pitchFamily="49" charset="-127"/>
               </a:rPr>
-              <a:t>word</a:t>
+              <a:t>vs</a:t>
             </a:r>
             <a:r>
               <a:rPr lang="ko-KR" altLang="en-US" sz="1600" dirty="0">
                 <a:latin typeface="D2Coding" panose="020B0609020101020101" pitchFamily="49" charset="-127"/>
                 <a:ea typeface="D2Coding" panose="020B0609020101020101" pitchFamily="49" charset="-127"/>
               </a:rPr>
-              <a:t> </a:t>
+              <a:t>. </a:t>
             </a:r>
             <a:r>
               <a:rPr lang="ko-KR" altLang="en-US" sz="1600" dirty="0" err="1">
                 <a:latin typeface="D2Coding" panose="020B0609020101020101" pitchFamily="49" charset="-127"/>
                 <a:ea typeface="D2Coding" panose="020B0609020101020101" pitchFamily="49" charset="-127"/>
               </a:rPr>
-              <a:t>tokenization</a:t>
+              <a:t>sequences</a:t>
             </a:r>
             <a:r>
               <a:rPr lang="ko-KR" altLang="en-US" sz="1600" dirty="0">
                 <a:latin typeface="D2Coding" panose="020B0609020101020101" pitchFamily="49" charset="-127"/>
                 <a:ea typeface="D2Coding" panose="020B0609020101020101" pitchFamily="49" charset="-127"/>
               </a:rPr>
-              <a:t> (문자 및 단어 단위 토큰화)</a:t>
+              <a:t> (텍스트 표현 관점의 비교)</a:t>
             </a:r>
             <a:endParaRPr lang="en-US" altLang="ko-KR" sz="1600" dirty="0">
               <a:latin typeface="D2Coding" panose="020B0609020101020101" pitchFamily="49" charset="-127"/>
@@ -11844,46 +11965,88 @@
               <a:buAutoNum type="arabicPeriod"/>
             </a:pPr>
             <a:r>
-              <a:rPr lang="ko-KR" altLang="en-US" sz="1600" dirty="0" err="1">
-                <a:latin typeface="D2Coding" panose="020B0609020101020101" pitchFamily="49" charset="-127"/>
-                <a:ea typeface="D2Coding" panose="020B0609020101020101" pitchFamily="49" charset="-127"/>
-              </a:rPr>
-              <a:t>Subword</a:t>
-            </a:r>
-            <a:r>
-              <a:rPr lang="ko-KR" altLang="en-US" sz="1600" dirty="0">
+              <a:rPr lang="ko-KR" altLang="en-US" sz="1400" dirty="0" err="1">
+                <a:latin typeface="D2Coding" panose="020B0609020101020101" pitchFamily="49" charset="-127"/>
+                <a:ea typeface="D2Coding" panose="020B0609020101020101" pitchFamily="49" charset="-127"/>
+              </a:rPr>
+              <a:t>Loading</a:t>
+            </a:r>
+            <a:r>
+              <a:rPr lang="ko-KR" altLang="en-US" sz="1400" dirty="0">
                 <a:latin typeface="D2Coding" panose="020B0609020101020101" pitchFamily="49" charset="-127"/>
                 <a:ea typeface="D2Coding" panose="020B0609020101020101" pitchFamily="49" charset="-127"/>
               </a:rPr>
               <a:t> </a:t>
             </a:r>
             <a:r>
-              <a:rPr lang="ko-KR" altLang="en-US" sz="1600" dirty="0" err="1">
-                <a:latin typeface="D2Coding" panose="020B0609020101020101" pitchFamily="49" charset="-127"/>
-                <a:ea typeface="D2Coding" panose="020B0609020101020101" pitchFamily="49" charset="-127"/>
-              </a:rPr>
-              <a:t>tokenization</a:t>
-            </a:r>
-            <a:r>
-              <a:rPr lang="ko-KR" altLang="en-US" sz="1600" dirty="0">
+              <a:rPr lang="ko-KR" altLang="en-US" sz="1400" dirty="0" err="1">
+                <a:latin typeface="D2Coding" panose="020B0609020101020101" pitchFamily="49" charset="-127"/>
+                <a:ea typeface="D2Coding" panose="020B0609020101020101" pitchFamily="49" charset="-127"/>
+              </a:rPr>
+              <a:t>the</a:t>
+            </a:r>
+            <a:r>
+              <a:rPr lang="ko-KR" altLang="en-US" sz="1400" dirty="0">
+                <a:latin typeface="D2Coding" panose="020B0609020101020101" pitchFamily="49" charset="-127"/>
+                <a:ea typeface="D2Coding" panose="020B0609020101020101" pitchFamily="49" charset="-127"/>
+              </a:rPr>
+              <a:t> </a:t>
+            </a:r>
+            <a:r>
+              <a:rPr lang="ko-KR" altLang="en-US" sz="1400" dirty="0" err="1">
+                <a:latin typeface="D2Coding" panose="020B0609020101020101" pitchFamily="49" charset="-127"/>
+                <a:ea typeface="D2Coding" panose="020B0609020101020101" pitchFamily="49" charset="-127"/>
+              </a:rPr>
+              <a:t>IMDb</a:t>
+            </a:r>
+            <a:r>
+              <a:rPr lang="ko-KR" altLang="en-US" sz="1400" dirty="0">
+                <a:latin typeface="D2Coding" panose="020B0609020101020101" pitchFamily="49" charset="-127"/>
+                <a:ea typeface="D2Coding" panose="020B0609020101020101" pitchFamily="49" charset="-127"/>
+              </a:rPr>
+              <a:t> </a:t>
+            </a:r>
+            <a:r>
+              <a:rPr lang="ko-KR" altLang="en-US" sz="1400" dirty="0" err="1">
+                <a:latin typeface="D2Coding" panose="020B0609020101020101" pitchFamily="49" charset="-127"/>
+                <a:ea typeface="D2Coding" panose="020B0609020101020101" pitchFamily="49" charset="-127"/>
+              </a:rPr>
+              <a:t>classification</a:t>
+            </a:r>
+            <a:r>
+              <a:rPr lang="ko-KR" altLang="en-US" sz="1400" dirty="0">
+                <a:latin typeface="D2Coding" panose="020B0609020101020101" pitchFamily="49" charset="-127"/>
+                <a:ea typeface="D2Coding" panose="020B0609020101020101" pitchFamily="49" charset="-127"/>
+              </a:rPr>
+              <a:t> </a:t>
+            </a:r>
+            <a:r>
+              <a:rPr lang="ko-KR" altLang="en-US" sz="1400" dirty="0" err="1">
+                <a:latin typeface="D2Coding" panose="020B0609020101020101" pitchFamily="49" charset="-127"/>
+                <a:ea typeface="D2Coding" panose="020B0609020101020101" pitchFamily="49" charset="-127"/>
+              </a:rPr>
+              <a:t>dataset</a:t>
+            </a:r>
+            <a:r>
+              <a:rPr lang="ko-KR" altLang="en-US" sz="1400" dirty="0">
                 <a:latin typeface="D2Coding" panose="020B0609020101020101" pitchFamily="49" charset="-127"/>
                 <a:ea typeface="D2Coding" panose="020B0609020101020101" pitchFamily="49" charset="-127"/>
               </a:rPr>
               <a:t> (</a:t>
             </a:r>
             <a:r>
-              <a:rPr lang="ko-KR" altLang="en-US" sz="1600" dirty="0" err="1">
-                <a:latin typeface="D2Coding" panose="020B0609020101020101" pitchFamily="49" charset="-127"/>
-                <a:ea typeface="D2Coding" panose="020B0609020101020101" pitchFamily="49" charset="-127"/>
-              </a:rPr>
-              <a:t>서브워드</a:t>
-            </a:r>
-            <a:r>
-              <a:rPr lang="ko-KR" altLang="en-US" sz="1600" dirty="0">
-                <a:latin typeface="D2Coding" panose="020B0609020101020101" pitchFamily="49" charset="-127"/>
-                <a:ea typeface="D2Coding" panose="020B0609020101020101" pitchFamily="49" charset="-127"/>
-              </a:rPr>
-              <a:t> 단위 토큰화)</a:t>
+              <a:rPr lang="ko-KR" altLang="en-US" sz="1400" dirty="0" err="1">
+                <a:latin typeface="D2Coding" panose="020B0609020101020101" pitchFamily="49" charset="-127"/>
+                <a:ea typeface="D2Coding" panose="020B0609020101020101" pitchFamily="49" charset="-127"/>
+              </a:rPr>
+              <a:t>IMDb</a:t>
+            </a:r>
+            <a:r>
+              <a:rPr lang="ko-KR" altLang="en-US" sz="1400" dirty="0">
+                <a:latin typeface="D2Coding" panose="020B0609020101020101" pitchFamily="49" charset="-127"/>
+                <a:ea typeface="D2Coding" panose="020B0609020101020101" pitchFamily="49" charset="-127"/>
+              </a:rPr>
+              <a:t> 영화 리뷰 분류 데이터셋 로딩)</a:t>
             </a:r>
           </a:p>
           <a:p>
@@ -11891,7 +12054,7 @@
               <a:buFont typeface="+mj-lt"/>
               <a:buAutoNum type="arabicPeriod"/>
             </a:pPr>
-            <a:endParaRPr lang="ko-KR" altLang="en-US" sz="1050" dirty="0">
+            <a:endParaRPr lang="ko-KR" altLang="en-US" sz="1000" dirty="0">
               <a:latin typeface="D2Coding" panose="020B0609020101020101" pitchFamily="49" charset="-127"/>
               <a:ea typeface="D2Coding" panose="020B0609020101020101" pitchFamily="49" charset="-127"/>
             </a:endParaRPr>
@@ -11902,186 +12065,34 @@
               <a:buAutoNum type="arabicPeriod"/>
             </a:pPr>
             <a:r>
-              <a:rPr lang="ko-KR" altLang="en-US" dirty="0" err="1">
-                <a:latin typeface="D2Coding" panose="020B0609020101020101" pitchFamily="49" charset="-127"/>
-                <a:ea typeface="D2Coding" panose="020B0609020101020101" pitchFamily="49" charset="-127"/>
-              </a:rPr>
-              <a:t>Sets</a:t>
-            </a:r>
-            <a:r>
-              <a:rPr lang="ko-KR" altLang="en-US" dirty="0">
+              <a:rPr lang="ko-KR" altLang="en-US" sz="1600" dirty="0" err="1">
+                <a:latin typeface="D2Coding" panose="020B0609020101020101" pitchFamily="49" charset="-127"/>
+                <a:ea typeface="D2Coding" panose="020B0609020101020101" pitchFamily="49" charset="-127"/>
+              </a:rPr>
+              <a:t>Set</a:t>
+            </a:r>
+            <a:r>
+              <a:rPr lang="ko-KR" altLang="en-US" sz="1600" dirty="0">
                 <a:latin typeface="D2Coding" panose="020B0609020101020101" pitchFamily="49" charset="-127"/>
                 <a:ea typeface="D2Coding" panose="020B0609020101020101" pitchFamily="49" charset="-127"/>
               </a:rPr>
               <a:t> </a:t>
             </a:r>
             <a:r>
-              <a:rPr lang="ko-KR" altLang="en-US" dirty="0" err="1">
-                <a:latin typeface="D2Coding" panose="020B0609020101020101" pitchFamily="49" charset="-127"/>
-                <a:ea typeface="D2Coding" panose="020B0609020101020101" pitchFamily="49" charset="-127"/>
-              </a:rPr>
-              <a:t>vs</a:t>
-            </a:r>
-            <a:r>
-              <a:rPr lang="ko-KR" altLang="en-US" dirty="0">
-                <a:latin typeface="D2Coding" panose="020B0609020101020101" pitchFamily="49" charset="-127"/>
-                <a:ea typeface="D2Coding" panose="020B0609020101020101" pitchFamily="49" charset="-127"/>
-              </a:rPr>
-              <a:t>. </a:t>
-            </a:r>
-            <a:r>
-              <a:rPr lang="ko-KR" altLang="en-US" dirty="0" err="1">
-                <a:latin typeface="D2Coding" panose="020B0609020101020101" pitchFamily="49" charset="-127"/>
-                <a:ea typeface="D2Coding" panose="020B0609020101020101" pitchFamily="49" charset="-127"/>
-              </a:rPr>
-              <a:t>sequences</a:t>
-            </a:r>
-            <a:r>
-              <a:rPr lang="ko-KR" altLang="en-US" dirty="0">
-                <a:latin typeface="D2Coding" panose="020B0609020101020101" pitchFamily="49" charset="-127"/>
-                <a:ea typeface="D2Coding" panose="020B0609020101020101" pitchFamily="49" charset="-127"/>
-              </a:rPr>
-              <a:t> (텍스트 표현 관점의 비교)</a:t>
-            </a:r>
-            <a:endParaRPr lang="en-US" altLang="ko-KR" dirty="0">
-              <a:latin typeface="D2Coding" panose="020B0609020101020101" pitchFamily="49" charset="-127"/>
-              <a:ea typeface="D2Coding" panose="020B0609020101020101" pitchFamily="49" charset="-127"/>
-            </a:endParaRPr>
-          </a:p>
-          <a:p>
-            <a:pPr marL="800100" lvl="1" indent="-342900">
-              <a:buFont typeface="+mj-lt"/>
-              <a:buAutoNum type="arabicPeriod"/>
-            </a:pPr>
-            <a:r>
               <a:rPr lang="ko-KR" altLang="en-US" sz="1600" dirty="0" err="1">
                 <a:latin typeface="D2Coding" panose="020B0609020101020101" pitchFamily="49" charset="-127"/>
                 <a:ea typeface="D2Coding" panose="020B0609020101020101" pitchFamily="49" charset="-127"/>
               </a:rPr>
-              <a:t>Loading</a:t>
+              <a:t>models</a:t>
             </a:r>
             <a:r>
               <a:rPr lang="ko-KR" altLang="en-US" sz="1600" dirty="0">
                 <a:latin typeface="D2Coding" panose="020B0609020101020101" pitchFamily="49" charset="-127"/>
                 <a:ea typeface="D2Coding" panose="020B0609020101020101" pitchFamily="49" charset="-127"/>
               </a:rPr>
-              <a:t> </a:t>
-            </a:r>
-            <a:r>
-              <a:rPr lang="ko-KR" altLang="en-US" sz="1600" dirty="0" err="1">
-                <a:latin typeface="D2Coding" panose="020B0609020101020101" pitchFamily="49" charset="-127"/>
-                <a:ea typeface="D2Coding" panose="020B0609020101020101" pitchFamily="49" charset="-127"/>
-              </a:rPr>
-              <a:t>the</a:t>
-            </a:r>
-            <a:r>
-              <a:rPr lang="ko-KR" altLang="en-US" sz="1600" dirty="0">
-                <a:latin typeface="D2Coding" panose="020B0609020101020101" pitchFamily="49" charset="-127"/>
-                <a:ea typeface="D2Coding" panose="020B0609020101020101" pitchFamily="49" charset="-127"/>
-              </a:rPr>
-              <a:t> </a:t>
-            </a:r>
-            <a:r>
-              <a:rPr lang="ko-KR" altLang="en-US" sz="1600" dirty="0" err="1">
-                <a:latin typeface="D2Coding" panose="020B0609020101020101" pitchFamily="49" charset="-127"/>
-                <a:ea typeface="D2Coding" panose="020B0609020101020101" pitchFamily="49" charset="-127"/>
-              </a:rPr>
-              <a:t>IMDb</a:t>
-            </a:r>
-            <a:r>
-              <a:rPr lang="ko-KR" altLang="en-US" sz="1600" dirty="0">
-                <a:latin typeface="D2Coding" panose="020B0609020101020101" pitchFamily="49" charset="-127"/>
-                <a:ea typeface="D2Coding" panose="020B0609020101020101" pitchFamily="49" charset="-127"/>
-              </a:rPr>
-              <a:t> </a:t>
-            </a:r>
-            <a:r>
-              <a:rPr lang="ko-KR" altLang="en-US" sz="1600" dirty="0" err="1">
-                <a:latin typeface="D2Coding" panose="020B0609020101020101" pitchFamily="49" charset="-127"/>
-                <a:ea typeface="D2Coding" panose="020B0609020101020101" pitchFamily="49" charset="-127"/>
-              </a:rPr>
-              <a:t>classification</a:t>
-            </a:r>
-            <a:r>
-              <a:rPr lang="ko-KR" altLang="en-US" sz="1600" dirty="0">
-                <a:latin typeface="D2Coding" panose="020B0609020101020101" pitchFamily="49" charset="-127"/>
-                <a:ea typeface="D2Coding" panose="020B0609020101020101" pitchFamily="49" charset="-127"/>
-              </a:rPr>
-              <a:t> </a:t>
-            </a:r>
-            <a:r>
-              <a:rPr lang="ko-KR" altLang="en-US" sz="1600" dirty="0" err="1">
-                <a:latin typeface="D2Coding" panose="020B0609020101020101" pitchFamily="49" charset="-127"/>
-                <a:ea typeface="D2Coding" panose="020B0609020101020101" pitchFamily="49" charset="-127"/>
-              </a:rPr>
-              <a:t>dataset</a:t>
-            </a:r>
-            <a:r>
-              <a:rPr lang="ko-KR" altLang="en-US" sz="1600" dirty="0">
-                <a:latin typeface="D2Coding" panose="020B0609020101020101" pitchFamily="49" charset="-127"/>
-                <a:ea typeface="D2Coding" panose="020B0609020101020101" pitchFamily="49" charset="-127"/>
-              </a:rPr>
-              <a:t> (</a:t>
-            </a:r>
-            <a:r>
-              <a:rPr lang="ko-KR" altLang="en-US" sz="1600" dirty="0" err="1">
-                <a:latin typeface="D2Coding" panose="020B0609020101020101" pitchFamily="49" charset="-127"/>
-                <a:ea typeface="D2Coding" panose="020B0609020101020101" pitchFamily="49" charset="-127"/>
-              </a:rPr>
-              <a:t>IMDb</a:t>
-            </a:r>
-            <a:r>
-              <a:rPr lang="ko-KR" altLang="en-US" sz="1600" dirty="0">
-                <a:latin typeface="D2Coding" panose="020B0609020101020101" pitchFamily="49" charset="-127"/>
-                <a:ea typeface="D2Coding" panose="020B0609020101020101" pitchFamily="49" charset="-127"/>
-              </a:rPr>
-              <a:t> 영화 리뷰 분류 데이터셋 로딩)</a:t>
-            </a:r>
-          </a:p>
-          <a:p>
-            <a:pPr marL="342900" indent="-342900">
-              <a:buFont typeface="+mj-lt"/>
-              <a:buAutoNum type="arabicPeriod"/>
-            </a:pPr>
-            <a:endParaRPr lang="ko-KR" altLang="en-US" sz="1050" dirty="0">
-              <a:latin typeface="D2Coding" panose="020B0609020101020101" pitchFamily="49" charset="-127"/>
-              <a:ea typeface="D2Coding" panose="020B0609020101020101" pitchFamily="49" charset="-127"/>
-            </a:endParaRPr>
-          </a:p>
-          <a:p>
-            <a:pPr marL="342900" indent="-342900">
-              <a:buFont typeface="+mj-lt"/>
-              <a:buAutoNum type="arabicPeriod"/>
-            </a:pPr>
-            <a:r>
-              <a:rPr lang="ko-KR" altLang="en-US" dirty="0" err="1">
-                <a:latin typeface="D2Coding" panose="020B0609020101020101" pitchFamily="49" charset="-127"/>
-                <a:ea typeface="D2Coding" panose="020B0609020101020101" pitchFamily="49" charset="-127"/>
-              </a:rPr>
-              <a:t>Set</a:t>
-            </a:r>
-            <a:r>
-              <a:rPr lang="ko-KR" altLang="en-US" dirty="0">
-                <a:latin typeface="D2Coding" panose="020B0609020101020101" pitchFamily="49" charset="-127"/>
-                <a:ea typeface="D2Coding" panose="020B0609020101020101" pitchFamily="49" charset="-127"/>
-              </a:rPr>
-              <a:t> </a:t>
-            </a:r>
-            <a:r>
-              <a:rPr lang="ko-KR" altLang="en-US" dirty="0" err="1">
-                <a:latin typeface="D2Coding" panose="020B0609020101020101" pitchFamily="49" charset="-127"/>
-                <a:ea typeface="D2Coding" panose="020B0609020101020101" pitchFamily="49" charset="-127"/>
-              </a:rPr>
-              <a:t>models</a:t>
-            </a:r>
-            <a:r>
-              <a:rPr lang="ko-KR" altLang="en-US" dirty="0">
-                <a:latin typeface="D2Coding" panose="020B0609020101020101" pitchFamily="49" charset="-127"/>
-                <a:ea typeface="D2Coding" panose="020B0609020101020101" pitchFamily="49" charset="-127"/>
-              </a:rPr>
               <a:t> (순서를 고려하지 않는 집합 기반 모델)</a:t>
             </a:r>
-            <a:endParaRPr lang="en-US" altLang="ko-KR" dirty="0">
+            <a:endParaRPr lang="en-US" altLang="ko-KR" sz="1600" dirty="0">
               <a:latin typeface="D2Coding" panose="020B0609020101020101" pitchFamily="49" charset="-127"/>
               <a:ea typeface="D2Coding" panose="020B0609020101020101" pitchFamily="49" charset="-127"/>
             </a:endParaRPr>
@@ -12095,104 +12106,104 @@
               <a:buAutoNum type="arabicPeriod"/>
             </a:pPr>
             <a:r>
-              <a:rPr lang="ko-KR" altLang="en-US" sz="1600" dirty="0" err="1">
+              <a:rPr lang="ko-KR" altLang="en-US" sz="1400" dirty="0" err="1">
                 <a:latin typeface="D2Coding" panose="020B0609020101020101" pitchFamily="49" charset="-127"/>
                 <a:ea typeface="D2Coding" panose="020B0609020101020101" pitchFamily="49" charset="-127"/>
               </a:rPr>
               <a:t>Training</a:t>
             </a:r>
             <a:r>
-              <a:rPr lang="ko-KR" altLang="en-US" sz="1600" dirty="0">
+              <a:rPr lang="ko-KR" altLang="en-US" sz="1400" dirty="0">
                 <a:latin typeface="D2Coding" panose="020B0609020101020101" pitchFamily="49" charset="-127"/>
                 <a:ea typeface="D2Coding" panose="020B0609020101020101" pitchFamily="49" charset="-127"/>
               </a:rPr>
               <a:t> </a:t>
             </a:r>
             <a:r>
-              <a:rPr lang="ko-KR" altLang="en-US" sz="1600" dirty="0" err="1">
+              <a:rPr lang="ko-KR" altLang="en-US" sz="1400" dirty="0" err="1">
                 <a:latin typeface="D2Coding" panose="020B0609020101020101" pitchFamily="49" charset="-127"/>
                 <a:ea typeface="D2Coding" panose="020B0609020101020101" pitchFamily="49" charset="-127"/>
               </a:rPr>
               <a:t>a</a:t>
             </a:r>
             <a:r>
-              <a:rPr lang="ko-KR" altLang="en-US" sz="1600" dirty="0">
+              <a:rPr lang="ko-KR" altLang="en-US" sz="1400" dirty="0">
                 <a:latin typeface="D2Coding" panose="020B0609020101020101" pitchFamily="49" charset="-127"/>
                 <a:ea typeface="D2Coding" panose="020B0609020101020101" pitchFamily="49" charset="-127"/>
               </a:rPr>
               <a:t> </a:t>
             </a:r>
             <a:r>
-              <a:rPr lang="ko-KR" altLang="en-US" sz="1600" dirty="0" err="1">
+              <a:rPr lang="ko-KR" altLang="en-US" sz="1400" dirty="0" err="1">
                 <a:latin typeface="D2Coding" panose="020B0609020101020101" pitchFamily="49" charset="-127"/>
                 <a:ea typeface="D2Coding" panose="020B0609020101020101" pitchFamily="49" charset="-127"/>
               </a:rPr>
               <a:t>bag</a:t>
             </a:r>
             <a:r>
-              <a:rPr lang="ko-KR" altLang="en-US" sz="1600" dirty="0">
+              <a:rPr lang="ko-KR" altLang="en-US" sz="1400" dirty="0">
                 <a:latin typeface="D2Coding" panose="020B0609020101020101" pitchFamily="49" charset="-127"/>
                 <a:ea typeface="D2Coding" panose="020B0609020101020101" pitchFamily="49" charset="-127"/>
               </a:rPr>
               <a:t>-of-</a:t>
             </a:r>
             <a:r>
-              <a:rPr lang="ko-KR" altLang="en-US" sz="1600" dirty="0" err="1">
+              <a:rPr lang="ko-KR" altLang="en-US" sz="1400" dirty="0" err="1">
                 <a:latin typeface="D2Coding" panose="020B0609020101020101" pitchFamily="49" charset="-127"/>
                 <a:ea typeface="D2Coding" panose="020B0609020101020101" pitchFamily="49" charset="-127"/>
               </a:rPr>
               <a:t>words</a:t>
             </a:r>
             <a:r>
-              <a:rPr lang="ko-KR" altLang="en-US" sz="1600" dirty="0">
+              <a:rPr lang="ko-KR" altLang="en-US" sz="1400" dirty="0">
                 <a:latin typeface="D2Coding" panose="020B0609020101020101" pitchFamily="49" charset="-127"/>
                 <a:ea typeface="D2Coding" panose="020B0609020101020101" pitchFamily="49" charset="-127"/>
               </a:rPr>
               <a:t> </a:t>
             </a:r>
             <a:r>
-              <a:rPr lang="ko-KR" altLang="en-US" sz="1600" dirty="0" err="1">
+              <a:rPr lang="ko-KR" altLang="en-US" sz="1400" dirty="0" err="1">
                 <a:latin typeface="D2Coding" panose="020B0609020101020101" pitchFamily="49" charset="-127"/>
                 <a:ea typeface="D2Coding" panose="020B0609020101020101" pitchFamily="49" charset="-127"/>
               </a:rPr>
               <a:t>model</a:t>
             </a:r>
             <a:r>
-              <a:rPr lang="ko-KR" altLang="en-US" sz="1600" dirty="0">
+              <a:rPr lang="ko-KR" altLang="en-US" sz="1400" dirty="0">
                 <a:latin typeface="D2Coding" panose="020B0609020101020101" pitchFamily="49" charset="-127"/>
                 <a:ea typeface="D2Coding" panose="020B0609020101020101" pitchFamily="49" charset="-127"/>
               </a:rPr>
               <a:t> (</a:t>
             </a:r>
             <a:r>
-              <a:rPr lang="ko-KR" altLang="en-US" sz="1600" dirty="0" err="1">
+              <a:rPr lang="ko-KR" altLang="en-US" sz="1400" dirty="0" err="1">
                 <a:latin typeface="D2Coding" panose="020B0609020101020101" pitchFamily="49" charset="-127"/>
                 <a:ea typeface="D2Coding" panose="020B0609020101020101" pitchFamily="49" charset="-127"/>
               </a:rPr>
               <a:t>Bag</a:t>
             </a:r>
             <a:r>
-              <a:rPr lang="ko-KR" altLang="en-US" sz="1600" dirty="0">
+              <a:rPr lang="ko-KR" altLang="en-US" sz="1400" dirty="0">
                 <a:latin typeface="D2Coding" panose="020B0609020101020101" pitchFamily="49" charset="-127"/>
                 <a:ea typeface="D2Coding" panose="020B0609020101020101" pitchFamily="49" charset="-127"/>
               </a:rPr>
               <a:t>-of-</a:t>
             </a:r>
             <a:r>
-              <a:rPr lang="ko-KR" altLang="en-US" sz="1600" dirty="0" err="1">
+              <a:rPr lang="ko-KR" altLang="en-US" sz="1400" dirty="0" err="1">
                 <a:latin typeface="D2Coding" panose="020B0609020101020101" pitchFamily="49" charset="-127"/>
                 <a:ea typeface="D2Coding" panose="020B0609020101020101" pitchFamily="49" charset="-127"/>
               </a:rPr>
               <a:t>Words</a:t>
             </a:r>
             <a:r>
-              <a:rPr lang="ko-KR" altLang="en-US" sz="1600" dirty="0">
+              <a:rPr lang="ko-KR" altLang="en-US" sz="1400" dirty="0">
                 <a:latin typeface="D2Coding" panose="020B0609020101020101" pitchFamily="49" charset="-127"/>
                 <a:ea typeface="D2Coding" panose="020B0609020101020101" pitchFamily="49" charset="-127"/>
               </a:rPr>
               <a:t> 모델 학습)</a:t>
             </a:r>
-            <a:endParaRPr lang="en-US" altLang="ko-KR" sz="1600" dirty="0">
+            <a:endParaRPr lang="en-US" altLang="ko-KR" sz="1400" dirty="0">
               <a:latin typeface="D2Coding" panose="020B0609020101020101" pitchFamily="49" charset="-127"/>
               <a:ea typeface="D2Coding" panose="020B0609020101020101" pitchFamily="49" charset="-127"/>
             </a:endParaRPr>
@@ -12203,70 +12214,70 @@
               <a:buAutoNum type="arabicPeriod"/>
             </a:pPr>
             <a:r>
-              <a:rPr lang="ko-KR" altLang="en-US" sz="1600" dirty="0" err="1">
+              <a:rPr lang="ko-KR" altLang="en-US" sz="1400" dirty="0" err="1">
                 <a:latin typeface="D2Coding" panose="020B0609020101020101" pitchFamily="49" charset="-127"/>
                 <a:ea typeface="D2Coding" panose="020B0609020101020101" pitchFamily="49" charset="-127"/>
               </a:rPr>
               <a:t>Training</a:t>
             </a:r>
             <a:r>
-              <a:rPr lang="ko-KR" altLang="en-US" sz="1600" dirty="0">
+              <a:rPr lang="ko-KR" altLang="en-US" sz="1400" dirty="0">
                 <a:latin typeface="D2Coding" panose="020B0609020101020101" pitchFamily="49" charset="-127"/>
                 <a:ea typeface="D2Coding" panose="020B0609020101020101" pitchFamily="49" charset="-127"/>
               </a:rPr>
               <a:t> </a:t>
             </a:r>
             <a:r>
-              <a:rPr lang="ko-KR" altLang="en-US" sz="1600" dirty="0" err="1">
+              <a:rPr lang="ko-KR" altLang="en-US" sz="1400" dirty="0" err="1">
                 <a:latin typeface="D2Coding" panose="020B0609020101020101" pitchFamily="49" charset="-127"/>
                 <a:ea typeface="D2Coding" panose="020B0609020101020101" pitchFamily="49" charset="-127"/>
               </a:rPr>
               <a:t>a</a:t>
             </a:r>
             <a:r>
-              <a:rPr lang="ko-KR" altLang="en-US" sz="1600" dirty="0">
+              <a:rPr lang="ko-KR" altLang="en-US" sz="1400" dirty="0">
                 <a:latin typeface="D2Coding" panose="020B0609020101020101" pitchFamily="49" charset="-127"/>
                 <a:ea typeface="D2Coding" panose="020B0609020101020101" pitchFamily="49" charset="-127"/>
               </a:rPr>
               <a:t> </a:t>
             </a:r>
             <a:r>
-              <a:rPr lang="ko-KR" altLang="en-US" sz="1600" dirty="0" err="1">
+              <a:rPr lang="ko-KR" altLang="en-US" sz="1400" dirty="0" err="1">
                 <a:latin typeface="D2Coding" panose="020B0609020101020101" pitchFamily="49" charset="-127"/>
                 <a:ea typeface="D2Coding" panose="020B0609020101020101" pitchFamily="49" charset="-127"/>
               </a:rPr>
               <a:t>bigram</a:t>
             </a:r>
             <a:r>
-              <a:rPr lang="ko-KR" altLang="en-US" sz="1600" dirty="0">
+              <a:rPr lang="ko-KR" altLang="en-US" sz="1400" dirty="0">
                 <a:latin typeface="D2Coding" panose="020B0609020101020101" pitchFamily="49" charset="-127"/>
                 <a:ea typeface="D2Coding" panose="020B0609020101020101" pitchFamily="49" charset="-127"/>
               </a:rPr>
               <a:t> </a:t>
             </a:r>
             <a:r>
-              <a:rPr lang="ko-KR" altLang="en-US" sz="1600" dirty="0" err="1">
+              <a:rPr lang="ko-KR" altLang="en-US" sz="1400" dirty="0" err="1">
                 <a:latin typeface="D2Coding" panose="020B0609020101020101" pitchFamily="49" charset="-127"/>
                 <a:ea typeface="D2Coding" panose="020B0609020101020101" pitchFamily="49" charset="-127"/>
               </a:rPr>
               <a:t>model</a:t>
             </a:r>
             <a:r>
-              <a:rPr lang="ko-KR" altLang="en-US" sz="1600" dirty="0">
+              <a:rPr lang="ko-KR" altLang="en-US" sz="1400" dirty="0">
                 <a:latin typeface="D2Coding" panose="020B0609020101020101" pitchFamily="49" charset="-127"/>
                 <a:ea typeface="D2Coding" panose="020B0609020101020101" pitchFamily="49" charset="-127"/>
               </a:rPr>
               <a:t> (</a:t>
             </a:r>
             <a:r>
-              <a:rPr lang="ko-KR" altLang="en-US" sz="1600" dirty="0" err="1">
+              <a:rPr lang="ko-KR" altLang="en-US" sz="1400" dirty="0" err="1">
                 <a:latin typeface="D2Coding" panose="020B0609020101020101" pitchFamily="49" charset="-127"/>
                 <a:ea typeface="D2Coding" panose="020B0609020101020101" pitchFamily="49" charset="-127"/>
               </a:rPr>
               <a:t>Bigram</a:t>
             </a:r>
             <a:r>
-              <a:rPr lang="ko-KR" altLang="en-US" sz="1600" dirty="0">
+              <a:rPr lang="ko-KR" altLang="en-US" sz="1400" dirty="0">
                 <a:latin typeface="D2Coding" panose="020B0609020101020101" pitchFamily="49" charset="-127"/>
                 <a:ea typeface="D2Coding" panose="020B0609020101020101" pitchFamily="49" charset="-127"/>
               </a:rPr>
@@ -12278,7 +12289,7 @@
               <a:buFont typeface="+mj-lt"/>
               <a:buAutoNum type="arabicPeriod"/>
             </a:pPr>
-            <a:endParaRPr lang="ko-KR" altLang="en-US" sz="1050" dirty="0">
+            <a:endParaRPr lang="ko-KR" altLang="en-US" sz="1000" dirty="0">
               <a:latin typeface="D2Coding" panose="020B0609020101020101" pitchFamily="49" charset="-127"/>
               <a:ea typeface="D2Coding" panose="020B0609020101020101" pitchFamily="49" charset="-127"/>
             </a:endParaRPr>
@@ -12289,28 +12300,28 @@
               <a:buAutoNum type="arabicPeriod"/>
             </a:pPr>
             <a:r>
-              <a:rPr lang="ko-KR" altLang="en-US" dirty="0" err="1">
+              <a:rPr lang="ko-KR" altLang="en-US" sz="1600" dirty="0" err="1">
                 <a:latin typeface="D2Coding" panose="020B0609020101020101" pitchFamily="49" charset="-127"/>
                 <a:ea typeface="D2Coding" panose="020B0609020101020101" pitchFamily="49" charset="-127"/>
               </a:rPr>
               <a:t>Sequence</a:t>
             </a:r>
             <a:r>
-              <a:rPr lang="ko-KR" altLang="en-US" dirty="0">
+              <a:rPr lang="ko-KR" altLang="en-US" sz="1600" dirty="0">
                 <a:latin typeface="D2Coding" panose="020B0609020101020101" pitchFamily="49" charset="-127"/>
                 <a:ea typeface="D2Coding" panose="020B0609020101020101" pitchFamily="49" charset="-127"/>
               </a:rPr>
               <a:t> </a:t>
             </a:r>
             <a:r>
-              <a:rPr lang="ko-KR" altLang="en-US" dirty="0" err="1">
+              <a:rPr lang="ko-KR" altLang="en-US" sz="1600" dirty="0" err="1">
                 <a:latin typeface="D2Coding" panose="020B0609020101020101" pitchFamily="49" charset="-127"/>
                 <a:ea typeface="D2Coding" panose="020B0609020101020101" pitchFamily="49" charset="-127"/>
               </a:rPr>
               <a:t>models</a:t>
             </a:r>
             <a:r>
-              <a:rPr lang="ko-KR" altLang="en-US" dirty="0">
+              <a:rPr lang="ko-KR" altLang="en-US" sz="1600" dirty="0">
                 <a:latin typeface="D2Coding" panose="020B0609020101020101" pitchFamily="49" charset="-127"/>
                 <a:ea typeface="D2Coding" panose="020B0609020101020101" pitchFamily="49" charset="-127"/>
               </a:rPr>
@@ -12326,56 +12337,56 @@
               <a:buAutoNum type="arabicPeriod"/>
             </a:pPr>
             <a:r>
-              <a:rPr lang="ko-KR" altLang="en-US" sz="1600" dirty="0" err="1">
+              <a:rPr lang="ko-KR" altLang="en-US" sz="1400" dirty="0" err="1">
                 <a:latin typeface="D2Coding" panose="020B0609020101020101" pitchFamily="49" charset="-127"/>
                 <a:ea typeface="D2Coding" panose="020B0609020101020101" pitchFamily="49" charset="-127"/>
               </a:rPr>
               <a:t>Training</a:t>
             </a:r>
             <a:r>
-              <a:rPr lang="ko-KR" altLang="en-US" sz="1600" dirty="0">
+              <a:rPr lang="ko-KR" altLang="en-US" sz="1400" dirty="0">
                 <a:latin typeface="D2Coding" panose="020B0609020101020101" pitchFamily="49" charset="-127"/>
                 <a:ea typeface="D2Coding" panose="020B0609020101020101" pitchFamily="49" charset="-127"/>
               </a:rPr>
               <a:t> </a:t>
             </a:r>
             <a:r>
-              <a:rPr lang="ko-KR" altLang="en-US" sz="1600" dirty="0" err="1">
+              <a:rPr lang="ko-KR" altLang="en-US" sz="1400" dirty="0" err="1">
                 <a:latin typeface="D2Coding" panose="020B0609020101020101" pitchFamily="49" charset="-127"/>
                 <a:ea typeface="D2Coding" panose="020B0609020101020101" pitchFamily="49" charset="-127"/>
               </a:rPr>
               <a:t>a</a:t>
             </a:r>
             <a:r>
-              <a:rPr lang="ko-KR" altLang="en-US" sz="1600" dirty="0">
+              <a:rPr lang="ko-KR" altLang="en-US" sz="1400" dirty="0">
                 <a:latin typeface="D2Coding" panose="020B0609020101020101" pitchFamily="49" charset="-127"/>
                 <a:ea typeface="D2Coding" panose="020B0609020101020101" pitchFamily="49" charset="-127"/>
               </a:rPr>
               <a:t> </a:t>
             </a:r>
             <a:r>
-              <a:rPr lang="ko-KR" altLang="en-US" sz="1600" dirty="0" err="1">
+              <a:rPr lang="ko-KR" altLang="en-US" sz="1400" dirty="0" err="1">
                 <a:latin typeface="D2Coding" panose="020B0609020101020101" pitchFamily="49" charset="-127"/>
                 <a:ea typeface="D2Coding" panose="020B0609020101020101" pitchFamily="49" charset="-127"/>
               </a:rPr>
               <a:t>recurrent</a:t>
             </a:r>
             <a:r>
-              <a:rPr lang="ko-KR" altLang="en-US" sz="1600" dirty="0">
+              <a:rPr lang="ko-KR" altLang="en-US" sz="1400" dirty="0">
                 <a:latin typeface="D2Coding" panose="020B0609020101020101" pitchFamily="49" charset="-127"/>
                 <a:ea typeface="D2Coding" panose="020B0609020101020101" pitchFamily="49" charset="-127"/>
               </a:rPr>
               <a:t> </a:t>
             </a:r>
             <a:r>
-              <a:rPr lang="ko-KR" altLang="en-US" sz="1600" dirty="0" err="1">
+              <a:rPr lang="ko-KR" altLang="en-US" sz="1400" dirty="0" err="1">
                 <a:latin typeface="D2Coding" panose="020B0609020101020101" pitchFamily="49" charset="-127"/>
                 <a:ea typeface="D2Coding" panose="020B0609020101020101" pitchFamily="49" charset="-127"/>
               </a:rPr>
               <a:t>model</a:t>
             </a:r>
             <a:r>
-              <a:rPr lang="ko-KR" altLang="en-US" sz="1600" dirty="0">
+              <a:rPr lang="ko-KR" altLang="en-US" sz="1400" dirty="0">
                 <a:latin typeface="D2Coding" panose="020B0609020101020101" pitchFamily="49" charset="-127"/>
                 <a:ea typeface="D2Coding" panose="020B0609020101020101" pitchFamily="49" charset="-127"/>
               </a:rPr>
@@ -12388,56 +12399,56 @@
               <a:buAutoNum type="arabicPeriod"/>
             </a:pPr>
             <a:r>
-              <a:rPr lang="ko-KR" altLang="en-US" sz="1600" dirty="0" err="1">
+              <a:rPr lang="ko-KR" altLang="en-US" sz="1400" dirty="0" err="1">
                 <a:latin typeface="D2Coding" panose="020B0609020101020101" pitchFamily="49" charset="-127"/>
                 <a:ea typeface="D2Coding" panose="020B0609020101020101" pitchFamily="49" charset="-127"/>
               </a:rPr>
               <a:t>Understanding</a:t>
             </a:r>
             <a:r>
-              <a:rPr lang="ko-KR" altLang="en-US" sz="1600" dirty="0">
+              <a:rPr lang="ko-KR" altLang="en-US" sz="1400" dirty="0">
                 <a:latin typeface="D2Coding" panose="020B0609020101020101" pitchFamily="49" charset="-127"/>
                 <a:ea typeface="D2Coding" panose="020B0609020101020101" pitchFamily="49" charset="-127"/>
               </a:rPr>
               <a:t> </a:t>
             </a:r>
             <a:r>
-              <a:rPr lang="ko-KR" altLang="en-US" sz="1600" dirty="0" err="1">
+              <a:rPr lang="ko-KR" altLang="en-US" sz="1400" dirty="0" err="1">
                 <a:latin typeface="D2Coding" panose="020B0609020101020101" pitchFamily="49" charset="-127"/>
                 <a:ea typeface="D2Coding" panose="020B0609020101020101" pitchFamily="49" charset="-127"/>
               </a:rPr>
               <a:t>word</a:t>
             </a:r>
             <a:r>
-              <a:rPr lang="ko-KR" altLang="en-US" sz="1600" dirty="0">
+              <a:rPr lang="ko-KR" altLang="en-US" sz="1400" dirty="0">
                 <a:latin typeface="D2Coding" panose="020B0609020101020101" pitchFamily="49" charset="-127"/>
                 <a:ea typeface="D2Coding" panose="020B0609020101020101" pitchFamily="49" charset="-127"/>
               </a:rPr>
               <a:t> </a:t>
             </a:r>
             <a:r>
-              <a:rPr lang="ko-KR" altLang="en-US" sz="1600" dirty="0" err="1">
+              <a:rPr lang="ko-KR" altLang="en-US" sz="1400" dirty="0" err="1">
                 <a:latin typeface="D2Coding" panose="020B0609020101020101" pitchFamily="49" charset="-127"/>
                 <a:ea typeface="D2Coding" panose="020B0609020101020101" pitchFamily="49" charset="-127"/>
               </a:rPr>
               <a:t>embeddings</a:t>
             </a:r>
             <a:r>
-              <a:rPr lang="ko-KR" altLang="en-US" sz="1600" dirty="0">
+              <a:rPr lang="ko-KR" altLang="en-US" sz="1400" dirty="0">
                 <a:latin typeface="D2Coding" panose="020B0609020101020101" pitchFamily="49" charset="-127"/>
                 <a:ea typeface="D2Coding" panose="020B0609020101020101" pitchFamily="49" charset="-127"/>
               </a:rPr>
               <a:t> (단어 </a:t>
             </a:r>
             <a:r>
-              <a:rPr lang="ko-KR" altLang="en-US" sz="1600" dirty="0" err="1">
+              <a:rPr lang="ko-KR" altLang="en-US" sz="1400" dirty="0" err="1">
                 <a:latin typeface="D2Coding" panose="020B0609020101020101" pitchFamily="49" charset="-127"/>
                 <a:ea typeface="D2Coding" panose="020B0609020101020101" pitchFamily="49" charset="-127"/>
               </a:rPr>
               <a:t>임베딩의</a:t>
             </a:r>
             <a:r>
-              <a:rPr lang="ko-KR" altLang="en-US" sz="1600" dirty="0">
+              <a:rPr lang="ko-KR" altLang="en-US" sz="1400" dirty="0">
                 <a:latin typeface="D2Coding" panose="020B0609020101020101" pitchFamily="49" charset="-127"/>
                 <a:ea typeface="D2Coding" panose="020B0609020101020101" pitchFamily="49" charset="-127"/>
               </a:rPr>
@@ -12450,70 +12461,70 @@
               <a:buAutoNum type="arabicPeriod"/>
             </a:pPr>
             <a:r>
-              <a:rPr lang="ko-KR" altLang="en-US" sz="1600" dirty="0" err="1">
+              <a:rPr lang="ko-KR" altLang="en-US" sz="1400" dirty="0" err="1">
                 <a:latin typeface="D2Coding" panose="020B0609020101020101" pitchFamily="49" charset="-127"/>
                 <a:ea typeface="D2Coding" panose="020B0609020101020101" pitchFamily="49" charset="-127"/>
               </a:rPr>
               <a:t>Using</a:t>
             </a:r>
             <a:r>
-              <a:rPr lang="ko-KR" altLang="en-US" sz="1600" dirty="0">
+              <a:rPr lang="ko-KR" altLang="en-US" sz="1400" dirty="0">
                 <a:latin typeface="D2Coding" panose="020B0609020101020101" pitchFamily="49" charset="-127"/>
                 <a:ea typeface="D2Coding" panose="020B0609020101020101" pitchFamily="49" charset="-127"/>
               </a:rPr>
               <a:t> </a:t>
             </a:r>
             <a:r>
-              <a:rPr lang="ko-KR" altLang="en-US" sz="1600" dirty="0" err="1">
+              <a:rPr lang="ko-KR" altLang="en-US" sz="1400" dirty="0" err="1">
                 <a:latin typeface="D2Coding" panose="020B0609020101020101" pitchFamily="49" charset="-127"/>
                 <a:ea typeface="D2Coding" panose="020B0609020101020101" pitchFamily="49" charset="-127"/>
               </a:rPr>
               <a:t>a</a:t>
             </a:r>
             <a:r>
-              <a:rPr lang="ko-KR" altLang="en-US" sz="1600" dirty="0">
+              <a:rPr lang="ko-KR" altLang="en-US" sz="1400" dirty="0">
                 <a:latin typeface="D2Coding" panose="020B0609020101020101" pitchFamily="49" charset="-127"/>
                 <a:ea typeface="D2Coding" panose="020B0609020101020101" pitchFamily="49" charset="-127"/>
               </a:rPr>
               <a:t> </a:t>
             </a:r>
             <a:r>
-              <a:rPr lang="ko-KR" altLang="en-US" sz="1600" dirty="0" err="1">
+              <a:rPr lang="ko-KR" altLang="en-US" sz="1400" dirty="0" err="1">
                 <a:latin typeface="D2Coding" panose="020B0609020101020101" pitchFamily="49" charset="-127"/>
                 <a:ea typeface="D2Coding" panose="020B0609020101020101" pitchFamily="49" charset="-127"/>
               </a:rPr>
               <a:t>word</a:t>
             </a:r>
             <a:r>
-              <a:rPr lang="ko-KR" altLang="en-US" sz="1600" dirty="0">
+              <a:rPr lang="ko-KR" altLang="en-US" sz="1400" dirty="0">
                 <a:latin typeface="D2Coding" panose="020B0609020101020101" pitchFamily="49" charset="-127"/>
                 <a:ea typeface="D2Coding" panose="020B0609020101020101" pitchFamily="49" charset="-127"/>
               </a:rPr>
               <a:t> </a:t>
             </a:r>
             <a:r>
-              <a:rPr lang="ko-KR" altLang="en-US" sz="1600" dirty="0" err="1">
+              <a:rPr lang="ko-KR" altLang="en-US" sz="1400" dirty="0" err="1">
                 <a:latin typeface="D2Coding" panose="020B0609020101020101" pitchFamily="49" charset="-127"/>
                 <a:ea typeface="D2Coding" panose="020B0609020101020101" pitchFamily="49" charset="-127"/>
               </a:rPr>
               <a:t>embedding</a:t>
             </a:r>
             <a:r>
-              <a:rPr lang="ko-KR" altLang="en-US" sz="1600" dirty="0">
+              <a:rPr lang="ko-KR" altLang="en-US" sz="1400" dirty="0">
                 <a:latin typeface="D2Coding" panose="020B0609020101020101" pitchFamily="49" charset="-127"/>
                 <a:ea typeface="D2Coding" panose="020B0609020101020101" pitchFamily="49" charset="-127"/>
               </a:rPr>
               <a:t> (단어 </a:t>
             </a:r>
             <a:r>
-              <a:rPr lang="ko-KR" altLang="en-US" sz="1600" dirty="0" err="1">
+              <a:rPr lang="ko-KR" altLang="en-US" sz="1400" dirty="0" err="1">
                 <a:latin typeface="D2Coding" panose="020B0609020101020101" pitchFamily="49" charset="-127"/>
                 <a:ea typeface="D2Coding" panose="020B0609020101020101" pitchFamily="49" charset="-127"/>
               </a:rPr>
               <a:t>임베딩</a:t>
             </a:r>
             <a:r>
-              <a:rPr lang="ko-KR" altLang="en-US" sz="1600" dirty="0">
+              <a:rPr lang="ko-KR" altLang="en-US" sz="1400" dirty="0">
                 <a:latin typeface="D2Coding" panose="020B0609020101020101" pitchFamily="49" charset="-127"/>
                 <a:ea typeface="D2Coding" panose="020B0609020101020101" pitchFamily="49" charset="-127"/>
               </a:rPr>
@@ -12526,70 +12537,70 @@
               <a:buAutoNum type="arabicPeriod"/>
             </a:pPr>
             <a:r>
-              <a:rPr lang="ko-KR" altLang="en-US" sz="1600" dirty="0" err="1">
+              <a:rPr lang="ko-KR" altLang="en-US" sz="1400" dirty="0" err="1">
                 <a:latin typeface="D2Coding" panose="020B0609020101020101" pitchFamily="49" charset="-127"/>
                 <a:ea typeface="D2Coding" panose="020B0609020101020101" pitchFamily="49" charset="-127"/>
               </a:rPr>
               <a:t>Pretraining</a:t>
             </a:r>
             <a:r>
-              <a:rPr lang="ko-KR" altLang="en-US" sz="1600" dirty="0">
+              <a:rPr lang="ko-KR" altLang="en-US" sz="1400" dirty="0">
                 <a:latin typeface="D2Coding" panose="020B0609020101020101" pitchFamily="49" charset="-127"/>
                 <a:ea typeface="D2Coding" panose="020B0609020101020101" pitchFamily="49" charset="-127"/>
               </a:rPr>
               <a:t> </a:t>
             </a:r>
             <a:r>
-              <a:rPr lang="ko-KR" altLang="en-US" sz="1600" dirty="0" err="1">
+              <a:rPr lang="ko-KR" altLang="en-US" sz="1400" dirty="0" err="1">
                 <a:latin typeface="D2Coding" panose="020B0609020101020101" pitchFamily="49" charset="-127"/>
                 <a:ea typeface="D2Coding" panose="020B0609020101020101" pitchFamily="49" charset="-127"/>
               </a:rPr>
               <a:t>a</a:t>
             </a:r>
             <a:r>
-              <a:rPr lang="ko-KR" altLang="en-US" sz="1600" dirty="0">
+              <a:rPr lang="ko-KR" altLang="en-US" sz="1400" dirty="0">
                 <a:latin typeface="D2Coding" panose="020B0609020101020101" pitchFamily="49" charset="-127"/>
                 <a:ea typeface="D2Coding" panose="020B0609020101020101" pitchFamily="49" charset="-127"/>
               </a:rPr>
               <a:t> </a:t>
             </a:r>
             <a:r>
-              <a:rPr lang="ko-KR" altLang="en-US" sz="1600" dirty="0" err="1">
+              <a:rPr lang="ko-KR" altLang="en-US" sz="1400" dirty="0" err="1">
                 <a:latin typeface="D2Coding" panose="020B0609020101020101" pitchFamily="49" charset="-127"/>
                 <a:ea typeface="D2Coding" panose="020B0609020101020101" pitchFamily="49" charset="-127"/>
               </a:rPr>
               <a:t>word</a:t>
             </a:r>
             <a:r>
-              <a:rPr lang="ko-KR" altLang="en-US" sz="1600" dirty="0">
+              <a:rPr lang="ko-KR" altLang="en-US" sz="1400" dirty="0">
                 <a:latin typeface="D2Coding" panose="020B0609020101020101" pitchFamily="49" charset="-127"/>
                 <a:ea typeface="D2Coding" panose="020B0609020101020101" pitchFamily="49" charset="-127"/>
               </a:rPr>
               <a:t> </a:t>
             </a:r>
             <a:r>
-              <a:rPr lang="ko-KR" altLang="en-US" sz="1600" dirty="0" err="1">
+              <a:rPr lang="ko-KR" altLang="en-US" sz="1400" dirty="0" err="1">
                 <a:latin typeface="D2Coding" panose="020B0609020101020101" pitchFamily="49" charset="-127"/>
                 <a:ea typeface="D2Coding" panose="020B0609020101020101" pitchFamily="49" charset="-127"/>
               </a:rPr>
               <a:t>embedding</a:t>
             </a:r>
             <a:r>
-              <a:rPr lang="ko-KR" altLang="en-US" sz="1600" dirty="0">
+              <a:rPr lang="ko-KR" altLang="en-US" sz="1400" dirty="0">
                 <a:latin typeface="D2Coding" panose="020B0609020101020101" pitchFamily="49" charset="-127"/>
                 <a:ea typeface="D2Coding" panose="020B0609020101020101" pitchFamily="49" charset="-127"/>
               </a:rPr>
               <a:t> (단어 </a:t>
             </a:r>
             <a:r>
-              <a:rPr lang="ko-KR" altLang="en-US" sz="1600" dirty="0" err="1">
+              <a:rPr lang="ko-KR" altLang="en-US" sz="1400" dirty="0" err="1">
                 <a:latin typeface="D2Coding" panose="020B0609020101020101" pitchFamily="49" charset="-127"/>
                 <a:ea typeface="D2Coding" panose="020B0609020101020101" pitchFamily="49" charset="-127"/>
               </a:rPr>
               <a:t>임베딩</a:t>
             </a:r>
             <a:r>
-              <a:rPr lang="ko-KR" altLang="en-US" sz="1600" dirty="0">
+              <a:rPr lang="ko-KR" altLang="en-US" sz="1400" dirty="0">
                 <a:latin typeface="D2Coding" panose="020B0609020101020101" pitchFamily="49" charset="-127"/>
                 <a:ea typeface="D2Coding" panose="020B0609020101020101" pitchFamily="49" charset="-127"/>
               </a:rPr>
@@ -12602,98 +12613,98 @@
               <a:buAutoNum type="arabicPeriod"/>
             </a:pPr>
             <a:r>
-              <a:rPr lang="ko-KR" altLang="en-US" sz="1600" dirty="0" err="1">
+              <a:rPr lang="ko-KR" altLang="en-US" sz="1400" dirty="0" err="1">
                 <a:latin typeface="D2Coding" panose="020B0609020101020101" pitchFamily="49" charset="-127"/>
                 <a:ea typeface="D2Coding" panose="020B0609020101020101" pitchFamily="49" charset="-127"/>
               </a:rPr>
               <a:t>Using</a:t>
             </a:r>
             <a:r>
-              <a:rPr lang="ko-KR" altLang="en-US" sz="1600" dirty="0">
+              <a:rPr lang="ko-KR" altLang="en-US" sz="1400" dirty="0">
                 <a:latin typeface="D2Coding" panose="020B0609020101020101" pitchFamily="49" charset="-127"/>
                 <a:ea typeface="D2Coding" panose="020B0609020101020101" pitchFamily="49" charset="-127"/>
               </a:rPr>
               <a:t> </a:t>
             </a:r>
             <a:r>
-              <a:rPr lang="ko-KR" altLang="en-US" sz="1600" dirty="0" err="1">
+              <a:rPr lang="ko-KR" altLang="en-US" sz="1400" dirty="0" err="1">
                 <a:latin typeface="D2Coding" panose="020B0609020101020101" pitchFamily="49" charset="-127"/>
                 <a:ea typeface="D2Coding" panose="020B0609020101020101" pitchFamily="49" charset="-127"/>
               </a:rPr>
               <a:t>the</a:t>
             </a:r>
             <a:r>
-              <a:rPr lang="ko-KR" altLang="en-US" sz="1600" dirty="0">
+              <a:rPr lang="ko-KR" altLang="en-US" sz="1400" dirty="0">
                 <a:latin typeface="D2Coding" panose="020B0609020101020101" pitchFamily="49" charset="-127"/>
                 <a:ea typeface="D2Coding" panose="020B0609020101020101" pitchFamily="49" charset="-127"/>
               </a:rPr>
               <a:t> </a:t>
             </a:r>
             <a:r>
-              <a:rPr lang="ko-KR" altLang="en-US" sz="1600" dirty="0" err="1">
+              <a:rPr lang="ko-KR" altLang="en-US" sz="1400" dirty="0" err="1">
                 <a:latin typeface="D2Coding" panose="020B0609020101020101" pitchFamily="49" charset="-127"/>
                 <a:ea typeface="D2Coding" panose="020B0609020101020101" pitchFamily="49" charset="-127"/>
               </a:rPr>
               <a:t>pretrained</a:t>
             </a:r>
             <a:r>
-              <a:rPr lang="ko-KR" altLang="en-US" sz="1600" dirty="0">
+              <a:rPr lang="ko-KR" altLang="en-US" sz="1400" dirty="0">
                 <a:latin typeface="D2Coding" panose="020B0609020101020101" pitchFamily="49" charset="-127"/>
                 <a:ea typeface="D2Coding" panose="020B0609020101020101" pitchFamily="49" charset="-127"/>
               </a:rPr>
               <a:t> </a:t>
             </a:r>
             <a:r>
-              <a:rPr lang="ko-KR" altLang="en-US" sz="1600" dirty="0" err="1">
+              <a:rPr lang="ko-KR" altLang="en-US" sz="1400" dirty="0" err="1">
                 <a:latin typeface="D2Coding" panose="020B0609020101020101" pitchFamily="49" charset="-127"/>
                 <a:ea typeface="D2Coding" panose="020B0609020101020101" pitchFamily="49" charset="-127"/>
               </a:rPr>
               <a:t>embedding</a:t>
             </a:r>
             <a:r>
-              <a:rPr lang="ko-KR" altLang="en-US" sz="1600" dirty="0">
+              <a:rPr lang="ko-KR" altLang="en-US" sz="1400" dirty="0">
                 <a:latin typeface="D2Coding" panose="020B0609020101020101" pitchFamily="49" charset="-127"/>
                 <a:ea typeface="D2Coding" panose="020B0609020101020101" pitchFamily="49" charset="-127"/>
               </a:rPr>
               <a:t> </a:t>
             </a:r>
             <a:r>
-              <a:rPr lang="ko-KR" altLang="en-US" sz="1600" dirty="0" err="1">
+              <a:rPr lang="ko-KR" altLang="en-US" sz="1400" dirty="0" err="1">
                 <a:latin typeface="D2Coding" panose="020B0609020101020101" pitchFamily="49" charset="-127"/>
                 <a:ea typeface="D2Coding" panose="020B0609020101020101" pitchFamily="49" charset="-127"/>
               </a:rPr>
               <a:t>for</a:t>
             </a:r>
             <a:r>
-              <a:rPr lang="ko-KR" altLang="en-US" sz="1600" dirty="0">
+              <a:rPr lang="ko-KR" altLang="en-US" sz="1400" dirty="0">
                 <a:latin typeface="D2Coding" panose="020B0609020101020101" pitchFamily="49" charset="-127"/>
                 <a:ea typeface="D2Coding" panose="020B0609020101020101" pitchFamily="49" charset="-127"/>
               </a:rPr>
               <a:t> </a:t>
             </a:r>
             <a:r>
-              <a:rPr lang="ko-KR" altLang="en-US" sz="1600" dirty="0" err="1">
+              <a:rPr lang="ko-KR" altLang="en-US" sz="1400" dirty="0" err="1">
                 <a:latin typeface="D2Coding" panose="020B0609020101020101" pitchFamily="49" charset="-127"/>
                 <a:ea typeface="D2Coding" panose="020B0609020101020101" pitchFamily="49" charset="-127"/>
               </a:rPr>
               <a:t>classification</a:t>
             </a:r>
             <a:r>
-              <a:rPr lang="ko-KR" altLang="en-US" sz="1600" dirty="0">
+              <a:rPr lang="ko-KR" altLang="en-US" sz="1400" dirty="0">
                 <a:latin typeface="D2Coding" panose="020B0609020101020101" pitchFamily="49" charset="-127"/>
                 <a:ea typeface="D2Coding" panose="020B0609020101020101" pitchFamily="49" charset="-127"/>
               </a:rPr>
               <a:t> (사전 학습된 </a:t>
             </a:r>
             <a:r>
-              <a:rPr lang="ko-KR" altLang="en-US" sz="1600" dirty="0" err="1">
+              <a:rPr lang="ko-KR" altLang="en-US" sz="1400" dirty="0" err="1">
                 <a:latin typeface="D2Coding" panose="020B0609020101020101" pitchFamily="49" charset="-127"/>
                 <a:ea typeface="D2Coding" panose="020B0609020101020101" pitchFamily="49" charset="-127"/>
               </a:rPr>
               <a:t>임베딩</a:t>
             </a:r>
             <a:r>
-              <a:rPr lang="ko-KR" altLang="en-US" sz="1600" dirty="0">
+              <a:rPr lang="ko-KR" altLang="en-US" sz="1400" dirty="0">
                 <a:latin typeface="D2Coding" panose="020B0609020101020101" pitchFamily="49" charset="-127"/>
                 <a:ea typeface="D2Coding" panose="020B0609020101020101" pitchFamily="49" charset="-127"/>
               </a:rPr>
@@ -13983,7 +13994,7 @@
         </p:nvSpPr>
         <p:spPr>
           <a:xfrm>
-            <a:off x="619125" y="1828799"/>
+            <a:off x="619125" y="1762124"/>
             <a:ext cx="10277475" cy="390525"/>
           </a:xfrm>
           <a:prstGeom prst="rect">
@@ -14113,7 +14124,7 @@
         <p:spPr>
           <a:xfrm>
             <a:off x="861450" y="1400822"/>
-            <a:ext cx="10778099" cy="5009064"/>
+            <a:ext cx="10778099" cy="4416594"/>
           </a:xfrm>
           <a:prstGeom prst="rect">
             <a:avLst/>
@@ -14131,90 +14142,90 @@
               <a:buAutoNum type="arabicPeriod"/>
             </a:pPr>
             <a:r>
-              <a:rPr lang="ko-KR" altLang="en-US" dirty="0" err="1">
+              <a:rPr lang="ko-KR" altLang="en-US" sz="1600" dirty="0" err="1">
                 <a:latin typeface="D2Coding" panose="020B0609020101020101" pitchFamily="49" charset="-127"/>
                 <a:ea typeface="D2Coding" panose="020B0609020101020101" pitchFamily="49" charset="-127"/>
               </a:rPr>
               <a:t>A</a:t>
             </a:r>
             <a:r>
-              <a:rPr lang="ko-KR" altLang="en-US" dirty="0">
+              <a:rPr lang="ko-KR" altLang="en-US" sz="1600" dirty="0">
                 <a:latin typeface="D2Coding" panose="020B0609020101020101" pitchFamily="49" charset="-127"/>
                 <a:ea typeface="D2Coding" panose="020B0609020101020101" pitchFamily="49" charset="-127"/>
               </a:rPr>
               <a:t> </a:t>
             </a:r>
             <a:r>
-              <a:rPr lang="ko-KR" altLang="en-US" dirty="0" err="1">
+              <a:rPr lang="ko-KR" altLang="en-US" sz="1600" dirty="0" err="1">
                 <a:latin typeface="D2Coding" panose="020B0609020101020101" pitchFamily="49" charset="-127"/>
                 <a:ea typeface="D2Coding" panose="020B0609020101020101" pitchFamily="49" charset="-127"/>
               </a:rPr>
               <a:t>brief</a:t>
             </a:r>
             <a:r>
-              <a:rPr lang="ko-KR" altLang="en-US" dirty="0">
+              <a:rPr lang="ko-KR" altLang="en-US" sz="1600" dirty="0">
                 <a:latin typeface="D2Coding" panose="020B0609020101020101" pitchFamily="49" charset="-127"/>
                 <a:ea typeface="D2Coding" panose="020B0609020101020101" pitchFamily="49" charset="-127"/>
               </a:rPr>
               <a:t> </a:t>
             </a:r>
             <a:r>
-              <a:rPr lang="ko-KR" altLang="en-US" dirty="0" err="1">
+              <a:rPr lang="ko-KR" altLang="en-US" sz="1600" dirty="0" err="1">
                 <a:latin typeface="D2Coding" panose="020B0609020101020101" pitchFamily="49" charset="-127"/>
                 <a:ea typeface="D2Coding" panose="020B0609020101020101" pitchFamily="49" charset="-127"/>
               </a:rPr>
               <a:t>history</a:t>
             </a:r>
             <a:r>
-              <a:rPr lang="ko-KR" altLang="en-US" dirty="0">
+              <a:rPr lang="ko-KR" altLang="en-US" sz="1600" dirty="0">
                 <a:latin typeface="D2Coding" panose="020B0609020101020101" pitchFamily="49" charset="-127"/>
                 <a:ea typeface="D2Coding" panose="020B0609020101020101" pitchFamily="49" charset="-127"/>
               </a:rPr>
               <a:t> of </a:t>
             </a:r>
             <a:r>
-              <a:rPr lang="ko-KR" altLang="en-US" dirty="0" err="1">
+              <a:rPr lang="ko-KR" altLang="en-US" sz="1600" dirty="0" err="1">
                 <a:latin typeface="D2Coding" panose="020B0609020101020101" pitchFamily="49" charset="-127"/>
                 <a:ea typeface="D2Coding" panose="020B0609020101020101" pitchFamily="49" charset="-127"/>
               </a:rPr>
               <a:t>natural</a:t>
             </a:r>
             <a:r>
-              <a:rPr lang="ko-KR" altLang="en-US" dirty="0">
+              <a:rPr lang="ko-KR" altLang="en-US" sz="1600" dirty="0">
                 <a:latin typeface="D2Coding" panose="020B0609020101020101" pitchFamily="49" charset="-127"/>
                 <a:ea typeface="D2Coding" panose="020B0609020101020101" pitchFamily="49" charset="-127"/>
               </a:rPr>
               <a:t> </a:t>
             </a:r>
             <a:r>
-              <a:rPr lang="ko-KR" altLang="en-US" dirty="0" err="1">
+              <a:rPr lang="ko-KR" altLang="en-US" sz="1600" dirty="0" err="1">
                 <a:latin typeface="D2Coding" panose="020B0609020101020101" pitchFamily="49" charset="-127"/>
                 <a:ea typeface="D2Coding" panose="020B0609020101020101" pitchFamily="49" charset="-127"/>
               </a:rPr>
               <a:t>language</a:t>
             </a:r>
             <a:r>
-              <a:rPr lang="ko-KR" altLang="en-US" dirty="0">
+              <a:rPr lang="ko-KR" altLang="en-US" sz="1600" dirty="0">
                 <a:latin typeface="D2Coding" panose="020B0609020101020101" pitchFamily="49" charset="-127"/>
                 <a:ea typeface="D2Coding" panose="020B0609020101020101" pitchFamily="49" charset="-127"/>
               </a:rPr>
               <a:t> </a:t>
             </a:r>
             <a:r>
-              <a:rPr lang="ko-KR" altLang="en-US" dirty="0" err="1">
+              <a:rPr lang="ko-KR" altLang="en-US" sz="1600" dirty="0" err="1">
                 <a:latin typeface="D2Coding" panose="020B0609020101020101" pitchFamily="49" charset="-127"/>
                 <a:ea typeface="D2Coding" panose="020B0609020101020101" pitchFamily="49" charset="-127"/>
               </a:rPr>
               <a:t>processing</a:t>
             </a:r>
             <a:r>
-              <a:rPr lang="ko-KR" altLang="en-US" dirty="0">
+              <a:rPr lang="ko-KR" altLang="en-US" sz="1600" dirty="0">
                 <a:latin typeface="D2Coding" panose="020B0609020101020101" pitchFamily="49" charset="-127"/>
                 <a:ea typeface="D2Coding" panose="020B0609020101020101" pitchFamily="49" charset="-127"/>
               </a:rPr>
               <a:t> (자연어 처리의 개요/역사)</a:t>
             </a:r>
-            <a:endParaRPr lang="en-US" altLang="ko-KR" dirty="0">
+            <a:endParaRPr lang="en-US" altLang="ko-KR" sz="1600" dirty="0">
               <a:latin typeface="D2Coding" panose="020B0609020101020101" pitchFamily="49" charset="-127"/>
               <a:ea typeface="D2Coding" panose="020B0609020101020101" pitchFamily="49" charset="-127"/>
             </a:endParaRPr>
@@ -14224,7 +14235,7 @@
               <a:buFont typeface="+mj-lt"/>
               <a:buAutoNum type="arabicPeriod"/>
             </a:pPr>
-            <a:endParaRPr lang="ko-KR" altLang="en-US" sz="1050" dirty="0">
+            <a:endParaRPr lang="ko-KR" altLang="en-US" sz="1000" dirty="0">
               <a:latin typeface="D2Coding" panose="020B0609020101020101" pitchFamily="49" charset="-127"/>
               <a:ea typeface="D2Coding" panose="020B0609020101020101" pitchFamily="49" charset="-127"/>
             </a:endParaRPr>
@@ -14235,62 +14246,62 @@
               <a:buAutoNum type="arabicPeriod"/>
             </a:pPr>
             <a:r>
-              <a:rPr lang="ko-KR" altLang="en-US" dirty="0" err="1">
+              <a:rPr lang="ko-KR" altLang="en-US" sz="1600" dirty="0" err="1">
                 <a:latin typeface="D2Coding" panose="020B0609020101020101" pitchFamily="49" charset="-127"/>
                 <a:ea typeface="D2Coding" panose="020B0609020101020101" pitchFamily="49" charset="-127"/>
               </a:rPr>
               <a:t>Preparing</a:t>
             </a:r>
             <a:r>
-              <a:rPr lang="ko-KR" altLang="en-US" dirty="0">
+              <a:rPr lang="ko-KR" altLang="en-US" sz="1600" dirty="0">
                 <a:latin typeface="D2Coding" panose="020B0609020101020101" pitchFamily="49" charset="-127"/>
                 <a:ea typeface="D2Coding" panose="020B0609020101020101" pitchFamily="49" charset="-127"/>
               </a:rPr>
               <a:t> </a:t>
             </a:r>
             <a:r>
-              <a:rPr lang="ko-KR" altLang="en-US" dirty="0" err="1">
+              <a:rPr lang="ko-KR" altLang="en-US" sz="1600" dirty="0" err="1">
                 <a:latin typeface="D2Coding" panose="020B0609020101020101" pitchFamily="49" charset="-127"/>
                 <a:ea typeface="D2Coding" panose="020B0609020101020101" pitchFamily="49" charset="-127"/>
               </a:rPr>
               <a:t>text</a:t>
             </a:r>
             <a:r>
-              <a:rPr lang="ko-KR" altLang="en-US" dirty="0">
+              <a:rPr lang="ko-KR" altLang="en-US" sz="1600" dirty="0">
                 <a:latin typeface="D2Coding" panose="020B0609020101020101" pitchFamily="49" charset="-127"/>
                 <a:ea typeface="D2Coding" panose="020B0609020101020101" pitchFamily="49" charset="-127"/>
               </a:rPr>
               <a:t> </a:t>
             </a:r>
             <a:r>
-              <a:rPr lang="ko-KR" altLang="en-US" dirty="0" err="1">
+              <a:rPr lang="ko-KR" altLang="en-US" sz="1600" dirty="0" err="1">
                 <a:latin typeface="D2Coding" panose="020B0609020101020101" pitchFamily="49" charset="-127"/>
                 <a:ea typeface="D2Coding" panose="020B0609020101020101" pitchFamily="49" charset="-127"/>
               </a:rPr>
               <a:t>data</a:t>
             </a:r>
             <a:r>
-              <a:rPr lang="ko-KR" altLang="en-US" dirty="0">
+              <a:rPr lang="ko-KR" altLang="en-US" sz="1600" dirty="0">
                 <a:latin typeface="D2Coding" panose="020B0609020101020101" pitchFamily="49" charset="-127"/>
                 <a:ea typeface="D2Coding" panose="020B0609020101020101" pitchFamily="49" charset="-127"/>
               </a:rPr>
               <a:t> (텍스트 데이터 </a:t>
             </a:r>
             <a:r>
-              <a:rPr lang="ko-KR" altLang="en-US" dirty="0" err="1">
+              <a:rPr lang="ko-KR" altLang="en-US" sz="1600" dirty="0" err="1">
                 <a:latin typeface="D2Coding" panose="020B0609020101020101" pitchFamily="49" charset="-127"/>
                 <a:ea typeface="D2Coding" panose="020B0609020101020101" pitchFamily="49" charset="-127"/>
               </a:rPr>
               <a:t>전처리</a:t>
             </a:r>
             <a:r>
-              <a:rPr lang="ko-KR" altLang="en-US" dirty="0">
+              <a:rPr lang="ko-KR" altLang="en-US" sz="1600" dirty="0">
                 <a:latin typeface="D2Coding" panose="020B0609020101020101" pitchFamily="49" charset="-127"/>
                 <a:ea typeface="D2Coding" panose="020B0609020101020101" pitchFamily="49" charset="-127"/>
               </a:rPr>
               <a:t>)</a:t>
             </a:r>
-            <a:endParaRPr lang="en-US" altLang="ko-KR" dirty="0">
+            <a:endParaRPr lang="en-US" altLang="ko-KR" sz="1600" dirty="0">
               <a:latin typeface="D2Coding" panose="020B0609020101020101" pitchFamily="49" charset="-127"/>
               <a:ea typeface="D2Coding" panose="020B0609020101020101" pitchFamily="49" charset="-127"/>
             </a:endParaRPr>
@@ -14304,46 +14315,156 @@
               <a:buAutoNum type="arabicPeriod"/>
             </a:pPr>
             <a:r>
+              <a:rPr lang="ko-KR" altLang="en-US" sz="1400" dirty="0" err="1">
+                <a:latin typeface="D2Coding" panose="020B0609020101020101" pitchFamily="49" charset="-127"/>
+                <a:ea typeface="D2Coding" panose="020B0609020101020101" pitchFamily="49" charset="-127"/>
+              </a:rPr>
+              <a:t>Character</a:t>
+            </a:r>
+            <a:r>
+              <a:rPr lang="ko-KR" altLang="en-US" sz="1400" dirty="0">
+                <a:latin typeface="D2Coding" panose="020B0609020101020101" pitchFamily="49" charset="-127"/>
+                <a:ea typeface="D2Coding" panose="020B0609020101020101" pitchFamily="49" charset="-127"/>
+              </a:rPr>
+              <a:t> and </a:t>
+            </a:r>
+            <a:r>
+              <a:rPr lang="ko-KR" altLang="en-US" sz="1400" dirty="0" err="1">
+                <a:latin typeface="D2Coding" panose="020B0609020101020101" pitchFamily="49" charset="-127"/>
+                <a:ea typeface="D2Coding" panose="020B0609020101020101" pitchFamily="49" charset="-127"/>
+              </a:rPr>
+              <a:t>word</a:t>
+            </a:r>
+            <a:r>
+              <a:rPr lang="ko-KR" altLang="en-US" sz="1400" dirty="0">
+                <a:latin typeface="D2Coding" panose="020B0609020101020101" pitchFamily="49" charset="-127"/>
+                <a:ea typeface="D2Coding" panose="020B0609020101020101" pitchFamily="49" charset="-127"/>
+              </a:rPr>
+              <a:t> </a:t>
+            </a:r>
+            <a:r>
+              <a:rPr lang="ko-KR" altLang="en-US" sz="1400" dirty="0" err="1">
+                <a:latin typeface="D2Coding" panose="020B0609020101020101" pitchFamily="49" charset="-127"/>
+                <a:ea typeface="D2Coding" panose="020B0609020101020101" pitchFamily="49" charset="-127"/>
+              </a:rPr>
+              <a:t>tokenization</a:t>
+            </a:r>
+            <a:r>
+              <a:rPr lang="ko-KR" altLang="en-US" sz="1400" dirty="0">
+                <a:latin typeface="D2Coding" panose="020B0609020101020101" pitchFamily="49" charset="-127"/>
+                <a:ea typeface="D2Coding" panose="020B0609020101020101" pitchFamily="49" charset="-127"/>
+              </a:rPr>
+              <a:t> (문자 및 단어 단위 토큰화)</a:t>
+            </a:r>
+            <a:endParaRPr lang="en-US" altLang="ko-KR" sz="1400" dirty="0">
+              <a:latin typeface="D2Coding" panose="020B0609020101020101" pitchFamily="49" charset="-127"/>
+              <a:ea typeface="D2Coding" panose="020B0609020101020101" pitchFamily="49" charset="-127"/>
+            </a:endParaRPr>
+          </a:p>
+          <a:p>
+            <a:pPr marL="800100" lvl="1" indent="-342900">
+              <a:buFont typeface="+mj-lt"/>
+              <a:buAutoNum type="arabicPeriod"/>
+            </a:pPr>
+            <a:r>
+              <a:rPr lang="ko-KR" altLang="en-US" sz="1400" dirty="0" err="1">
+                <a:latin typeface="D2Coding" panose="020B0609020101020101" pitchFamily="49" charset="-127"/>
+                <a:ea typeface="D2Coding" panose="020B0609020101020101" pitchFamily="49" charset="-127"/>
+              </a:rPr>
+              <a:t>Subword</a:t>
+            </a:r>
+            <a:r>
+              <a:rPr lang="ko-KR" altLang="en-US" sz="1400" dirty="0">
+                <a:latin typeface="D2Coding" panose="020B0609020101020101" pitchFamily="49" charset="-127"/>
+                <a:ea typeface="D2Coding" panose="020B0609020101020101" pitchFamily="49" charset="-127"/>
+              </a:rPr>
+              <a:t> </a:t>
+            </a:r>
+            <a:r>
+              <a:rPr lang="ko-KR" altLang="en-US" sz="1400" dirty="0" err="1">
+                <a:latin typeface="D2Coding" panose="020B0609020101020101" pitchFamily="49" charset="-127"/>
+                <a:ea typeface="D2Coding" panose="020B0609020101020101" pitchFamily="49" charset="-127"/>
+              </a:rPr>
+              <a:t>tokenization</a:t>
+            </a:r>
+            <a:r>
+              <a:rPr lang="ko-KR" altLang="en-US" sz="1400" dirty="0">
+                <a:latin typeface="D2Coding" panose="020B0609020101020101" pitchFamily="49" charset="-127"/>
+                <a:ea typeface="D2Coding" panose="020B0609020101020101" pitchFamily="49" charset="-127"/>
+              </a:rPr>
+              <a:t> (</a:t>
+            </a:r>
+            <a:r>
+              <a:rPr lang="ko-KR" altLang="en-US" sz="1400" dirty="0" err="1">
+                <a:latin typeface="D2Coding" panose="020B0609020101020101" pitchFamily="49" charset="-127"/>
+                <a:ea typeface="D2Coding" panose="020B0609020101020101" pitchFamily="49" charset="-127"/>
+              </a:rPr>
+              <a:t>서브워드</a:t>
+            </a:r>
+            <a:r>
+              <a:rPr lang="ko-KR" altLang="en-US" sz="1400" dirty="0">
+                <a:latin typeface="D2Coding" panose="020B0609020101020101" pitchFamily="49" charset="-127"/>
+                <a:ea typeface="D2Coding" panose="020B0609020101020101" pitchFamily="49" charset="-127"/>
+              </a:rPr>
+              <a:t> 단위 토큰화)</a:t>
+            </a:r>
+          </a:p>
+          <a:p>
+            <a:pPr marL="342900" indent="-342900">
+              <a:buFont typeface="+mj-lt"/>
+              <a:buAutoNum type="arabicPeriod"/>
+            </a:pPr>
+            <a:endParaRPr lang="ko-KR" altLang="en-US" sz="1000" dirty="0">
+              <a:latin typeface="D2Coding" panose="020B0609020101020101" pitchFamily="49" charset="-127"/>
+              <a:ea typeface="D2Coding" panose="020B0609020101020101" pitchFamily="49" charset="-127"/>
+            </a:endParaRPr>
+          </a:p>
+          <a:p>
+            <a:pPr marL="342900" indent="-342900">
+              <a:buFont typeface="+mj-lt"/>
+              <a:buAutoNum type="arabicPeriod"/>
+            </a:pPr>
+            <a:r>
               <a:rPr lang="ko-KR" altLang="en-US" sz="1600" dirty="0" err="1">
                 <a:latin typeface="D2Coding" panose="020B0609020101020101" pitchFamily="49" charset="-127"/>
                 <a:ea typeface="D2Coding" panose="020B0609020101020101" pitchFamily="49" charset="-127"/>
               </a:rPr>
-              <a:t>Character</a:t>
+              <a:t>Sets</a:t>
             </a:r>
             <a:r>
               <a:rPr lang="ko-KR" altLang="en-US" sz="1600" dirty="0">
                 <a:latin typeface="D2Coding" panose="020B0609020101020101" pitchFamily="49" charset="-127"/>
                 <a:ea typeface="D2Coding" panose="020B0609020101020101" pitchFamily="49" charset="-127"/>
               </a:rPr>
-              <a:t> and </a:t>
+              <a:t> </a:t>
             </a:r>
             <a:r>
               <a:rPr lang="ko-KR" altLang="en-US" sz="1600" dirty="0" err="1">
                 <a:latin typeface="D2Coding" panose="020B0609020101020101" pitchFamily="49" charset="-127"/>
                 <a:ea typeface="D2Coding" panose="020B0609020101020101" pitchFamily="49" charset="-127"/>
               </a:rPr>
-              <a:t>word</a:t>
+              <a:t>vs</a:t>
             </a:r>
             <a:r>
               <a:rPr lang="ko-KR" altLang="en-US" sz="1600" dirty="0">
                 <a:latin typeface="D2Coding" panose="020B0609020101020101" pitchFamily="49" charset="-127"/>
                 <a:ea typeface="D2Coding" panose="020B0609020101020101" pitchFamily="49" charset="-127"/>
               </a:rPr>
-              <a:t> </a:t>
+              <a:t>. </a:t>
             </a:r>
             <a:r>
               <a:rPr lang="ko-KR" altLang="en-US" sz="1600" dirty="0" err="1">
                 <a:latin typeface="D2Coding" panose="020B0609020101020101" pitchFamily="49" charset="-127"/>
                 <a:ea typeface="D2Coding" panose="020B0609020101020101" pitchFamily="49" charset="-127"/>
               </a:rPr>
-              <a:t>tokenization</a:t>
+              <a:t>sequences</a:t>
             </a:r>
             <a:r>
               <a:rPr lang="ko-KR" altLang="en-US" sz="1600" dirty="0">
                 <a:latin typeface="D2Coding" panose="020B0609020101020101" pitchFamily="49" charset="-127"/>
                 <a:ea typeface="D2Coding" panose="020B0609020101020101" pitchFamily="49" charset="-127"/>
               </a:rPr>
-              <a:t> (문자 및 단어 단위 토큰화)</a:t>
+              <a:t> (텍스트 표현 관점의 비교)</a:t>
             </a:r>
             <a:endParaRPr lang="en-US" altLang="ko-KR" sz="1600" dirty="0">
               <a:latin typeface="D2Coding" panose="020B0609020101020101" pitchFamily="49" charset="-127"/>
@@ -14356,46 +14477,88 @@
               <a:buAutoNum type="arabicPeriod"/>
             </a:pPr>
             <a:r>
-              <a:rPr lang="ko-KR" altLang="en-US" sz="1600" dirty="0" err="1">
-                <a:latin typeface="D2Coding" panose="020B0609020101020101" pitchFamily="49" charset="-127"/>
-                <a:ea typeface="D2Coding" panose="020B0609020101020101" pitchFamily="49" charset="-127"/>
-              </a:rPr>
-              <a:t>Subword</a:t>
-            </a:r>
-            <a:r>
-              <a:rPr lang="ko-KR" altLang="en-US" sz="1600" dirty="0">
+              <a:rPr lang="ko-KR" altLang="en-US" sz="1400" dirty="0" err="1">
+                <a:latin typeface="D2Coding" panose="020B0609020101020101" pitchFamily="49" charset="-127"/>
+                <a:ea typeface="D2Coding" panose="020B0609020101020101" pitchFamily="49" charset="-127"/>
+              </a:rPr>
+              <a:t>Loading</a:t>
+            </a:r>
+            <a:r>
+              <a:rPr lang="ko-KR" altLang="en-US" sz="1400" dirty="0">
                 <a:latin typeface="D2Coding" panose="020B0609020101020101" pitchFamily="49" charset="-127"/>
                 <a:ea typeface="D2Coding" panose="020B0609020101020101" pitchFamily="49" charset="-127"/>
               </a:rPr>
               <a:t> </a:t>
             </a:r>
             <a:r>
-              <a:rPr lang="ko-KR" altLang="en-US" sz="1600" dirty="0" err="1">
-                <a:latin typeface="D2Coding" panose="020B0609020101020101" pitchFamily="49" charset="-127"/>
-                <a:ea typeface="D2Coding" panose="020B0609020101020101" pitchFamily="49" charset="-127"/>
-              </a:rPr>
-              <a:t>tokenization</a:t>
-            </a:r>
-            <a:r>
-              <a:rPr lang="ko-KR" altLang="en-US" sz="1600" dirty="0">
+              <a:rPr lang="ko-KR" altLang="en-US" sz="1400" dirty="0" err="1">
+                <a:latin typeface="D2Coding" panose="020B0609020101020101" pitchFamily="49" charset="-127"/>
+                <a:ea typeface="D2Coding" panose="020B0609020101020101" pitchFamily="49" charset="-127"/>
+              </a:rPr>
+              <a:t>the</a:t>
+            </a:r>
+            <a:r>
+              <a:rPr lang="ko-KR" altLang="en-US" sz="1400" dirty="0">
+                <a:latin typeface="D2Coding" panose="020B0609020101020101" pitchFamily="49" charset="-127"/>
+                <a:ea typeface="D2Coding" panose="020B0609020101020101" pitchFamily="49" charset="-127"/>
+              </a:rPr>
+              <a:t> </a:t>
+            </a:r>
+            <a:r>
+              <a:rPr lang="ko-KR" altLang="en-US" sz="1400" dirty="0" err="1">
+                <a:latin typeface="D2Coding" panose="020B0609020101020101" pitchFamily="49" charset="-127"/>
+                <a:ea typeface="D2Coding" panose="020B0609020101020101" pitchFamily="49" charset="-127"/>
+              </a:rPr>
+              <a:t>IMDb</a:t>
+            </a:r>
+            <a:r>
+              <a:rPr lang="ko-KR" altLang="en-US" sz="1400" dirty="0">
+                <a:latin typeface="D2Coding" panose="020B0609020101020101" pitchFamily="49" charset="-127"/>
+                <a:ea typeface="D2Coding" panose="020B0609020101020101" pitchFamily="49" charset="-127"/>
+              </a:rPr>
+              <a:t> </a:t>
+            </a:r>
+            <a:r>
+              <a:rPr lang="ko-KR" altLang="en-US" sz="1400" dirty="0" err="1">
+                <a:latin typeface="D2Coding" panose="020B0609020101020101" pitchFamily="49" charset="-127"/>
+                <a:ea typeface="D2Coding" panose="020B0609020101020101" pitchFamily="49" charset="-127"/>
+              </a:rPr>
+              <a:t>classification</a:t>
+            </a:r>
+            <a:r>
+              <a:rPr lang="ko-KR" altLang="en-US" sz="1400" dirty="0">
+                <a:latin typeface="D2Coding" panose="020B0609020101020101" pitchFamily="49" charset="-127"/>
+                <a:ea typeface="D2Coding" panose="020B0609020101020101" pitchFamily="49" charset="-127"/>
+              </a:rPr>
+              <a:t> </a:t>
+            </a:r>
+            <a:r>
+              <a:rPr lang="ko-KR" altLang="en-US" sz="1400" dirty="0" err="1">
+                <a:latin typeface="D2Coding" panose="020B0609020101020101" pitchFamily="49" charset="-127"/>
+                <a:ea typeface="D2Coding" panose="020B0609020101020101" pitchFamily="49" charset="-127"/>
+              </a:rPr>
+              <a:t>dataset</a:t>
+            </a:r>
+            <a:r>
+              <a:rPr lang="ko-KR" altLang="en-US" sz="1400" dirty="0">
                 <a:latin typeface="D2Coding" panose="020B0609020101020101" pitchFamily="49" charset="-127"/>
                 <a:ea typeface="D2Coding" panose="020B0609020101020101" pitchFamily="49" charset="-127"/>
               </a:rPr>
               <a:t> (</a:t>
             </a:r>
             <a:r>
-              <a:rPr lang="ko-KR" altLang="en-US" sz="1600" dirty="0" err="1">
-                <a:latin typeface="D2Coding" panose="020B0609020101020101" pitchFamily="49" charset="-127"/>
-                <a:ea typeface="D2Coding" panose="020B0609020101020101" pitchFamily="49" charset="-127"/>
-              </a:rPr>
-              <a:t>서브워드</a:t>
-            </a:r>
-            <a:r>
-              <a:rPr lang="ko-KR" altLang="en-US" sz="1600" dirty="0">
-                <a:latin typeface="D2Coding" panose="020B0609020101020101" pitchFamily="49" charset="-127"/>
-                <a:ea typeface="D2Coding" panose="020B0609020101020101" pitchFamily="49" charset="-127"/>
-              </a:rPr>
-              <a:t> 단위 토큰화)</a:t>
+              <a:rPr lang="ko-KR" altLang="en-US" sz="1400" dirty="0" err="1">
+                <a:latin typeface="D2Coding" panose="020B0609020101020101" pitchFamily="49" charset="-127"/>
+                <a:ea typeface="D2Coding" panose="020B0609020101020101" pitchFamily="49" charset="-127"/>
+              </a:rPr>
+              <a:t>IMDb</a:t>
+            </a:r>
+            <a:r>
+              <a:rPr lang="ko-KR" altLang="en-US" sz="1400" dirty="0">
+                <a:latin typeface="D2Coding" panose="020B0609020101020101" pitchFamily="49" charset="-127"/>
+                <a:ea typeface="D2Coding" panose="020B0609020101020101" pitchFamily="49" charset="-127"/>
+              </a:rPr>
+              <a:t> 영화 리뷰 분류 데이터셋 로딩)</a:t>
             </a:r>
           </a:p>
           <a:p>
@@ -14403,7 +14566,7 @@
               <a:buFont typeface="+mj-lt"/>
               <a:buAutoNum type="arabicPeriod"/>
             </a:pPr>
-            <a:endParaRPr lang="ko-KR" altLang="en-US" sz="1050" dirty="0">
+            <a:endParaRPr lang="ko-KR" altLang="en-US" sz="1000" dirty="0">
               <a:latin typeface="D2Coding" panose="020B0609020101020101" pitchFamily="49" charset="-127"/>
               <a:ea typeface="D2Coding" panose="020B0609020101020101" pitchFamily="49" charset="-127"/>
             </a:endParaRPr>
@@ -14414,186 +14577,34 @@
               <a:buAutoNum type="arabicPeriod"/>
             </a:pPr>
             <a:r>
-              <a:rPr lang="ko-KR" altLang="en-US" dirty="0" err="1">
-                <a:latin typeface="D2Coding" panose="020B0609020101020101" pitchFamily="49" charset="-127"/>
-                <a:ea typeface="D2Coding" panose="020B0609020101020101" pitchFamily="49" charset="-127"/>
-              </a:rPr>
-              <a:t>Sets</a:t>
-            </a:r>
-            <a:r>
-              <a:rPr lang="ko-KR" altLang="en-US" dirty="0">
+              <a:rPr lang="ko-KR" altLang="en-US" sz="1600" dirty="0" err="1">
+                <a:latin typeface="D2Coding" panose="020B0609020101020101" pitchFamily="49" charset="-127"/>
+                <a:ea typeface="D2Coding" panose="020B0609020101020101" pitchFamily="49" charset="-127"/>
+              </a:rPr>
+              <a:t>Set</a:t>
+            </a:r>
+            <a:r>
+              <a:rPr lang="ko-KR" altLang="en-US" sz="1600" dirty="0">
                 <a:latin typeface="D2Coding" panose="020B0609020101020101" pitchFamily="49" charset="-127"/>
                 <a:ea typeface="D2Coding" panose="020B0609020101020101" pitchFamily="49" charset="-127"/>
               </a:rPr>
               <a:t> </a:t>
             </a:r>
             <a:r>
-              <a:rPr lang="ko-KR" altLang="en-US" dirty="0" err="1">
-                <a:latin typeface="D2Coding" panose="020B0609020101020101" pitchFamily="49" charset="-127"/>
-                <a:ea typeface="D2Coding" panose="020B0609020101020101" pitchFamily="49" charset="-127"/>
-              </a:rPr>
-              <a:t>vs</a:t>
-            </a:r>
-            <a:r>
-              <a:rPr lang="ko-KR" altLang="en-US" dirty="0">
-                <a:latin typeface="D2Coding" panose="020B0609020101020101" pitchFamily="49" charset="-127"/>
-                <a:ea typeface="D2Coding" panose="020B0609020101020101" pitchFamily="49" charset="-127"/>
-              </a:rPr>
-              <a:t>. </a:t>
-            </a:r>
-            <a:r>
-              <a:rPr lang="ko-KR" altLang="en-US" dirty="0" err="1">
-                <a:latin typeface="D2Coding" panose="020B0609020101020101" pitchFamily="49" charset="-127"/>
-                <a:ea typeface="D2Coding" panose="020B0609020101020101" pitchFamily="49" charset="-127"/>
-              </a:rPr>
-              <a:t>sequences</a:t>
-            </a:r>
-            <a:r>
-              <a:rPr lang="ko-KR" altLang="en-US" dirty="0">
-                <a:latin typeface="D2Coding" panose="020B0609020101020101" pitchFamily="49" charset="-127"/>
-                <a:ea typeface="D2Coding" panose="020B0609020101020101" pitchFamily="49" charset="-127"/>
-              </a:rPr>
-              <a:t> (텍스트 표현 관점의 비교)</a:t>
-            </a:r>
-            <a:endParaRPr lang="en-US" altLang="ko-KR" dirty="0">
-              <a:latin typeface="D2Coding" panose="020B0609020101020101" pitchFamily="49" charset="-127"/>
-              <a:ea typeface="D2Coding" panose="020B0609020101020101" pitchFamily="49" charset="-127"/>
-            </a:endParaRPr>
-          </a:p>
-          <a:p>
-            <a:pPr marL="800100" lvl="1" indent="-342900">
-              <a:buFont typeface="+mj-lt"/>
-              <a:buAutoNum type="arabicPeriod"/>
-            </a:pPr>
-            <a:r>
               <a:rPr lang="ko-KR" altLang="en-US" sz="1600" dirty="0" err="1">
                 <a:latin typeface="D2Coding" panose="020B0609020101020101" pitchFamily="49" charset="-127"/>
                 <a:ea typeface="D2Coding" panose="020B0609020101020101" pitchFamily="49" charset="-127"/>
               </a:rPr>
-              <a:t>Loading</a:t>
+              <a:t>models</a:t>
             </a:r>
             <a:r>
               <a:rPr lang="ko-KR" altLang="en-US" sz="1600" dirty="0">
                 <a:latin typeface="D2Coding" panose="020B0609020101020101" pitchFamily="49" charset="-127"/>
                 <a:ea typeface="D2Coding" panose="020B0609020101020101" pitchFamily="49" charset="-127"/>
               </a:rPr>
-              <a:t> </a:t>
-            </a:r>
-            <a:r>
-              <a:rPr lang="ko-KR" altLang="en-US" sz="1600" dirty="0" err="1">
-                <a:latin typeface="D2Coding" panose="020B0609020101020101" pitchFamily="49" charset="-127"/>
-                <a:ea typeface="D2Coding" panose="020B0609020101020101" pitchFamily="49" charset="-127"/>
-              </a:rPr>
-              <a:t>the</a:t>
-            </a:r>
-            <a:r>
-              <a:rPr lang="ko-KR" altLang="en-US" sz="1600" dirty="0">
-                <a:latin typeface="D2Coding" panose="020B0609020101020101" pitchFamily="49" charset="-127"/>
-                <a:ea typeface="D2Coding" panose="020B0609020101020101" pitchFamily="49" charset="-127"/>
-              </a:rPr>
-              <a:t> </a:t>
-            </a:r>
-            <a:r>
-              <a:rPr lang="ko-KR" altLang="en-US" sz="1600" dirty="0" err="1">
-                <a:latin typeface="D2Coding" panose="020B0609020101020101" pitchFamily="49" charset="-127"/>
-                <a:ea typeface="D2Coding" panose="020B0609020101020101" pitchFamily="49" charset="-127"/>
-              </a:rPr>
-              <a:t>IMDb</a:t>
-            </a:r>
-            <a:r>
-              <a:rPr lang="ko-KR" altLang="en-US" sz="1600" dirty="0">
-                <a:latin typeface="D2Coding" panose="020B0609020101020101" pitchFamily="49" charset="-127"/>
-                <a:ea typeface="D2Coding" panose="020B0609020101020101" pitchFamily="49" charset="-127"/>
-              </a:rPr>
-              <a:t> </a:t>
-            </a:r>
-            <a:r>
-              <a:rPr lang="ko-KR" altLang="en-US" sz="1600" dirty="0" err="1">
-                <a:latin typeface="D2Coding" panose="020B0609020101020101" pitchFamily="49" charset="-127"/>
-                <a:ea typeface="D2Coding" panose="020B0609020101020101" pitchFamily="49" charset="-127"/>
-              </a:rPr>
-              <a:t>classification</a:t>
-            </a:r>
-            <a:r>
-              <a:rPr lang="ko-KR" altLang="en-US" sz="1600" dirty="0">
-                <a:latin typeface="D2Coding" panose="020B0609020101020101" pitchFamily="49" charset="-127"/>
-                <a:ea typeface="D2Coding" panose="020B0609020101020101" pitchFamily="49" charset="-127"/>
-              </a:rPr>
-              <a:t> </a:t>
-            </a:r>
-            <a:r>
-              <a:rPr lang="ko-KR" altLang="en-US" sz="1600" dirty="0" err="1">
-                <a:latin typeface="D2Coding" panose="020B0609020101020101" pitchFamily="49" charset="-127"/>
-                <a:ea typeface="D2Coding" panose="020B0609020101020101" pitchFamily="49" charset="-127"/>
-              </a:rPr>
-              <a:t>dataset</a:t>
-            </a:r>
-            <a:r>
-              <a:rPr lang="ko-KR" altLang="en-US" sz="1600" dirty="0">
-                <a:latin typeface="D2Coding" panose="020B0609020101020101" pitchFamily="49" charset="-127"/>
-                <a:ea typeface="D2Coding" panose="020B0609020101020101" pitchFamily="49" charset="-127"/>
-              </a:rPr>
-              <a:t> (</a:t>
-            </a:r>
-            <a:r>
-              <a:rPr lang="ko-KR" altLang="en-US" sz="1600" dirty="0" err="1">
-                <a:latin typeface="D2Coding" panose="020B0609020101020101" pitchFamily="49" charset="-127"/>
-                <a:ea typeface="D2Coding" panose="020B0609020101020101" pitchFamily="49" charset="-127"/>
-              </a:rPr>
-              <a:t>IMDb</a:t>
-            </a:r>
-            <a:r>
-              <a:rPr lang="ko-KR" altLang="en-US" sz="1600" dirty="0">
-                <a:latin typeface="D2Coding" panose="020B0609020101020101" pitchFamily="49" charset="-127"/>
-                <a:ea typeface="D2Coding" panose="020B0609020101020101" pitchFamily="49" charset="-127"/>
-              </a:rPr>
-              <a:t> 영화 리뷰 분류 데이터셋 로딩)</a:t>
-            </a:r>
-          </a:p>
-          <a:p>
-            <a:pPr marL="342900" indent="-342900">
-              <a:buFont typeface="+mj-lt"/>
-              <a:buAutoNum type="arabicPeriod"/>
-            </a:pPr>
-            <a:endParaRPr lang="ko-KR" altLang="en-US" sz="1050" dirty="0">
-              <a:latin typeface="D2Coding" panose="020B0609020101020101" pitchFamily="49" charset="-127"/>
-              <a:ea typeface="D2Coding" panose="020B0609020101020101" pitchFamily="49" charset="-127"/>
-            </a:endParaRPr>
-          </a:p>
-          <a:p>
-            <a:pPr marL="342900" indent="-342900">
-              <a:buFont typeface="+mj-lt"/>
-              <a:buAutoNum type="arabicPeriod"/>
-            </a:pPr>
-            <a:r>
-              <a:rPr lang="ko-KR" altLang="en-US" dirty="0" err="1">
-                <a:latin typeface="D2Coding" panose="020B0609020101020101" pitchFamily="49" charset="-127"/>
-                <a:ea typeface="D2Coding" panose="020B0609020101020101" pitchFamily="49" charset="-127"/>
-              </a:rPr>
-              <a:t>Set</a:t>
-            </a:r>
-            <a:r>
-              <a:rPr lang="ko-KR" altLang="en-US" dirty="0">
-                <a:latin typeface="D2Coding" panose="020B0609020101020101" pitchFamily="49" charset="-127"/>
-                <a:ea typeface="D2Coding" panose="020B0609020101020101" pitchFamily="49" charset="-127"/>
-              </a:rPr>
-              <a:t> </a:t>
-            </a:r>
-            <a:r>
-              <a:rPr lang="ko-KR" altLang="en-US" dirty="0" err="1">
-                <a:latin typeface="D2Coding" panose="020B0609020101020101" pitchFamily="49" charset="-127"/>
-                <a:ea typeface="D2Coding" panose="020B0609020101020101" pitchFamily="49" charset="-127"/>
-              </a:rPr>
-              <a:t>models</a:t>
-            </a:r>
-            <a:r>
-              <a:rPr lang="ko-KR" altLang="en-US" dirty="0">
-                <a:latin typeface="D2Coding" panose="020B0609020101020101" pitchFamily="49" charset="-127"/>
-                <a:ea typeface="D2Coding" panose="020B0609020101020101" pitchFamily="49" charset="-127"/>
-              </a:rPr>
               <a:t> (순서를 고려하지 않는 집합 기반 모델)</a:t>
             </a:r>
-            <a:endParaRPr lang="en-US" altLang="ko-KR" dirty="0">
+            <a:endParaRPr lang="en-US" altLang="ko-KR" sz="1600" dirty="0">
               <a:latin typeface="D2Coding" panose="020B0609020101020101" pitchFamily="49" charset="-127"/>
               <a:ea typeface="D2Coding" panose="020B0609020101020101" pitchFamily="49" charset="-127"/>
             </a:endParaRPr>
@@ -14607,104 +14618,104 @@
               <a:buAutoNum type="arabicPeriod"/>
             </a:pPr>
             <a:r>
-              <a:rPr lang="ko-KR" altLang="en-US" sz="1600" dirty="0" err="1">
+              <a:rPr lang="ko-KR" altLang="en-US" sz="1400" dirty="0" err="1">
                 <a:latin typeface="D2Coding" panose="020B0609020101020101" pitchFamily="49" charset="-127"/>
                 <a:ea typeface="D2Coding" panose="020B0609020101020101" pitchFamily="49" charset="-127"/>
               </a:rPr>
               <a:t>Training</a:t>
             </a:r>
             <a:r>
-              <a:rPr lang="ko-KR" altLang="en-US" sz="1600" dirty="0">
+              <a:rPr lang="ko-KR" altLang="en-US" sz="1400" dirty="0">
                 <a:latin typeface="D2Coding" panose="020B0609020101020101" pitchFamily="49" charset="-127"/>
                 <a:ea typeface="D2Coding" panose="020B0609020101020101" pitchFamily="49" charset="-127"/>
               </a:rPr>
               <a:t> </a:t>
             </a:r>
             <a:r>
-              <a:rPr lang="ko-KR" altLang="en-US" sz="1600" dirty="0" err="1">
+              <a:rPr lang="ko-KR" altLang="en-US" sz="1400" dirty="0" err="1">
                 <a:latin typeface="D2Coding" panose="020B0609020101020101" pitchFamily="49" charset="-127"/>
                 <a:ea typeface="D2Coding" panose="020B0609020101020101" pitchFamily="49" charset="-127"/>
               </a:rPr>
               <a:t>a</a:t>
             </a:r>
             <a:r>
-              <a:rPr lang="ko-KR" altLang="en-US" sz="1600" dirty="0">
+              <a:rPr lang="ko-KR" altLang="en-US" sz="1400" dirty="0">
                 <a:latin typeface="D2Coding" panose="020B0609020101020101" pitchFamily="49" charset="-127"/>
                 <a:ea typeface="D2Coding" panose="020B0609020101020101" pitchFamily="49" charset="-127"/>
               </a:rPr>
               <a:t> </a:t>
             </a:r>
             <a:r>
-              <a:rPr lang="ko-KR" altLang="en-US" sz="1600" dirty="0" err="1">
+              <a:rPr lang="ko-KR" altLang="en-US" sz="1400" dirty="0" err="1">
                 <a:latin typeface="D2Coding" panose="020B0609020101020101" pitchFamily="49" charset="-127"/>
                 <a:ea typeface="D2Coding" panose="020B0609020101020101" pitchFamily="49" charset="-127"/>
               </a:rPr>
               <a:t>bag</a:t>
             </a:r>
             <a:r>
-              <a:rPr lang="ko-KR" altLang="en-US" sz="1600" dirty="0">
+              <a:rPr lang="ko-KR" altLang="en-US" sz="1400" dirty="0">
                 <a:latin typeface="D2Coding" panose="020B0609020101020101" pitchFamily="49" charset="-127"/>
                 <a:ea typeface="D2Coding" panose="020B0609020101020101" pitchFamily="49" charset="-127"/>
               </a:rPr>
               <a:t>-of-</a:t>
             </a:r>
             <a:r>
-              <a:rPr lang="ko-KR" altLang="en-US" sz="1600" dirty="0" err="1">
+              <a:rPr lang="ko-KR" altLang="en-US" sz="1400" dirty="0" err="1">
                 <a:latin typeface="D2Coding" panose="020B0609020101020101" pitchFamily="49" charset="-127"/>
                 <a:ea typeface="D2Coding" panose="020B0609020101020101" pitchFamily="49" charset="-127"/>
               </a:rPr>
               <a:t>words</a:t>
             </a:r>
             <a:r>
-              <a:rPr lang="ko-KR" altLang="en-US" sz="1600" dirty="0">
+              <a:rPr lang="ko-KR" altLang="en-US" sz="1400" dirty="0">
                 <a:latin typeface="D2Coding" panose="020B0609020101020101" pitchFamily="49" charset="-127"/>
                 <a:ea typeface="D2Coding" panose="020B0609020101020101" pitchFamily="49" charset="-127"/>
               </a:rPr>
               <a:t> </a:t>
             </a:r>
             <a:r>
-              <a:rPr lang="ko-KR" altLang="en-US" sz="1600" dirty="0" err="1">
+              <a:rPr lang="ko-KR" altLang="en-US" sz="1400" dirty="0" err="1">
                 <a:latin typeface="D2Coding" panose="020B0609020101020101" pitchFamily="49" charset="-127"/>
                 <a:ea typeface="D2Coding" panose="020B0609020101020101" pitchFamily="49" charset="-127"/>
               </a:rPr>
               <a:t>model</a:t>
             </a:r>
             <a:r>
-              <a:rPr lang="ko-KR" altLang="en-US" sz="1600" dirty="0">
+              <a:rPr lang="ko-KR" altLang="en-US" sz="1400" dirty="0">
                 <a:latin typeface="D2Coding" panose="020B0609020101020101" pitchFamily="49" charset="-127"/>
                 <a:ea typeface="D2Coding" panose="020B0609020101020101" pitchFamily="49" charset="-127"/>
               </a:rPr>
               <a:t> (</a:t>
             </a:r>
             <a:r>
-              <a:rPr lang="ko-KR" altLang="en-US" sz="1600" dirty="0" err="1">
+              <a:rPr lang="ko-KR" altLang="en-US" sz="1400" dirty="0" err="1">
                 <a:latin typeface="D2Coding" panose="020B0609020101020101" pitchFamily="49" charset="-127"/>
                 <a:ea typeface="D2Coding" panose="020B0609020101020101" pitchFamily="49" charset="-127"/>
               </a:rPr>
               <a:t>Bag</a:t>
             </a:r>
             <a:r>
-              <a:rPr lang="ko-KR" altLang="en-US" sz="1600" dirty="0">
+              <a:rPr lang="ko-KR" altLang="en-US" sz="1400" dirty="0">
                 <a:latin typeface="D2Coding" panose="020B0609020101020101" pitchFamily="49" charset="-127"/>
                 <a:ea typeface="D2Coding" panose="020B0609020101020101" pitchFamily="49" charset="-127"/>
               </a:rPr>
               <a:t>-of-</a:t>
             </a:r>
             <a:r>
-              <a:rPr lang="ko-KR" altLang="en-US" sz="1600" dirty="0" err="1">
+              <a:rPr lang="ko-KR" altLang="en-US" sz="1400" dirty="0" err="1">
                 <a:latin typeface="D2Coding" panose="020B0609020101020101" pitchFamily="49" charset="-127"/>
                 <a:ea typeface="D2Coding" panose="020B0609020101020101" pitchFamily="49" charset="-127"/>
               </a:rPr>
               <a:t>Words</a:t>
             </a:r>
             <a:r>
-              <a:rPr lang="ko-KR" altLang="en-US" sz="1600" dirty="0">
+              <a:rPr lang="ko-KR" altLang="en-US" sz="1400" dirty="0">
                 <a:latin typeface="D2Coding" panose="020B0609020101020101" pitchFamily="49" charset="-127"/>
                 <a:ea typeface="D2Coding" panose="020B0609020101020101" pitchFamily="49" charset="-127"/>
               </a:rPr>
               <a:t> 모델 학습)</a:t>
             </a:r>
-            <a:endParaRPr lang="en-US" altLang="ko-KR" sz="1600" dirty="0">
+            <a:endParaRPr lang="en-US" altLang="ko-KR" sz="1400" dirty="0">
               <a:latin typeface="D2Coding" panose="020B0609020101020101" pitchFamily="49" charset="-127"/>
               <a:ea typeface="D2Coding" panose="020B0609020101020101" pitchFamily="49" charset="-127"/>
             </a:endParaRPr>
@@ -14715,70 +14726,70 @@
               <a:buAutoNum type="arabicPeriod"/>
             </a:pPr>
             <a:r>
-              <a:rPr lang="ko-KR" altLang="en-US" sz="1600" dirty="0" err="1">
+              <a:rPr lang="ko-KR" altLang="en-US" sz="1400" dirty="0" err="1">
                 <a:latin typeface="D2Coding" panose="020B0609020101020101" pitchFamily="49" charset="-127"/>
                 <a:ea typeface="D2Coding" panose="020B0609020101020101" pitchFamily="49" charset="-127"/>
               </a:rPr>
               <a:t>Training</a:t>
             </a:r>
             <a:r>
-              <a:rPr lang="ko-KR" altLang="en-US" sz="1600" dirty="0">
+              <a:rPr lang="ko-KR" altLang="en-US" sz="1400" dirty="0">
                 <a:latin typeface="D2Coding" panose="020B0609020101020101" pitchFamily="49" charset="-127"/>
                 <a:ea typeface="D2Coding" panose="020B0609020101020101" pitchFamily="49" charset="-127"/>
               </a:rPr>
               <a:t> </a:t>
             </a:r>
             <a:r>
-              <a:rPr lang="ko-KR" altLang="en-US" sz="1600" dirty="0" err="1">
+              <a:rPr lang="ko-KR" altLang="en-US" sz="1400" dirty="0" err="1">
                 <a:latin typeface="D2Coding" panose="020B0609020101020101" pitchFamily="49" charset="-127"/>
                 <a:ea typeface="D2Coding" panose="020B0609020101020101" pitchFamily="49" charset="-127"/>
               </a:rPr>
               <a:t>a</a:t>
             </a:r>
             <a:r>
-              <a:rPr lang="ko-KR" altLang="en-US" sz="1600" dirty="0">
+              <a:rPr lang="ko-KR" altLang="en-US" sz="1400" dirty="0">
                 <a:latin typeface="D2Coding" panose="020B0609020101020101" pitchFamily="49" charset="-127"/>
                 <a:ea typeface="D2Coding" panose="020B0609020101020101" pitchFamily="49" charset="-127"/>
               </a:rPr>
               <a:t> </a:t>
             </a:r>
             <a:r>
-              <a:rPr lang="ko-KR" altLang="en-US" sz="1600" dirty="0" err="1">
+              <a:rPr lang="ko-KR" altLang="en-US" sz="1400" dirty="0" err="1">
                 <a:latin typeface="D2Coding" panose="020B0609020101020101" pitchFamily="49" charset="-127"/>
                 <a:ea typeface="D2Coding" panose="020B0609020101020101" pitchFamily="49" charset="-127"/>
               </a:rPr>
               <a:t>bigram</a:t>
             </a:r>
             <a:r>
-              <a:rPr lang="ko-KR" altLang="en-US" sz="1600" dirty="0">
+              <a:rPr lang="ko-KR" altLang="en-US" sz="1400" dirty="0">
                 <a:latin typeface="D2Coding" panose="020B0609020101020101" pitchFamily="49" charset="-127"/>
                 <a:ea typeface="D2Coding" panose="020B0609020101020101" pitchFamily="49" charset="-127"/>
               </a:rPr>
               <a:t> </a:t>
             </a:r>
             <a:r>
-              <a:rPr lang="ko-KR" altLang="en-US" sz="1600" dirty="0" err="1">
+              <a:rPr lang="ko-KR" altLang="en-US" sz="1400" dirty="0" err="1">
                 <a:latin typeface="D2Coding" panose="020B0609020101020101" pitchFamily="49" charset="-127"/>
                 <a:ea typeface="D2Coding" panose="020B0609020101020101" pitchFamily="49" charset="-127"/>
               </a:rPr>
               <a:t>model</a:t>
             </a:r>
             <a:r>
-              <a:rPr lang="ko-KR" altLang="en-US" sz="1600" dirty="0">
+              <a:rPr lang="ko-KR" altLang="en-US" sz="1400" dirty="0">
                 <a:latin typeface="D2Coding" panose="020B0609020101020101" pitchFamily="49" charset="-127"/>
                 <a:ea typeface="D2Coding" panose="020B0609020101020101" pitchFamily="49" charset="-127"/>
               </a:rPr>
               <a:t> (</a:t>
             </a:r>
             <a:r>
-              <a:rPr lang="ko-KR" altLang="en-US" sz="1600" dirty="0" err="1">
+              <a:rPr lang="ko-KR" altLang="en-US" sz="1400" dirty="0" err="1">
                 <a:latin typeface="D2Coding" panose="020B0609020101020101" pitchFamily="49" charset="-127"/>
                 <a:ea typeface="D2Coding" panose="020B0609020101020101" pitchFamily="49" charset="-127"/>
               </a:rPr>
               <a:t>Bigram</a:t>
             </a:r>
             <a:r>
-              <a:rPr lang="ko-KR" altLang="en-US" sz="1600" dirty="0">
+              <a:rPr lang="ko-KR" altLang="en-US" sz="1400" dirty="0">
                 <a:latin typeface="D2Coding" panose="020B0609020101020101" pitchFamily="49" charset="-127"/>
                 <a:ea typeface="D2Coding" panose="020B0609020101020101" pitchFamily="49" charset="-127"/>
               </a:rPr>
@@ -14790,7 +14801,7 @@
               <a:buFont typeface="+mj-lt"/>
               <a:buAutoNum type="arabicPeriod"/>
             </a:pPr>
-            <a:endParaRPr lang="ko-KR" altLang="en-US" sz="1050" dirty="0">
+            <a:endParaRPr lang="ko-KR" altLang="en-US" sz="1000" dirty="0">
               <a:latin typeface="D2Coding" panose="020B0609020101020101" pitchFamily="49" charset="-127"/>
               <a:ea typeface="D2Coding" panose="020B0609020101020101" pitchFamily="49" charset="-127"/>
             </a:endParaRPr>
@@ -14801,28 +14812,28 @@
               <a:buAutoNum type="arabicPeriod"/>
             </a:pPr>
             <a:r>
-              <a:rPr lang="ko-KR" altLang="en-US" dirty="0" err="1">
+              <a:rPr lang="ko-KR" altLang="en-US" sz="1600" dirty="0" err="1">
                 <a:latin typeface="D2Coding" panose="020B0609020101020101" pitchFamily="49" charset="-127"/>
                 <a:ea typeface="D2Coding" panose="020B0609020101020101" pitchFamily="49" charset="-127"/>
               </a:rPr>
               <a:t>Sequence</a:t>
             </a:r>
             <a:r>
-              <a:rPr lang="ko-KR" altLang="en-US" dirty="0">
+              <a:rPr lang="ko-KR" altLang="en-US" sz="1600" dirty="0">
                 <a:latin typeface="D2Coding" panose="020B0609020101020101" pitchFamily="49" charset="-127"/>
                 <a:ea typeface="D2Coding" panose="020B0609020101020101" pitchFamily="49" charset="-127"/>
               </a:rPr>
               <a:t> </a:t>
             </a:r>
             <a:r>
-              <a:rPr lang="ko-KR" altLang="en-US" dirty="0" err="1">
+              <a:rPr lang="ko-KR" altLang="en-US" sz="1600" dirty="0" err="1">
                 <a:latin typeface="D2Coding" panose="020B0609020101020101" pitchFamily="49" charset="-127"/>
                 <a:ea typeface="D2Coding" panose="020B0609020101020101" pitchFamily="49" charset="-127"/>
               </a:rPr>
               <a:t>models</a:t>
             </a:r>
             <a:r>
-              <a:rPr lang="ko-KR" altLang="en-US" dirty="0">
+              <a:rPr lang="ko-KR" altLang="en-US" sz="1600" dirty="0">
                 <a:latin typeface="D2Coding" panose="020B0609020101020101" pitchFamily="49" charset="-127"/>
                 <a:ea typeface="D2Coding" panose="020B0609020101020101" pitchFamily="49" charset="-127"/>
               </a:rPr>
@@ -14838,56 +14849,56 @@
               <a:buAutoNum type="arabicPeriod"/>
             </a:pPr>
             <a:r>
-              <a:rPr lang="ko-KR" altLang="en-US" sz="1600" dirty="0" err="1">
+              <a:rPr lang="ko-KR" altLang="en-US" sz="1400" dirty="0" err="1">
                 <a:latin typeface="D2Coding" panose="020B0609020101020101" pitchFamily="49" charset="-127"/>
                 <a:ea typeface="D2Coding" panose="020B0609020101020101" pitchFamily="49" charset="-127"/>
               </a:rPr>
               <a:t>Training</a:t>
             </a:r>
             <a:r>
-              <a:rPr lang="ko-KR" altLang="en-US" sz="1600" dirty="0">
+              <a:rPr lang="ko-KR" altLang="en-US" sz="1400" dirty="0">
                 <a:latin typeface="D2Coding" panose="020B0609020101020101" pitchFamily="49" charset="-127"/>
                 <a:ea typeface="D2Coding" panose="020B0609020101020101" pitchFamily="49" charset="-127"/>
               </a:rPr>
               <a:t> </a:t>
             </a:r>
             <a:r>
-              <a:rPr lang="ko-KR" altLang="en-US" sz="1600" dirty="0" err="1">
+              <a:rPr lang="ko-KR" altLang="en-US" sz="1400" dirty="0" err="1">
                 <a:latin typeface="D2Coding" panose="020B0609020101020101" pitchFamily="49" charset="-127"/>
                 <a:ea typeface="D2Coding" panose="020B0609020101020101" pitchFamily="49" charset="-127"/>
               </a:rPr>
               <a:t>a</a:t>
             </a:r>
             <a:r>
-              <a:rPr lang="ko-KR" altLang="en-US" sz="1600" dirty="0">
+              <a:rPr lang="ko-KR" altLang="en-US" sz="1400" dirty="0">
                 <a:latin typeface="D2Coding" panose="020B0609020101020101" pitchFamily="49" charset="-127"/>
                 <a:ea typeface="D2Coding" panose="020B0609020101020101" pitchFamily="49" charset="-127"/>
               </a:rPr>
               <a:t> </a:t>
             </a:r>
             <a:r>
-              <a:rPr lang="ko-KR" altLang="en-US" sz="1600" dirty="0" err="1">
+              <a:rPr lang="ko-KR" altLang="en-US" sz="1400" dirty="0" err="1">
                 <a:latin typeface="D2Coding" panose="020B0609020101020101" pitchFamily="49" charset="-127"/>
                 <a:ea typeface="D2Coding" panose="020B0609020101020101" pitchFamily="49" charset="-127"/>
               </a:rPr>
               <a:t>recurrent</a:t>
             </a:r>
             <a:r>
-              <a:rPr lang="ko-KR" altLang="en-US" sz="1600" dirty="0">
+              <a:rPr lang="ko-KR" altLang="en-US" sz="1400" dirty="0">
                 <a:latin typeface="D2Coding" panose="020B0609020101020101" pitchFamily="49" charset="-127"/>
                 <a:ea typeface="D2Coding" panose="020B0609020101020101" pitchFamily="49" charset="-127"/>
               </a:rPr>
               <a:t> </a:t>
             </a:r>
             <a:r>
-              <a:rPr lang="ko-KR" altLang="en-US" sz="1600" dirty="0" err="1">
+              <a:rPr lang="ko-KR" altLang="en-US" sz="1400" dirty="0" err="1">
                 <a:latin typeface="D2Coding" panose="020B0609020101020101" pitchFamily="49" charset="-127"/>
                 <a:ea typeface="D2Coding" panose="020B0609020101020101" pitchFamily="49" charset="-127"/>
               </a:rPr>
               <a:t>model</a:t>
             </a:r>
             <a:r>
-              <a:rPr lang="ko-KR" altLang="en-US" sz="1600" dirty="0">
+              <a:rPr lang="ko-KR" altLang="en-US" sz="1400" dirty="0">
                 <a:latin typeface="D2Coding" panose="020B0609020101020101" pitchFamily="49" charset="-127"/>
                 <a:ea typeface="D2Coding" panose="020B0609020101020101" pitchFamily="49" charset="-127"/>
               </a:rPr>
@@ -14900,56 +14911,56 @@
               <a:buAutoNum type="arabicPeriod"/>
             </a:pPr>
             <a:r>
-              <a:rPr lang="ko-KR" altLang="en-US" sz="1600" dirty="0" err="1">
+              <a:rPr lang="ko-KR" altLang="en-US" sz="1400" dirty="0" err="1">
                 <a:latin typeface="D2Coding" panose="020B0609020101020101" pitchFamily="49" charset="-127"/>
                 <a:ea typeface="D2Coding" panose="020B0609020101020101" pitchFamily="49" charset="-127"/>
               </a:rPr>
               <a:t>Understanding</a:t>
             </a:r>
             <a:r>
-              <a:rPr lang="ko-KR" altLang="en-US" sz="1600" dirty="0">
+              <a:rPr lang="ko-KR" altLang="en-US" sz="1400" dirty="0">
                 <a:latin typeface="D2Coding" panose="020B0609020101020101" pitchFamily="49" charset="-127"/>
                 <a:ea typeface="D2Coding" panose="020B0609020101020101" pitchFamily="49" charset="-127"/>
               </a:rPr>
               <a:t> </a:t>
             </a:r>
             <a:r>
-              <a:rPr lang="ko-KR" altLang="en-US" sz="1600" dirty="0" err="1">
+              <a:rPr lang="ko-KR" altLang="en-US" sz="1400" dirty="0" err="1">
                 <a:latin typeface="D2Coding" panose="020B0609020101020101" pitchFamily="49" charset="-127"/>
                 <a:ea typeface="D2Coding" panose="020B0609020101020101" pitchFamily="49" charset="-127"/>
               </a:rPr>
               <a:t>word</a:t>
             </a:r>
             <a:r>
-              <a:rPr lang="ko-KR" altLang="en-US" sz="1600" dirty="0">
+              <a:rPr lang="ko-KR" altLang="en-US" sz="1400" dirty="0">
                 <a:latin typeface="D2Coding" panose="020B0609020101020101" pitchFamily="49" charset="-127"/>
                 <a:ea typeface="D2Coding" panose="020B0609020101020101" pitchFamily="49" charset="-127"/>
               </a:rPr>
               <a:t> </a:t>
             </a:r>
             <a:r>
-              <a:rPr lang="ko-KR" altLang="en-US" sz="1600" dirty="0" err="1">
+              <a:rPr lang="ko-KR" altLang="en-US" sz="1400" dirty="0" err="1">
                 <a:latin typeface="D2Coding" panose="020B0609020101020101" pitchFamily="49" charset="-127"/>
                 <a:ea typeface="D2Coding" panose="020B0609020101020101" pitchFamily="49" charset="-127"/>
               </a:rPr>
               <a:t>embeddings</a:t>
             </a:r>
             <a:r>
-              <a:rPr lang="ko-KR" altLang="en-US" sz="1600" dirty="0">
+              <a:rPr lang="ko-KR" altLang="en-US" sz="1400" dirty="0">
                 <a:latin typeface="D2Coding" panose="020B0609020101020101" pitchFamily="49" charset="-127"/>
                 <a:ea typeface="D2Coding" panose="020B0609020101020101" pitchFamily="49" charset="-127"/>
               </a:rPr>
               <a:t> (단어 </a:t>
             </a:r>
             <a:r>
-              <a:rPr lang="ko-KR" altLang="en-US" sz="1600" dirty="0" err="1">
+              <a:rPr lang="ko-KR" altLang="en-US" sz="1400" dirty="0" err="1">
                 <a:latin typeface="D2Coding" panose="020B0609020101020101" pitchFamily="49" charset="-127"/>
                 <a:ea typeface="D2Coding" panose="020B0609020101020101" pitchFamily="49" charset="-127"/>
               </a:rPr>
               <a:t>임베딩의</a:t>
             </a:r>
             <a:r>
-              <a:rPr lang="ko-KR" altLang="en-US" sz="1600" dirty="0">
+              <a:rPr lang="ko-KR" altLang="en-US" sz="1400" dirty="0">
                 <a:latin typeface="D2Coding" panose="020B0609020101020101" pitchFamily="49" charset="-127"/>
                 <a:ea typeface="D2Coding" panose="020B0609020101020101" pitchFamily="49" charset="-127"/>
               </a:rPr>
@@ -14962,70 +14973,70 @@
               <a:buAutoNum type="arabicPeriod"/>
             </a:pPr>
             <a:r>
-              <a:rPr lang="ko-KR" altLang="en-US" sz="1600" dirty="0" err="1">
+              <a:rPr lang="ko-KR" altLang="en-US" sz="1400" dirty="0" err="1">
                 <a:latin typeface="D2Coding" panose="020B0609020101020101" pitchFamily="49" charset="-127"/>
                 <a:ea typeface="D2Coding" panose="020B0609020101020101" pitchFamily="49" charset="-127"/>
               </a:rPr>
               <a:t>Using</a:t>
             </a:r>
             <a:r>
-              <a:rPr lang="ko-KR" altLang="en-US" sz="1600" dirty="0">
+              <a:rPr lang="ko-KR" altLang="en-US" sz="1400" dirty="0">
                 <a:latin typeface="D2Coding" panose="020B0609020101020101" pitchFamily="49" charset="-127"/>
                 <a:ea typeface="D2Coding" panose="020B0609020101020101" pitchFamily="49" charset="-127"/>
               </a:rPr>
               <a:t> </a:t>
             </a:r>
             <a:r>
-              <a:rPr lang="ko-KR" altLang="en-US" sz="1600" dirty="0" err="1">
+              <a:rPr lang="ko-KR" altLang="en-US" sz="1400" dirty="0" err="1">
                 <a:latin typeface="D2Coding" panose="020B0609020101020101" pitchFamily="49" charset="-127"/>
                 <a:ea typeface="D2Coding" panose="020B0609020101020101" pitchFamily="49" charset="-127"/>
               </a:rPr>
               <a:t>a</a:t>
             </a:r>
             <a:r>
-              <a:rPr lang="ko-KR" altLang="en-US" sz="1600" dirty="0">
+              <a:rPr lang="ko-KR" altLang="en-US" sz="1400" dirty="0">
                 <a:latin typeface="D2Coding" panose="020B0609020101020101" pitchFamily="49" charset="-127"/>
                 <a:ea typeface="D2Coding" panose="020B0609020101020101" pitchFamily="49" charset="-127"/>
               </a:rPr>
               <a:t> </a:t>
             </a:r>
             <a:r>
-              <a:rPr lang="ko-KR" altLang="en-US" sz="1600" dirty="0" err="1">
+              <a:rPr lang="ko-KR" altLang="en-US" sz="1400" dirty="0" err="1">
                 <a:latin typeface="D2Coding" panose="020B0609020101020101" pitchFamily="49" charset="-127"/>
                 <a:ea typeface="D2Coding" panose="020B0609020101020101" pitchFamily="49" charset="-127"/>
               </a:rPr>
               <a:t>word</a:t>
             </a:r>
             <a:r>
-              <a:rPr lang="ko-KR" altLang="en-US" sz="1600" dirty="0">
+              <a:rPr lang="ko-KR" altLang="en-US" sz="1400" dirty="0">
                 <a:latin typeface="D2Coding" panose="020B0609020101020101" pitchFamily="49" charset="-127"/>
                 <a:ea typeface="D2Coding" panose="020B0609020101020101" pitchFamily="49" charset="-127"/>
               </a:rPr>
               <a:t> </a:t>
             </a:r>
             <a:r>
-              <a:rPr lang="ko-KR" altLang="en-US" sz="1600" dirty="0" err="1">
+              <a:rPr lang="ko-KR" altLang="en-US" sz="1400" dirty="0" err="1">
                 <a:latin typeface="D2Coding" panose="020B0609020101020101" pitchFamily="49" charset="-127"/>
                 <a:ea typeface="D2Coding" panose="020B0609020101020101" pitchFamily="49" charset="-127"/>
               </a:rPr>
               <a:t>embedding</a:t>
             </a:r>
             <a:r>
-              <a:rPr lang="ko-KR" altLang="en-US" sz="1600" dirty="0">
+              <a:rPr lang="ko-KR" altLang="en-US" sz="1400" dirty="0">
                 <a:latin typeface="D2Coding" panose="020B0609020101020101" pitchFamily="49" charset="-127"/>
                 <a:ea typeface="D2Coding" panose="020B0609020101020101" pitchFamily="49" charset="-127"/>
               </a:rPr>
               <a:t> (단어 </a:t>
             </a:r>
             <a:r>
-              <a:rPr lang="ko-KR" altLang="en-US" sz="1600" dirty="0" err="1">
+              <a:rPr lang="ko-KR" altLang="en-US" sz="1400" dirty="0" err="1">
                 <a:latin typeface="D2Coding" panose="020B0609020101020101" pitchFamily="49" charset="-127"/>
                 <a:ea typeface="D2Coding" panose="020B0609020101020101" pitchFamily="49" charset="-127"/>
               </a:rPr>
               <a:t>임베딩</a:t>
             </a:r>
             <a:r>
-              <a:rPr lang="ko-KR" altLang="en-US" sz="1600" dirty="0">
+              <a:rPr lang="ko-KR" altLang="en-US" sz="1400" dirty="0">
                 <a:latin typeface="D2Coding" panose="020B0609020101020101" pitchFamily="49" charset="-127"/>
                 <a:ea typeface="D2Coding" panose="020B0609020101020101" pitchFamily="49" charset="-127"/>
               </a:rPr>
@@ -15038,70 +15049,70 @@
               <a:buAutoNum type="arabicPeriod"/>
             </a:pPr>
             <a:r>
-              <a:rPr lang="ko-KR" altLang="en-US" sz="1600" dirty="0" err="1">
+              <a:rPr lang="ko-KR" altLang="en-US" sz="1400" dirty="0" err="1">
                 <a:latin typeface="D2Coding" panose="020B0609020101020101" pitchFamily="49" charset="-127"/>
                 <a:ea typeface="D2Coding" panose="020B0609020101020101" pitchFamily="49" charset="-127"/>
               </a:rPr>
               <a:t>Pretraining</a:t>
             </a:r>
             <a:r>
-              <a:rPr lang="ko-KR" altLang="en-US" sz="1600" dirty="0">
+              <a:rPr lang="ko-KR" altLang="en-US" sz="1400" dirty="0">
                 <a:latin typeface="D2Coding" panose="020B0609020101020101" pitchFamily="49" charset="-127"/>
                 <a:ea typeface="D2Coding" panose="020B0609020101020101" pitchFamily="49" charset="-127"/>
               </a:rPr>
               <a:t> </a:t>
             </a:r>
             <a:r>
-              <a:rPr lang="ko-KR" altLang="en-US" sz="1600" dirty="0" err="1">
+              <a:rPr lang="ko-KR" altLang="en-US" sz="1400" dirty="0" err="1">
                 <a:latin typeface="D2Coding" panose="020B0609020101020101" pitchFamily="49" charset="-127"/>
                 <a:ea typeface="D2Coding" panose="020B0609020101020101" pitchFamily="49" charset="-127"/>
               </a:rPr>
               <a:t>a</a:t>
             </a:r>
             <a:r>
-              <a:rPr lang="ko-KR" altLang="en-US" sz="1600" dirty="0">
+              <a:rPr lang="ko-KR" altLang="en-US" sz="1400" dirty="0">
                 <a:latin typeface="D2Coding" panose="020B0609020101020101" pitchFamily="49" charset="-127"/>
                 <a:ea typeface="D2Coding" panose="020B0609020101020101" pitchFamily="49" charset="-127"/>
               </a:rPr>
               <a:t> </a:t>
             </a:r>
             <a:r>
-              <a:rPr lang="ko-KR" altLang="en-US" sz="1600" dirty="0" err="1">
+              <a:rPr lang="ko-KR" altLang="en-US" sz="1400" dirty="0" err="1">
                 <a:latin typeface="D2Coding" panose="020B0609020101020101" pitchFamily="49" charset="-127"/>
                 <a:ea typeface="D2Coding" panose="020B0609020101020101" pitchFamily="49" charset="-127"/>
               </a:rPr>
               <a:t>word</a:t>
             </a:r>
             <a:r>
-              <a:rPr lang="ko-KR" altLang="en-US" sz="1600" dirty="0">
+              <a:rPr lang="ko-KR" altLang="en-US" sz="1400" dirty="0">
                 <a:latin typeface="D2Coding" panose="020B0609020101020101" pitchFamily="49" charset="-127"/>
                 <a:ea typeface="D2Coding" panose="020B0609020101020101" pitchFamily="49" charset="-127"/>
               </a:rPr>
               <a:t> </a:t>
             </a:r>
             <a:r>
-              <a:rPr lang="ko-KR" altLang="en-US" sz="1600" dirty="0" err="1">
+              <a:rPr lang="ko-KR" altLang="en-US" sz="1400" dirty="0" err="1">
                 <a:latin typeface="D2Coding" panose="020B0609020101020101" pitchFamily="49" charset="-127"/>
                 <a:ea typeface="D2Coding" panose="020B0609020101020101" pitchFamily="49" charset="-127"/>
               </a:rPr>
               <a:t>embedding</a:t>
             </a:r>
             <a:r>
-              <a:rPr lang="ko-KR" altLang="en-US" sz="1600" dirty="0">
+              <a:rPr lang="ko-KR" altLang="en-US" sz="1400" dirty="0">
                 <a:latin typeface="D2Coding" panose="020B0609020101020101" pitchFamily="49" charset="-127"/>
                 <a:ea typeface="D2Coding" panose="020B0609020101020101" pitchFamily="49" charset="-127"/>
               </a:rPr>
               <a:t> (단어 </a:t>
             </a:r>
             <a:r>
-              <a:rPr lang="ko-KR" altLang="en-US" sz="1600" dirty="0" err="1">
+              <a:rPr lang="ko-KR" altLang="en-US" sz="1400" dirty="0" err="1">
                 <a:latin typeface="D2Coding" panose="020B0609020101020101" pitchFamily="49" charset="-127"/>
                 <a:ea typeface="D2Coding" panose="020B0609020101020101" pitchFamily="49" charset="-127"/>
               </a:rPr>
               <a:t>임베딩</a:t>
             </a:r>
             <a:r>
-              <a:rPr lang="ko-KR" altLang="en-US" sz="1600" dirty="0">
+              <a:rPr lang="ko-KR" altLang="en-US" sz="1400" dirty="0">
                 <a:latin typeface="D2Coding" panose="020B0609020101020101" pitchFamily="49" charset="-127"/>
                 <a:ea typeface="D2Coding" panose="020B0609020101020101" pitchFamily="49" charset="-127"/>
               </a:rPr>
@@ -15114,98 +15125,98 @@
               <a:buAutoNum type="arabicPeriod"/>
             </a:pPr>
             <a:r>
-              <a:rPr lang="ko-KR" altLang="en-US" sz="1600" dirty="0" err="1">
+              <a:rPr lang="ko-KR" altLang="en-US" sz="1400" dirty="0" err="1">
                 <a:latin typeface="D2Coding" panose="020B0609020101020101" pitchFamily="49" charset="-127"/>
                 <a:ea typeface="D2Coding" panose="020B0609020101020101" pitchFamily="49" charset="-127"/>
               </a:rPr>
               <a:t>Using</a:t>
             </a:r>
             <a:r>
-              <a:rPr lang="ko-KR" altLang="en-US" sz="1600" dirty="0">
+              <a:rPr lang="ko-KR" altLang="en-US" sz="1400" dirty="0">
                 <a:latin typeface="D2Coding" panose="020B0609020101020101" pitchFamily="49" charset="-127"/>
                 <a:ea typeface="D2Coding" panose="020B0609020101020101" pitchFamily="49" charset="-127"/>
               </a:rPr>
               <a:t> </a:t>
             </a:r>
             <a:r>
-              <a:rPr lang="ko-KR" altLang="en-US" sz="1600" dirty="0" err="1">
+              <a:rPr lang="ko-KR" altLang="en-US" sz="1400" dirty="0" err="1">
                 <a:latin typeface="D2Coding" panose="020B0609020101020101" pitchFamily="49" charset="-127"/>
                 <a:ea typeface="D2Coding" panose="020B0609020101020101" pitchFamily="49" charset="-127"/>
               </a:rPr>
               <a:t>the</a:t>
             </a:r>
             <a:r>
-              <a:rPr lang="ko-KR" altLang="en-US" sz="1600" dirty="0">
+              <a:rPr lang="ko-KR" altLang="en-US" sz="1400" dirty="0">
                 <a:latin typeface="D2Coding" panose="020B0609020101020101" pitchFamily="49" charset="-127"/>
                 <a:ea typeface="D2Coding" panose="020B0609020101020101" pitchFamily="49" charset="-127"/>
               </a:rPr>
               <a:t> </a:t>
             </a:r>
             <a:r>
-              <a:rPr lang="ko-KR" altLang="en-US" sz="1600" dirty="0" err="1">
+              <a:rPr lang="ko-KR" altLang="en-US" sz="1400" dirty="0" err="1">
                 <a:latin typeface="D2Coding" panose="020B0609020101020101" pitchFamily="49" charset="-127"/>
                 <a:ea typeface="D2Coding" panose="020B0609020101020101" pitchFamily="49" charset="-127"/>
               </a:rPr>
               <a:t>pretrained</a:t>
             </a:r>
             <a:r>
-              <a:rPr lang="ko-KR" altLang="en-US" sz="1600" dirty="0">
+              <a:rPr lang="ko-KR" altLang="en-US" sz="1400" dirty="0">
                 <a:latin typeface="D2Coding" panose="020B0609020101020101" pitchFamily="49" charset="-127"/>
                 <a:ea typeface="D2Coding" panose="020B0609020101020101" pitchFamily="49" charset="-127"/>
               </a:rPr>
               <a:t> </a:t>
             </a:r>
             <a:r>
-              <a:rPr lang="ko-KR" altLang="en-US" sz="1600" dirty="0" err="1">
+              <a:rPr lang="ko-KR" altLang="en-US" sz="1400" dirty="0" err="1">
                 <a:latin typeface="D2Coding" panose="020B0609020101020101" pitchFamily="49" charset="-127"/>
                 <a:ea typeface="D2Coding" panose="020B0609020101020101" pitchFamily="49" charset="-127"/>
               </a:rPr>
               <a:t>embedding</a:t>
             </a:r>
             <a:r>
-              <a:rPr lang="ko-KR" altLang="en-US" sz="1600" dirty="0">
+              <a:rPr lang="ko-KR" altLang="en-US" sz="1400" dirty="0">
                 <a:latin typeface="D2Coding" panose="020B0609020101020101" pitchFamily="49" charset="-127"/>
                 <a:ea typeface="D2Coding" panose="020B0609020101020101" pitchFamily="49" charset="-127"/>
               </a:rPr>
               <a:t> </a:t>
             </a:r>
             <a:r>
-              <a:rPr lang="ko-KR" altLang="en-US" sz="1600" dirty="0" err="1">
+              <a:rPr lang="ko-KR" altLang="en-US" sz="1400" dirty="0" err="1">
                 <a:latin typeface="D2Coding" panose="020B0609020101020101" pitchFamily="49" charset="-127"/>
                 <a:ea typeface="D2Coding" panose="020B0609020101020101" pitchFamily="49" charset="-127"/>
               </a:rPr>
               <a:t>for</a:t>
             </a:r>
             <a:r>
-              <a:rPr lang="ko-KR" altLang="en-US" sz="1600" dirty="0">
+              <a:rPr lang="ko-KR" altLang="en-US" sz="1400" dirty="0">
                 <a:latin typeface="D2Coding" panose="020B0609020101020101" pitchFamily="49" charset="-127"/>
                 <a:ea typeface="D2Coding" panose="020B0609020101020101" pitchFamily="49" charset="-127"/>
               </a:rPr>
               <a:t> </a:t>
             </a:r>
             <a:r>
-              <a:rPr lang="ko-KR" altLang="en-US" sz="1600" dirty="0" err="1">
+              <a:rPr lang="ko-KR" altLang="en-US" sz="1400" dirty="0" err="1">
                 <a:latin typeface="D2Coding" panose="020B0609020101020101" pitchFamily="49" charset="-127"/>
                 <a:ea typeface="D2Coding" panose="020B0609020101020101" pitchFamily="49" charset="-127"/>
               </a:rPr>
               <a:t>classification</a:t>
             </a:r>
             <a:r>
-              <a:rPr lang="ko-KR" altLang="en-US" sz="1600" dirty="0">
+              <a:rPr lang="ko-KR" altLang="en-US" sz="1400" dirty="0">
                 <a:latin typeface="D2Coding" panose="020B0609020101020101" pitchFamily="49" charset="-127"/>
                 <a:ea typeface="D2Coding" panose="020B0609020101020101" pitchFamily="49" charset="-127"/>
               </a:rPr>
               <a:t> (사전 학습된 </a:t>
             </a:r>
             <a:r>
-              <a:rPr lang="ko-KR" altLang="en-US" sz="1600" dirty="0" err="1">
+              <a:rPr lang="ko-KR" altLang="en-US" sz="1400" dirty="0" err="1">
                 <a:latin typeface="D2Coding" panose="020B0609020101020101" pitchFamily="49" charset="-127"/>
                 <a:ea typeface="D2Coding" panose="020B0609020101020101" pitchFamily="49" charset="-127"/>
               </a:rPr>
               <a:t>임베딩</a:t>
             </a:r>
             <a:r>
-              <a:rPr lang="ko-KR" altLang="en-US" sz="1600" dirty="0">
+              <a:rPr lang="ko-KR" altLang="en-US" sz="1400" dirty="0">
                 <a:latin typeface="D2Coding" panose="020B0609020101020101" pitchFamily="49" charset="-127"/>
                 <a:ea typeface="D2Coding" panose="020B0609020101020101" pitchFamily="49" charset="-127"/>
               </a:rPr>
@@ -15856,9 +15867,7 @@
           </a:prstGeom>
           <a:noFill/>
           <a:ln>
-            <a:solidFill>
-              <a:schemeClr val="tx1"/>
-            </a:solidFill>
+            <a:noFill/>
           </a:ln>
           <a:extLst>
             <a:ext uri="{909E8E84-426E-40DD-AFC4-6F175D3DCCD1}">
@@ -16186,7 +16195,7 @@
         </p:nvSpPr>
         <p:spPr>
           <a:xfrm>
-            <a:off x="619125" y="3543299"/>
+            <a:off x="619125" y="3314699"/>
             <a:ext cx="10277475" cy="390525"/>
           </a:xfrm>
           <a:prstGeom prst="rect">
@@ -16316,7 +16325,7 @@
         <p:spPr>
           <a:xfrm>
             <a:off x="861450" y="1400822"/>
-            <a:ext cx="10778099" cy="5009064"/>
+            <a:ext cx="10778099" cy="4416594"/>
           </a:xfrm>
           <a:prstGeom prst="rect">
             <a:avLst/>
@@ -16334,90 +16343,90 @@
               <a:buAutoNum type="arabicPeriod"/>
             </a:pPr>
             <a:r>
-              <a:rPr lang="ko-KR" altLang="en-US" dirty="0" err="1">
+              <a:rPr lang="ko-KR" altLang="en-US" sz="1600" dirty="0" err="1">
                 <a:latin typeface="D2Coding" panose="020B0609020101020101" pitchFamily="49" charset="-127"/>
                 <a:ea typeface="D2Coding" panose="020B0609020101020101" pitchFamily="49" charset="-127"/>
               </a:rPr>
               <a:t>A</a:t>
             </a:r>
             <a:r>
-              <a:rPr lang="ko-KR" altLang="en-US" dirty="0">
+              <a:rPr lang="ko-KR" altLang="en-US" sz="1600" dirty="0">
                 <a:latin typeface="D2Coding" panose="020B0609020101020101" pitchFamily="49" charset="-127"/>
                 <a:ea typeface="D2Coding" panose="020B0609020101020101" pitchFamily="49" charset="-127"/>
               </a:rPr>
               <a:t> </a:t>
             </a:r>
             <a:r>
-              <a:rPr lang="ko-KR" altLang="en-US" dirty="0" err="1">
+              <a:rPr lang="ko-KR" altLang="en-US" sz="1600" dirty="0" err="1">
                 <a:latin typeface="D2Coding" panose="020B0609020101020101" pitchFamily="49" charset="-127"/>
                 <a:ea typeface="D2Coding" panose="020B0609020101020101" pitchFamily="49" charset="-127"/>
               </a:rPr>
               <a:t>brief</a:t>
             </a:r>
             <a:r>
-              <a:rPr lang="ko-KR" altLang="en-US" dirty="0">
+              <a:rPr lang="ko-KR" altLang="en-US" sz="1600" dirty="0">
                 <a:latin typeface="D2Coding" panose="020B0609020101020101" pitchFamily="49" charset="-127"/>
                 <a:ea typeface="D2Coding" panose="020B0609020101020101" pitchFamily="49" charset="-127"/>
               </a:rPr>
               <a:t> </a:t>
             </a:r>
             <a:r>
-              <a:rPr lang="ko-KR" altLang="en-US" dirty="0" err="1">
+              <a:rPr lang="ko-KR" altLang="en-US" sz="1600" dirty="0" err="1">
                 <a:latin typeface="D2Coding" panose="020B0609020101020101" pitchFamily="49" charset="-127"/>
                 <a:ea typeface="D2Coding" panose="020B0609020101020101" pitchFamily="49" charset="-127"/>
               </a:rPr>
               <a:t>history</a:t>
             </a:r>
             <a:r>
-              <a:rPr lang="ko-KR" altLang="en-US" dirty="0">
+              <a:rPr lang="ko-KR" altLang="en-US" sz="1600" dirty="0">
                 <a:latin typeface="D2Coding" panose="020B0609020101020101" pitchFamily="49" charset="-127"/>
                 <a:ea typeface="D2Coding" panose="020B0609020101020101" pitchFamily="49" charset="-127"/>
               </a:rPr>
               <a:t> of </a:t>
             </a:r>
             <a:r>
-              <a:rPr lang="ko-KR" altLang="en-US" dirty="0" err="1">
+              <a:rPr lang="ko-KR" altLang="en-US" sz="1600" dirty="0" err="1">
                 <a:latin typeface="D2Coding" panose="020B0609020101020101" pitchFamily="49" charset="-127"/>
                 <a:ea typeface="D2Coding" panose="020B0609020101020101" pitchFamily="49" charset="-127"/>
               </a:rPr>
               <a:t>natural</a:t>
             </a:r>
             <a:r>
-              <a:rPr lang="ko-KR" altLang="en-US" dirty="0">
+              <a:rPr lang="ko-KR" altLang="en-US" sz="1600" dirty="0">
                 <a:latin typeface="D2Coding" panose="020B0609020101020101" pitchFamily="49" charset="-127"/>
                 <a:ea typeface="D2Coding" panose="020B0609020101020101" pitchFamily="49" charset="-127"/>
               </a:rPr>
               <a:t> </a:t>
             </a:r>
             <a:r>
-              <a:rPr lang="ko-KR" altLang="en-US" dirty="0" err="1">
+              <a:rPr lang="ko-KR" altLang="en-US" sz="1600" dirty="0" err="1">
                 <a:latin typeface="D2Coding" panose="020B0609020101020101" pitchFamily="49" charset="-127"/>
                 <a:ea typeface="D2Coding" panose="020B0609020101020101" pitchFamily="49" charset="-127"/>
               </a:rPr>
               <a:t>language</a:t>
             </a:r>
             <a:r>
-              <a:rPr lang="ko-KR" altLang="en-US" dirty="0">
+              <a:rPr lang="ko-KR" altLang="en-US" sz="1600" dirty="0">
                 <a:latin typeface="D2Coding" panose="020B0609020101020101" pitchFamily="49" charset="-127"/>
                 <a:ea typeface="D2Coding" panose="020B0609020101020101" pitchFamily="49" charset="-127"/>
               </a:rPr>
               <a:t> </a:t>
             </a:r>
             <a:r>
-              <a:rPr lang="ko-KR" altLang="en-US" dirty="0" err="1">
+              <a:rPr lang="ko-KR" altLang="en-US" sz="1600" dirty="0" err="1">
                 <a:latin typeface="D2Coding" panose="020B0609020101020101" pitchFamily="49" charset="-127"/>
                 <a:ea typeface="D2Coding" panose="020B0609020101020101" pitchFamily="49" charset="-127"/>
               </a:rPr>
               <a:t>processing</a:t>
             </a:r>
             <a:r>
-              <a:rPr lang="ko-KR" altLang="en-US" dirty="0">
+              <a:rPr lang="ko-KR" altLang="en-US" sz="1600" dirty="0">
                 <a:latin typeface="D2Coding" panose="020B0609020101020101" pitchFamily="49" charset="-127"/>
                 <a:ea typeface="D2Coding" panose="020B0609020101020101" pitchFamily="49" charset="-127"/>
               </a:rPr>
               <a:t> (자연어 처리의 개요/역사)</a:t>
             </a:r>
-            <a:endParaRPr lang="en-US" altLang="ko-KR" dirty="0">
+            <a:endParaRPr lang="en-US" altLang="ko-KR" sz="1600" dirty="0">
               <a:latin typeface="D2Coding" panose="020B0609020101020101" pitchFamily="49" charset="-127"/>
               <a:ea typeface="D2Coding" panose="020B0609020101020101" pitchFamily="49" charset="-127"/>
             </a:endParaRPr>
@@ -16427,7 +16436,7 @@
               <a:buFont typeface="+mj-lt"/>
               <a:buAutoNum type="arabicPeriod"/>
             </a:pPr>
-            <a:endParaRPr lang="ko-KR" altLang="en-US" sz="1050" dirty="0">
+            <a:endParaRPr lang="ko-KR" altLang="en-US" sz="1000" dirty="0">
               <a:latin typeface="D2Coding" panose="020B0609020101020101" pitchFamily="49" charset="-127"/>
               <a:ea typeface="D2Coding" panose="020B0609020101020101" pitchFamily="49" charset="-127"/>
             </a:endParaRPr>
@@ -16438,62 +16447,62 @@
               <a:buAutoNum type="arabicPeriod"/>
             </a:pPr>
             <a:r>
-              <a:rPr lang="ko-KR" altLang="en-US" dirty="0" err="1">
+              <a:rPr lang="ko-KR" altLang="en-US" sz="1600" dirty="0" err="1">
                 <a:latin typeface="D2Coding" panose="020B0609020101020101" pitchFamily="49" charset="-127"/>
                 <a:ea typeface="D2Coding" panose="020B0609020101020101" pitchFamily="49" charset="-127"/>
               </a:rPr>
               <a:t>Preparing</a:t>
             </a:r>
             <a:r>
-              <a:rPr lang="ko-KR" altLang="en-US" dirty="0">
+              <a:rPr lang="ko-KR" altLang="en-US" sz="1600" dirty="0">
                 <a:latin typeface="D2Coding" panose="020B0609020101020101" pitchFamily="49" charset="-127"/>
                 <a:ea typeface="D2Coding" panose="020B0609020101020101" pitchFamily="49" charset="-127"/>
               </a:rPr>
               <a:t> </a:t>
             </a:r>
             <a:r>
-              <a:rPr lang="ko-KR" altLang="en-US" dirty="0" err="1">
+              <a:rPr lang="ko-KR" altLang="en-US" sz="1600" dirty="0" err="1">
                 <a:latin typeface="D2Coding" panose="020B0609020101020101" pitchFamily="49" charset="-127"/>
                 <a:ea typeface="D2Coding" panose="020B0609020101020101" pitchFamily="49" charset="-127"/>
               </a:rPr>
               <a:t>text</a:t>
             </a:r>
             <a:r>
-              <a:rPr lang="ko-KR" altLang="en-US" dirty="0">
+              <a:rPr lang="ko-KR" altLang="en-US" sz="1600" dirty="0">
                 <a:latin typeface="D2Coding" panose="020B0609020101020101" pitchFamily="49" charset="-127"/>
                 <a:ea typeface="D2Coding" panose="020B0609020101020101" pitchFamily="49" charset="-127"/>
               </a:rPr>
               <a:t> </a:t>
             </a:r>
             <a:r>
-              <a:rPr lang="ko-KR" altLang="en-US" dirty="0" err="1">
+              <a:rPr lang="ko-KR" altLang="en-US" sz="1600" dirty="0" err="1">
                 <a:latin typeface="D2Coding" panose="020B0609020101020101" pitchFamily="49" charset="-127"/>
                 <a:ea typeface="D2Coding" panose="020B0609020101020101" pitchFamily="49" charset="-127"/>
               </a:rPr>
               <a:t>data</a:t>
             </a:r>
             <a:r>
-              <a:rPr lang="ko-KR" altLang="en-US" dirty="0">
+              <a:rPr lang="ko-KR" altLang="en-US" sz="1600" dirty="0">
                 <a:latin typeface="D2Coding" panose="020B0609020101020101" pitchFamily="49" charset="-127"/>
                 <a:ea typeface="D2Coding" panose="020B0609020101020101" pitchFamily="49" charset="-127"/>
               </a:rPr>
               <a:t> (텍스트 데이터 </a:t>
             </a:r>
             <a:r>
-              <a:rPr lang="ko-KR" altLang="en-US" dirty="0" err="1">
+              <a:rPr lang="ko-KR" altLang="en-US" sz="1600" dirty="0" err="1">
                 <a:latin typeface="D2Coding" panose="020B0609020101020101" pitchFamily="49" charset="-127"/>
                 <a:ea typeface="D2Coding" panose="020B0609020101020101" pitchFamily="49" charset="-127"/>
               </a:rPr>
               <a:t>전처리</a:t>
             </a:r>
             <a:r>
-              <a:rPr lang="ko-KR" altLang="en-US" dirty="0">
+              <a:rPr lang="ko-KR" altLang="en-US" sz="1600" dirty="0">
                 <a:latin typeface="D2Coding" panose="020B0609020101020101" pitchFamily="49" charset="-127"/>
                 <a:ea typeface="D2Coding" panose="020B0609020101020101" pitchFamily="49" charset="-127"/>
               </a:rPr>
               <a:t>)</a:t>
             </a:r>
-            <a:endParaRPr lang="en-US" altLang="ko-KR" dirty="0">
+            <a:endParaRPr lang="en-US" altLang="ko-KR" sz="1600" dirty="0">
               <a:latin typeface="D2Coding" panose="020B0609020101020101" pitchFamily="49" charset="-127"/>
               <a:ea typeface="D2Coding" panose="020B0609020101020101" pitchFamily="49" charset="-127"/>
             </a:endParaRPr>
@@ -16507,46 +16516,156 @@
               <a:buAutoNum type="arabicPeriod"/>
             </a:pPr>
             <a:r>
+              <a:rPr lang="ko-KR" altLang="en-US" sz="1400" dirty="0" err="1">
+                <a:latin typeface="D2Coding" panose="020B0609020101020101" pitchFamily="49" charset="-127"/>
+                <a:ea typeface="D2Coding" panose="020B0609020101020101" pitchFamily="49" charset="-127"/>
+              </a:rPr>
+              <a:t>Character</a:t>
+            </a:r>
+            <a:r>
+              <a:rPr lang="ko-KR" altLang="en-US" sz="1400" dirty="0">
+                <a:latin typeface="D2Coding" panose="020B0609020101020101" pitchFamily="49" charset="-127"/>
+                <a:ea typeface="D2Coding" panose="020B0609020101020101" pitchFamily="49" charset="-127"/>
+              </a:rPr>
+              <a:t> and </a:t>
+            </a:r>
+            <a:r>
+              <a:rPr lang="ko-KR" altLang="en-US" sz="1400" dirty="0" err="1">
+                <a:latin typeface="D2Coding" panose="020B0609020101020101" pitchFamily="49" charset="-127"/>
+                <a:ea typeface="D2Coding" panose="020B0609020101020101" pitchFamily="49" charset="-127"/>
+              </a:rPr>
+              <a:t>word</a:t>
+            </a:r>
+            <a:r>
+              <a:rPr lang="ko-KR" altLang="en-US" sz="1400" dirty="0">
+                <a:latin typeface="D2Coding" panose="020B0609020101020101" pitchFamily="49" charset="-127"/>
+                <a:ea typeface="D2Coding" panose="020B0609020101020101" pitchFamily="49" charset="-127"/>
+              </a:rPr>
+              <a:t> </a:t>
+            </a:r>
+            <a:r>
+              <a:rPr lang="ko-KR" altLang="en-US" sz="1400" dirty="0" err="1">
+                <a:latin typeface="D2Coding" panose="020B0609020101020101" pitchFamily="49" charset="-127"/>
+                <a:ea typeface="D2Coding" panose="020B0609020101020101" pitchFamily="49" charset="-127"/>
+              </a:rPr>
+              <a:t>tokenization</a:t>
+            </a:r>
+            <a:r>
+              <a:rPr lang="ko-KR" altLang="en-US" sz="1400" dirty="0">
+                <a:latin typeface="D2Coding" panose="020B0609020101020101" pitchFamily="49" charset="-127"/>
+                <a:ea typeface="D2Coding" panose="020B0609020101020101" pitchFamily="49" charset="-127"/>
+              </a:rPr>
+              <a:t> (문자 및 단어 단위 토큰화)</a:t>
+            </a:r>
+            <a:endParaRPr lang="en-US" altLang="ko-KR" sz="1400" dirty="0">
+              <a:latin typeface="D2Coding" panose="020B0609020101020101" pitchFamily="49" charset="-127"/>
+              <a:ea typeface="D2Coding" panose="020B0609020101020101" pitchFamily="49" charset="-127"/>
+            </a:endParaRPr>
+          </a:p>
+          <a:p>
+            <a:pPr marL="800100" lvl="1" indent="-342900">
+              <a:buFont typeface="+mj-lt"/>
+              <a:buAutoNum type="arabicPeriod"/>
+            </a:pPr>
+            <a:r>
+              <a:rPr lang="ko-KR" altLang="en-US" sz="1400" dirty="0" err="1">
+                <a:latin typeface="D2Coding" panose="020B0609020101020101" pitchFamily="49" charset="-127"/>
+                <a:ea typeface="D2Coding" panose="020B0609020101020101" pitchFamily="49" charset="-127"/>
+              </a:rPr>
+              <a:t>Subword</a:t>
+            </a:r>
+            <a:r>
+              <a:rPr lang="ko-KR" altLang="en-US" sz="1400" dirty="0">
+                <a:latin typeface="D2Coding" panose="020B0609020101020101" pitchFamily="49" charset="-127"/>
+                <a:ea typeface="D2Coding" panose="020B0609020101020101" pitchFamily="49" charset="-127"/>
+              </a:rPr>
+              <a:t> </a:t>
+            </a:r>
+            <a:r>
+              <a:rPr lang="ko-KR" altLang="en-US" sz="1400" dirty="0" err="1">
+                <a:latin typeface="D2Coding" panose="020B0609020101020101" pitchFamily="49" charset="-127"/>
+                <a:ea typeface="D2Coding" panose="020B0609020101020101" pitchFamily="49" charset="-127"/>
+              </a:rPr>
+              <a:t>tokenization</a:t>
+            </a:r>
+            <a:r>
+              <a:rPr lang="ko-KR" altLang="en-US" sz="1400" dirty="0">
+                <a:latin typeface="D2Coding" panose="020B0609020101020101" pitchFamily="49" charset="-127"/>
+                <a:ea typeface="D2Coding" panose="020B0609020101020101" pitchFamily="49" charset="-127"/>
+              </a:rPr>
+              <a:t> (</a:t>
+            </a:r>
+            <a:r>
+              <a:rPr lang="ko-KR" altLang="en-US" sz="1400" dirty="0" err="1">
+                <a:latin typeface="D2Coding" panose="020B0609020101020101" pitchFamily="49" charset="-127"/>
+                <a:ea typeface="D2Coding" panose="020B0609020101020101" pitchFamily="49" charset="-127"/>
+              </a:rPr>
+              <a:t>서브워드</a:t>
+            </a:r>
+            <a:r>
+              <a:rPr lang="ko-KR" altLang="en-US" sz="1400" dirty="0">
+                <a:latin typeface="D2Coding" panose="020B0609020101020101" pitchFamily="49" charset="-127"/>
+                <a:ea typeface="D2Coding" panose="020B0609020101020101" pitchFamily="49" charset="-127"/>
+              </a:rPr>
+              <a:t> 단위 토큰화)</a:t>
+            </a:r>
+          </a:p>
+          <a:p>
+            <a:pPr marL="342900" indent="-342900">
+              <a:buFont typeface="+mj-lt"/>
+              <a:buAutoNum type="arabicPeriod"/>
+            </a:pPr>
+            <a:endParaRPr lang="ko-KR" altLang="en-US" sz="1000" dirty="0">
+              <a:latin typeface="D2Coding" panose="020B0609020101020101" pitchFamily="49" charset="-127"/>
+              <a:ea typeface="D2Coding" panose="020B0609020101020101" pitchFamily="49" charset="-127"/>
+            </a:endParaRPr>
+          </a:p>
+          <a:p>
+            <a:pPr marL="342900" indent="-342900">
+              <a:buFont typeface="+mj-lt"/>
+              <a:buAutoNum type="arabicPeriod"/>
+            </a:pPr>
+            <a:r>
               <a:rPr lang="ko-KR" altLang="en-US" sz="1600" dirty="0" err="1">
                 <a:latin typeface="D2Coding" panose="020B0609020101020101" pitchFamily="49" charset="-127"/>
                 <a:ea typeface="D2Coding" panose="020B0609020101020101" pitchFamily="49" charset="-127"/>
               </a:rPr>
-              <a:t>Character</a:t>
+              <a:t>Sets</a:t>
             </a:r>
             <a:r>
               <a:rPr lang="ko-KR" altLang="en-US" sz="1600" dirty="0">
                 <a:latin typeface="D2Coding" panose="020B0609020101020101" pitchFamily="49" charset="-127"/>
                 <a:ea typeface="D2Coding" panose="020B0609020101020101" pitchFamily="49" charset="-127"/>
               </a:rPr>
-              <a:t> and </a:t>
+              <a:t> </a:t>
             </a:r>
             <a:r>
               <a:rPr lang="ko-KR" altLang="en-US" sz="1600" dirty="0" err="1">
                 <a:latin typeface="D2Coding" panose="020B0609020101020101" pitchFamily="49" charset="-127"/>
                 <a:ea typeface="D2Coding" panose="020B0609020101020101" pitchFamily="49" charset="-127"/>
               </a:rPr>
-              <a:t>word</a:t>
+              <a:t>vs</a:t>
             </a:r>
             <a:r>
               <a:rPr lang="ko-KR" altLang="en-US" sz="1600" dirty="0">
                 <a:latin typeface="D2Coding" panose="020B0609020101020101" pitchFamily="49" charset="-127"/>
                 <a:ea typeface="D2Coding" panose="020B0609020101020101" pitchFamily="49" charset="-127"/>
               </a:rPr>
-              <a:t> </a:t>
+              <a:t>. </a:t>
             </a:r>
             <a:r>
               <a:rPr lang="ko-KR" altLang="en-US" sz="1600" dirty="0" err="1">
                 <a:latin typeface="D2Coding" panose="020B0609020101020101" pitchFamily="49" charset="-127"/>
                 <a:ea typeface="D2Coding" panose="020B0609020101020101" pitchFamily="49" charset="-127"/>
               </a:rPr>
-              <a:t>tokenization</a:t>
+              <a:t>sequences</a:t>
             </a:r>
             <a:r>
               <a:rPr lang="ko-KR" altLang="en-US" sz="1600" dirty="0">
                 <a:latin typeface="D2Coding" panose="020B0609020101020101" pitchFamily="49" charset="-127"/>
                 <a:ea typeface="D2Coding" panose="020B0609020101020101" pitchFamily="49" charset="-127"/>
               </a:rPr>
-              <a:t> (문자 및 단어 단위 토큰화)</a:t>
+              <a:t> (텍스트 표현 관점의 비교)</a:t>
             </a:r>
             <a:endParaRPr lang="en-US" altLang="ko-KR" sz="1600" dirty="0">
               <a:latin typeface="D2Coding" panose="020B0609020101020101" pitchFamily="49" charset="-127"/>
@@ -16559,46 +16678,88 @@
               <a:buAutoNum type="arabicPeriod"/>
             </a:pPr>
             <a:r>
-              <a:rPr lang="ko-KR" altLang="en-US" sz="1600" dirty="0" err="1">
-                <a:latin typeface="D2Coding" panose="020B0609020101020101" pitchFamily="49" charset="-127"/>
-                <a:ea typeface="D2Coding" panose="020B0609020101020101" pitchFamily="49" charset="-127"/>
-              </a:rPr>
-              <a:t>Subword</a:t>
-            </a:r>
-            <a:r>
-              <a:rPr lang="ko-KR" altLang="en-US" sz="1600" dirty="0">
+              <a:rPr lang="ko-KR" altLang="en-US" sz="1400" dirty="0" err="1">
+                <a:latin typeface="D2Coding" panose="020B0609020101020101" pitchFamily="49" charset="-127"/>
+                <a:ea typeface="D2Coding" panose="020B0609020101020101" pitchFamily="49" charset="-127"/>
+              </a:rPr>
+              <a:t>Loading</a:t>
+            </a:r>
+            <a:r>
+              <a:rPr lang="ko-KR" altLang="en-US" sz="1400" dirty="0">
                 <a:latin typeface="D2Coding" panose="020B0609020101020101" pitchFamily="49" charset="-127"/>
                 <a:ea typeface="D2Coding" panose="020B0609020101020101" pitchFamily="49" charset="-127"/>
               </a:rPr>
               <a:t> </a:t>
             </a:r>
             <a:r>
-              <a:rPr lang="ko-KR" altLang="en-US" sz="1600" dirty="0" err="1">
-                <a:latin typeface="D2Coding" panose="020B0609020101020101" pitchFamily="49" charset="-127"/>
-                <a:ea typeface="D2Coding" panose="020B0609020101020101" pitchFamily="49" charset="-127"/>
-              </a:rPr>
-              <a:t>tokenization</a:t>
-            </a:r>
-            <a:r>
-              <a:rPr lang="ko-KR" altLang="en-US" sz="1600" dirty="0">
+              <a:rPr lang="ko-KR" altLang="en-US" sz="1400" dirty="0" err="1">
+                <a:latin typeface="D2Coding" panose="020B0609020101020101" pitchFamily="49" charset="-127"/>
+                <a:ea typeface="D2Coding" panose="020B0609020101020101" pitchFamily="49" charset="-127"/>
+              </a:rPr>
+              <a:t>the</a:t>
+            </a:r>
+            <a:r>
+              <a:rPr lang="ko-KR" altLang="en-US" sz="1400" dirty="0">
+                <a:latin typeface="D2Coding" panose="020B0609020101020101" pitchFamily="49" charset="-127"/>
+                <a:ea typeface="D2Coding" panose="020B0609020101020101" pitchFamily="49" charset="-127"/>
+              </a:rPr>
+              <a:t> </a:t>
+            </a:r>
+            <a:r>
+              <a:rPr lang="ko-KR" altLang="en-US" sz="1400" dirty="0" err="1">
+                <a:latin typeface="D2Coding" panose="020B0609020101020101" pitchFamily="49" charset="-127"/>
+                <a:ea typeface="D2Coding" panose="020B0609020101020101" pitchFamily="49" charset="-127"/>
+              </a:rPr>
+              <a:t>IMDb</a:t>
+            </a:r>
+            <a:r>
+              <a:rPr lang="ko-KR" altLang="en-US" sz="1400" dirty="0">
+                <a:latin typeface="D2Coding" panose="020B0609020101020101" pitchFamily="49" charset="-127"/>
+                <a:ea typeface="D2Coding" panose="020B0609020101020101" pitchFamily="49" charset="-127"/>
+              </a:rPr>
+              <a:t> </a:t>
+            </a:r>
+            <a:r>
+              <a:rPr lang="ko-KR" altLang="en-US" sz="1400" dirty="0" err="1">
+                <a:latin typeface="D2Coding" panose="020B0609020101020101" pitchFamily="49" charset="-127"/>
+                <a:ea typeface="D2Coding" panose="020B0609020101020101" pitchFamily="49" charset="-127"/>
+              </a:rPr>
+              <a:t>classification</a:t>
+            </a:r>
+            <a:r>
+              <a:rPr lang="ko-KR" altLang="en-US" sz="1400" dirty="0">
+                <a:latin typeface="D2Coding" panose="020B0609020101020101" pitchFamily="49" charset="-127"/>
+                <a:ea typeface="D2Coding" panose="020B0609020101020101" pitchFamily="49" charset="-127"/>
+              </a:rPr>
+              <a:t> </a:t>
+            </a:r>
+            <a:r>
+              <a:rPr lang="ko-KR" altLang="en-US" sz="1400" dirty="0" err="1">
+                <a:latin typeface="D2Coding" panose="020B0609020101020101" pitchFamily="49" charset="-127"/>
+                <a:ea typeface="D2Coding" panose="020B0609020101020101" pitchFamily="49" charset="-127"/>
+              </a:rPr>
+              <a:t>dataset</a:t>
+            </a:r>
+            <a:r>
+              <a:rPr lang="ko-KR" altLang="en-US" sz="1400" dirty="0">
                 <a:latin typeface="D2Coding" panose="020B0609020101020101" pitchFamily="49" charset="-127"/>
                 <a:ea typeface="D2Coding" panose="020B0609020101020101" pitchFamily="49" charset="-127"/>
               </a:rPr>
               <a:t> (</a:t>
             </a:r>
             <a:r>
-              <a:rPr lang="ko-KR" altLang="en-US" sz="1600" dirty="0" err="1">
-                <a:latin typeface="D2Coding" panose="020B0609020101020101" pitchFamily="49" charset="-127"/>
-                <a:ea typeface="D2Coding" panose="020B0609020101020101" pitchFamily="49" charset="-127"/>
-              </a:rPr>
-              <a:t>서브워드</a:t>
-            </a:r>
-            <a:r>
-              <a:rPr lang="ko-KR" altLang="en-US" sz="1600" dirty="0">
-                <a:latin typeface="D2Coding" panose="020B0609020101020101" pitchFamily="49" charset="-127"/>
-                <a:ea typeface="D2Coding" panose="020B0609020101020101" pitchFamily="49" charset="-127"/>
-              </a:rPr>
-              <a:t> 단위 토큰화)</a:t>
+              <a:rPr lang="ko-KR" altLang="en-US" sz="1400" dirty="0" err="1">
+                <a:latin typeface="D2Coding" panose="020B0609020101020101" pitchFamily="49" charset="-127"/>
+                <a:ea typeface="D2Coding" panose="020B0609020101020101" pitchFamily="49" charset="-127"/>
+              </a:rPr>
+              <a:t>IMDb</a:t>
+            </a:r>
+            <a:r>
+              <a:rPr lang="ko-KR" altLang="en-US" sz="1400" dirty="0">
+                <a:latin typeface="D2Coding" panose="020B0609020101020101" pitchFamily="49" charset="-127"/>
+                <a:ea typeface="D2Coding" panose="020B0609020101020101" pitchFamily="49" charset="-127"/>
+              </a:rPr>
+              <a:t> 영화 리뷰 분류 데이터셋 로딩)</a:t>
             </a:r>
           </a:p>
           <a:p>
@@ -16606,7 +16767,7 @@
               <a:buFont typeface="+mj-lt"/>
               <a:buAutoNum type="arabicPeriod"/>
             </a:pPr>
-            <a:endParaRPr lang="ko-KR" altLang="en-US" sz="1050" dirty="0">
+            <a:endParaRPr lang="ko-KR" altLang="en-US" sz="1000" dirty="0">
               <a:latin typeface="D2Coding" panose="020B0609020101020101" pitchFamily="49" charset="-127"/>
               <a:ea typeface="D2Coding" panose="020B0609020101020101" pitchFamily="49" charset="-127"/>
             </a:endParaRPr>
@@ -16617,186 +16778,34 @@
               <a:buAutoNum type="arabicPeriod"/>
             </a:pPr>
             <a:r>
-              <a:rPr lang="ko-KR" altLang="en-US" dirty="0" err="1">
-                <a:latin typeface="D2Coding" panose="020B0609020101020101" pitchFamily="49" charset="-127"/>
-                <a:ea typeface="D2Coding" panose="020B0609020101020101" pitchFamily="49" charset="-127"/>
-              </a:rPr>
-              <a:t>Sets</a:t>
-            </a:r>
-            <a:r>
-              <a:rPr lang="ko-KR" altLang="en-US" dirty="0">
+              <a:rPr lang="ko-KR" altLang="en-US" sz="1600" dirty="0" err="1">
+                <a:latin typeface="D2Coding" panose="020B0609020101020101" pitchFamily="49" charset="-127"/>
+                <a:ea typeface="D2Coding" panose="020B0609020101020101" pitchFamily="49" charset="-127"/>
+              </a:rPr>
+              <a:t>Set</a:t>
+            </a:r>
+            <a:r>
+              <a:rPr lang="ko-KR" altLang="en-US" sz="1600" dirty="0">
                 <a:latin typeface="D2Coding" panose="020B0609020101020101" pitchFamily="49" charset="-127"/>
                 <a:ea typeface="D2Coding" panose="020B0609020101020101" pitchFamily="49" charset="-127"/>
               </a:rPr>
               <a:t> </a:t>
             </a:r>
             <a:r>
-              <a:rPr lang="ko-KR" altLang="en-US" dirty="0" err="1">
-                <a:latin typeface="D2Coding" panose="020B0609020101020101" pitchFamily="49" charset="-127"/>
-                <a:ea typeface="D2Coding" panose="020B0609020101020101" pitchFamily="49" charset="-127"/>
-              </a:rPr>
-              <a:t>vs</a:t>
-            </a:r>
-            <a:r>
-              <a:rPr lang="ko-KR" altLang="en-US" dirty="0">
-                <a:latin typeface="D2Coding" panose="020B0609020101020101" pitchFamily="49" charset="-127"/>
-                <a:ea typeface="D2Coding" panose="020B0609020101020101" pitchFamily="49" charset="-127"/>
-              </a:rPr>
-              <a:t>. </a:t>
-            </a:r>
-            <a:r>
-              <a:rPr lang="ko-KR" altLang="en-US" dirty="0" err="1">
-                <a:latin typeface="D2Coding" panose="020B0609020101020101" pitchFamily="49" charset="-127"/>
-                <a:ea typeface="D2Coding" panose="020B0609020101020101" pitchFamily="49" charset="-127"/>
-              </a:rPr>
-              <a:t>sequences</a:t>
-            </a:r>
-            <a:r>
-              <a:rPr lang="ko-KR" altLang="en-US" dirty="0">
-                <a:latin typeface="D2Coding" panose="020B0609020101020101" pitchFamily="49" charset="-127"/>
-                <a:ea typeface="D2Coding" panose="020B0609020101020101" pitchFamily="49" charset="-127"/>
-              </a:rPr>
-              <a:t> (텍스트 표현 관점의 비교)</a:t>
-            </a:r>
-            <a:endParaRPr lang="en-US" altLang="ko-KR" dirty="0">
-              <a:latin typeface="D2Coding" panose="020B0609020101020101" pitchFamily="49" charset="-127"/>
-              <a:ea typeface="D2Coding" panose="020B0609020101020101" pitchFamily="49" charset="-127"/>
-            </a:endParaRPr>
-          </a:p>
-          <a:p>
-            <a:pPr marL="800100" lvl="1" indent="-342900">
-              <a:buFont typeface="+mj-lt"/>
-              <a:buAutoNum type="arabicPeriod"/>
-            </a:pPr>
-            <a:r>
               <a:rPr lang="ko-KR" altLang="en-US" sz="1600" dirty="0" err="1">
                 <a:latin typeface="D2Coding" panose="020B0609020101020101" pitchFamily="49" charset="-127"/>
                 <a:ea typeface="D2Coding" panose="020B0609020101020101" pitchFamily="49" charset="-127"/>
               </a:rPr>
-              <a:t>Loading</a:t>
+              <a:t>models</a:t>
             </a:r>
             <a:r>
               <a:rPr lang="ko-KR" altLang="en-US" sz="1600" dirty="0">
                 <a:latin typeface="D2Coding" panose="020B0609020101020101" pitchFamily="49" charset="-127"/>
                 <a:ea typeface="D2Coding" panose="020B0609020101020101" pitchFamily="49" charset="-127"/>
               </a:rPr>
-              <a:t> </a:t>
-            </a:r>
-            <a:r>
-              <a:rPr lang="ko-KR" altLang="en-US" sz="1600" dirty="0" err="1">
-                <a:latin typeface="D2Coding" panose="020B0609020101020101" pitchFamily="49" charset="-127"/>
-                <a:ea typeface="D2Coding" panose="020B0609020101020101" pitchFamily="49" charset="-127"/>
-              </a:rPr>
-              <a:t>the</a:t>
-            </a:r>
-            <a:r>
-              <a:rPr lang="ko-KR" altLang="en-US" sz="1600" dirty="0">
-                <a:latin typeface="D2Coding" panose="020B0609020101020101" pitchFamily="49" charset="-127"/>
-                <a:ea typeface="D2Coding" panose="020B0609020101020101" pitchFamily="49" charset="-127"/>
-              </a:rPr>
-              <a:t> </a:t>
-            </a:r>
-            <a:r>
-              <a:rPr lang="ko-KR" altLang="en-US" sz="1600" dirty="0" err="1">
-                <a:latin typeface="D2Coding" panose="020B0609020101020101" pitchFamily="49" charset="-127"/>
-                <a:ea typeface="D2Coding" panose="020B0609020101020101" pitchFamily="49" charset="-127"/>
-              </a:rPr>
-              <a:t>IMDb</a:t>
-            </a:r>
-            <a:r>
-              <a:rPr lang="ko-KR" altLang="en-US" sz="1600" dirty="0">
-                <a:latin typeface="D2Coding" panose="020B0609020101020101" pitchFamily="49" charset="-127"/>
-                <a:ea typeface="D2Coding" panose="020B0609020101020101" pitchFamily="49" charset="-127"/>
-              </a:rPr>
-              <a:t> </a:t>
-            </a:r>
-            <a:r>
-              <a:rPr lang="ko-KR" altLang="en-US" sz="1600" dirty="0" err="1">
-                <a:latin typeface="D2Coding" panose="020B0609020101020101" pitchFamily="49" charset="-127"/>
-                <a:ea typeface="D2Coding" panose="020B0609020101020101" pitchFamily="49" charset="-127"/>
-              </a:rPr>
-              <a:t>classification</a:t>
-            </a:r>
-            <a:r>
-              <a:rPr lang="ko-KR" altLang="en-US" sz="1600" dirty="0">
-                <a:latin typeface="D2Coding" panose="020B0609020101020101" pitchFamily="49" charset="-127"/>
-                <a:ea typeface="D2Coding" panose="020B0609020101020101" pitchFamily="49" charset="-127"/>
-              </a:rPr>
-              <a:t> </a:t>
-            </a:r>
-            <a:r>
-              <a:rPr lang="ko-KR" altLang="en-US" sz="1600" dirty="0" err="1">
-                <a:latin typeface="D2Coding" panose="020B0609020101020101" pitchFamily="49" charset="-127"/>
-                <a:ea typeface="D2Coding" panose="020B0609020101020101" pitchFamily="49" charset="-127"/>
-              </a:rPr>
-              <a:t>dataset</a:t>
-            </a:r>
-            <a:r>
-              <a:rPr lang="ko-KR" altLang="en-US" sz="1600" dirty="0">
-                <a:latin typeface="D2Coding" panose="020B0609020101020101" pitchFamily="49" charset="-127"/>
-                <a:ea typeface="D2Coding" panose="020B0609020101020101" pitchFamily="49" charset="-127"/>
-              </a:rPr>
-              <a:t> (</a:t>
-            </a:r>
-            <a:r>
-              <a:rPr lang="ko-KR" altLang="en-US" sz="1600" dirty="0" err="1">
-                <a:latin typeface="D2Coding" panose="020B0609020101020101" pitchFamily="49" charset="-127"/>
-                <a:ea typeface="D2Coding" panose="020B0609020101020101" pitchFamily="49" charset="-127"/>
-              </a:rPr>
-              <a:t>IMDb</a:t>
-            </a:r>
-            <a:r>
-              <a:rPr lang="ko-KR" altLang="en-US" sz="1600" dirty="0">
-                <a:latin typeface="D2Coding" panose="020B0609020101020101" pitchFamily="49" charset="-127"/>
-                <a:ea typeface="D2Coding" panose="020B0609020101020101" pitchFamily="49" charset="-127"/>
-              </a:rPr>
-              <a:t> 영화 리뷰 분류 데이터셋 로딩)</a:t>
-            </a:r>
-          </a:p>
-          <a:p>
-            <a:pPr marL="342900" indent="-342900">
-              <a:buFont typeface="+mj-lt"/>
-              <a:buAutoNum type="arabicPeriod"/>
-            </a:pPr>
-            <a:endParaRPr lang="ko-KR" altLang="en-US" sz="1050" dirty="0">
-              <a:latin typeface="D2Coding" panose="020B0609020101020101" pitchFamily="49" charset="-127"/>
-              <a:ea typeface="D2Coding" panose="020B0609020101020101" pitchFamily="49" charset="-127"/>
-            </a:endParaRPr>
-          </a:p>
-          <a:p>
-            <a:pPr marL="342900" indent="-342900">
-              <a:buFont typeface="+mj-lt"/>
-              <a:buAutoNum type="arabicPeriod"/>
-            </a:pPr>
-            <a:r>
-              <a:rPr lang="ko-KR" altLang="en-US" dirty="0" err="1">
-                <a:latin typeface="D2Coding" panose="020B0609020101020101" pitchFamily="49" charset="-127"/>
-                <a:ea typeface="D2Coding" panose="020B0609020101020101" pitchFamily="49" charset="-127"/>
-              </a:rPr>
-              <a:t>Set</a:t>
-            </a:r>
-            <a:r>
-              <a:rPr lang="ko-KR" altLang="en-US" dirty="0">
-                <a:latin typeface="D2Coding" panose="020B0609020101020101" pitchFamily="49" charset="-127"/>
-                <a:ea typeface="D2Coding" panose="020B0609020101020101" pitchFamily="49" charset="-127"/>
-              </a:rPr>
-              <a:t> </a:t>
-            </a:r>
-            <a:r>
-              <a:rPr lang="ko-KR" altLang="en-US" dirty="0" err="1">
-                <a:latin typeface="D2Coding" panose="020B0609020101020101" pitchFamily="49" charset="-127"/>
-                <a:ea typeface="D2Coding" panose="020B0609020101020101" pitchFamily="49" charset="-127"/>
-              </a:rPr>
-              <a:t>models</a:t>
-            </a:r>
-            <a:r>
-              <a:rPr lang="ko-KR" altLang="en-US" dirty="0">
-                <a:latin typeface="D2Coding" panose="020B0609020101020101" pitchFamily="49" charset="-127"/>
-                <a:ea typeface="D2Coding" panose="020B0609020101020101" pitchFamily="49" charset="-127"/>
-              </a:rPr>
               <a:t> (순서를 고려하지 않는 집합 기반 모델)</a:t>
             </a:r>
-            <a:endParaRPr lang="en-US" altLang="ko-KR" dirty="0">
+            <a:endParaRPr lang="en-US" altLang="ko-KR" sz="1600" dirty="0">
               <a:latin typeface="D2Coding" panose="020B0609020101020101" pitchFamily="49" charset="-127"/>
               <a:ea typeface="D2Coding" panose="020B0609020101020101" pitchFamily="49" charset="-127"/>
             </a:endParaRPr>
@@ -16810,104 +16819,104 @@
               <a:buAutoNum type="arabicPeriod"/>
             </a:pPr>
             <a:r>
-              <a:rPr lang="ko-KR" altLang="en-US" sz="1600" dirty="0" err="1">
+              <a:rPr lang="ko-KR" altLang="en-US" sz="1400" dirty="0" err="1">
                 <a:latin typeface="D2Coding" panose="020B0609020101020101" pitchFamily="49" charset="-127"/>
                 <a:ea typeface="D2Coding" panose="020B0609020101020101" pitchFamily="49" charset="-127"/>
               </a:rPr>
               <a:t>Training</a:t>
             </a:r>
             <a:r>
-              <a:rPr lang="ko-KR" altLang="en-US" sz="1600" dirty="0">
+              <a:rPr lang="ko-KR" altLang="en-US" sz="1400" dirty="0">
                 <a:latin typeface="D2Coding" panose="020B0609020101020101" pitchFamily="49" charset="-127"/>
                 <a:ea typeface="D2Coding" panose="020B0609020101020101" pitchFamily="49" charset="-127"/>
               </a:rPr>
               <a:t> </a:t>
             </a:r>
             <a:r>
-              <a:rPr lang="ko-KR" altLang="en-US" sz="1600" dirty="0" err="1">
+              <a:rPr lang="ko-KR" altLang="en-US" sz="1400" dirty="0" err="1">
                 <a:latin typeface="D2Coding" panose="020B0609020101020101" pitchFamily="49" charset="-127"/>
                 <a:ea typeface="D2Coding" panose="020B0609020101020101" pitchFamily="49" charset="-127"/>
               </a:rPr>
               <a:t>a</a:t>
             </a:r>
             <a:r>
-              <a:rPr lang="ko-KR" altLang="en-US" sz="1600" dirty="0">
+              <a:rPr lang="ko-KR" altLang="en-US" sz="1400" dirty="0">
                 <a:latin typeface="D2Coding" panose="020B0609020101020101" pitchFamily="49" charset="-127"/>
                 <a:ea typeface="D2Coding" panose="020B0609020101020101" pitchFamily="49" charset="-127"/>
               </a:rPr>
               <a:t> </a:t>
             </a:r>
             <a:r>
-              <a:rPr lang="ko-KR" altLang="en-US" sz="1600" dirty="0" err="1">
+              <a:rPr lang="ko-KR" altLang="en-US" sz="1400" dirty="0" err="1">
                 <a:latin typeface="D2Coding" panose="020B0609020101020101" pitchFamily="49" charset="-127"/>
                 <a:ea typeface="D2Coding" panose="020B0609020101020101" pitchFamily="49" charset="-127"/>
               </a:rPr>
               <a:t>bag</a:t>
             </a:r>
             <a:r>
-              <a:rPr lang="ko-KR" altLang="en-US" sz="1600" dirty="0">
+              <a:rPr lang="ko-KR" altLang="en-US" sz="1400" dirty="0">
                 <a:latin typeface="D2Coding" panose="020B0609020101020101" pitchFamily="49" charset="-127"/>
                 <a:ea typeface="D2Coding" panose="020B0609020101020101" pitchFamily="49" charset="-127"/>
               </a:rPr>
               <a:t>-of-</a:t>
             </a:r>
             <a:r>
-              <a:rPr lang="ko-KR" altLang="en-US" sz="1600" dirty="0" err="1">
+              <a:rPr lang="ko-KR" altLang="en-US" sz="1400" dirty="0" err="1">
                 <a:latin typeface="D2Coding" panose="020B0609020101020101" pitchFamily="49" charset="-127"/>
                 <a:ea typeface="D2Coding" panose="020B0609020101020101" pitchFamily="49" charset="-127"/>
               </a:rPr>
               <a:t>words</a:t>
             </a:r>
             <a:r>
-              <a:rPr lang="ko-KR" altLang="en-US" sz="1600" dirty="0">
+              <a:rPr lang="ko-KR" altLang="en-US" sz="1400" dirty="0">
                 <a:latin typeface="D2Coding" panose="020B0609020101020101" pitchFamily="49" charset="-127"/>
                 <a:ea typeface="D2Coding" panose="020B0609020101020101" pitchFamily="49" charset="-127"/>
               </a:rPr>
               <a:t> </a:t>
             </a:r>
             <a:r>
-              <a:rPr lang="ko-KR" altLang="en-US" sz="1600" dirty="0" err="1">
+              <a:rPr lang="ko-KR" altLang="en-US" sz="1400" dirty="0" err="1">
                 <a:latin typeface="D2Coding" panose="020B0609020101020101" pitchFamily="49" charset="-127"/>
                 <a:ea typeface="D2Coding" panose="020B0609020101020101" pitchFamily="49" charset="-127"/>
               </a:rPr>
               <a:t>model</a:t>
             </a:r>
             <a:r>
-              <a:rPr lang="ko-KR" altLang="en-US" sz="1600" dirty="0">
+              <a:rPr lang="ko-KR" altLang="en-US" sz="1400" dirty="0">
                 <a:latin typeface="D2Coding" panose="020B0609020101020101" pitchFamily="49" charset="-127"/>
                 <a:ea typeface="D2Coding" panose="020B0609020101020101" pitchFamily="49" charset="-127"/>
               </a:rPr>
               <a:t> (</a:t>
             </a:r>
             <a:r>
-              <a:rPr lang="ko-KR" altLang="en-US" sz="1600" dirty="0" err="1">
+              <a:rPr lang="ko-KR" altLang="en-US" sz="1400" dirty="0" err="1">
                 <a:latin typeface="D2Coding" panose="020B0609020101020101" pitchFamily="49" charset="-127"/>
                 <a:ea typeface="D2Coding" panose="020B0609020101020101" pitchFamily="49" charset="-127"/>
               </a:rPr>
               <a:t>Bag</a:t>
             </a:r>
             <a:r>
-              <a:rPr lang="ko-KR" altLang="en-US" sz="1600" dirty="0">
+              <a:rPr lang="ko-KR" altLang="en-US" sz="1400" dirty="0">
                 <a:latin typeface="D2Coding" panose="020B0609020101020101" pitchFamily="49" charset="-127"/>
                 <a:ea typeface="D2Coding" panose="020B0609020101020101" pitchFamily="49" charset="-127"/>
               </a:rPr>
               <a:t>-of-</a:t>
             </a:r>
             <a:r>
-              <a:rPr lang="ko-KR" altLang="en-US" sz="1600" dirty="0" err="1">
+              <a:rPr lang="ko-KR" altLang="en-US" sz="1400" dirty="0" err="1">
                 <a:latin typeface="D2Coding" panose="020B0609020101020101" pitchFamily="49" charset="-127"/>
                 <a:ea typeface="D2Coding" panose="020B0609020101020101" pitchFamily="49" charset="-127"/>
               </a:rPr>
               <a:t>Words</a:t>
             </a:r>
             <a:r>
-              <a:rPr lang="ko-KR" altLang="en-US" sz="1600" dirty="0">
+              <a:rPr lang="ko-KR" altLang="en-US" sz="1400" dirty="0">
                 <a:latin typeface="D2Coding" panose="020B0609020101020101" pitchFamily="49" charset="-127"/>
                 <a:ea typeface="D2Coding" panose="020B0609020101020101" pitchFamily="49" charset="-127"/>
               </a:rPr>
               <a:t> 모델 학습)</a:t>
             </a:r>
-            <a:endParaRPr lang="en-US" altLang="ko-KR" sz="1600" dirty="0">
+            <a:endParaRPr lang="en-US" altLang="ko-KR" sz="1400" dirty="0">
               <a:latin typeface="D2Coding" panose="020B0609020101020101" pitchFamily="49" charset="-127"/>
               <a:ea typeface="D2Coding" panose="020B0609020101020101" pitchFamily="49" charset="-127"/>
             </a:endParaRPr>
@@ -16918,70 +16927,70 @@
               <a:buAutoNum type="arabicPeriod"/>
             </a:pPr>
             <a:r>
-              <a:rPr lang="ko-KR" altLang="en-US" sz="1600" dirty="0" err="1">
+              <a:rPr lang="ko-KR" altLang="en-US" sz="1400" dirty="0" err="1">
                 <a:latin typeface="D2Coding" panose="020B0609020101020101" pitchFamily="49" charset="-127"/>
                 <a:ea typeface="D2Coding" panose="020B0609020101020101" pitchFamily="49" charset="-127"/>
               </a:rPr>
               <a:t>Training</a:t>
             </a:r>
             <a:r>
-              <a:rPr lang="ko-KR" altLang="en-US" sz="1600" dirty="0">
+              <a:rPr lang="ko-KR" altLang="en-US" sz="1400" dirty="0">
                 <a:latin typeface="D2Coding" panose="020B0609020101020101" pitchFamily="49" charset="-127"/>
                 <a:ea typeface="D2Coding" panose="020B0609020101020101" pitchFamily="49" charset="-127"/>
               </a:rPr>
               <a:t> </a:t>
             </a:r>
             <a:r>
-              <a:rPr lang="ko-KR" altLang="en-US" sz="1600" dirty="0" err="1">
+              <a:rPr lang="ko-KR" altLang="en-US" sz="1400" dirty="0" err="1">
                 <a:latin typeface="D2Coding" panose="020B0609020101020101" pitchFamily="49" charset="-127"/>
                 <a:ea typeface="D2Coding" panose="020B0609020101020101" pitchFamily="49" charset="-127"/>
               </a:rPr>
               <a:t>a</a:t>
             </a:r>
             <a:r>
-              <a:rPr lang="ko-KR" altLang="en-US" sz="1600" dirty="0">
+              <a:rPr lang="ko-KR" altLang="en-US" sz="1400" dirty="0">
                 <a:latin typeface="D2Coding" panose="020B0609020101020101" pitchFamily="49" charset="-127"/>
                 <a:ea typeface="D2Coding" panose="020B0609020101020101" pitchFamily="49" charset="-127"/>
               </a:rPr>
               <a:t> </a:t>
             </a:r>
             <a:r>
-              <a:rPr lang="ko-KR" altLang="en-US" sz="1600" dirty="0" err="1">
+              <a:rPr lang="ko-KR" altLang="en-US" sz="1400" dirty="0" err="1">
                 <a:latin typeface="D2Coding" panose="020B0609020101020101" pitchFamily="49" charset="-127"/>
                 <a:ea typeface="D2Coding" panose="020B0609020101020101" pitchFamily="49" charset="-127"/>
               </a:rPr>
               <a:t>bigram</a:t>
             </a:r>
             <a:r>
-              <a:rPr lang="ko-KR" altLang="en-US" sz="1600" dirty="0">
+              <a:rPr lang="ko-KR" altLang="en-US" sz="1400" dirty="0">
                 <a:latin typeface="D2Coding" panose="020B0609020101020101" pitchFamily="49" charset="-127"/>
                 <a:ea typeface="D2Coding" panose="020B0609020101020101" pitchFamily="49" charset="-127"/>
               </a:rPr>
               <a:t> </a:t>
             </a:r>
             <a:r>
-              <a:rPr lang="ko-KR" altLang="en-US" sz="1600" dirty="0" err="1">
+              <a:rPr lang="ko-KR" altLang="en-US" sz="1400" dirty="0" err="1">
                 <a:latin typeface="D2Coding" panose="020B0609020101020101" pitchFamily="49" charset="-127"/>
                 <a:ea typeface="D2Coding" panose="020B0609020101020101" pitchFamily="49" charset="-127"/>
               </a:rPr>
               <a:t>model</a:t>
             </a:r>
             <a:r>
-              <a:rPr lang="ko-KR" altLang="en-US" sz="1600" dirty="0">
+              <a:rPr lang="ko-KR" altLang="en-US" sz="1400" dirty="0">
                 <a:latin typeface="D2Coding" panose="020B0609020101020101" pitchFamily="49" charset="-127"/>
                 <a:ea typeface="D2Coding" panose="020B0609020101020101" pitchFamily="49" charset="-127"/>
               </a:rPr>
               <a:t> (</a:t>
             </a:r>
             <a:r>
-              <a:rPr lang="ko-KR" altLang="en-US" sz="1600" dirty="0" err="1">
+              <a:rPr lang="ko-KR" altLang="en-US" sz="1400" dirty="0" err="1">
                 <a:latin typeface="D2Coding" panose="020B0609020101020101" pitchFamily="49" charset="-127"/>
                 <a:ea typeface="D2Coding" panose="020B0609020101020101" pitchFamily="49" charset="-127"/>
               </a:rPr>
               <a:t>Bigram</a:t>
             </a:r>
             <a:r>
-              <a:rPr lang="ko-KR" altLang="en-US" sz="1600" dirty="0">
+              <a:rPr lang="ko-KR" altLang="en-US" sz="1400" dirty="0">
                 <a:latin typeface="D2Coding" panose="020B0609020101020101" pitchFamily="49" charset="-127"/>
                 <a:ea typeface="D2Coding" panose="020B0609020101020101" pitchFamily="49" charset="-127"/>
               </a:rPr>
@@ -16993,7 +17002,7 @@
               <a:buFont typeface="+mj-lt"/>
               <a:buAutoNum type="arabicPeriod"/>
             </a:pPr>
-            <a:endParaRPr lang="ko-KR" altLang="en-US" sz="1050" dirty="0">
+            <a:endParaRPr lang="ko-KR" altLang="en-US" sz="1000" dirty="0">
               <a:latin typeface="D2Coding" panose="020B0609020101020101" pitchFamily="49" charset="-127"/>
               <a:ea typeface="D2Coding" panose="020B0609020101020101" pitchFamily="49" charset="-127"/>
             </a:endParaRPr>
@@ -17004,28 +17013,28 @@
               <a:buAutoNum type="arabicPeriod"/>
             </a:pPr>
             <a:r>
-              <a:rPr lang="ko-KR" altLang="en-US" dirty="0" err="1">
+              <a:rPr lang="ko-KR" altLang="en-US" sz="1600" dirty="0" err="1">
                 <a:latin typeface="D2Coding" panose="020B0609020101020101" pitchFamily="49" charset="-127"/>
                 <a:ea typeface="D2Coding" panose="020B0609020101020101" pitchFamily="49" charset="-127"/>
               </a:rPr>
               <a:t>Sequence</a:t>
             </a:r>
             <a:r>
-              <a:rPr lang="ko-KR" altLang="en-US" dirty="0">
+              <a:rPr lang="ko-KR" altLang="en-US" sz="1600" dirty="0">
                 <a:latin typeface="D2Coding" panose="020B0609020101020101" pitchFamily="49" charset="-127"/>
                 <a:ea typeface="D2Coding" panose="020B0609020101020101" pitchFamily="49" charset="-127"/>
               </a:rPr>
               <a:t> </a:t>
             </a:r>
             <a:r>
-              <a:rPr lang="ko-KR" altLang="en-US" dirty="0" err="1">
+              <a:rPr lang="ko-KR" altLang="en-US" sz="1600" dirty="0" err="1">
                 <a:latin typeface="D2Coding" panose="020B0609020101020101" pitchFamily="49" charset="-127"/>
                 <a:ea typeface="D2Coding" panose="020B0609020101020101" pitchFamily="49" charset="-127"/>
               </a:rPr>
               <a:t>models</a:t>
             </a:r>
             <a:r>
-              <a:rPr lang="ko-KR" altLang="en-US" dirty="0">
+              <a:rPr lang="ko-KR" altLang="en-US" sz="1600" dirty="0">
                 <a:latin typeface="D2Coding" panose="020B0609020101020101" pitchFamily="49" charset="-127"/>
                 <a:ea typeface="D2Coding" panose="020B0609020101020101" pitchFamily="49" charset="-127"/>
               </a:rPr>
@@ -17041,56 +17050,56 @@
               <a:buAutoNum type="arabicPeriod"/>
             </a:pPr>
             <a:r>
-              <a:rPr lang="ko-KR" altLang="en-US" sz="1600" dirty="0" err="1">
+              <a:rPr lang="ko-KR" altLang="en-US" sz="1400" dirty="0" err="1">
                 <a:latin typeface="D2Coding" panose="020B0609020101020101" pitchFamily="49" charset="-127"/>
                 <a:ea typeface="D2Coding" panose="020B0609020101020101" pitchFamily="49" charset="-127"/>
               </a:rPr>
               <a:t>Training</a:t>
             </a:r>
             <a:r>
-              <a:rPr lang="ko-KR" altLang="en-US" sz="1600" dirty="0">
+              <a:rPr lang="ko-KR" altLang="en-US" sz="1400" dirty="0">
                 <a:latin typeface="D2Coding" panose="020B0609020101020101" pitchFamily="49" charset="-127"/>
                 <a:ea typeface="D2Coding" panose="020B0609020101020101" pitchFamily="49" charset="-127"/>
               </a:rPr>
               <a:t> </a:t>
             </a:r>
             <a:r>
-              <a:rPr lang="ko-KR" altLang="en-US" sz="1600" dirty="0" err="1">
+              <a:rPr lang="ko-KR" altLang="en-US" sz="1400" dirty="0" err="1">
                 <a:latin typeface="D2Coding" panose="020B0609020101020101" pitchFamily="49" charset="-127"/>
                 <a:ea typeface="D2Coding" panose="020B0609020101020101" pitchFamily="49" charset="-127"/>
               </a:rPr>
               <a:t>a</a:t>
             </a:r>
             <a:r>
-              <a:rPr lang="ko-KR" altLang="en-US" sz="1600" dirty="0">
+              <a:rPr lang="ko-KR" altLang="en-US" sz="1400" dirty="0">
                 <a:latin typeface="D2Coding" panose="020B0609020101020101" pitchFamily="49" charset="-127"/>
                 <a:ea typeface="D2Coding" panose="020B0609020101020101" pitchFamily="49" charset="-127"/>
               </a:rPr>
               <a:t> </a:t>
             </a:r>
             <a:r>
-              <a:rPr lang="ko-KR" altLang="en-US" sz="1600" dirty="0" err="1">
+              <a:rPr lang="ko-KR" altLang="en-US" sz="1400" dirty="0" err="1">
                 <a:latin typeface="D2Coding" panose="020B0609020101020101" pitchFamily="49" charset="-127"/>
                 <a:ea typeface="D2Coding" panose="020B0609020101020101" pitchFamily="49" charset="-127"/>
               </a:rPr>
               <a:t>recurrent</a:t>
             </a:r>
             <a:r>
-              <a:rPr lang="ko-KR" altLang="en-US" sz="1600" dirty="0">
+              <a:rPr lang="ko-KR" altLang="en-US" sz="1400" dirty="0">
                 <a:latin typeface="D2Coding" panose="020B0609020101020101" pitchFamily="49" charset="-127"/>
                 <a:ea typeface="D2Coding" panose="020B0609020101020101" pitchFamily="49" charset="-127"/>
               </a:rPr>
               <a:t> </a:t>
             </a:r>
             <a:r>
-              <a:rPr lang="ko-KR" altLang="en-US" sz="1600" dirty="0" err="1">
+              <a:rPr lang="ko-KR" altLang="en-US" sz="1400" dirty="0" err="1">
                 <a:latin typeface="D2Coding" panose="020B0609020101020101" pitchFamily="49" charset="-127"/>
                 <a:ea typeface="D2Coding" panose="020B0609020101020101" pitchFamily="49" charset="-127"/>
               </a:rPr>
               <a:t>model</a:t>
             </a:r>
             <a:r>
-              <a:rPr lang="ko-KR" altLang="en-US" sz="1600" dirty="0">
+              <a:rPr lang="ko-KR" altLang="en-US" sz="1400" dirty="0">
                 <a:latin typeface="D2Coding" panose="020B0609020101020101" pitchFamily="49" charset="-127"/>
                 <a:ea typeface="D2Coding" panose="020B0609020101020101" pitchFamily="49" charset="-127"/>
               </a:rPr>
@@ -17103,56 +17112,56 @@
               <a:buAutoNum type="arabicPeriod"/>
             </a:pPr>
             <a:r>
-              <a:rPr lang="ko-KR" altLang="en-US" sz="1600" dirty="0" err="1">
+              <a:rPr lang="ko-KR" altLang="en-US" sz="1400" dirty="0" err="1">
                 <a:latin typeface="D2Coding" panose="020B0609020101020101" pitchFamily="49" charset="-127"/>
                 <a:ea typeface="D2Coding" panose="020B0609020101020101" pitchFamily="49" charset="-127"/>
               </a:rPr>
               <a:t>Understanding</a:t>
             </a:r>
             <a:r>
-              <a:rPr lang="ko-KR" altLang="en-US" sz="1600" dirty="0">
+              <a:rPr lang="ko-KR" altLang="en-US" sz="1400" dirty="0">
                 <a:latin typeface="D2Coding" panose="020B0609020101020101" pitchFamily="49" charset="-127"/>
                 <a:ea typeface="D2Coding" panose="020B0609020101020101" pitchFamily="49" charset="-127"/>
               </a:rPr>
               <a:t> </a:t>
             </a:r>
             <a:r>
-              <a:rPr lang="ko-KR" altLang="en-US" sz="1600" dirty="0" err="1">
+              <a:rPr lang="ko-KR" altLang="en-US" sz="1400" dirty="0" err="1">
                 <a:latin typeface="D2Coding" panose="020B0609020101020101" pitchFamily="49" charset="-127"/>
                 <a:ea typeface="D2Coding" panose="020B0609020101020101" pitchFamily="49" charset="-127"/>
               </a:rPr>
               <a:t>word</a:t>
             </a:r>
             <a:r>
-              <a:rPr lang="ko-KR" altLang="en-US" sz="1600" dirty="0">
+              <a:rPr lang="ko-KR" altLang="en-US" sz="1400" dirty="0">
                 <a:latin typeface="D2Coding" panose="020B0609020101020101" pitchFamily="49" charset="-127"/>
                 <a:ea typeface="D2Coding" panose="020B0609020101020101" pitchFamily="49" charset="-127"/>
               </a:rPr>
               <a:t> </a:t>
             </a:r>
             <a:r>
-              <a:rPr lang="ko-KR" altLang="en-US" sz="1600" dirty="0" err="1">
+              <a:rPr lang="ko-KR" altLang="en-US" sz="1400" dirty="0" err="1">
                 <a:latin typeface="D2Coding" panose="020B0609020101020101" pitchFamily="49" charset="-127"/>
                 <a:ea typeface="D2Coding" panose="020B0609020101020101" pitchFamily="49" charset="-127"/>
               </a:rPr>
               <a:t>embeddings</a:t>
             </a:r>
             <a:r>
-              <a:rPr lang="ko-KR" altLang="en-US" sz="1600" dirty="0">
+              <a:rPr lang="ko-KR" altLang="en-US" sz="1400" dirty="0">
                 <a:latin typeface="D2Coding" panose="020B0609020101020101" pitchFamily="49" charset="-127"/>
                 <a:ea typeface="D2Coding" panose="020B0609020101020101" pitchFamily="49" charset="-127"/>
               </a:rPr>
               <a:t> (단어 </a:t>
             </a:r>
             <a:r>
-              <a:rPr lang="ko-KR" altLang="en-US" sz="1600" dirty="0" err="1">
+              <a:rPr lang="ko-KR" altLang="en-US" sz="1400" dirty="0" err="1">
                 <a:latin typeface="D2Coding" panose="020B0609020101020101" pitchFamily="49" charset="-127"/>
                 <a:ea typeface="D2Coding" panose="020B0609020101020101" pitchFamily="49" charset="-127"/>
               </a:rPr>
               <a:t>임베딩의</a:t>
             </a:r>
             <a:r>
-              <a:rPr lang="ko-KR" altLang="en-US" sz="1600" dirty="0">
+              <a:rPr lang="ko-KR" altLang="en-US" sz="1400" dirty="0">
                 <a:latin typeface="D2Coding" panose="020B0609020101020101" pitchFamily="49" charset="-127"/>
                 <a:ea typeface="D2Coding" panose="020B0609020101020101" pitchFamily="49" charset="-127"/>
               </a:rPr>
@@ -17165,70 +17174,70 @@
               <a:buAutoNum type="arabicPeriod"/>
             </a:pPr>
             <a:r>
-              <a:rPr lang="ko-KR" altLang="en-US" sz="1600" dirty="0" err="1">
+              <a:rPr lang="ko-KR" altLang="en-US" sz="1400" dirty="0" err="1">
                 <a:latin typeface="D2Coding" panose="020B0609020101020101" pitchFamily="49" charset="-127"/>
                 <a:ea typeface="D2Coding" panose="020B0609020101020101" pitchFamily="49" charset="-127"/>
               </a:rPr>
               <a:t>Using</a:t>
             </a:r>
             <a:r>
-              <a:rPr lang="ko-KR" altLang="en-US" sz="1600" dirty="0">
+              <a:rPr lang="ko-KR" altLang="en-US" sz="1400" dirty="0">
                 <a:latin typeface="D2Coding" panose="020B0609020101020101" pitchFamily="49" charset="-127"/>
                 <a:ea typeface="D2Coding" panose="020B0609020101020101" pitchFamily="49" charset="-127"/>
               </a:rPr>
               <a:t> </a:t>
             </a:r>
             <a:r>
-              <a:rPr lang="ko-KR" altLang="en-US" sz="1600" dirty="0" err="1">
+              <a:rPr lang="ko-KR" altLang="en-US" sz="1400" dirty="0" err="1">
                 <a:latin typeface="D2Coding" panose="020B0609020101020101" pitchFamily="49" charset="-127"/>
                 <a:ea typeface="D2Coding" panose="020B0609020101020101" pitchFamily="49" charset="-127"/>
               </a:rPr>
               <a:t>a</a:t>
             </a:r>
             <a:r>
-              <a:rPr lang="ko-KR" altLang="en-US" sz="1600" dirty="0">
+              <a:rPr lang="ko-KR" altLang="en-US" sz="1400" dirty="0">
                 <a:latin typeface="D2Coding" panose="020B0609020101020101" pitchFamily="49" charset="-127"/>
                 <a:ea typeface="D2Coding" panose="020B0609020101020101" pitchFamily="49" charset="-127"/>
               </a:rPr>
               <a:t> </a:t>
             </a:r>
             <a:r>
-              <a:rPr lang="ko-KR" altLang="en-US" sz="1600" dirty="0" err="1">
+              <a:rPr lang="ko-KR" altLang="en-US" sz="1400" dirty="0" err="1">
                 <a:latin typeface="D2Coding" panose="020B0609020101020101" pitchFamily="49" charset="-127"/>
                 <a:ea typeface="D2Coding" panose="020B0609020101020101" pitchFamily="49" charset="-127"/>
               </a:rPr>
               <a:t>word</a:t>
             </a:r>
             <a:r>
-              <a:rPr lang="ko-KR" altLang="en-US" sz="1600" dirty="0">
+              <a:rPr lang="ko-KR" altLang="en-US" sz="1400" dirty="0">
                 <a:latin typeface="D2Coding" panose="020B0609020101020101" pitchFamily="49" charset="-127"/>
                 <a:ea typeface="D2Coding" panose="020B0609020101020101" pitchFamily="49" charset="-127"/>
               </a:rPr>
               <a:t> </a:t>
             </a:r>
             <a:r>
-              <a:rPr lang="ko-KR" altLang="en-US" sz="1600" dirty="0" err="1">
+              <a:rPr lang="ko-KR" altLang="en-US" sz="1400" dirty="0" err="1">
                 <a:latin typeface="D2Coding" panose="020B0609020101020101" pitchFamily="49" charset="-127"/>
                 <a:ea typeface="D2Coding" panose="020B0609020101020101" pitchFamily="49" charset="-127"/>
               </a:rPr>
               <a:t>embedding</a:t>
             </a:r>
             <a:r>
-              <a:rPr lang="ko-KR" altLang="en-US" sz="1600" dirty="0">
+              <a:rPr lang="ko-KR" altLang="en-US" sz="1400" dirty="0">
                 <a:latin typeface="D2Coding" panose="020B0609020101020101" pitchFamily="49" charset="-127"/>
                 <a:ea typeface="D2Coding" panose="020B0609020101020101" pitchFamily="49" charset="-127"/>
               </a:rPr>
               <a:t> (단어 </a:t>
             </a:r>
             <a:r>
-              <a:rPr lang="ko-KR" altLang="en-US" sz="1600" dirty="0" err="1">
+              <a:rPr lang="ko-KR" altLang="en-US" sz="1400" dirty="0" err="1">
                 <a:latin typeface="D2Coding" panose="020B0609020101020101" pitchFamily="49" charset="-127"/>
                 <a:ea typeface="D2Coding" panose="020B0609020101020101" pitchFamily="49" charset="-127"/>
               </a:rPr>
               <a:t>임베딩</a:t>
             </a:r>
             <a:r>
-              <a:rPr lang="ko-KR" altLang="en-US" sz="1600" dirty="0">
+              <a:rPr lang="ko-KR" altLang="en-US" sz="1400" dirty="0">
                 <a:latin typeface="D2Coding" panose="020B0609020101020101" pitchFamily="49" charset="-127"/>
                 <a:ea typeface="D2Coding" panose="020B0609020101020101" pitchFamily="49" charset="-127"/>
               </a:rPr>
@@ -17241,70 +17250,70 @@
               <a:buAutoNum type="arabicPeriod"/>
             </a:pPr>
             <a:r>
-              <a:rPr lang="ko-KR" altLang="en-US" sz="1600" dirty="0" err="1">
+              <a:rPr lang="ko-KR" altLang="en-US" sz="1400" dirty="0" err="1">
                 <a:latin typeface="D2Coding" panose="020B0609020101020101" pitchFamily="49" charset="-127"/>
                 <a:ea typeface="D2Coding" panose="020B0609020101020101" pitchFamily="49" charset="-127"/>
               </a:rPr>
               <a:t>Pretraining</a:t>
             </a:r>
             <a:r>
-              <a:rPr lang="ko-KR" altLang="en-US" sz="1600" dirty="0">
+              <a:rPr lang="ko-KR" altLang="en-US" sz="1400" dirty="0">
                 <a:latin typeface="D2Coding" panose="020B0609020101020101" pitchFamily="49" charset="-127"/>
                 <a:ea typeface="D2Coding" panose="020B0609020101020101" pitchFamily="49" charset="-127"/>
               </a:rPr>
               <a:t> </a:t>
             </a:r>
             <a:r>
-              <a:rPr lang="ko-KR" altLang="en-US" sz="1600" dirty="0" err="1">
+              <a:rPr lang="ko-KR" altLang="en-US" sz="1400" dirty="0" err="1">
                 <a:latin typeface="D2Coding" panose="020B0609020101020101" pitchFamily="49" charset="-127"/>
                 <a:ea typeface="D2Coding" panose="020B0609020101020101" pitchFamily="49" charset="-127"/>
               </a:rPr>
               <a:t>a</a:t>
             </a:r>
             <a:r>
-              <a:rPr lang="ko-KR" altLang="en-US" sz="1600" dirty="0">
+              <a:rPr lang="ko-KR" altLang="en-US" sz="1400" dirty="0">
                 <a:latin typeface="D2Coding" panose="020B0609020101020101" pitchFamily="49" charset="-127"/>
                 <a:ea typeface="D2Coding" panose="020B0609020101020101" pitchFamily="49" charset="-127"/>
               </a:rPr>
               <a:t> </a:t>
             </a:r>
             <a:r>
-              <a:rPr lang="ko-KR" altLang="en-US" sz="1600" dirty="0" err="1">
+              <a:rPr lang="ko-KR" altLang="en-US" sz="1400" dirty="0" err="1">
                 <a:latin typeface="D2Coding" panose="020B0609020101020101" pitchFamily="49" charset="-127"/>
                 <a:ea typeface="D2Coding" panose="020B0609020101020101" pitchFamily="49" charset="-127"/>
               </a:rPr>
               <a:t>word</a:t>
             </a:r>
             <a:r>
-              <a:rPr lang="ko-KR" altLang="en-US" sz="1600" dirty="0">
+              <a:rPr lang="ko-KR" altLang="en-US" sz="1400" dirty="0">
                 <a:latin typeface="D2Coding" panose="020B0609020101020101" pitchFamily="49" charset="-127"/>
                 <a:ea typeface="D2Coding" panose="020B0609020101020101" pitchFamily="49" charset="-127"/>
               </a:rPr>
               <a:t> </a:t>
             </a:r>
             <a:r>
-              <a:rPr lang="ko-KR" altLang="en-US" sz="1600" dirty="0" err="1">
+              <a:rPr lang="ko-KR" altLang="en-US" sz="1400" dirty="0" err="1">
                 <a:latin typeface="D2Coding" panose="020B0609020101020101" pitchFamily="49" charset="-127"/>
                 <a:ea typeface="D2Coding" panose="020B0609020101020101" pitchFamily="49" charset="-127"/>
               </a:rPr>
               <a:t>embedding</a:t>
             </a:r>
             <a:r>
-              <a:rPr lang="ko-KR" altLang="en-US" sz="1600" dirty="0">
+              <a:rPr lang="ko-KR" altLang="en-US" sz="1400" dirty="0">
                 <a:latin typeface="D2Coding" panose="020B0609020101020101" pitchFamily="49" charset="-127"/>
                 <a:ea typeface="D2Coding" panose="020B0609020101020101" pitchFamily="49" charset="-127"/>
               </a:rPr>
               <a:t> (단어 </a:t>
             </a:r>
             <a:r>
-              <a:rPr lang="ko-KR" altLang="en-US" sz="1600" dirty="0" err="1">
+              <a:rPr lang="ko-KR" altLang="en-US" sz="1400" dirty="0" err="1">
                 <a:latin typeface="D2Coding" panose="020B0609020101020101" pitchFamily="49" charset="-127"/>
                 <a:ea typeface="D2Coding" panose="020B0609020101020101" pitchFamily="49" charset="-127"/>
               </a:rPr>
               <a:t>임베딩</a:t>
             </a:r>
             <a:r>
-              <a:rPr lang="ko-KR" altLang="en-US" sz="1600" dirty="0">
+              <a:rPr lang="ko-KR" altLang="en-US" sz="1400" dirty="0">
                 <a:latin typeface="D2Coding" panose="020B0609020101020101" pitchFamily="49" charset="-127"/>
                 <a:ea typeface="D2Coding" panose="020B0609020101020101" pitchFamily="49" charset="-127"/>
               </a:rPr>
@@ -17317,98 +17326,98 @@
               <a:buAutoNum type="arabicPeriod"/>
             </a:pPr>
             <a:r>
-              <a:rPr lang="ko-KR" altLang="en-US" sz="1600" dirty="0" err="1">
+              <a:rPr lang="ko-KR" altLang="en-US" sz="1400" dirty="0" err="1">
                 <a:latin typeface="D2Coding" panose="020B0609020101020101" pitchFamily="49" charset="-127"/>
                 <a:ea typeface="D2Coding" panose="020B0609020101020101" pitchFamily="49" charset="-127"/>
               </a:rPr>
               <a:t>Using</a:t>
             </a:r>
             <a:r>
-              <a:rPr lang="ko-KR" altLang="en-US" sz="1600" dirty="0">
+              <a:rPr lang="ko-KR" altLang="en-US" sz="1400" dirty="0">
                 <a:latin typeface="D2Coding" panose="020B0609020101020101" pitchFamily="49" charset="-127"/>
                 <a:ea typeface="D2Coding" panose="020B0609020101020101" pitchFamily="49" charset="-127"/>
               </a:rPr>
               <a:t> </a:t>
             </a:r>
             <a:r>
-              <a:rPr lang="ko-KR" altLang="en-US" sz="1600" dirty="0" err="1">
+              <a:rPr lang="ko-KR" altLang="en-US" sz="1400" dirty="0" err="1">
                 <a:latin typeface="D2Coding" panose="020B0609020101020101" pitchFamily="49" charset="-127"/>
                 <a:ea typeface="D2Coding" panose="020B0609020101020101" pitchFamily="49" charset="-127"/>
               </a:rPr>
               <a:t>the</a:t>
             </a:r>
             <a:r>
-              <a:rPr lang="ko-KR" altLang="en-US" sz="1600" dirty="0">
+              <a:rPr lang="ko-KR" altLang="en-US" sz="1400" dirty="0">
                 <a:latin typeface="D2Coding" panose="020B0609020101020101" pitchFamily="49" charset="-127"/>
                 <a:ea typeface="D2Coding" panose="020B0609020101020101" pitchFamily="49" charset="-127"/>
               </a:rPr>
               <a:t> </a:t>
             </a:r>
             <a:r>
-              <a:rPr lang="ko-KR" altLang="en-US" sz="1600" dirty="0" err="1">
+              <a:rPr lang="ko-KR" altLang="en-US" sz="1400" dirty="0" err="1">
                 <a:latin typeface="D2Coding" panose="020B0609020101020101" pitchFamily="49" charset="-127"/>
                 <a:ea typeface="D2Coding" panose="020B0609020101020101" pitchFamily="49" charset="-127"/>
               </a:rPr>
               <a:t>pretrained</a:t>
             </a:r>
             <a:r>
-              <a:rPr lang="ko-KR" altLang="en-US" sz="1600" dirty="0">
+              <a:rPr lang="ko-KR" altLang="en-US" sz="1400" dirty="0">
                 <a:latin typeface="D2Coding" panose="020B0609020101020101" pitchFamily="49" charset="-127"/>
                 <a:ea typeface="D2Coding" panose="020B0609020101020101" pitchFamily="49" charset="-127"/>
               </a:rPr>
               <a:t> </a:t>
             </a:r>
             <a:r>
-              <a:rPr lang="ko-KR" altLang="en-US" sz="1600" dirty="0" err="1">
+              <a:rPr lang="ko-KR" altLang="en-US" sz="1400" dirty="0" err="1">
                 <a:latin typeface="D2Coding" panose="020B0609020101020101" pitchFamily="49" charset="-127"/>
                 <a:ea typeface="D2Coding" panose="020B0609020101020101" pitchFamily="49" charset="-127"/>
               </a:rPr>
               <a:t>embedding</a:t>
             </a:r>
             <a:r>
-              <a:rPr lang="ko-KR" altLang="en-US" sz="1600" dirty="0">
+              <a:rPr lang="ko-KR" altLang="en-US" sz="1400" dirty="0">
                 <a:latin typeface="D2Coding" panose="020B0609020101020101" pitchFamily="49" charset="-127"/>
                 <a:ea typeface="D2Coding" panose="020B0609020101020101" pitchFamily="49" charset="-127"/>
               </a:rPr>
               <a:t> </a:t>
             </a:r>
             <a:r>
-              <a:rPr lang="ko-KR" altLang="en-US" sz="1600" dirty="0" err="1">
+              <a:rPr lang="ko-KR" altLang="en-US" sz="1400" dirty="0" err="1">
                 <a:latin typeface="D2Coding" panose="020B0609020101020101" pitchFamily="49" charset="-127"/>
                 <a:ea typeface="D2Coding" panose="020B0609020101020101" pitchFamily="49" charset="-127"/>
               </a:rPr>
               <a:t>for</a:t>
             </a:r>
             <a:r>
-              <a:rPr lang="ko-KR" altLang="en-US" sz="1600" dirty="0">
+              <a:rPr lang="ko-KR" altLang="en-US" sz="1400" dirty="0">
                 <a:latin typeface="D2Coding" panose="020B0609020101020101" pitchFamily="49" charset="-127"/>
                 <a:ea typeface="D2Coding" panose="020B0609020101020101" pitchFamily="49" charset="-127"/>
               </a:rPr>
               <a:t> </a:t>
             </a:r>
             <a:r>
-              <a:rPr lang="ko-KR" altLang="en-US" sz="1600" dirty="0" err="1">
+              <a:rPr lang="ko-KR" altLang="en-US" sz="1400" dirty="0" err="1">
                 <a:latin typeface="D2Coding" panose="020B0609020101020101" pitchFamily="49" charset="-127"/>
                 <a:ea typeface="D2Coding" panose="020B0609020101020101" pitchFamily="49" charset="-127"/>
               </a:rPr>
               <a:t>classification</a:t>
             </a:r>
             <a:r>
-              <a:rPr lang="ko-KR" altLang="en-US" sz="1600" dirty="0">
+              <a:rPr lang="ko-KR" altLang="en-US" sz="1400" dirty="0">
                 <a:latin typeface="D2Coding" panose="020B0609020101020101" pitchFamily="49" charset="-127"/>
                 <a:ea typeface="D2Coding" panose="020B0609020101020101" pitchFamily="49" charset="-127"/>
               </a:rPr>
               <a:t> (사전 학습된 </a:t>
             </a:r>
             <a:r>
-              <a:rPr lang="ko-KR" altLang="en-US" sz="1600" dirty="0" err="1">
+              <a:rPr lang="ko-KR" altLang="en-US" sz="1400" dirty="0" err="1">
                 <a:latin typeface="D2Coding" panose="020B0609020101020101" pitchFamily="49" charset="-127"/>
                 <a:ea typeface="D2Coding" panose="020B0609020101020101" pitchFamily="49" charset="-127"/>
               </a:rPr>
               <a:t>임베딩</a:t>
             </a:r>
             <a:r>
-              <a:rPr lang="ko-KR" altLang="en-US" sz="1600" dirty="0">
+              <a:rPr lang="ko-KR" altLang="en-US" sz="1400" dirty="0">
                 <a:latin typeface="D2Coding" panose="020B0609020101020101" pitchFamily="49" charset="-127"/>
                 <a:ea typeface="D2Coding" panose="020B0609020101020101" pitchFamily="49" charset="-127"/>
               </a:rPr>

--- a/Chapter 14 Text classification.pptx
+++ b/Chapter 14 Text classification.pptx
@@ -5,10 +5,10 @@
     <p:sldMasterId id="2147483660" r:id="rId1"/>
   </p:sldMasterIdLst>
   <p:notesMasterIdLst>
-    <p:notesMasterId r:id="rId24"/>
+    <p:notesMasterId r:id="rId25"/>
   </p:notesMasterIdLst>
   <p:handoutMasterIdLst>
-    <p:handoutMasterId r:id="rId25"/>
+    <p:handoutMasterId r:id="rId26"/>
   </p:handoutMasterIdLst>
   <p:sldIdLst>
     <p:sldId id="256" r:id="rId2"/>
@@ -33,6 +33,7 @@
     <p:sldId id="1151" r:id="rId21"/>
     <p:sldId id="1178" r:id="rId22"/>
     <p:sldId id="1146" r:id="rId23"/>
+    <p:sldId id="1187" r:id="rId24"/>
   </p:sldIdLst>
   <p:sldSz cx="12192000" cy="6858000"/>
   <p:notesSz cx="6858000" cy="9144000"/>
@@ -162,6 +163,7 @@
             <p14:sldId id="1151"/>
             <p14:sldId id="1178"/>
             <p14:sldId id="1146"/>
+            <p14:sldId id="1187"/>
           </p14:sldIdLst>
         </p14:section>
         <p14:section name="자세한 정보" id="{2CC34DB2-6590-42C0-AD4B-A04C6060184E}">
@@ -286,7 +288,7 @@
                 <a:latin typeface="맑은 고딕" panose="020B0503020000020004" pitchFamily="50" charset="-127"/>
                 <a:ea typeface="맑은 고딕" panose="020B0503020000020004" pitchFamily="50" charset="-127"/>
               </a:rPr>
-              <a:t>2026-10-07</a:t>
+              <a:t>2026-10-08</a:t>
             </a:fld>
             <a:endParaRPr lang="ko-KR" altLang="en-US">
               <a:latin typeface="맑은 고딕" panose="020B0503020000020004" pitchFamily="50" charset="-127"/>
@@ -472,7 +474,7 @@
           <a:p>
             <a:fld id="{43E1C3DD-4A19-441D-907C-380838DB51C4}" type="datetime1">
               <a:rPr lang="ko-KR" altLang="en-US" noProof="0" smtClean="0"/>
-              <a:t>2026-10-07</a:t>
+              <a:t>2026-10-08</a:t>
             </a:fld>
             <a:endParaRPr lang="ko-KR" altLang="en-US" noProof="0"/>
           </a:p>
@@ -1320,7 +1322,7 @@
           <a:p>
             <a:fld id="{990475B5-67CA-4281-BDCA-DA943C3C8EB3}" type="datetime1">
               <a:rPr lang="ko-KR" altLang="en-US" noProof="0" smtClean="0"/>
-              <a:t>2026-10-07</a:t>
+              <a:t>2026-10-08</a:t>
             </a:fld>
             <a:endParaRPr lang="ko-KR" altLang="en-US" noProof="0"/>
           </a:p>
@@ -1974,7 +1976,7 @@
           <a:p>
             <a:fld id="{48A87A34-81AB-432B-8DAE-1953F412C126}" type="datetimeFigureOut">
               <a:rPr lang="en-US" smtClean="0"/>
-              <a:t>10/7/2026</a:t>
+              <a:t>10/8/2026</a:t>
             </a:fld>
             <a:endParaRPr lang="en-US" dirty="0"/>
           </a:p>
@@ -2270,7 +2272,7 @@
           <a:p>
             <a:fld id="{C655C81E-72E7-4D05-94B5-F45B321A525D}" type="datetime1">
               <a:rPr lang="ko-KR" altLang="en-US" noProof="0" smtClean="0"/>
-              <a:t>2026-10-07</a:t>
+              <a:t>2026-10-08</a:t>
             </a:fld>
             <a:endParaRPr lang="ko-KR" altLang="en-US" noProof="0" dirty="0">
               <a:latin typeface="맑은 고딕" panose="020B0503020000020004" pitchFamily="50" charset="-127"/>
@@ -11436,6 +11438,340 @@
     <p:extLst>
       <p:ext uri="{BB962C8B-B14F-4D97-AF65-F5344CB8AC3E}">
         <p14:creationId xmlns:p14="http://schemas.microsoft.com/office/powerpoint/2010/main" val="2177251980"/>
+      </p:ext>
+    </p:extLst>
+  </p:cSld>
+  <p:clrMapOvr>
+    <a:masterClrMapping/>
+  </p:clrMapOvr>
+</p:sld>
+</file>
+
+<file path=ppt/slides/slide23.xml><?xml version="1.0" encoding="utf-8"?>
+<p:sld xmlns:a="http://schemas.openxmlformats.org/drawingml/2006/main" xmlns:r="http://schemas.openxmlformats.org/officeDocument/2006/relationships" xmlns:p="http://schemas.openxmlformats.org/presentationml/2006/main">
+  <p:cSld>
+    <p:spTree>
+      <p:nvGrpSpPr>
+        <p:cNvPr id="1" name="">
+          <a:extLst>
+            <a:ext uri="{FF2B5EF4-FFF2-40B4-BE49-F238E27FC236}">
+              <a16:creationId xmlns:a16="http://schemas.microsoft.com/office/drawing/2014/main" id="{09C7572D-4520-A749-8E0B-77BE2EE19C0D}"/>
+            </a:ext>
+          </a:extLst>
+        </p:cNvPr>
+        <p:cNvGrpSpPr/>
+        <p:nvPr/>
+      </p:nvGrpSpPr>
+      <p:grpSpPr>
+        <a:xfrm>
+          <a:off x="0" y="0"/>
+          <a:ext cx="0" cy="0"/>
+          <a:chOff x="0" y="0"/>
+          <a:chExt cx="0" cy="0"/>
+        </a:xfrm>
+      </p:grpSpPr>
+      <p:sp>
+        <p:nvSpPr>
+          <p:cNvPr id="3" name="제목 1">
+            <a:extLst>
+              <a:ext uri="{FF2B5EF4-FFF2-40B4-BE49-F238E27FC236}">
+                <a16:creationId xmlns:a16="http://schemas.microsoft.com/office/drawing/2014/main" id="{7B38D273-8187-0243-E0DA-CF8E968B7E58}"/>
+              </a:ext>
+            </a:extLst>
+          </p:cNvPr>
+          <p:cNvSpPr txBox="1">
+            <a:spLocks/>
+          </p:cNvSpPr>
+          <p:nvPr/>
+        </p:nvSpPr>
+        <p:spPr>
+          <a:xfrm>
+            <a:off x="475645" y="481983"/>
+            <a:ext cx="11076274" cy="766439"/>
+          </a:xfrm>
+          <a:prstGeom prst="rect">
+            <a:avLst/>
+          </a:prstGeom>
+        </p:spPr>
+        <p:txBody>
+          <a:bodyPr vert="horz" lIns="91440" tIns="45720" rIns="91440" bIns="45720" rtlCol="0" anchor="ctr">
+            <a:normAutofit/>
+          </a:bodyPr>
+          <a:lstStyle>
+            <a:lvl1pPr algn="ctr" defTabSz="914400" rtl="0" eaLnBrk="1" latinLnBrk="1" hangingPunct="1">
+              <a:lnSpc>
+                <a:spcPct val="90000"/>
+              </a:lnSpc>
+              <a:spcBef>
+                <a:spcPct val="0"/>
+              </a:spcBef>
+              <a:buNone/>
+              <a:defRPr sz="3200" kern="1200" cap="all" baseline="0">
+                <a:solidFill>
+                  <a:schemeClr val="tx1"/>
+                </a:solidFill>
+                <a:effectLst/>
+                <a:latin typeface="Batang" panose="02030600000101010101" pitchFamily="18" charset="-127"/>
+                <a:ea typeface="Batang" panose="02030600000101010101" pitchFamily="18" charset="-127"/>
+                <a:cs typeface="+mj-cs"/>
+              </a:defRPr>
+            </a:lvl1pPr>
+          </a:lstStyle>
+          <a:p>
+            <a:pPr algn="l"/>
+            <a:r>
+              <a:rPr lang="en-US" altLang="ko-KR" sz="2800" cap="none" dirty="0" err="1">
+                <a:solidFill>
+                  <a:schemeClr val="bg2">
+                    <a:lumMod val="25000"/>
+                  </a:schemeClr>
+                </a:solidFill>
+                <a:latin typeface="D2Coding" panose="020B0609020101020101" pitchFamily="49" charset="-127"/>
+                <a:ea typeface="D2Coding" panose="020B0609020101020101" pitchFamily="49" charset="-127"/>
+                <a:cs typeface="Segoe UI Light" panose="020B0502040204020203" pitchFamily="34" charset="0"/>
+              </a:rPr>
+              <a:t>Excercing</a:t>
+            </a:r>
+            <a:r>
+              <a:rPr lang="en-US" altLang="ko-KR" sz="2800" cap="none" dirty="0">
+                <a:solidFill>
+                  <a:schemeClr val="bg2">
+                    <a:lumMod val="25000"/>
+                  </a:schemeClr>
+                </a:solidFill>
+                <a:latin typeface="D2Coding" panose="020B0609020101020101" pitchFamily="49" charset="-127"/>
+                <a:ea typeface="D2Coding" panose="020B0609020101020101" pitchFamily="49" charset="-127"/>
+                <a:cs typeface="Segoe UI Light" panose="020B0502040204020203" pitchFamily="34" charset="0"/>
+              </a:rPr>
+              <a:t> word embeddings</a:t>
+            </a:r>
+          </a:p>
+        </p:txBody>
+      </p:sp>
+      <p:sp>
+        <p:nvSpPr>
+          <p:cNvPr id="2" name="슬라이드 번호 개체 틀 3">
+            <a:extLst>
+              <a:ext uri="{FF2B5EF4-FFF2-40B4-BE49-F238E27FC236}">
+                <a16:creationId xmlns:a16="http://schemas.microsoft.com/office/drawing/2014/main" id="{77E7F04C-4383-592D-343D-06CBF107A6B0}"/>
+              </a:ext>
+            </a:extLst>
+          </p:cNvPr>
+          <p:cNvSpPr txBox="1">
+            <a:spLocks/>
+          </p:cNvSpPr>
+          <p:nvPr/>
+        </p:nvSpPr>
+        <p:spPr>
+          <a:xfrm>
+            <a:off x="11162487" y="299420"/>
+            <a:ext cx="753545" cy="365125"/>
+          </a:xfrm>
+          <a:prstGeom prst="rect">
+            <a:avLst/>
+          </a:prstGeom>
+        </p:spPr>
+        <p:txBody>
+          <a:bodyPr vert="horz" lIns="91440" tIns="45720" rIns="91440" bIns="45720" rtlCol="0" anchor="ctr"/>
+          <a:lstStyle>
+            <a:defPPr rtl="0">
+              <a:defRPr lang="ko-KR"/>
+            </a:defPPr>
+            <a:lvl1pPr marL="0" algn="r" defTabSz="914400" rtl="0" eaLnBrk="1" latinLnBrk="0" hangingPunct="1">
+              <a:defRPr sz="1200" kern="1200" baseline="0">
+                <a:solidFill>
+                  <a:schemeClr val="tx1">
+                    <a:lumMod val="65000"/>
+                    <a:lumOff val="35000"/>
+                  </a:schemeClr>
+                </a:solidFill>
+                <a:latin typeface="맑은 고딕" panose="020B0503020000020004" pitchFamily="50" charset="-127"/>
+                <a:ea typeface="맑은 고딕" panose="020B0503020000020004" pitchFamily="50" charset="-127"/>
+                <a:cs typeface="+mn-cs"/>
+              </a:defRPr>
+            </a:lvl1pPr>
+            <a:lvl2pPr marL="457200" algn="l" defTabSz="914400" rtl="0" eaLnBrk="1" latinLnBrk="0" hangingPunct="1">
+              <a:defRPr sz="1800" kern="1200">
+                <a:solidFill>
+                  <a:schemeClr val="tx1"/>
+                </a:solidFill>
+                <a:latin typeface="+mn-lt"/>
+                <a:ea typeface="+mn-ea"/>
+                <a:cs typeface="+mn-cs"/>
+              </a:defRPr>
+            </a:lvl2pPr>
+            <a:lvl3pPr marL="914400" algn="l" defTabSz="914400" rtl="0" eaLnBrk="1" latinLnBrk="0" hangingPunct="1">
+              <a:defRPr sz="1800" kern="1200">
+                <a:solidFill>
+                  <a:schemeClr val="tx1"/>
+                </a:solidFill>
+                <a:latin typeface="+mn-lt"/>
+                <a:ea typeface="+mn-ea"/>
+                <a:cs typeface="+mn-cs"/>
+              </a:defRPr>
+            </a:lvl3pPr>
+            <a:lvl4pPr marL="1371600" algn="l" defTabSz="914400" rtl="0" eaLnBrk="1" latinLnBrk="0" hangingPunct="1">
+              <a:defRPr sz="1800" kern="1200">
+                <a:solidFill>
+                  <a:schemeClr val="tx1"/>
+                </a:solidFill>
+                <a:latin typeface="+mn-lt"/>
+                <a:ea typeface="+mn-ea"/>
+                <a:cs typeface="+mn-cs"/>
+              </a:defRPr>
+            </a:lvl4pPr>
+            <a:lvl5pPr marL="1828800" algn="l" defTabSz="914400" rtl="0" eaLnBrk="1" latinLnBrk="0" hangingPunct="1">
+              <a:defRPr sz="1800" kern="1200">
+                <a:solidFill>
+                  <a:schemeClr val="tx1"/>
+                </a:solidFill>
+                <a:latin typeface="+mn-lt"/>
+                <a:ea typeface="+mn-ea"/>
+                <a:cs typeface="+mn-cs"/>
+              </a:defRPr>
+            </a:lvl5pPr>
+            <a:lvl6pPr marL="2286000" algn="l" defTabSz="914400" rtl="0" eaLnBrk="1" latinLnBrk="0" hangingPunct="1">
+              <a:defRPr sz="1800" kern="1200">
+                <a:solidFill>
+                  <a:schemeClr val="tx1"/>
+                </a:solidFill>
+                <a:latin typeface="+mn-lt"/>
+                <a:ea typeface="+mn-ea"/>
+                <a:cs typeface="+mn-cs"/>
+              </a:defRPr>
+            </a:lvl6pPr>
+            <a:lvl7pPr marL="2743200" algn="l" defTabSz="914400" rtl="0" eaLnBrk="1" latinLnBrk="0" hangingPunct="1">
+              <a:defRPr sz="1800" kern="1200">
+                <a:solidFill>
+                  <a:schemeClr val="tx1"/>
+                </a:solidFill>
+                <a:latin typeface="+mn-lt"/>
+                <a:ea typeface="+mn-ea"/>
+                <a:cs typeface="+mn-cs"/>
+              </a:defRPr>
+            </a:lvl7pPr>
+            <a:lvl8pPr marL="3200400" algn="l" defTabSz="914400" rtl="0" eaLnBrk="1" latinLnBrk="0" hangingPunct="1">
+              <a:defRPr sz="1800" kern="1200">
+                <a:solidFill>
+                  <a:schemeClr val="tx1"/>
+                </a:solidFill>
+                <a:latin typeface="+mn-lt"/>
+                <a:ea typeface="+mn-ea"/>
+                <a:cs typeface="+mn-cs"/>
+              </a:defRPr>
+            </a:lvl8pPr>
+            <a:lvl9pPr marL="3657600" algn="l" defTabSz="914400" rtl="0" eaLnBrk="1" latinLnBrk="0" hangingPunct="1">
+              <a:defRPr sz="1800" kern="1200">
+                <a:solidFill>
+                  <a:schemeClr val="tx1"/>
+                </a:solidFill>
+                <a:latin typeface="+mn-lt"/>
+                <a:ea typeface="+mn-ea"/>
+                <a:cs typeface="+mn-cs"/>
+              </a:defRPr>
+            </a:lvl9pPr>
+          </a:lstStyle>
+          <a:p>
+            <a:fld id="{D57F1E4F-1CFF-5643-939E-217C01CDF565}" type="slidenum">
+              <a:rPr lang="en-US" sz="1400" b="1" smtClean="0">
+                <a:latin typeface="Times New Roman" panose="02020603050405020304" pitchFamily="18" charset="0"/>
+                <a:ea typeface="Verdana" panose="020B0604030504040204" pitchFamily="34" charset="0"/>
+                <a:cs typeface="Times New Roman" panose="02020603050405020304" pitchFamily="18" charset="0"/>
+              </a:rPr>
+              <a:pPr/>
+              <a:t>23</a:t>
+            </a:fld>
+            <a:endParaRPr lang="en-US" sz="1400" b="1" dirty="0">
+              <a:latin typeface="Times New Roman" panose="02020603050405020304" pitchFamily="18" charset="0"/>
+              <a:ea typeface="Verdana" panose="020B0604030504040204" pitchFamily="34" charset="0"/>
+              <a:cs typeface="Times New Roman" panose="02020603050405020304" pitchFamily="18" charset="0"/>
+            </a:endParaRPr>
+          </a:p>
+        </p:txBody>
+      </p:sp>
+      <p:sp>
+        <p:nvSpPr>
+          <p:cNvPr id="4" name="TextBox 3">
+            <a:extLst>
+              <a:ext uri="{FF2B5EF4-FFF2-40B4-BE49-F238E27FC236}">
+                <a16:creationId xmlns:a16="http://schemas.microsoft.com/office/drawing/2014/main" id="{C6103FA2-B1B1-7D5C-AB6A-7A77CB3A70BF}"/>
+              </a:ext>
+            </a:extLst>
+          </p:cNvPr>
+          <p:cNvSpPr txBox="1"/>
+          <p:nvPr/>
+        </p:nvSpPr>
+        <p:spPr>
+          <a:xfrm>
+            <a:off x="790575" y="1962150"/>
+            <a:ext cx="5101974" cy="369332"/>
+          </a:xfrm>
+          <a:prstGeom prst="rect">
+            <a:avLst/>
+          </a:prstGeom>
+          <a:noFill/>
+        </p:spPr>
+        <p:txBody>
+          <a:bodyPr wrap="none" rtlCol="0">
+            <a:spAutoFit/>
+          </a:bodyPr>
+          <a:lstStyle/>
+          <a:p>
+            <a:r>
+              <a:rPr lang="en-US" altLang="ko-KR" dirty="0" err="1">
+                <a:latin typeface="D2Coding" panose="020B0609020101020101" pitchFamily="49" charset="-127"/>
+                <a:ea typeface="D2Coding" panose="020B0609020101020101" pitchFamily="49" charset="-127"/>
+                <a:hlinkClick r:id="rId2"/>
+              </a:rPr>
+              <a:t>Word_Embedding_Sequence_to_Sequence.ipynb</a:t>
+            </a:r>
+            <a:endParaRPr lang="ko-KR" altLang="en-US" dirty="0">
+              <a:latin typeface="D2Coding" panose="020B0609020101020101" pitchFamily="49" charset="-127"/>
+              <a:ea typeface="D2Coding" panose="020B0609020101020101" pitchFamily="49" charset="-127"/>
+            </a:endParaRPr>
+          </a:p>
+        </p:txBody>
+      </p:sp>
+      <p:pic>
+        <p:nvPicPr>
+          <p:cNvPr id="9" name="그래픽 8" descr="자전거 타기">
+            <a:extLst>
+              <a:ext uri="{FF2B5EF4-FFF2-40B4-BE49-F238E27FC236}">
+                <a16:creationId xmlns:a16="http://schemas.microsoft.com/office/drawing/2014/main" id="{09A85534-FEC6-8079-2105-AFEA613181FF}"/>
+              </a:ext>
+            </a:extLst>
+          </p:cNvPr>
+          <p:cNvPicPr>
+            <a:picLocks noChangeAspect="1"/>
+          </p:cNvPicPr>
+          <p:nvPr/>
+        </p:nvPicPr>
+        <p:blipFill>
+          <a:blip r:embed="rId3">
+            <a:extLst>
+              <a:ext uri="{96DAC541-7B7A-43D3-8B79-37D633B846F1}">
+                <asvg:svgBlip xmlns:asvg="http://schemas.microsoft.com/office/drawing/2016/SVG/main" r:embed="rId4"/>
+              </a:ext>
+            </a:extLst>
+          </a:blip>
+          <a:stretch>
+            <a:fillRect/>
+          </a:stretch>
+        </p:blipFill>
+        <p:spPr>
+          <a:xfrm>
+            <a:off x="4772024" y="2704775"/>
+            <a:ext cx="2066925" cy="2066925"/>
+          </a:xfrm>
+          <a:prstGeom prst="rect">
+            <a:avLst/>
+          </a:prstGeom>
+        </p:spPr>
+      </p:pic>
+    </p:spTree>
+    <p:extLst>
+      <p:ext uri="{BB962C8B-B14F-4D97-AF65-F5344CB8AC3E}">
+        <p14:creationId xmlns:p14="http://schemas.microsoft.com/office/powerpoint/2010/main" val="2773725011"/>
       </p:ext>
     </p:extLst>
   </p:cSld>
